--- a/GIUMS-MediaKit-PT.pptx
+++ b/GIUMS-MediaKit-PT.pptx
@@ -2,22 +2,22 @@
 <file path=ppt/presentation.xml><?xml version="1.0" encoding="utf-8"?>
 <p:presentation xmlns:p="http://schemas.openxmlformats.org/presentationml/2006/main">
   <p:sldMasterIdLst>
-    <p:sldMasterId xmlns:r="http://schemas.openxmlformats.org/officeDocument/2006/relationships" id="2147483648" r:id="Rfe34c70990b4410a"/>
+    <p:sldMasterId xmlns:r="http://schemas.openxmlformats.org/officeDocument/2006/relationships" id="2147483648" r:id="R4212d9c54c274677"/>
   </p:sldMasterIdLst>
   <p:notesMasterIdLst>
-    <p:notesMasterId xmlns:r="http://schemas.openxmlformats.org/officeDocument/2006/relationships" r:id="R4ff1bda5dbac4a3b"/>
+    <p:notesMasterId xmlns:r="http://schemas.openxmlformats.org/officeDocument/2006/relationships" r:id="R37d552040d8749c7"/>
   </p:notesMasterIdLst>
   <p:sldIdLst>
-    <p:sldId xmlns:r="http://schemas.openxmlformats.org/officeDocument/2006/relationships" id="256" r:id="R420534ada6c146fc"/>
-    <p:sldId xmlns:r="http://schemas.openxmlformats.org/officeDocument/2006/relationships" id="257" r:id="R188213d584d940ac"/>
-    <p:sldId xmlns:r="http://schemas.openxmlformats.org/officeDocument/2006/relationships" id="258" r:id="Rffd2b9913a07402b"/>
-    <p:sldId xmlns:r="http://schemas.openxmlformats.org/officeDocument/2006/relationships" id="259" r:id="R3936050efec7412a"/>
-    <p:sldId xmlns:r="http://schemas.openxmlformats.org/officeDocument/2006/relationships" id="260" r:id="Rc536fbffe0b7477c"/>
-    <p:sldId xmlns:r="http://schemas.openxmlformats.org/officeDocument/2006/relationships" id="261" r:id="Rd810bfe083514d79"/>
-    <p:sldId xmlns:r="http://schemas.openxmlformats.org/officeDocument/2006/relationships" id="262" r:id="Re865534725a447b1"/>
-    <p:sldId xmlns:r="http://schemas.openxmlformats.org/officeDocument/2006/relationships" id="263" r:id="Refbf97d41fe641ca"/>
-    <p:sldId xmlns:r="http://schemas.openxmlformats.org/officeDocument/2006/relationships" id="264" r:id="R2e94ab11c93947fd"/>
-    <p:sldId xmlns:r="http://schemas.openxmlformats.org/officeDocument/2006/relationships" id="265" r:id="R79248ede542849fc"/>
+    <p:sldId xmlns:r="http://schemas.openxmlformats.org/officeDocument/2006/relationships" id="256" r:id="Rc44d719c364f4eb5"/>
+    <p:sldId xmlns:r="http://schemas.openxmlformats.org/officeDocument/2006/relationships" id="257" r:id="R6c4b69520ed34eae"/>
+    <p:sldId xmlns:r="http://schemas.openxmlformats.org/officeDocument/2006/relationships" id="258" r:id="R8e861db7ca2840e9"/>
+    <p:sldId xmlns:r="http://schemas.openxmlformats.org/officeDocument/2006/relationships" id="259" r:id="Rc2b9039db6bc4bd6"/>
+    <p:sldId xmlns:r="http://schemas.openxmlformats.org/officeDocument/2006/relationships" id="260" r:id="R442408f9b81e4546"/>
+    <p:sldId xmlns:r="http://schemas.openxmlformats.org/officeDocument/2006/relationships" id="261" r:id="R2d09ee19bbe64482"/>
+    <p:sldId xmlns:r="http://schemas.openxmlformats.org/officeDocument/2006/relationships" id="262" r:id="R59843fe894e34972"/>
+    <p:sldId xmlns:r="http://schemas.openxmlformats.org/officeDocument/2006/relationships" id="263" r:id="R9c74c434a0774bd9"/>
+    <p:sldId xmlns:r="http://schemas.openxmlformats.org/officeDocument/2006/relationships" id="264" r:id="Rb183ce1f2e134a2a"/>
+    <p:sldId xmlns:r="http://schemas.openxmlformats.org/officeDocument/2006/relationships" id="265" r:id="R0c56a24e14514e19"/>
   </p:sldIdLst>
   <p:sldSz cx="12192000" cy="6858000"/>
   <p:notesSz cx="6858000" cy="9144000"/>
@@ -1128,7 +1128,7 @@
           <p:cNvPr id="3" name="Title">
             <a:extLst xmlns:a="http://schemas.openxmlformats.org/drawingml/2006/main">
               <a:ext uri="{FF2B5EF4-FFF2-40B4-BE49-F238E27FC236}">
-                <a16:creationId xmlns:a16="http://schemas.microsoft.com/office/drawing/2014/main" id="{2C8DE81A-D26E-44A7-B43B-AE7E2E13BA60}"/>
+                <a16:creationId xmlns:a16="http://schemas.microsoft.com/office/drawing/2014/main" id="{488D95FC-A766-4105-8451-C5314C866008}"/>
               </a:ext>
             </a:extLst>
           </p:cNvPr>
@@ -1357,7 +1357,7 @@
           <p:cNvPr id="2" name="Subtitle">
             <a:extLst xmlns:a="http://schemas.openxmlformats.org/drawingml/2006/main">
               <a:ext uri="{FF2B5EF4-FFF2-40B4-BE49-F238E27FC236}">
-                <a16:creationId xmlns:a16="http://schemas.microsoft.com/office/drawing/2014/main" id="{64EDB31C-6DB0-4FDF-B045-440D15510F54}"/>
+                <a16:creationId xmlns:a16="http://schemas.microsoft.com/office/drawing/2014/main" id="{FAB7F633-4068-442F-9BCB-120FB3E640DF}"/>
               </a:ext>
             </a:extLst>
           </p:cNvPr>
@@ -1603,7 +1603,7 @@
           <p:cNvPr id="2" name="Section title">
             <a:extLst xmlns:a="http://schemas.openxmlformats.org/drawingml/2006/main">
               <a:ext uri="{FF2B5EF4-FFF2-40B4-BE49-F238E27FC236}">
-                <a16:creationId xmlns:a16="http://schemas.microsoft.com/office/drawing/2014/main" id="{BBA1D414-CE08-421D-937C-97ECD21FCC39}"/>
+                <a16:creationId xmlns:a16="http://schemas.microsoft.com/office/drawing/2014/main" id="{6480EF96-D348-4225-846C-76C13F9A69AD}"/>
               </a:ext>
             </a:extLst>
           </p:cNvPr>
@@ -1849,7 +1849,7 @@
           <p:cNvPr id="3" name="Title">
             <a:extLst xmlns:a="http://schemas.openxmlformats.org/drawingml/2006/main">
               <a:ext uri="{FF2B5EF4-FFF2-40B4-BE49-F238E27FC236}">
-                <a16:creationId xmlns:a16="http://schemas.microsoft.com/office/drawing/2014/main" id="{13165D4F-0A48-4B53-A12D-6C11F73C3E92}"/>
+                <a16:creationId xmlns:a16="http://schemas.microsoft.com/office/drawing/2014/main" id="{2D534990-51C9-4F66-8492-CB7E65093A47}"/>
               </a:ext>
             </a:extLst>
           </p:cNvPr>
@@ -2078,7 +2078,7 @@
           <p:cNvPr id="2" name="Body">
             <a:extLst xmlns:a="http://schemas.openxmlformats.org/drawingml/2006/main">
               <a:ext uri="{FF2B5EF4-FFF2-40B4-BE49-F238E27FC236}">
-                <a16:creationId xmlns:a16="http://schemas.microsoft.com/office/drawing/2014/main" id="{82D8A0C8-D2AF-4966-8322-C7F3D752310F}"/>
+                <a16:creationId xmlns:a16="http://schemas.microsoft.com/office/drawing/2014/main" id="{E84D0FF0-15BE-4C83-97BD-802B15A650BC}"/>
               </a:ext>
             </a:extLst>
           </p:cNvPr>
@@ -2324,7 +2324,7 @@
           <p:cNvPr id="4" name="Title">
             <a:extLst xmlns:a="http://schemas.openxmlformats.org/drawingml/2006/main">
               <a:ext uri="{FF2B5EF4-FFF2-40B4-BE49-F238E27FC236}">
-                <a16:creationId xmlns:a16="http://schemas.microsoft.com/office/drawing/2014/main" id="{52280ECC-5902-4C16-A8A1-EB7682EEC9E5}"/>
+                <a16:creationId xmlns:a16="http://schemas.microsoft.com/office/drawing/2014/main" id="{180944F2-C6C7-432B-A888-9C6E921071E0}"/>
               </a:ext>
             </a:extLst>
           </p:cNvPr>
@@ -2553,7 +2553,7 @@
           <p:cNvPr id="2" name="Left column">
             <a:extLst xmlns:a="http://schemas.openxmlformats.org/drawingml/2006/main">
               <a:ext uri="{FF2B5EF4-FFF2-40B4-BE49-F238E27FC236}">
-                <a16:creationId xmlns:a16="http://schemas.microsoft.com/office/drawing/2014/main" id="{797BAFF7-7DF1-4D0F-B1C4-BFD7E1D43869}"/>
+                <a16:creationId xmlns:a16="http://schemas.microsoft.com/office/drawing/2014/main" id="{D492A5FF-4ACD-4714-85D7-AD70974DEF51}"/>
               </a:ext>
             </a:extLst>
           </p:cNvPr>
@@ -2782,7 +2782,7 @@
           <p:cNvPr id="3" name="Right column">
             <a:extLst xmlns:a="http://schemas.openxmlformats.org/drawingml/2006/main">
               <a:ext uri="{FF2B5EF4-FFF2-40B4-BE49-F238E27FC236}">
-                <a16:creationId xmlns:a16="http://schemas.microsoft.com/office/drawing/2014/main" id="{CD8C6007-69CE-4449-ADE5-A8E7A5CD64B8}"/>
+                <a16:creationId xmlns:a16="http://schemas.microsoft.com/office/drawing/2014/main" id="{92DE88C5-D7FA-4260-B5A4-C72C3E6D813F}"/>
               </a:ext>
             </a:extLst>
           </p:cNvPr>
@@ -3028,7 +3028,7 @@
           <p:cNvPr id="3" name="Title">
             <a:extLst xmlns:a="http://schemas.openxmlformats.org/drawingml/2006/main">
               <a:ext uri="{FF2B5EF4-FFF2-40B4-BE49-F238E27FC236}">
-                <a16:creationId xmlns:a16="http://schemas.microsoft.com/office/drawing/2014/main" id="{A86E7F00-DEE6-4106-9126-BD4978F1916B}"/>
+                <a16:creationId xmlns:a16="http://schemas.microsoft.com/office/drawing/2014/main" id="{239D78D2-5FD6-4AC4-9F9E-B2D5AC721C67}"/>
               </a:ext>
             </a:extLst>
           </p:cNvPr>
@@ -3257,7 +3257,7 @@
           <p:cNvPr id="2" name="Left column">
             <a:extLst xmlns:a="http://schemas.openxmlformats.org/drawingml/2006/main">
               <a:ext uri="{FF2B5EF4-FFF2-40B4-BE49-F238E27FC236}">
-                <a16:creationId xmlns:a16="http://schemas.microsoft.com/office/drawing/2014/main" id="{0BF830D6-A571-45C5-A928-04F2ECABAF49}"/>
+                <a16:creationId xmlns:a16="http://schemas.microsoft.com/office/drawing/2014/main" id="{D3DBD59E-5629-45E1-AACD-C3A613D5FBAB}"/>
               </a:ext>
             </a:extLst>
           </p:cNvPr>
@@ -3524,12 +3524,12 @@
   </p:cSld>
   <p:clrMap bg1="lt1" tx1="dk1" bg2="lt2" tx2="dk2" accent1="accent1" accent2="accent2" accent3="accent3" accent4="accent4" accent5="accent5" accent6="accent6" hlink="hlink" folHlink="folHlink"/>
   <p:sldLayoutIdLst>
-    <p:sldLayoutId xmlns:r="http://schemas.openxmlformats.org/officeDocument/2006/relationships" id="2147483649" r:id="Reac567b73b5f447d"/>
-    <p:sldLayoutId xmlns:r="http://schemas.openxmlformats.org/officeDocument/2006/relationships" id="2147483650" r:id="R19551a3622cf4092"/>
-    <p:sldLayoutId xmlns:r="http://schemas.openxmlformats.org/officeDocument/2006/relationships" id="2147483651" r:id="Re80424928228416b"/>
-    <p:sldLayoutId xmlns:r="http://schemas.openxmlformats.org/officeDocument/2006/relationships" id="2147483652" r:id="R262a7753ba1942f1"/>
-    <p:sldLayoutId xmlns:r="http://schemas.openxmlformats.org/officeDocument/2006/relationships" id="2147483653" r:id="R67ae2a7346d14871"/>
-    <p:sldLayoutId xmlns:r="http://schemas.openxmlformats.org/officeDocument/2006/relationships" id="2147483654" r:id="R72375e4897514546"/>
+    <p:sldLayoutId xmlns:r="http://schemas.openxmlformats.org/officeDocument/2006/relationships" id="2147483649" r:id="Refb1b0defe4f475b"/>
+    <p:sldLayoutId xmlns:r="http://schemas.openxmlformats.org/officeDocument/2006/relationships" id="2147483650" r:id="R5fbfe59601744c85"/>
+    <p:sldLayoutId xmlns:r="http://schemas.openxmlformats.org/officeDocument/2006/relationships" id="2147483651" r:id="R80a1adac43e24bba"/>
+    <p:sldLayoutId xmlns:r="http://schemas.openxmlformats.org/officeDocument/2006/relationships" id="2147483652" r:id="R8091b5b203654a0a"/>
+    <p:sldLayoutId xmlns:r="http://schemas.openxmlformats.org/officeDocument/2006/relationships" id="2147483653" r:id="R7ce41cb5571f42cb"/>
+    <p:sldLayoutId xmlns:r="http://schemas.openxmlformats.org/officeDocument/2006/relationships" id="2147483654" r:id="Rf685f7a7699d410a"/>
   </p:sldLayoutIdLst>
   <p:txStyles>
     <p:titleStyle>
@@ -4080,7 +4080,7 @@
           <p:cNvPr id="2" name="">
             <a:extLst xmlns:a="http://schemas.openxmlformats.org/drawingml/2006/main">
               <a:ext uri="{FF2B5EF4-FFF2-40B4-BE49-F238E27FC236}">
-                <a16:creationId xmlns:a16="http://schemas.microsoft.com/office/drawing/2014/main" id="{3EEB62EF-7295-4F2F-986D-6F3619045E82}"/>
+                <a16:creationId xmlns:a16="http://schemas.microsoft.com/office/drawing/2014/main" id="{B7DB69E2-8422-4821-8143-028DD6F3571F}"/>
               </a:ext>
             </a:extLst>
           </p:cNvPr>
@@ -4090,7 +4090,7 @@
           <p:nvPr/>
         </p:nvPicPr>
         <p:blipFill>
-          <a:blip xmlns:r="http://schemas.openxmlformats.org/officeDocument/2006/relationships" xmlns:a="http://schemas.openxmlformats.org/drawingml/2006/main" r:embed="R323ebed4ab694419"/>
+          <a:blip xmlns:r="http://schemas.openxmlformats.org/officeDocument/2006/relationships" xmlns:a="http://schemas.openxmlformats.org/drawingml/2006/main" r:embed="R71ab917b27914eb3"/>
           <a:stretch xmlns:a="http://schemas.openxmlformats.org/drawingml/2006/main"/>
         </p:blipFill>
         <p:spPr>
@@ -4106,7 +4106,7 @@
     </p:spTree>
     <p:extLst>
       <p:ext uri="{BB962C8B-B14F-4D97-AF65-F5344CB8AC3E}">
-        <p14:creationId xmlns:p14="http://schemas.microsoft.com/office/powerpoint/2010/main" val="1390490331"/>
+        <p14:creationId xmlns:p14="http://schemas.microsoft.com/office/powerpoint/2010/main" val="212214900"/>
       </p:ext>
     </p:extLst>
   </p:cSld>
@@ -4134,10 +4134,10 @@
       </p:grpSpPr>
       <p:sp>
         <p:nvSpPr>
-          <p:cNvPr id="17" name="text-263">
+          <p:cNvPr id="17" name="text-247">
             <a:extLst xmlns:a="http://schemas.openxmlformats.org/drawingml/2006/main">
               <a:ext uri="{FF2B5EF4-FFF2-40B4-BE49-F238E27FC236}">
-                <a16:creationId xmlns:a16="http://schemas.microsoft.com/office/drawing/2014/main" id="{3EE55CDC-C9AF-4492-B12A-BAC6E05554A0}"/>
+                <a16:creationId xmlns:a16="http://schemas.microsoft.com/office/drawing/2014/main" id="{A8ED1754-A6CC-425B-9B81-3FA019C6B5BE}"/>
               </a:ext>
             </a:extLst>
           </p:cNvPr>
@@ -4292,10 +4292,10 @@
       </p:sp>
       <p:sp>
         <p:nvSpPr>
-          <p:cNvPr id="2" name="text-264">
+          <p:cNvPr id="2" name="text-248">
             <a:extLst xmlns:a="http://schemas.openxmlformats.org/drawingml/2006/main">
               <a:ext uri="{FF2B5EF4-FFF2-40B4-BE49-F238E27FC236}">
-                <a16:creationId xmlns:a16="http://schemas.microsoft.com/office/drawing/2014/main" id="{FDD23FC8-2614-4ED6-B922-DFD6E0E8EC0F}"/>
+                <a16:creationId xmlns:a16="http://schemas.microsoft.com/office/drawing/2014/main" id="{901F1230-7E34-4E9B-8B0F-DC0ED291DE54}"/>
               </a:ext>
             </a:extLst>
           </p:cNvPr>
@@ -4450,10 +4450,10 @@
       </p:sp>
       <p:sp>
         <p:nvSpPr>
-          <p:cNvPr id="3" name="text-265">
+          <p:cNvPr id="3" name="text-249">
             <a:extLst xmlns:a="http://schemas.openxmlformats.org/drawingml/2006/main">
               <a:ext uri="{FF2B5EF4-FFF2-40B4-BE49-F238E27FC236}">
-                <a16:creationId xmlns:a16="http://schemas.microsoft.com/office/drawing/2014/main" id="{D16AD01E-6E1E-4CBD-92D4-B01EDD1F6056}"/>
+                <a16:creationId xmlns:a16="http://schemas.microsoft.com/office/drawing/2014/main" id="{0E6CB949-2782-4A08-9349-CA1A4248E237}"/>
               </a:ext>
             </a:extLst>
           </p:cNvPr>
@@ -4608,10 +4608,10 @@
       </p:sp>
       <p:sp>
         <p:nvSpPr>
-          <p:cNvPr id="4" name="text-266">
+          <p:cNvPr id="4" name="text-250">
             <a:extLst xmlns:a="http://schemas.openxmlformats.org/drawingml/2006/main">
               <a:ext uri="{FF2B5EF4-FFF2-40B4-BE49-F238E27FC236}">
-                <a16:creationId xmlns:a16="http://schemas.microsoft.com/office/drawing/2014/main" id="{F408FF16-1E29-4E1B-8E56-2C117A486195}"/>
+                <a16:creationId xmlns:a16="http://schemas.microsoft.com/office/drawing/2014/main" id="{4FA3A20A-35BA-4246-BB9F-596F342DBD06}"/>
               </a:ext>
             </a:extLst>
           </p:cNvPr>
@@ -4766,10 +4766,10 @@
       </p:sp>
       <p:sp>
         <p:nvSpPr>
-          <p:cNvPr id="5" name="text-267">
+          <p:cNvPr id="5" name="text-251">
             <a:extLst xmlns:a="http://schemas.openxmlformats.org/drawingml/2006/main">
               <a:ext uri="{FF2B5EF4-FFF2-40B4-BE49-F238E27FC236}">
-                <a16:creationId xmlns:a16="http://schemas.microsoft.com/office/drawing/2014/main" id="{641D0D1A-3D34-4986-A563-B3328728D136}"/>
+                <a16:creationId xmlns:a16="http://schemas.microsoft.com/office/drawing/2014/main" id="{B2023098-75C2-4359-8329-A0459336521B}"/>
               </a:ext>
             </a:extLst>
           </p:cNvPr>
@@ -4924,10 +4924,10 @@
       </p:sp>
       <p:sp>
         <p:nvSpPr>
-          <p:cNvPr id="6" name="text-268">
+          <p:cNvPr id="6" name="text-252">
             <a:extLst xmlns:a="http://schemas.openxmlformats.org/drawingml/2006/main">
               <a:ext uri="{FF2B5EF4-FFF2-40B4-BE49-F238E27FC236}">
-                <a16:creationId xmlns:a16="http://schemas.microsoft.com/office/drawing/2014/main" id="{A1DEBC3A-E7FC-4340-857C-143B6F57E22D}"/>
+                <a16:creationId xmlns:a16="http://schemas.microsoft.com/office/drawing/2014/main" id="{9ABDABD7-850F-4CA3-8DCD-850FD660EFF7}"/>
               </a:ext>
             </a:extLst>
           </p:cNvPr>
@@ -5082,10 +5082,10 @@
       </p:sp>
       <p:sp>
         <p:nvSpPr>
-          <p:cNvPr id="7" name="text-269">
+          <p:cNvPr id="7" name="text-253">
             <a:extLst xmlns:a="http://schemas.openxmlformats.org/drawingml/2006/main">
               <a:ext uri="{FF2B5EF4-FFF2-40B4-BE49-F238E27FC236}">
-                <a16:creationId xmlns:a16="http://schemas.microsoft.com/office/drawing/2014/main" id="{3722A712-0846-4A71-8FC5-9122969CBBE1}"/>
+                <a16:creationId xmlns:a16="http://schemas.microsoft.com/office/drawing/2014/main" id="{38F07FAC-64A0-4756-BBD6-04452C877587}"/>
               </a:ext>
             </a:extLst>
           </p:cNvPr>
@@ -5232,7 +5232,7 @@
                 <a:latin typeface="Arial"/>
                 <a:ea typeface="Arial"/>
                 <a:cs typeface="Arial"/>
-                <a:hlinkClick xmlns:r="http://schemas.openxmlformats.org/officeDocument/2006/relationships" r:id="Re653376e35eb4246"/>
+                <a:hlinkClick xmlns:r="http://schemas.openxmlformats.org/officeDocument/2006/relationships" r:id="R8ee3663ffba74f57"/>
               </a:rPr>
               <a:t>giumsart@gmail.com</a:t>
             </a:r>
@@ -5241,10 +5241,10 @@
       </p:sp>
       <p:sp>
         <p:nvSpPr>
-          <p:cNvPr id="8" name="text-270">
+          <p:cNvPr id="8" name="text-254">
             <a:extLst xmlns:a="http://schemas.openxmlformats.org/drawingml/2006/main">
               <a:ext uri="{FF2B5EF4-FFF2-40B4-BE49-F238E27FC236}">
-                <a16:creationId xmlns:a16="http://schemas.microsoft.com/office/drawing/2014/main" id="{9B4257F7-0298-48C3-B3DF-C13F239E4FC1}"/>
+                <a16:creationId xmlns:a16="http://schemas.microsoft.com/office/drawing/2014/main" id="{54CC0889-57DA-4F35-9484-4ABAC3E43D20}"/>
               </a:ext>
             </a:extLst>
           </p:cNvPr>
@@ -5391,7 +5391,7 @@
                 <a:latin typeface="Arial"/>
                 <a:ea typeface="Arial"/>
                 <a:cs typeface="Arial"/>
-                <a:hlinkClick xmlns:r="http://schemas.openxmlformats.org/officeDocument/2006/relationships" r:id="R612bf29f5c8647cf"/>
+                <a:hlinkClick xmlns:r="http://schemas.openxmlformats.org/officeDocument/2006/relationships" r:id="Rbfbf9683562942df"/>
               </a:rPr>
               <a:t>giums.onrender.com</a:t>
             </a:r>
@@ -5400,10 +5400,10 @@
       </p:sp>
       <p:sp>
         <p:nvSpPr>
-          <p:cNvPr id="9" name="text-271">
+          <p:cNvPr id="9" name="text-255">
             <a:extLst xmlns:a="http://schemas.openxmlformats.org/drawingml/2006/main">
               <a:ext uri="{FF2B5EF4-FFF2-40B4-BE49-F238E27FC236}">
-                <a16:creationId xmlns:a16="http://schemas.microsoft.com/office/drawing/2014/main" id="{587AEAAB-E296-41A3-A208-F19D9A557578}"/>
+                <a16:creationId xmlns:a16="http://schemas.microsoft.com/office/drawing/2014/main" id="{F9A63A1C-0694-41F1-99F6-394E2A6D7B34}"/>
               </a:ext>
             </a:extLst>
           </p:cNvPr>
@@ -5550,7 +5550,7 @@
                 <a:latin typeface="Arial"/>
                 <a:ea typeface="Arial"/>
                 <a:cs typeface="Arial"/>
-                <a:hlinkClick xmlns:r="http://schemas.openxmlformats.org/officeDocument/2006/relationships" r:id="R48f1030851844846"/>
+                <a:hlinkClick xmlns:r="http://schemas.openxmlformats.org/officeDocument/2006/relationships" r:id="R9cdaf87f19f34bc4"/>
               </a:rPr>
               <a:t>@giums</a:t>
             </a:r>
@@ -5559,10 +5559,10 @@
       </p:sp>
       <p:sp>
         <p:nvSpPr>
-          <p:cNvPr id="10" name="text-272">
+          <p:cNvPr id="10" name="text-256">
             <a:extLst xmlns:a="http://schemas.openxmlformats.org/drawingml/2006/main">
               <a:ext uri="{FF2B5EF4-FFF2-40B4-BE49-F238E27FC236}">
-                <a16:creationId xmlns:a16="http://schemas.microsoft.com/office/drawing/2014/main" id="{39F70490-8E34-4816-A3D3-957D8355D863}"/>
+                <a16:creationId xmlns:a16="http://schemas.microsoft.com/office/drawing/2014/main" id="{58884CC3-0E8F-4EAE-A28C-270A52FB83D8}"/>
               </a:ext>
             </a:extLst>
           </p:cNvPr>
@@ -5709,7 +5709,7 @@
                 <a:latin typeface="Arial"/>
                 <a:ea typeface="Arial"/>
                 <a:cs typeface="Arial"/>
-                <a:hlinkClick xmlns:r="http://schemas.openxmlformats.org/officeDocument/2006/relationships" r:id="Rcb1bb9afccd44f83"/>
+                <a:hlinkClick xmlns:r="http://schemas.openxmlformats.org/officeDocument/2006/relationships" r:id="R447146a4130a4eee"/>
               </a:rPr>
               <a:t>@giums.bsky.social</a:t>
             </a:r>
@@ -5718,10 +5718,10 @@
       </p:sp>
       <p:sp>
         <p:nvSpPr>
-          <p:cNvPr id="11" name="text-273">
+          <p:cNvPr id="11" name="text-257">
             <a:extLst xmlns:a="http://schemas.openxmlformats.org/drawingml/2006/main">
               <a:ext uri="{FF2B5EF4-FFF2-40B4-BE49-F238E27FC236}">
-                <a16:creationId xmlns:a16="http://schemas.microsoft.com/office/drawing/2014/main" id="{B6663FBB-EC61-4C35-AFFA-27C62BA7AA9D}"/>
+                <a16:creationId xmlns:a16="http://schemas.microsoft.com/office/drawing/2014/main" id="{B32C2C35-BFFF-45DB-8426-FBDF390ABDF8}"/>
               </a:ext>
             </a:extLst>
           </p:cNvPr>
@@ -5868,7 +5868,7 @@
                 <a:latin typeface="Arial"/>
                 <a:ea typeface="Arial"/>
                 <a:cs typeface="Arial"/>
-                <a:hlinkClick xmlns:r="http://schemas.openxmlformats.org/officeDocument/2006/relationships" r:id="Rd4b95fc6880a41d3"/>
+                <a:hlinkClick xmlns:r="http://schemas.openxmlformats.org/officeDocument/2006/relationships" r:id="Rd31d79d7385f47c5"/>
               </a:rPr>
               <a:t>@GIUMSyt</a:t>
             </a:r>
@@ -5877,10 +5877,10 @@
       </p:sp>
       <p:sp>
         <p:nvSpPr>
-          <p:cNvPr id="12" name="text-274">
+          <p:cNvPr id="12" name="text-258">
             <a:extLst xmlns:a="http://schemas.openxmlformats.org/drawingml/2006/main">
               <a:ext uri="{FF2B5EF4-FFF2-40B4-BE49-F238E27FC236}">
-                <a16:creationId xmlns:a16="http://schemas.microsoft.com/office/drawing/2014/main" id="{9050B4E9-5522-47BF-B315-EBF919E8CF9F}"/>
+                <a16:creationId xmlns:a16="http://schemas.microsoft.com/office/drawing/2014/main" id="{4FCC93CF-9A2C-4D71-8A42-25100CF42E18}"/>
               </a:ext>
             </a:extLst>
           </p:cNvPr>
@@ -6027,7 +6027,7 @@
                 <a:latin typeface="Arial"/>
                 <a:ea typeface="Arial"/>
                 <a:cs typeface="Arial"/>
-                <a:hlinkClick xmlns:r="http://schemas.openxmlformats.org/officeDocument/2006/relationships" r:id="R195b8ca7e76c4f54"/>
+                <a:hlinkClick xmlns:r="http://schemas.openxmlformats.org/officeDocument/2006/relationships" r:id="R071301a5f7024057"/>
               </a:rPr>
               <a:t>twitch.tv/giums</a:t>
             </a:r>
@@ -6036,10 +6036,10 @@
       </p:sp>
       <p:sp>
         <p:nvSpPr>
-          <p:cNvPr id="13" name="text-275">
+          <p:cNvPr id="13" name="text-259">
             <a:extLst xmlns:a="http://schemas.openxmlformats.org/drawingml/2006/main">
               <a:ext uri="{FF2B5EF4-FFF2-40B4-BE49-F238E27FC236}">
-                <a16:creationId xmlns:a16="http://schemas.microsoft.com/office/drawing/2014/main" id="{E541CF1B-4AAB-449B-B1F2-424C4E99E3F3}"/>
+                <a16:creationId xmlns:a16="http://schemas.microsoft.com/office/drawing/2014/main" id="{2C27B13C-98DE-4406-B630-08ED7C46101D}"/>
               </a:ext>
             </a:extLst>
           </p:cNvPr>
@@ -6186,7 +6186,7 @@
                 <a:latin typeface="Arial"/>
                 <a:ea typeface="Arial"/>
                 <a:cs typeface="Arial"/>
-                <a:hlinkClick xmlns:r="http://schemas.openxmlformats.org/officeDocument/2006/relationships" r:id="Rabf966cf9cad46ea"/>
+                <a:hlinkClick xmlns:r="http://schemas.openxmlformats.org/officeDocument/2006/relationships" r:id="R2952aed5a4d04274"/>
               </a:rPr>
               <a:t>patreon.com/giums</a:t>
             </a:r>
@@ -6195,10 +6195,10 @@
       </p:sp>
       <p:sp>
         <p:nvSpPr>
-          <p:cNvPr id="14" name="text-276">
+          <p:cNvPr id="14" name="text-260">
             <a:extLst xmlns:a="http://schemas.openxmlformats.org/drawingml/2006/main">
               <a:ext uri="{FF2B5EF4-FFF2-40B4-BE49-F238E27FC236}">
-                <a16:creationId xmlns:a16="http://schemas.microsoft.com/office/drawing/2014/main" id="{5BEAD4E1-1779-4BCC-A967-747E3313B35C}"/>
+                <a16:creationId xmlns:a16="http://schemas.microsoft.com/office/drawing/2014/main" id="{D080886A-7135-48B4-960E-E7906576CDC5}"/>
               </a:ext>
             </a:extLst>
           </p:cNvPr>
@@ -6353,10 +6353,10 @@
       </p:sp>
       <p:sp>
         <p:nvSpPr>
-          <p:cNvPr id="15" name="text-277">
+          <p:cNvPr id="15" name="text-261">
             <a:extLst xmlns:a="http://schemas.openxmlformats.org/drawingml/2006/main">
               <a:ext uri="{FF2B5EF4-FFF2-40B4-BE49-F238E27FC236}">
-                <a16:creationId xmlns:a16="http://schemas.microsoft.com/office/drawing/2014/main" id="{C3017FF0-CF67-4C9D-BC90-A583768ED626}"/>
+                <a16:creationId xmlns:a16="http://schemas.microsoft.com/office/drawing/2014/main" id="{799E4096-7AB7-4D68-BE78-1CC8C77C7137}"/>
               </a:ext>
             </a:extLst>
           </p:cNvPr>
@@ -6511,10 +6511,10 @@
       </p:sp>
       <p:sp>
         <p:nvSpPr>
-          <p:cNvPr id="16" name="text-278">
+          <p:cNvPr id="16" name="text-262">
             <a:extLst xmlns:a="http://schemas.openxmlformats.org/drawingml/2006/main">
               <a:ext uri="{FF2B5EF4-FFF2-40B4-BE49-F238E27FC236}">
-                <a16:creationId xmlns:a16="http://schemas.microsoft.com/office/drawing/2014/main" id="{43CA588E-4F7D-432D-821D-4BDF3A52AAAA}"/>
+                <a16:creationId xmlns:a16="http://schemas.microsoft.com/office/drawing/2014/main" id="{546CE655-9A4A-4AC3-B95D-9E9134BD7CF5}"/>
               </a:ext>
             </a:extLst>
           </p:cNvPr>
@@ -6670,7 +6670,7 @@
     </p:spTree>
     <p:extLst>
       <p:ext uri="{BB962C8B-B14F-4D97-AF65-F5344CB8AC3E}">
-        <p14:creationId xmlns:p14="http://schemas.microsoft.com/office/powerpoint/2010/main" val="546470874"/>
+        <p14:creationId xmlns:p14="http://schemas.microsoft.com/office/powerpoint/2010/main" val="339566786"/>
       </p:ext>
     </p:extLst>
   </p:cSld>
@@ -6698,10 +6698,10 @@
       </p:grpSpPr>
       <p:sp>
         <p:nvSpPr>
-          <p:cNvPr id="10" name="text-140">
+          <p:cNvPr id="10" name="text-132">
             <a:extLst xmlns:a="http://schemas.openxmlformats.org/drawingml/2006/main">
               <a:ext uri="{FF2B5EF4-FFF2-40B4-BE49-F238E27FC236}">
-                <a16:creationId xmlns:a16="http://schemas.microsoft.com/office/drawing/2014/main" id="{10590CA1-A5A0-45BE-9A4E-FC4FF99757E6}"/>
+                <a16:creationId xmlns:a16="http://schemas.microsoft.com/office/drawing/2014/main" id="{A3830F1B-DC5C-4B5B-81DF-B6EBD948E5AE}"/>
               </a:ext>
             </a:extLst>
           </p:cNvPr>
@@ -6856,10 +6856,10 @@
       </p:sp>
       <p:sp>
         <p:nvSpPr>
-          <p:cNvPr id="2" name="text-141">
+          <p:cNvPr id="2" name="text-133">
             <a:extLst xmlns:a="http://schemas.openxmlformats.org/drawingml/2006/main">
               <a:ext uri="{FF2B5EF4-FFF2-40B4-BE49-F238E27FC236}">
-                <a16:creationId xmlns:a16="http://schemas.microsoft.com/office/drawing/2014/main" id="{BB29102A-147D-4671-B543-75777FE1C7D1}"/>
+                <a16:creationId xmlns:a16="http://schemas.microsoft.com/office/drawing/2014/main" id="{626CA867-035C-4590-A0D1-AF221204F4BE}"/>
               </a:ext>
             </a:extLst>
           </p:cNvPr>
@@ -7014,10 +7014,10 @@
       </p:sp>
       <p:sp>
         <p:nvSpPr>
-          <p:cNvPr id="3" name="text-142">
+          <p:cNvPr id="3" name="text-134">
             <a:extLst xmlns:a="http://schemas.openxmlformats.org/drawingml/2006/main">
               <a:ext uri="{FF2B5EF4-FFF2-40B4-BE49-F238E27FC236}">
-                <a16:creationId xmlns:a16="http://schemas.microsoft.com/office/drawing/2014/main" id="{CB67C4DD-9792-4B0E-8208-856FA3E93BB4}"/>
+                <a16:creationId xmlns:a16="http://schemas.microsoft.com/office/drawing/2014/main" id="{28C6327A-EF98-452B-9295-F1076DB51010}"/>
               </a:ext>
             </a:extLst>
           </p:cNvPr>
@@ -7172,10 +7172,10 @@
       </p:sp>
       <p:sp>
         <p:nvSpPr>
-          <p:cNvPr id="4" name="text-143">
+          <p:cNvPr id="4" name="text-135">
             <a:extLst xmlns:a="http://schemas.openxmlformats.org/drawingml/2006/main">
               <a:ext uri="{FF2B5EF4-FFF2-40B4-BE49-F238E27FC236}">
-                <a16:creationId xmlns:a16="http://schemas.microsoft.com/office/drawing/2014/main" id="{F235BA1A-F3EA-4B4F-B0F3-01CE443755C0}"/>
+                <a16:creationId xmlns:a16="http://schemas.microsoft.com/office/drawing/2014/main" id="{1D8711C0-3C03-4C95-809D-785FDFC50510}"/>
               </a:ext>
             </a:extLst>
           </p:cNvPr>
@@ -7333,7 +7333,7 @@
           <p:cNvPr id="5" name="">
             <a:extLst xmlns:a="http://schemas.openxmlformats.org/drawingml/2006/main">
               <a:ext uri="{FF2B5EF4-FFF2-40B4-BE49-F238E27FC236}">
-                <a16:creationId xmlns:a16="http://schemas.microsoft.com/office/drawing/2014/main" id="{8E26B2B6-BF43-4018-93A3-0767D89DF45F}"/>
+                <a16:creationId xmlns:a16="http://schemas.microsoft.com/office/drawing/2014/main" id="{E2A0C511-7717-4FE7-B02A-5D9462F81363}"/>
               </a:ext>
             </a:extLst>
           </p:cNvPr>
@@ -7343,7 +7343,7 @@
           <p:nvPr/>
         </p:nvPicPr>
         <p:blipFill>
-          <a:blip xmlns:r="http://schemas.openxmlformats.org/officeDocument/2006/relationships" xmlns:a="http://schemas.openxmlformats.org/drawingml/2006/main" r:embed="Rc2749048d4ea4f27"/>
+          <a:blip xmlns:r="http://schemas.openxmlformats.org/officeDocument/2006/relationships" xmlns:a="http://schemas.openxmlformats.org/drawingml/2006/main" r:embed="R2dbf68a7e797493d"/>
           <a:srcRect xmlns:a="http://schemas.openxmlformats.org/drawingml/2006/main" l="0" t="4591" r="0" b="4591"/>
           <a:stretch xmlns:a="http://schemas.openxmlformats.org/drawingml/2006/main">
             <a:fillRect l="0" t="0" r="0" b="0"/>
@@ -7361,10 +7361,10 @@
       </p:pic>
       <p:sp>
         <p:nvSpPr>
-          <p:cNvPr id="6" name="text-144">
+          <p:cNvPr id="6" name="text-136">
             <a:extLst xmlns:a="http://schemas.openxmlformats.org/drawingml/2006/main">
               <a:ext uri="{FF2B5EF4-FFF2-40B4-BE49-F238E27FC236}">
-                <a16:creationId xmlns:a16="http://schemas.microsoft.com/office/drawing/2014/main" id="{AF5FED8E-5311-465B-B079-50C9E2246839}"/>
+                <a16:creationId xmlns:a16="http://schemas.microsoft.com/office/drawing/2014/main" id="{CD601301-9497-4436-A9F6-6F912BCF836F}"/>
               </a:ext>
             </a:extLst>
           </p:cNvPr>
@@ -7519,10 +7519,10 @@
       </p:sp>
       <p:sp>
         <p:nvSpPr>
-          <p:cNvPr id="7" name="text-145">
+          <p:cNvPr id="7" name="text-137">
             <a:extLst xmlns:a="http://schemas.openxmlformats.org/drawingml/2006/main">
               <a:ext uri="{FF2B5EF4-FFF2-40B4-BE49-F238E27FC236}">
-                <a16:creationId xmlns:a16="http://schemas.microsoft.com/office/drawing/2014/main" id="{7840607D-1B3F-4FE7-B194-2F772196C8C7}"/>
+                <a16:creationId xmlns:a16="http://schemas.microsoft.com/office/drawing/2014/main" id="{246119FF-7F2F-4398-889D-BD002C10182A}"/>
               </a:ext>
             </a:extLst>
           </p:cNvPr>
@@ -7677,10 +7677,10 @@
       </p:sp>
       <p:sp>
         <p:nvSpPr>
-          <p:cNvPr id="8" name="text-146">
+          <p:cNvPr id="8" name="text-138">
             <a:extLst xmlns:a="http://schemas.openxmlformats.org/drawingml/2006/main">
               <a:ext uri="{FF2B5EF4-FFF2-40B4-BE49-F238E27FC236}">
-                <a16:creationId xmlns:a16="http://schemas.microsoft.com/office/drawing/2014/main" id="{AE722DF9-C9FF-4905-844C-8A4E46BA8D35}"/>
+                <a16:creationId xmlns:a16="http://schemas.microsoft.com/office/drawing/2014/main" id="{FD73F2F4-10E6-42B0-9C27-07EFE37BB5D0}"/>
               </a:ext>
             </a:extLst>
           </p:cNvPr>
@@ -7835,10 +7835,10 @@
       </p:sp>
       <p:sp>
         <p:nvSpPr>
-          <p:cNvPr id="9" name="text-147">
+          <p:cNvPr id="9" name="text-139">
             <a:extLst xmlns:a="http://schemas.openxmlformats.org/drawingml/2006/main">
               <a:ext uri="{FF2B5EF4-FFF2-40B4-BE49-F238E27FC236}">
-                <a16:creationId xmlns:a16="http://schemas.microsoft.com/office/drawing/2014/main" id="{1A4A9975-27ED-4D02-9CAC-1033427609E2}"/>
+                <a16:creationId xmlns:a16="http://schemas.microsoft.com/office/drawing/2014/main" id="{868C398F-1BAD-411F-8DDB-E7A8DFF1BAB4}"/>
               </a:ext>
             </a:extLst>
           </p:cNvPr>
@@ -7994,7 +7994,7 @@
     </p:spTree>
     <p:extLst>
       <p:ext uri="{BB962C8B-B14F-4D97-AF65-F5344CB8AC3E}">
-        <p14:creationId xmlns:p14="http://schemas.microsoft.com/office/powerpoint/2010/main" val="1372845287"/>
+        <p14:creationId xmlns:p14="http://schemas.microsoft.com/office/powerpoint/2010/main" val="444980274"/>
       </p:ext>
     </p:extLst>
   </p:cSld>
@@ -8022,10 +8022,10 @@
       </p:grpSpPr>
       <p:sp>
         <p:nvSpPr>
-          <p:cNvPr id="17" name="text-148">
+          <p:cNvPr id="9" name="text-140">
             <a:extLst xmlns:a="http://schemas.openxmlformats.org/drawingml/2006/main">
               <a:ext uri="{FF2B5EF4-FFF2-40B4-BE49-F238E27FC236}">
-                <a16:creationId xmlns:a16="http://schemas.microsoft.com/office/drawing/2014/main" id="{215CCDDA-27D4-4E90-9F8F-E131CFBC0F34}"/>
+                <a16:creationId xmlns:a16="http://schemas.microsoft.com/office/drawing/2014/main" id="{9BFB4723-5F83-47AF-B824-F16FFF0DEBC1}"/>
               </a:ext>
             </a:extLst>
           </p:cNvPr>
@@ -8180,10 +8180,10 @@
       </p:sp>
       <p:sp>
         <p:nvSpPr>
-          <p:cNvPr id="2" name="text-149">
+          <p:cNvPr id="2" name="text-141">
             <a:extLst xmlns:a="http://schemas.openxmlformats.org/drawingml/2006/main">
               <a:ext uri="{FF2B5EF4-FFF2-40B4-BE49-F238E27FC236}">
-                <a16:creationId xmlns:a16="http://schemas.microsoft.com/office/drawing/2014/main" id="{AF88DF1D-2C91-4F3E-9B55-EC64B6AD0C81}"/>
+                <a16:creationId xmlns:a16="http://schemas.microsoft.com/office/drawing/2014/main" id="{D6AEFC4F-A9ED-446F-B263-F73295B53370}"/>
               </a:ext>
             </a:extLst>
           </p:cNvPr>
@@ -8338,10 +8338,10 @@
       </p:sp>
       <p:sp>
         <p:nvSpPr>
-          <p:cNvPr id="3" name="text-150">
+          <p:cNvPr id="3" name="text-142">
             <a:extLst xmlns:a="http://schemas.openxmlformats.org/drawingml/2006/main">
               <a:ext uri="{FF2B5EF4-FFF2-40B4-BE49-F238E27FC236}">
-                <a16:creationId xmlns:a16="http://schemas.microsoft.com/office/drawing/2014/main" id="{5D0B4B35-839C-4CFB-BACF-CFC078CDB3FF}"/>
+                <a16:creationId xmlns:a16="http://schemas.microsoft.com/office/drawing/2014/main" id="{3CD87A07-8978-4B39-B1CB-F26E39261D14}"/>
               </a:ext>
             </a:extLst>
           </p:cNvPr>
@@ -8496,10 +8496,10 @@
       </p:sp>
       <p:sp>
         <p:nvSpPr>
-          <p:cNvPr id="4" name="text-151">
+          <p:cNvPr id="4" name="text-143">
             <a:extLst xmlns:a="http://schemas.openxmlformats.org/drawingml/2006/main">
               <a:ext uri="{FF2B5EF4-FFF2-40B4-BE49-F238E27FC236}">
-                <a16:creationId xmlns:a16="http://schemas.microsoft.com/office/drawing/2014/main" id="{4C9CB12C-FCBA-48E2-A54E-01DF6FB5A834}"/>
+                <a16:creationId xmlns:a16="http://schemas.microsoft.com/office/drawing/2014/main" id="{4ED1B7DA-4EF1-4931-B17C-87A583D6E0C4}"/>
               </a:ext>
             </a:extLst>
           </p:cNvPr>
@@ -8654,10 +8654,10 @@
       </p:sp>
       <p:sp>
         <p:nvSpPr>
-          <p:cNvPr id="5" name="text-152">
+          <p:cNvPr id="5" name="text-144">
             <a:extLst xmlns:a="http://schemas.openxmlformats.org/drawingml/2006/main">
               <a:ext uri="{FF2B5EF4-FFF2-40B4-BE49-F238E27FC236}">
-                <a16:creationId xmlns:a16="http://schemas.microsoft.com/office/drawing/2014/main" id="{280429B8-D460-4343-9D6D-DF4781409BBE}"/>
+                <a16:creationId xmlns:a16="http://schemas.microsoft.com/office/drawing/2014/main" id="{A32DBC92-F1EB-4981-A349-FF5FF376F724}"/>
               </a:ext>
             </a:extLst>
           </p:cNvPr>
@@ -8668,8 +8668,8 @@
         </p:nvSpPr>
         <p:spPr>
           <a:xfrm xmlns:a="http://schemas.openxmlformats.org/drawingml/2006/main">
-            <a:off x="609600" y="1752600"/>
-            <a:ext cx="5238750" cy="523875"/>
+            <a:off x="609600" y="1885950"/>
+            <a:ext cx="5238750" cy="952500"/>
           </a:xfrm>
           <a:prstGeom xmlns:a="http://schemas.openxmlformats.org/drawingml/2006/main" prst="rect">
             <a:avLst/>
@@ -8685,7 +8685,7 @@
           </a:bodyPr>
           <a:lstStyle xmlns:a="http://schemas.openxmlformats.org/drawingml/2006/main">
             <a:defPPr>
-              <a:defRPr sz="2250" b="0">
+              <a:defRPr sz="2400" b="0">
                 <a:solidFill>
                   <a:srgbClr val="C2142F"/>
                 </a:solidFill>
@@ -8695,7 +8695,7 @@
               </a:defRPr>
             </a:defPPr>
             <a:lvl1pPr>
-              <a:defRPr sz="2250" b="0">
+              <a:defRPr sz="2400" b="0">
                 <a:solidFill>
                   <a:srgbClr val="C2142F"/>
                 </a:solidFill>
@@ -8705,7 +8705,7 @@
               </a:defRPr>
             </a:lvl1pPr>
             <a:lvl2pPr>
-              <a:defRPr sz="2250" b="0">
+              <a:defRPr sz="2400" b="0">
                 <a:solidFill>
                   <a:srgbClr val="C2142F"/>
                 </a:solidFill>
@@ -8715,7 +8715,7 @@
               </a:defRPr>
             </a:lvl2pPr>
             <a:lvl3pPr>
-              <a:defRPr sz="2250" b="0">
+              <a:defRPr sz="2400" b="0">
                 <a:solidFill>
                   <a:srgbClr val="C2142F"/>
                 </a:solidFill>
@@ -8725,7 +8725,7 @@
               </a:defRPr>
             </a:lvl3pPr>
             <a:lvl4pPr>
-              <a:defRPr sz="2250" b="0">
+              <a:defRPr sz="2400" b="0">
                 <a:solidFill>
                   <a:srgbClr val="C2142F"/>
                 </a:solidFill>
@@ -8735,7 +8735,7 @@
               </a:defRPr>
             </a:lvl4pPr>
             <a:lvl5pPr>
-              <a:defRPr sz="2250" b="0">
+              <a:defRPr sz="2400" b="0">
                 <a:solidFill>
                   <a:srgbClr val="C2142F"/>
                 </a:solidFill>
@@ -8745,7 +8745,7 @@
               </a:defRPr>
             </a:lvl5pPr>
             <a:lvl6pPr>
-              <a:defRPr sz="2250" b="0">
+              <a:defRPr sz="2400" b="0">
                 <a:solidFill>
                   <a:srgbClr val="C2142F"/>
                 </a:solidFill>
@@ -8755,7 +8755,7 @@
               </a:defRPr>
             </a:lvl6pPr>
             <a:lvl7pPr>
-              <a:defRPr sz="2250" b="0">
+              <a:defRPr sz="2400" b="0">
                 <a:solidFill>
                   <a:srgbClr val="C2142F"/>
                 </a:solidFill>
@@ -8765,7 +8765,7 @@
               </a:defRPr>
             </a:lvl7pPr>
             <a:lvl8pPr>
-              <a:defRPr sz="2250" b="0">
+              <a:defRPr sz="2400" b="0">
                 <a:solidFill>
                   <a:srgbClr val="C2142F"/>
                 </a:solidFill>
@@ -8775,7 +8775,7 @@
               </a:defRPr>
             </a:lvl8pPr>
             <a:lvl9pPr>
-              <a:defRPr sz="2250" b="0">
+              <a:defRPr sz="2400" b="0">
                 <a:solidFill>
                   <a:srgbClr val="C2142F"/>
                 </a:solidFill>
@@ -8787,7 +8787,7 @@
           </a:lstStyle>
           <a:p xmlns:a="http://schemas.openxmlformats.org/drawingml/2006/main">
             <a:pPr>
-              <a:defRPr sz="2250" b="0">
+              <a:defRPr sz="2400" b="0">
                 <a:solidFill>
                   <a:srgbClr val="C2142F"/>
                 </a:solidFill>
@@ -8797,7 +8797,7 @@
               </a:defRPr>
             </a:pPr>
             <a:r>
-              <a:rPr sz="2250" b="0">
+              <a:rPr sz="2400" b="0">
                 <a:solidFill>
                   <a:srgbClr val="C2142F"/>
                 </a:solidFill>
@@ -8805,17 +8805,17 @@
                 <a:ea typeface="Georgia"/>
                 <a:cs typeface="Georgia"/>
               </a:rPr>
-              <a:t>RPG de mesa &amp; jogos</a:t>
+              <a:t>Desenvolvimento de Artes Originais</a:t>
             </a:r>
           </a:p>
         </p:txBody>
       </p:sp>
       <p:sp>
         <p:nvSpPr>
-          <p:cNvPr id="6" name="text-153">
+          <p:cNvPr id="6" name="text-145">
             <a:extLst xmlns:a="http://schemas.openxmlformats.org/drawingml/2006/main">
               <a:ext uri="{FF2B5EF4-FFF2-40B4-BE49-F238E27FC236}">
-                <a16:creationId xmlns:a16="http://schemas.microsoft.com/office/drawing/2014/main" id="{2F7754F7-52FD-4F7A-B077-F64ACB2CF837}"/>
+                <a16:creationId xmlns:a16="http://schemas.microsoft.com/office/drawing/2014/main" id="{E86DEFD5-24EB-4299-AF7E-B7A6C2FA05B1}"/>
               </a:ext>
             </a:extLst>
           </p:cNvPr>
@@ -8826,8 +8826,8 @@
         </p:nvSpPr>
         <p:spPr>
           <a:xfrm xmlns:a="http://schemas.openxmlformats.org/drawingml/2006/main">
-            <a:off x="609600" y="2419350"/>
-            <a:ext cx="5238750" cy="1390650"/>
+            <a:off x="609600" y="3057525"/>
+            <a:ext cx="5238750" cy="2857500"/>
           </a:xfrm>
           <a:prstGeom xmlns:a="http://schemas.openxmlformats.org/drawingml/2006/main" prst="rect">
             <a:avLst/>
@@ -8843,7 +8843,7 @@
           </a:bodyPr>
           <a:lstStyle xmlns:a="http://schemas.openxmlformats.org/drawingml/2006/main">
             <a:defPPr>
-              <a:defRPr sz="1800" b="0">
+              <a:defRPr sz="2100" b="0">
                 <a:solidFill>
                   <a:srgbClr val="111015"/>
                 </a:solidFill>
@@ -8853,7 +8853,7 @@
               </a:defRPr>
             </a:defPPr>
             <a:lvl1pPr>
-              <a:defRPr sz="1800" b="0">
+              <a:defRPr sz="2100" b="0">
                 <a:solidFill>
                   <a:srgbClr val="111015"/>
                 </a:solidFill>
@@ -8863,7 +8863,7 @@
               </a:defRPr>
             </a:lvl1pPr>
             <a:lvl2pPr>
-              <a:defRPr sz="1800" b="0">
+              <a:defRPr sz="2100" b="0">
                 <a:solidFill>
                   <a:srgbClr val="111015"/>
                 </a:solidFill>
@@ -8873,7 +8873,7 @@
               </a:defRPr>
             </a:lvl2pPr>
             <a:lvl3pPr>
-              <a:defRPr sz="1800" b="0">
+              <a:defRPr sz="2100" b="0">
                 <a:solidFill>
                   <a:srgbClr val="111015"/>
                 </a:solidFill>
@@ -8883,7 +8883,7 @@
               </a:defRPr>
             </a:lvl3pPr>
             <a:lvl4pPr>
-              <a:defRPr sz="1800" b="0">
+              <a:defRPr sz="2100" b="0">
                 <a:solidFill>
                   <a:srgbClr val="111015"/>
                 </a:solidFill>
@@ -8893,7 +8893,7 @@
               </a:defRPr>
             </a:lvl4pPr>
             <a:lvl5pPr>
-              <a:defRPr sz="1800" b="0">
+              <a:defRPr sz="2100" b="0">
                 <a:solidFill>
                   <a:srgbClr val="111015"/>
                 </a:solidFill>
@@ -8903,7 +8903,7 @@
               </a:defRPr>
             </a:lvl5pPr>
             <a:lvl6pPr>
-              <a:defRPr sz="1800" b="0">
+              <a:defRPr sz="2100" b="0">
                 <a:solidFill>
                   <a:srgbClr val="111015"/>
                 </a:solidFill>
@@ -8913,7 +8913,7 @@
               </a:defRPr>
             </a:lvl6pPr>
             <a:lvl7pPr>
-              <a:defRPr sz="1800" b="0">
+              <a:defRPr sz="2100" b="0">
                 <a:solidFill>
                   <a:srgbClr val="111015"/>
                 </a:solidFill>
@@ -8923,7 +8923,7 @@
               </a:defRPr>
             </a:lvl7pPr>
             <a:lvl8pPr>
-              <a:defRPr sz="1800" b="0">
+              <a:defRPr sz="2100" b="0">
                 <a:solidFill>
                   <a:srgbClr val="111015"/>
                 </a:solidFill>
@@ -8933,7 +8933,7 @@
               </a:defRPr>
             </a:lvl8pPr>
             <a:lvl9pPr>
-              <a:defRPr sz="1800" b="0">
+              <a:defRPr sz="2100" b="0">
                 <a:solidFill>
                   <a:srgbClr val="111015"/>
                 </a:solidFill>
@@ -8945,7 +8945,7 @@
           </a:lstStyle>
           <a:p xmlns:a="http://schemas.openxmlformats.org/drawingml/2006/main">
             <a:pPr>
-              <a:defRPr sz="1800" b="0">
+              <a:defRPr sz="2100" b="0">
                 <a:solidFill>
                   <a:srgbClr val="111015"/>
                 </a:solidFill>
@@ -8955,7 +8955,7 @@
               </a:defRPr>
             </a:pPr>
             <a:r>
-              <a:rPr sz="1800" b="0">
+              <a:rPr sz="2100" b="0">
                 <a:solidFill>
                   <a:srgbClr val="111015"/>
                 </a:solidFill>
@@ -8963,17 +8963,17 @@
                 <a:ea typeface="Arial"/>
                 <a:cs typeface="Arial"/>
               </a:rPr>
-              <a:t>Pensada para seu projeto: personagens, criaturas e cenários com consistência visual, prontos para publicar, atendendo a editoras, estúdios de jogos, criadores de TCG e projetos independentes da comunidade.</a:t>
+              <a:t>Ilustrações que ajudam a contar a sua história: personagens, criaturas e cenários com coerência visual, prontos para publicar. Atendendo a editoras, estúdios de jogos, criadores de TCG e projetos independentes.</a:t>
             </a:r>
           </a:p>
         </p:txBody>
       </p:sp>
       <p:sp>
         <p:nvSpPr>
-          <p:cNvPr id="7" name="text-154">
+          <p:cNvPr id="7" name="text-146">
             <a:extLst xmlns:a="http://schemas.openxmlformats.org/drawingml/2006/main">
               <a:ext uri="{FF2B5EF4-FFF2-40B4-BE49-F238E27FC236}">
-                <a16:creationId xmlns:a16="http://schemas.microsoft.com/office/drawing/2014/main" id="{31DEFE50-9078-4168-9558-AEEFE20BFC52}"/>
+                <a16:creationId xmlns:a16="http://schemas.microsoft.com/office/drawing/2014/main" id="{F990539C-F398-4CB3-B21D-A1C1998D5198}"/>
               </a:ext>
             </a:extLst>
           </p:cNvPr>
@@ -8984,8 +8984,8 @@
         </p:nvSpPr>
         <p:spPr>
           <a:xfrm xmlns:a="http://schemas.openxmlformats.org/drawingml/2006/main">
-            <a:off x="6286500" y="1752600"/>
-            <a:ext cx="5238750" cy="523875"/>
+            <a:off x="6286500" y="1885950"/>
+            <a:ext cx="5238750" cy="952500"/>
           </a:xfrm>
           <a:prstGeom xmlns:a="http://schemas.openxmlformats.org/drawingml/2006/main" prst="rect">
             <a:avLst/>
@@ -9001,7 +9001,7 @@
           </a:bodyPr>
           <a:lstStyle xmlns:a="http://schemas.openxmlformats.org/drawingml/2006/main">
             <a:defPPr>
-              <a:defRPr sz="2250" b="0">
+              <a:defRPr sz="2400" b="0">
                 <a:solidFill>
                   <a:srgbClr val="C2142F"/>
                 </a:solidFill>
@@ -9011,7 +9011,7 @@
               </a:defRPr>
             </a:defPPr>
             <a:lvl1pPr>
-              <a:defRPr sz="2250" b="0">
+              <a:defRPr sz="2400" b="0">
                 <a:solidFill>
                   <a:srgbClr val="C2142F"/>
                 </a:solidFill>
@@ -9021,7 +9021,7 @@
               </a:defRPr>
             </a:lvl1pPr>
             <a:lvl2pPr>
-              <a:defRPr sz="2250" b="0">
+              <a:defRPr sz="2400" b="0">
                 <a:solidFill>
                   <a:srgbClr val="C2142F"/>
                 </a:solidFill>
@@ -9031,7 +9031,7 @@
               </a:defRPr>
             </a:lvl2pPr>
             <a:lvl3pPr>
-              <a:defRPr sz="2250" b="0">
+              <a:defRPr sz="2400" b="0">
                 <a:solidFill>
                   <a:srgbClr val="C2142F"/>
                 </a:solidFill>
@@ -9041,7 +9041,7 @@
               </a:defRPr>
             </a:lvl3pPr>
             <a:lvl4pPr>
-              <a:defRPr sz="2250" b="0">
+              <a:defRPr sz="2400" b="0">
                 <a:solidFill>
                   <a:srgbClr val="C2142F"/>
                 </a:solidFill>
@@ -9051,7 +9051,7 @@
               </a:defRPr>
             </a:lvl4pPr>
             <a:lvl5pPr>
-              <a:defRPr sz="2250" b="0">
+              <a:defRPr sz="2400" b="0">
                 <a:solidFill>
                   <a:srgbClr val="C2142F"/>
                 </a:solidFill>
@@ -9061,7 +9061,7 @@
               </a:defRPr>
             </a:lvl5pPr>
             <a:lvl6pPr>
-              <a:defRPr sz="2250" b="0">
+              <a:defRPr sz="2400" b="0">
                 <a:solidFill>
                   <a:srgbClr val="C2142F"/>
                 </a:solidFill>
@@ -9071,7 +9071,7 @@
               </a:defRPr>
             </a:lvl6pPr>
             <a:lvl7pPr>
-              <a:defRPr sz="2250" b="0">
+              <a:defRPr sz="2400" b="0">
                 <a:solidFill>
                   <a:srgbClr val="C2142F"/>
                 </a:solidFill>
@@ -9081,7 +9081,7 @@
               </a:defRPr>
             </a:lvl7pPr>
             <a:lvl8pPr>
-              <a:defRPr sz="2250" b="0">
+              <a:defRPr sz="2400" b="0">
                 <a:solidFill>
                   <a:srgbClr val="C2142F"/>
                 </a:solidFill>
@@ -9091,7 +9091,7 @@
               </a:defRPr>
             </a:lvl8pPr>
             <a:lvl9pPr>
-              <a:defRPr sz="2250" b="0">
+              <a:defRPr sz="2400" b="0">
                 <a:solidFill>
                   <a:srgbClr val="C2142F"/>
                 </a:solidFill>
@@ -9103,7 +9103,7 @@
           </a:lstStyle>
           <a:p xmlns:a="http://schemas.openxmlformats.org/drawingml/2006/main">
             <a:pPr>
-              <a:defRPr sz="2250" b="0">
+              <a:defRPr sz="2400" b="0">
                 <a:solidFill>
                   <a:srgbClr val="C2142F"/>
                 </a:solidFill>
@@ -9113,7 +9113,7 @@
               </a:defRPr>
             </a:pPr>
             <a:r>
-              <a:rPr sz="2250" b="0">
+              <a:rPr sz="2400" b="0">
                 <a:solidFill>
                   <a:srgbClr val="C2142F"/>
                 </a:solidFill>
@@ -9121,17 +9121,17 @@
                 <a:ea typeface="Georgia"/>
                 <a:cs typeface="Georgia"/>
               </a:rPr>
-              <a:t>Conteúdo para marcas</a:t>
+              <a:t>Cocriação com marcas</a:t>
             </a:r>
           </a:p>
         </p:txBody>
       </p:sp>
       <p:sp>
         <p:nvSpPr>
-          <p:cNvPr id="8" name="text-155">
+          <p:cNvPr id="8" name="text-147">
             <a:extLst xmlns:a="http://schemas.openxmlformats.org/drawingml/2006/main">
               <a:ext uri="{FF2B5EF4-FFF2-40B4-BE49-F238E27FC236}">
-                <a16:creationId xmlns:a16="http://schemas.microsoft.com/office/drawing/2014/main" id="{1DB6A918-9988-4BEB-86A5-2DDE279F5A49}"/>
+                <a16:creationId xmlns:a16="http://schemas.microsoft.com/office/drawing/2014/main" id="{D9B37FFB-D9C2-47A3-B86B-FFDD0B953C52}"/>
               </a:ext>
             </a:extLst>
           </p:cNvPr>
@@ -9142,8 +9142,8 @@
         </p:nvSpPr>
         <p:spPr>
           <a:xfrm xmlns:a="http://schemas.openxmlformats.org/drawingml/2006/main">
-            <a:off x="6286500" y="2419350"/>
-            <a:ext cx="5238750" cy="857250"/>
+            <a:off x="6286500" y="3057525"/>
+            <a:ext cx="5238750" cy="2857500"/>
           </a:xfrm>
           <a:prstGeom xmlns:a="http://schemas.openxmlformats.org/drawingml/2006/main" prst="rect">
             <a:avLst/>
@@ -9159,7 +9159,7 @@
           </a:bodyPr>
           <a:lstStyle xmlns:a="http://schemas.openxmlformats.org/drawingml/2006/main">
             <a:defPPr>
-              <a:defRPr sz="1800" b="0">
+              <a:defRPr sz="2100" b="0">
                 <a:solidFill>
                   <a:srgbClr val="111015"/>
                 </a:solidFill>
@@ -9169,7 +9169,7 @@
               </a:defRPr>
             </a:defPPr>
             <a:lvl1pPr>
-              <a:defRPr sz="1800" b="0">
+              <a:defRPr sz="2100" b="0">
                 <a:solidFill>
                   <a:srgbClr val="111015"/>
                 </a:solidFill>
@@ -9179,7 +9179,7 @@
               </a:defRPr>
             </a:lvl1pPr>
             <a:lvl2pPr>
-              <a:defRPr sz="1800" b="0">
+              <a:defRPr sz="2100" b="0">
                 <a:solidFill>
                   <a:srgbClr val="111015"/>
                 </a:solidFill>
@@ -9189,7 +9189,7 @@
               </a:defRPr>
             </a:lvl2pPr>
             <a:lvl3pPr>
-              <a:defRPr sz="1800" b="0">
+              <a:defRPr sz="2100" b="0">
                 <a:solidFill>
                   <a:srgbClr val="111015"/>
                 </a:solidFill>
@@ -9199,7 +9199,7 @@
               </a:defRPr>
             </a:lvl3pPr>
             <a:lvl4pPr>
-              <a:defRPr sz="1800" b="0">
+              <a:defRPr sz="2100" b="0">
                 <a:solidFill>
                   <a:srgbClr val="111015"/>
                 </a:solidFill>
@@ -9209,7 +9209,7 @@
               </a:defRPr>
             </a:lvl4pPr>
             <a:lvl5pPr>
-              <a:defRPr sz="1800" b="0">
+              <a:defRPr sz="2100" b="0">
                 <a:solidFill>
                   <a:srgbClr val="111015"/>
                 </a:solidFill>
@@ -9219,7 +9219,7 @@
               </a:defRPr>
             </a:lvl5pPr>
             <a:lvl6pPr>
-              <a:defRPr sz="1800" b="0">
+              <a:defRPr sz="2100" b="0">
                 <a:solidFill>
                   <a:srgbClr val="111015"/>
                 </a:solidFill>
@@ -9229,7 +9229,7 @@
               </a:defRPr>
             </a:lvl6pPr>
             <a:lvl7pPr>
-              <a:defRPr sz="1800" b="0">
+              <a:defRPr sz="2100" b="0">
                 <a:solidFill>
                   <a:srgbClr val="111015"/>
                 </a:solidFill>
@@ -9239,7 +9239,7 @@
               </a:defRPr>
             </a:lvl7pPr>
             <a:lvl8pPr>
-              <a:defRPr sz="1800" b="0">
+              <a:defRPr sz="2100" b="0">
                 <a:solidFill>
                   <a:srgbClr val="111015"/>
                 </a:solidFill>
@@ -9249,7 +9249,7 @@
               </a:defRPr>
             </a:lvl8pPr>
             <a:lvl9pPr>
-              <a:defRPr sz="1800" b="0">
+              <a:defRPr sz="2100" b="0">
                 <a:solidFill>
                   <a:srgbClr val="111015"/>
                 </a:solidFill>
@@ -9261,7 +9261,7 @@
           </a:lstStyle>
           <a:p xmlns:a="http://schemas.openxmlformats.org/drawingml/2006/main">
             <a:pPr>
-              <a:defRPr sz="1800" b="0">
+              <a:defRPr sz="2100" b="0">
                 <a:solidFill>
                   <a:srgbClr val="111015"/>
                 </a:solidFill>
@@ -9271,7 +9271,7 @@
               </a:defRPr>
             </a:pPr>
             <a:r>
-              <a:rPr sz="1800" b="0">
+              <a:rPr sz="2100" b="0">
                 <a:solidFill>
                   <a:srgbClr val="111015"/>
                 </a:solidFill>
@@ -9279,1271 +9279,7 @@
                 <a:ea typeface="Arial"/>
                 <a:cs typeface="Arial"/>
               </a:rPr>
-              <a:t>Conteúdo especializado em produtos e ferramentas para artistas, conectando marcas ao público.</a:t>
-            </a:r>
-          </a:p>
-        </p:txBody>
-      </p:sp>
-      <p:sp>
-        <p:nvSpPr>
-          <p:cNvPr id="9" name="text-156">
-            <a:extLst xmlns:a="http://schemas.openxmlformats.org/drawingml/2006/main">
-              <a:ext uri="{FF2B5EF4-FFF2-40B4-BE49-F238E27FC236}">
-                <a16:creationId xmlns:a16="http://schemas.microsoft.com/office/drawing/2014/main" id="{0BA671C0-F02C-49D4-8D99-D4808FEDF6AD}"/>
-              </a:ext>
-            </a:extLst>
-          </p:cNvPr>
-          <p:cNvSpPr>
-            <a:spLocks xmlns:a="http://schemas.openxmlformats.org/drawingml/2006/main" noGrp="1"/>
-          </p:cNvSpPr>
-          <p:nvPr/>
-        </p:nvSpPr>
-        <p:spPr>
-          <a:xfrm xmlns:a="http://schemas.openxmlformats.org/drawingml/2006/main">
-            <a:off x="609600" y="3981450"/>
-            <a:ext cx="5238750" cy="381000"/>
-          </a:xfrm>
-          <a:prstGeom xmlns:a="http://schemas.openxmlformats.org/drawingml/2006/main" prst="rect">
-            <a:avLst/>
-          </a:prstGeom>
-          <a:noFill xmlns:a="http://schemas.openxmlformats.org/drawingml/2006/main"/>
-          <a:ln xmlns:a="http://schemas.openxmlformats.org/drawingml/2006/main" w="0">
-            <a:noFill/>
-          </a:ln>
-        </p:spPr>
-        <p:txBody>
-          <a:bodyPr xmlns:a="http://schemas.openxmlformats.org/drawingml/2006/main" lIns="0" tIns="0" rIns="0" bIns="0" anchor="t">
-            <a:noAutofit/>
-          </a:bodyPr>
-          <a:lstStyle xmlns:a="http://schemas.openxmlformats.org/drawingml/2006/main">
-            <a:defPPr>
-              <a:defRPr sz="1800" b="1">
-                <a:solidFill>
-                  <a:srgbClr val="111015"/>
-                </a:solidFill>
-                <a:latin typeface="Georgia"/>
-                <a:ea typeface="Georgia"/>
-                <a:cs typeface="Georgia"/>
-              </a:defRPr>
-            </a:defPPr>
-            <a:lvl1pPr>
-              <a:defRPr sz="1800" b="1">
-                <a:solidFill>
-                  <a:srgbClr val="111015"/>
-                </a:solidFill>
-                <a:latin typeface="Georgia"/>
-                <a:ea typeface="Georgia"/>
-                <a:cs typeface="Georgia"/>
-              </a:defRPr>
-            </a:lvl1pPr>
-            <a:lvl2pPr>
-              <a:defRPr sz="1800" b="1">
-                <a:solidFill>
-                  <a:srgbClr val="111015"/>
-                </a:solidFill>
-                <a:latin typeface="Georgia"/>
-                <a:ea typeface="Georgia"/>
-                <a:cs typeface="Georgia"/>
-              </a:defRPr>
-            </a:lvl2pPr>
-            <a:lvl3pPr>
-              <a:defRPr sz="1800" b="1">
-                <a:solidFill>
-                  <a:srgbClr val="111015"/>
-                </a:solidFill>
-                <a:latin typeface="Georgia"/>
-                <a:ea typeface="Georgia"/>
-                <a:cs typeface="Georgia"/>
-              </a:defRPr>
-            </a:lvl3pPr>
-            <a:lvl4pPr>
-              <a:defRPr sz="1800" b="1">
-                <a:solidFill>
-                  <a:srgbClr val="111015"/>
-                </a:solidFill>
-                <a:latin typeface="Georgia"/>
-                <a:ea typeface="Georgia"/>
-                <a:cs typeface="Georgia"/>
-              </a:defRPr>
-            </a:lvl4pPr>
-            <a:lvl5pPr>
-              <a:defRPr sz="1800" b="1">
-                <a:solidFill>
-                  <a:srgbClr val="111015"/>
-                </a:solidFill>
-                <a:latin typeface="Georgia"/>
-                <a:ea typeface="Georgia"/>
-                <a:cs typeface="Georgia"/>
-              </a:defRPr>
-            </a:lvl5pPr>
-            <a:lvl6pPr>
-              <a:defRPr sz="1800" b="1">
-                <a:solidFill>
-                  <a:srgbClr val="111015"/>
-                </a:solidFill>
-                <a:latin typeface="Georgia"/>
-                <a:ea typeface="Georgia"/>
-                <a:cs typeface="Georgia"/>
-              </a:defRPr>
-            </a:lvl6pPr>
-            <a:lvl7pPr>
-              <a:defRPr sz="1800" b="1">
-                <a:solidFill>
-                  <a:srgbClr val="111015"/>
-                </a:solidFill>
-                <a:latin typeface="Georgia"/>
-                <a:ea typeface="Georgia"/>
-                <a:cs typeface="Georgia"/>
-              </a:defRPr>
-            </a:lvl7pPr>
-            <a:lvl8pPr>
-              <a:defRPr sz="1800" b="1">
-                <a:solidFill>
-                  <a:srgbClr val="111015"/>
-                </a:solidFill>
-                <a:latin typeface="Georgia"/>
-                <a:ea typeface="Georgia"/>
-                <a:cs typeface="Georgia"/>
-              </a:defRPr>
-            </a:lvl8pPr>
-            <a:lvl9pPr>
-              <a:defRPr sz="1800" b="1">
-                <a:solidFill>
-                  <a:srgbClr val="111015"/>
-                </a:solidFill>
-                <a:latin typeface="Georgia"/>
-                <a:ea typeface="Georgia"/>
-                <a:cs typeface="Georgia"/>
-              </a:defRPr>
-            </a:lvl9pPr>
-          </a:lstStyle>
-          <a:p xmlns:a="http://schemas.openxmlformats.org/drawingml/2006/main">
-            <a:pPr>
-              <a:defRPr sz="1800" b="1">
-                <a:solidFill>
-                  <a:srgbClr val="111015"/>
-                </a:solidFill>
-                <a:latin typeface="Georgia"/>
-                <a:ea typeface="Georgia"/>
-                <a:cs typeface="Georgia"/>
-              </a:defRPr>
-            </a:pPr>
-            <a:r>
-              <a:rPr sz="1800" b="1">
-                <a:solidFill>
-                  <a:srgbClr val="111015"/>
-                </a:solidFill>
-                <a:latin typeface="Georgia"/>
-                <a:ea typeface="Georgia"/>
-                <a:cs typeface="Georgia"/>
-              </a:rPr>
-              <a:t>Artes para livros e jogos</a:t>
-            </a:r>
-          </a:p>
-        </p:txBody>
-      </p:sp>
-      <p:sp>
-        <p:nvSpPr>
-          <p:cNvPr id="10" name="text-157">
-            <a:extLst xmlns:a="http://schemas.openxmlformats.org/drawingml/2006/main">
-              <a:ext uri="{FF2B5EF4-FFF2-40B4-BE49-F238E27FC236}">
-                <a16:creationId xmlns:a16="http://schemas.microsoft.com/office/drawing/2014/main" id="{028AFE62-C692-4A8D-B917-32514916D784}"/>
-              </a:ext>
-            </a:extLst>
-          </p:cNvPr>
-          <p:cNvSpPr>
-            <a:spLocks xmlns:a="http://schemas.openxmlformats.org/drawingml/2006/main" noGrp="1"/>
-          </p:cNvSpPr>
-          <p:nvPr/>
-        </p:nvSpPr>
-        <p:spPr>
-          <a:xfrm xmlns:a="http://schemas.openxmlformats.org/drawingml/2006/main">
-            <a:off x="609600" y="4391025"/>
-            <a:ext cx="5238750" cy="857250"/>
-          </a:xfrm>
-          <a:prstGeom xmlns:a="http://schemas.openxmlformats.org/drawingml/2006/main" prst="rect">
-            <a:avLst/>
-          </a:prstGeom>
-          <a:noFill xmlns:a="http://schemas.openxmlformats.org/drawingml/2006/main"/>
-          <a:ln xmlns:a="http://schemas.openxmlformats.org/drawingml/2006/main" w="0">
-            <a:noFill/>
-          </a:ln>
-        </p:spPr>
-        <p:txBody>
-          <a:bodyPr xmlns:a="http://schemas.openxmlformats.org/drawingml/2006/main" lIns="0" tIns="0" rIns="0" bIns="0" anchor="t">
-            <a:noAutofit/>
-          </a:bodyPr>
-          <a:lstStyle xmlns:a="http://schemas.openxmlformats.org/drawingml/2006/main">
-            <a:defPPr>
-              <a:defRPr sz="1575" b="0">
-                <a:solidFill>
-                  <a:srgbClr val="5F5A63"/>
-                </a:solidFill>
-                <a:latin typeface="Arial"/>
-                <a:ea typeface="Arial"/>
-                <a:cs typeface="Arial"/>
-              </a:defRPr>
-            </a:defPPr>
-            <a:lvl1pPr>
-              <a:defRPr sz="1575" b="0">
-                <a:solidFill>
-                  <a:srgbClr val="5F5A63"/>
-                </a:solidFill>
-                <a:latin typeface="Arial"/>
-                <a:ea typeface="Arial"/>
-                <a:cs typeface="Arial"/>
-              </a:defRPr>
-            </a:lvl1pPr>
-            <a:lvl2pPr>
-              <a:defRPr sz="1575" b="0">
-                <a:solidFill>
-                  <a:srgbClr val="5F5A63"/>
-                </a:solidFill>
-                <a:latin typeface="Arial"/>
-                <a:ea typeface="Arial"/>
-                <a:cs typeface="Arial"/>
-              </a:defRPr>
-            </a:lvl2pPr>
-            <a:lvl3pPr>
-              <a:defRPr sz="1575" b="0">
-                <a:solidFill>
-                  <a:srgbClr val="5F5A63"/>
-                </a:solidFill>
-                <a:latin typeface="Arial"/>
-                <a:ea typeface="Arial"/>
-                <a:cs typeface="Arial"/>
-              </a:defRPr>
-            </a:lvl3pPr>
-            <a:lvl4pPr>
-              <a:defRPr sz="1575" b="0">
-                <a:solidFill>
-                  <a:srgbClr val="5F5A63"/>
-                </a:solidFill>
-                <a:latin typeface="Arial"/>
-                <a:ea typeface="Arial"/>
-                <a:cs typeface="Arial"/>
-              </a:defRPr>
-            </a:lvl4pPr>
-            <a:lvl5pPr>
-              <a:defRPr sz="1575" b="0">
-                <a:solidFill>
-                  <a:srgbClr val="5F5A63"/>
-                </a:solidFill>
-                <a:latin typeface="Arial"/>
-                <a:ea typeface="Arial"/>
-                <a:cs typeface="Arial"/>
-              </a:defRPr>
-            </a:lvl5pPr>
-            <a:lvl6pPr>
-              <a:defRPr sz="1575" b="0">
-                <a:solidFill>
-                  <a:srgbClr val="5F5A63"/>
-                </a:solidFill>
-                <a:latin typeface="Arial"/>
-                <a:ea typeface="Arial"/>
-                <a:cs typeface="Arial"/>
-              </a:defRPr>
-            </a:lvl6pPr>
-            <a:lvl7pPr>
-              <a:defRPr sz="1575" b="0">
-                <a:solidFill>
-                  <a:srgbClr val="5F5A63"/>
-                </a:solidFill>
-                <a:latin typeface="Arial"/>
-                <a:ea typeface="Arial"/>
-                <a:cs typeface="Arial"/>
-              </a:defRPr>
-            </a:lvl7pPr>
-            <a:lvl8pPr>
-              <a:defRPr sz="1575" b="0">
-                <a:solidFill>
-                  <a:srgbClr val="5F5A63"/>
-                </a:solidFill>
-                <a:latin typeface="Arial"/>
-                <a:ea typeface="Arial"/>
-                <a:cs typeface="Arial"/>
-              </a:defRPr>
-            </a:lvl8pPr>
-            <a:lvl9pPr>
-              <a:defRPr sz="1575" b="0">
-                <a:solidFill>
-                  <a:srgbClr val="5F5A63"/>
-                </a:solidFill>
-                <a:latin typeface="Arial"/>
-                <a:ea typeface="Arial"/>
-                <a:cs typeface="Arial"/>
-              </a:defRPr>
-            </a:lvl9pPr>
-          </a:lstStyle>
-          <a:p xmlns:a="http://schemas.openxmlformats.org/drawingml/2006/main">
-            <a:pPr>
-              <a:defRPr sz="1575" b="0">
-                <a:solidFill>
-                  <a:srgbClr val="5F5A63"/>
-                </a:solidFill>
-                <a:latin typeface="Arial"/>
-                <a:ea typeface="Arial"/>
-                <a:cs typeface="Arial"/>
-              </a:defRPr>
-            </a:pPr>
-            <a:r>
-              <a:rPr sz="1575" b="0">
-                <a:solidFill>
-                  <a:srgbClr val="5F5A63"/>
-                </a:solidFill>
-                <a:latin typeface="Arial"/>
-                <a:ea typeface="Arial"/>
-                <a:cs typeface="Arial"/>
-              </a:rPr>
-              <a:t>Ilustrações que ajudam a contar a sua história: capas, páginas internas, cartas e artes de ambientação.</a:t>
-            </a:r>
-          </a:p>
-        </p:txBody>
-      </p:sp>
-      <p:sp>
-        <p:nvSpPr>
-          <p:cNvPr id="11" name="text-158">
-            <a:extLst xmlns:a="http://schemas.openxmlformats.org/drawingml/2006/main">
-              <a:ext uri="{FF2B5EF4-FFF2-40B4-BE49-F238E27FC236}">
-                <a16:creationId xmlns:a16="http://schemas.microsoft.com/office/drawing/2014/main" id="{7435B402-6E34-437A-A125-31C1F0C5EE2D}"/>
-              </a:ext>
-            </a:extLst>
-          </p:cNvPr>
-          <p:cNvSpPr>
-            <a:spLocks xmlns:a="http://schemas.openxmlformats.org/drawingml/2006/main" noGrp="1"/>
-          </p:cNvSpPr>
-          <p:nvPr/>
-        </p:nvSpPr>
-        <p:spPr>
-          <a:xfrm xmlns:a="http://schemas.openxmlformats.org/drawingml/2006/main">
-            <a:off x="609600" y="5219700"/>
-            <a:ext cx="5238750" cy="381000"/>
-          </a:xfrm>
-          <a:prstGeom xmlns:a="http://schemas.openxmlformats.org/drawingml/2006/main" prst="rect">
-            <a:avLst/>
-          </a:prstGeom>
-          <a:noFill xmlns:a="http://schemas.openxmlformats.org/drawingml/2006/main"/>
-          <a:ln xmlns:a="http://schemas.openxmlformats.org/drawingml/2006/main" w="0">
-            <a:noFill/>
-          </a:ln>
-        </p:spPr>
-        <p:txBody>
-          <a:bodyPr xmlns:a="http://schemas.openxmlformats.org/drawingml/2006/main" lIns="0" tIns="0" rIns="0" bIns="0" anchor="t">
-            <a:noAutofit/>
-          </a:bodyPr>
-          <a:lstStyle xmlns:a="http://schemas.openxmlformats.org/drawingml/2006/main">
-            <a:defPPr>
-              <a:defRPr sz="1800" b="1">
-                <a:solidFill>
-                  <a:srgbClr val="111015"/>
-                </a:solidFill>
-                <a:latin typeface="Georgia"/>
-                <a:ea typeface="Georgia"/>
-                <a:cs typeface="Georgia"/>
-              </a:defRPr>
-            </a:defPPr>
-            <a:lvl1pPr>
-              <a:defRPr sz="1800" b="1">
-                <a:solidFill>
-                  <a:srgbClr val="111015"/>
-                </a:solidFill>
-                <a:latin typeface="Georgia"/>
-                <a:ea typeface="Georgia"/>
-                <a:cs typeface="Georgia"/>
-              </a:defRPr>
-            </a:lvl1pPr>
-            <a:lvl2pPr>
-              <a:defRPr sz="1800" b="1">
-                <a:solidFill>
-                  <a:srgbClr val="111015"/>
-                </a:solidFill>
-                <a:latin typeface="Georgia"/>
-                <a:ea typeface="Georgia"/>
-                <a:cs typeface="Georgia"/>
-              </a:defRPr>
-            </a:lvl2pPr>
-            <a:lvl3pPr>
-              <a:defRPr sz="1800" b="1">
-                <a:solidFill>
-                  <a:srgbClr val="111015"/>
-                </a:solidFill>
-                <a:latin typeface="Georgia"/>
-                <a:ea typeface="Georgia"/>
-                <a:cs typeface="Georgia"/>
-              </a:defRPr>
-            </a:lvl3pPr>
-            <a:lvl4pPr>
-              <a:defRPr sz="1800" b="1">
-                <a:solidFill>
-                  <a:srgbClr val="111015"/>
-                </a:solidFill>
-                <a:latin typeface="Georgia"/>
-                <a:ea typeface="Georgia"/>
-                <a:cs typeface="Georgia"/>
-              </a:defRPr>
-            </a:lvl4pPr>
-            <a:lvl5pPr>
-              <a:defRPr sz="1800" b="1">
-                <a:solidFill>
-                  <a:srgbClr val="111015"/>
-                </a:solidFill>
-                <a:latin typeface="Georgia"/>
-                <a:ea typeface="Georgia"/>
-                <a:cs typeface="Georgia"/>
-              </a:defRPr>
-            </a:lvl5pPr>
-            <a:lvl6pPr>
-              <a:defRPr sz="1800" b="1">
-                <a:solidFill>
-                  <a:srgbClr val="111015"/>
-                </a:solidFill>
-                <a:latin typeface="Georgia"/>
-                <a:ea typeface="Georgia"/>
-                <a:cs typeface="Georgia"/>
-              </a:defRPr>
-            </a:lvl6pPr>
-            <a:lvl7pPr>
-              <a:defRPr sz="1800" b="1">
-                <a:solidFill>
-                  <a:srgbClr val="111015"/>
-                </a:solidFill>
-                <a:latin typeface="Georgia"/>
-                <a:ea typeface="Georgia"/>
-                <a:cs typeface="Georgia"/>
-              </a:defRPr>
-            </a:lvl7pPr>
-            <a:lvl8pPr>
-              <a:defRPr sz="1800" b="1">
-                <a:solidFill>
-                  <a:srgbClr val="111015"/>
-                </a:solidFill>
-                <a:latin typeface="Georgia"/>
-                <a:ea typeface="Georgia"/>
-                <a:cs typeface="Georgia"/>
-              </a:defRPr>
-            </a:lvl8pPr>
-            <a:lvl9pPr>
-              <a:defRPr sz="1800" b="1">
-                <a:solidFill>
-                  <a:srgbClr val="111015"/>
-                </a:solidFill>
-                <a:latin typeface="Georgia"/>
-                <a:ea typeface="Georgia"/>
-                <a:cs typeface="Georgia"/>
-              </a:defRPr>
-            </a:lvl9pPr>
-          </a:lstStyle>
-          <a:p xmlns:a="http://schemas.openxmlformats.org/drawingml/2006/main">
-            <a:pPr>
-              <a:defRPr sz="1800" b="1">
-                <a:solidFill>
-                  <a:srgbClr val="111015"/>
-                </a:solidFill>
-                <a:latin typeface="Georgia"/>
-                <a:ea typeface="Georgia"/>
-                <a:cs typeface="Georgia"/>
-              </a:defRPr>
-            </a:pPr>
-            <a:r>
-              <a:rPr sz="1800" b="1">
-                <a:solidFill>
-                  <a:srgbClr val="111015"/>
-                </a:solidFill>
-                <a:latin typeface="Georgia"/>
-                <a:ea typeface="Georgia"/>
-                <a:cs typeface="Georgia"/>
-              </a:rPr>
-              <a:t>Do briefing à arte final</a:t>
-            </a:r>
-          </a:p>
-        </p:txBody>
-      </p:sp>
-      <p:sp>
-        <p:nvSpPr>
-          <p:cNvPr id="12" name="text-159">
-            <a:extLst xmlns:a="http://schemas.openxmlformats.org/drawingml/2006/main">
-              <a:ext uri="{FF2B5EF4-FFF2-40B4-BE49-F238E27FC236}">
-                <a16:creationId xmlns:a16="http://schemas.microsoft.com/office/drawing/2014/main" id="{5864449F-D100-4E47-83E6-29D3200C2CBE}"/>
-              </a:ext>
-            </a:extLst>
-          </p:cNvPr>
-          <p:cNvSpPr>
-            <a:spLocks xmlns:a="http://schemas.openxmlformats.org/drawingml/2006/main" noGrp="1"/>
-          </p:cNvSpPr>
-          <p:nvPr/>
-        </p:nvSpPr>
-        <p:spPr>
-          <a:xfrm xmlns:a="http://schemas.openxmlformats.org/drawingml/2006/main">
-            <a:off x="609600" y="5629275"/>
-            <a:ext cx="5238750" cy="857250"/>
-          </a:xfrm>
-          <a:prstGeom xmlns:a="http://schemas.openxmlformats.org/drawingml/2006/main" prst="rect">
-            <a:avLst/>
-          </a:prstGeom>
-          <a:noFill xmlns:a="http://schemas.openxmlformats.org/drawingml/2006/main"/>
-          <a:ln xmlns:a="http://schemas.openxmlformats.org/drawingml/2006/main" w="0">
-            <a:noFill/>
-          </a:ln>
-        </p:spPr>
-        <p:txBody>
-          <a:bodyPr xmlns:a="http://schemas.openxmlformats.org/drawingml/2006/main" lIns="0" tIns="0" rIns="0" bIns="0" anchor="t">
-            <a:noAutofit/>
-          </a:bodyPr>
-          <a:lstStyle xmlns:a="http://schemas.openxmlformats.org/drawingml/2006/main">
-            <a:defPPr>
-              <a:defRPr sz="1575" b="0">
-                <a:solidFill>
-                  <a:srgbClr val="5F5A63"/>
-                </a:solidFill>
-                <a:latin typeface="Arial"/>
-                <a:ea typeface="Arial"/>
-                <a:cs typeface="Arial"/>
-              </a:defRPr>
-            </a:defPPr>
-            <a:lvl1pPr>
-              <a:defRPr sz="1575" b="0">
-                <a:solidFill>
-                  <a:srgbClr val="5F5A63"/>
-                </a:solidFill>
-                <a:latin typeface="Arial"/>
-                <a:ea typeface="Arial"/>
-                <a:cs typeface="Arial"/>
-              </a:defRPr>
-            </a:lvl1pPr>
-            <a:lvl2pPr>
-              <a:defRPr sz="1575" b="0">
-                <a:solidFill>
-                  <a:srgbClr val="5F5A63"/>
-                </a:solidFill>
-                <a:latin typeface="Arial"/>
-                <a:ea typeface="Arial"/>
-                <a:cs typeface="Arial"/>
-              </a:defRPr>
-            </a:lvl2pPr>
-            <a:lvl3pPr>
-              <a:defRPr sz="1575" b="0">
-                <a:solidFill>
-                  <a:srgbClr val="5F5A63"/>
-                </a:solidFill>
-                <a:latin typeface="Arial"/>
-                <a:ea typeface="Arial"/>
-                <a:cs typeface="Arial"/>
-              </a:defRPr>
-            </a:lvl3pPr>
-            <a:lvl4pPr>
-              <a:defRPr sz="1575" b="0">
-                <a:solidFill>
-                  <a:srgbClr val="5F5A63"/>
-                </a:solidFill>
-                <a:latin typeface="Arial"/>
-                <a:ea typeface="Arial"/>
-                <a:cs typeface="Arial"/>
-              </a:defRPr>
-            </a:lvl4pPr>
-            <a:lvl5pPr>
-              <a:defRPr sz="1575" b="0">
-                <a:solidFill>
-                  <a:srgbClr val="5F5A63"/>
-                </a:solidFill>
-                <a:latin typeface="Arial"/>
-                <a:ea typeface="Arial"/>
-                <a:cs typeface="Arial"/>
-              </a:defRPr>
-            </a:lvl5pPr>
-            <a:lvl6pPr>
-              <a:defRPr sz="1575" b="0">
-                <a:solidFill>
-                  <a:srgbClr val="5F5A63"/>
-                </a:solidFill>
-                <a:latin typeface="Arial"/>
-                <a:ea typeface="Arial"/>
-                <a:cs typeface="Arial"/>
-              </a:defRPr>
-            </a:lvl6pPr>
-            <a:lvl7pPr>
-              <a:defRPr sz="1575" b="0">
-                <a:solidFill>
-                  <a:srgbClr val="5F5A63"/>
-                </a:solidFill>
-                <a:latin typeface="Arial"/>
-                <a:ea typeface="Arial"/>
-                <a:cs typeface="Arial"/>
-              </a:defRPr>
-            </a:lvl7pPr>
-            <a:lvl8pPr>
-              <a:defRPr sz="1575" b="0">
-                <a:solidFill>
-                  <a:srgbClr val="5F5A63"/>
-                </a:solidFill>
-                <a:latin typeface="Arial"/>
-                <a:ea typeface="Arial"/>
-                <a:cs typeface="Arial"/>
-              </a:defRPr>
-            </a:lvl8pPr>
-            <a:lvl9pPr>
-              <a:defRPr sz="1575" b="0">
-                <a:solidFill>
-                  <a:srgbClr val="5F5A63"/>
-                </a:solidFill>
-                <a:latin typeface="Arial"/>
-                <a:ea typeface="Arial"/>
-                <a:cs typeface="Arial"/>
-              </a:defRPr>
-            </a:lvl9pPr>
-          </a:lstStyle>
-          <a:p xmlns:a="http://schemas.openxmlformats.org/drawingml/2006/main">
-            <a:pPr>
-              <a:defRPr sz="1575" b="0">
-                <a:solidFill>
-                  <a:srgbClr val="5F5A63"/>
-                </a:solidFill>
-                <a:latin typeface="Arial"/>
-                <a:ea typeface="Arial"/>
-                <a:cs typeface="Arial"/>
-              </a:defRPr>
-            </a:pPr>
-            <a:r>
-              <a:rPr sz="1575" b="0">
-                <a:solidFill>
-                  <a:srgbClr val="5F5A63"/>
-                </a:solidFill>
-                <a:latin typeface="Arial"/>
-                <a:ea typeface="Arial"/>
-                <a:cs typeface="Arial"/>
-              </a:rPr>
-              <a:t>Personagens autorais, criaturas e reference sheets completos, com diferentes ângulos, expressões, paleta de cores, detalhes de vestuário e itens.</a:t>
-            </a:r>
-          </a:p>
-        </p:txBody>
-      </p:sp>
-      <p:sp>
-        <p:nvSpPr>
-          <p:cNvPr id="13" name="text-160">
-            <a:extLst xmlns:a="http://schemas.openxmlformats.org/drawingml/2006/main">
-              <a:ext uri="{FF2B5EF4-FFF2-40B4-BE49-F238E27FC236}">
-                <a16:creationId xmlns:a16="http://schemas.microsoft.com/office/drawing/2014/main" id="{D3A82C3B-1B2A-4469-8723-3830624DC353}"/>
-              </a:ext>
-            </a:extLst>
-          </p:cNvPr>
-          <p:cNvSpPr>
-            <a:spLocks xmlns:a="http://schemas.openxmlformats.org/drawingml/2006/main" noGrp="1"/>
-          </p:cNvSpPr>
-          <p:nvPr/>
-        </p:nvSpPr>
-        <p:spPr>
-          <a:xfrm xmlns:a="http://schemas.openxmlformats.org/drawingml/2006/main">
-            <a:off x="6286500" y="3381375"/>
-            <a:ext cx="5238750" cy="381000"/>
-          </a:xfrm>
-          <a:prstGeom xmlns:a="http://schemas.openxmlformats.org/drawingml/2006/main" prst="rect">
-            <a:avLst/>
-          </a:prstGeom>
-          <a:noFill xmlns:a="http://schemas.openxmlformats.org/drawingml/2006/main"/>
-          <a:ln xmlns:a="http://schemas.openxmlformats.org/drawingml/2006/main" w="0">
-            <a:noFill/>
-          </a:ln>
-        </p:spPr>
-        <p:txBody>
-          <a:bodyPr xmlns:a="http://schemas.openxmlformats.org/drawingml/2006/main" lIns="0" tIns="0" rIns="0" bIns="0" anchor="t">
-            <a:noAutofit/>
-          </a:bodyPr>
-          <a:lstStyle xmlns:a="http://schemas.openxmlformats.org/drawingml/2006/main">
-            <a:defPPr>
-              <a:defRPr sz="1800" b="1">
-                <a:solidFill>
-                  <a:srgbClr val="111015"/>
-                </a:solidFill>
-                <a:latin typeface="Georgia"/>
-                <a:ea typeface="Georgia"/>
-                <a:cs typeface="Georgia"/>
-              </a:defRPr>
-            </a:defPPr>
-            <a:lvl1pPr>
-              <a:defRPr sz="1800" b="1">
-                <a:solidFill>
-                  <a:srgbClr val="111015"/>
-                </a:solidFill>
-                <a:latin typeface="Georgia"/>
-                <a:ea typeface="Georgia"/>
-                <a:cs typeface="Georgia"/>
-              </a:defRPr>
-            </a:lvl1pPr>
-            <a:lvl2pPr>
-              <a:defRPr sz="1800" b="1">
-                <a:solidFill>
-                  <a:srgbClr val="111015"/>
-                </a:solidFill>
-                <a:latin typeface="Georgia"/>
-                <a:ea typeface="Georgia"/>
-                <a:cs typeface="Georgia"/>
-              </a:defRPr>
-            </a:lvl2pPr>
-            <a:lvl3pPr>
-              <a:defRPr sz="1800" b="1">
-                <a:solidFill>
-                  <a:srgbClr val="111015"/>
-                </a:solidFill>
-                <a:latin typeface="Georgia"/>
-                <a:ea typeface="Georgia"/>
-                <a:cs typeface="Georgia"/>
-              </a:defRPr>
-            </a:lvl3pPr>
-            <a:lvl4pPr>
-              <a:defRPr sz="1800" b="1">
-                <a:solidFill>
-                  <a:srgbClr val="111015"/>
-                </a:solidFill>
-                <a:latin typeface="Georgia"/>
-                <a:ea typeface="Georgia"/>
-                <a:cs typeface="Georgia"/>
-              </a:defRPr>
-            </a:lvl4pPr>
-            <a:lvl5pPr>
-              <a:defRPr sz="1800" b="1">
-                <a:solidFill>
-                  <a:srgbClr val="111015"/>
-                </a:solidFill>
-                <a:latin typeface="Georgia"/>
-                <a:ea typeface="Georgia"/>
-                <a:cs typeface="Georgia"/>
-              </a:defRPr>
-            </a:lvl5pPr>
-            <a:lvl6pPr>
-              <a:defRPr sz="1800" b="1">
-                <a:solidFill>
-                  <a:srgbClr val="111015"/>
-                </a:solidFill>
-                <a:latin typeface="Georgia"/>
-                <a:ea typeface="Georgia"/>
-                <a:cs typeface="Georgia"/>
-              </a:defRPr>
-            </a:lvl6pPr>
-            <a:lvl7pPr>
-              <a:defRPr sz="1800" b="1">
-                <a:solidFill>
-                  <a:srgbClr val="111015"/>
-                </a:solidFill>
-                <a:latin typeface="Georgia"/>
-                <a:ea typeface="Georgia"/>
-                <a:cs typeface="Georgia"/>
-              </a:defRPr>
-            </a:lvl7pPr>
-            <a:lvl8pPr>
-              <a:defRPr sz="1800" b="1">
-                <a:solidFill>
-                  <a:srgbClr val="111015"/>
-                </a:solidFill>
-                <a:latin typeface="Georgia"/>
-                <a:ea typeface="Georgia"/>
-                <a:cs typeface="Georgia"/>
-              </a:defRPr>
-            </a:lvl8pPr>
-            <a:lvl9pPr>
-              <a:defRPr sz="1800" b="1">
-                <a:solidFill>
-                  <a:srgbClr val="111015"/>
-                </a:solidFill>
-                <a:latin typeface="Georgia"/>
-                <a:ea typeface="Georgia"/>
-                <a:cs typeface="Georgia"/>
-              </a:defRPr>
-            </a:lvl9pPr>
-          </a:lstStyle>
-          <a:p xmlns:a="http://schemas.openxmlformats.org/drawingml/2006/main">
-            <a:pPr>
-              <a:defRPr sz="1800" b="1">
-                <a:solidFill>
-                  <a:srgbClr val="111015"/>
-                </a:solidFill>
-                <a:latin typeface="Georgia"/>
-                <a:ea typeface="Georgia"/>
-                <a:cs typeface="Georgia"/>
-              </a:defRPr>
-            </a:pPr>
-            <a:r>
-              <a:rPr sz="1800" b="1">
-                <a:solidFill>
-                  <a:srgbClr val="111015"/>
-                </a:solidFill>
-                <a:latin typeface="Georgia"/>
-                <a:ea typeface="Georgia"/>
-                <a:cs typeface="Georgia"/>
-              </a:rPr>
-              <a:t>Reviews &amp; testes de produtos</a:t>
-            </a:r>
-          </a:p>
-        </p:txBody>
-      </p:sp>
-      <p:sp>
-        <p:nvSpPr>
-          <p:cNvPr id="14" name="text-161">
-            <a:extLst xmlns:a="http://schemas.openxmlformats.org/drawingml/2006/main">
-              <a:ext uri="{FF2B5EF4-FFF2-40B4-BE49-F238E27FC236}">
-                <a16:creationId xmlns:a16="http://schemas.microsoft.com/office/drawing/2014/main" id="{D198328B-7C78-4CC7-A6F8-E44A7B089EE2}"/>
-              </a:ext>
-            </a:extLst>
-          </p:cNvPr>
-          <p:cNvSpPr>
-            <a:spLocks xmlns:a="http://schemas.openxmlformats.org/drawingml/2006/main" noGrp="1"/>
-          </p:cNvSpPr>
-          <p:nvPr/>
-        </p:nvSpPr>
-        <p:spPr>
-          <a:xfrm xmlns:a="http://schemas.openxmlformats.org/drawingml/2006/main">
-            <a:off x="6286500" y="3790950"/>
-            <a:ext cx="5238750" cy="857250"/>
-          </a:xfrm>
-          <a:prstGeom xmlns:a="http://schemas.openxmlformats.org/drawingml/2006/main" prst="rect">
-            <a:avLst/>
-          </a:prstGeom>
-          <a:noFill xmlns:a="http://schemas.openxmlformats.org/drawingml/2006/main"/>
-          <a:ln xmlns:a="http://schemas.openxmlformats.org/drawingml/2006/main" w="0">
-            <a:noFill/>
-          </a:ln>
-        </p:spPr>
-        <p:txBody>
-          <a:bodyPr xmlns:a="http://schemas.openxmlformats.org/drawingml/2006/main" lIns="0" tIns="0" rIns="0" bIns="0" anchor="t">
-            <a:noAutofit/>
-          </a:bodyPr>
-          <a:lstStyle xmlns:a="http://schemas.openxmlformats.org/drawingml/2006/main">
-            <a:defPPr>
-              <a:defRPr sz="1575" b="0">
-                <a:solidFill>
-                  <a:srgbClr val="5F5A63"/>
-                </a:solidFill>
-                <a:latin typeface="Arial"/>
-                <a:ea typeface="Arial"/>
-                <a:cs typeface="Arial"/>
-              </a:defRPr>
-            </a:defPPr>
-            <a:lvl1pPr>
-              <a:defRPr sz="1575" b="0">
-                <a:solidFill>
-                  <a:srgbClr val="5F5A63"/>
-                </a:solidFill>
-                <a:latin typeface="Arial"/>
-                <a:ea typeface="Arial"/>
-                <a:cs typeface="Arial"/>
-              </a:defRPr>
-            </a:lvl1pPr>
-            <a:lvl2pPr>
-              <a:defRPr sz="1575" b="0">
-                <a:solidFill>
-                  <a:srgbClr val="5F5A63"/>
-                </a:solidFill>
-                <a:latin typeface="Arial"/>
-                <a:ea typeface="Arial"/>
-                <a:cs typeface="Arial"/>
-              </a:defRPr>
-            </a:lvl2pPr>
-            <a:lvl3pPr>
-              <a:defRPr sz="1575" b="0">
-                <a:solidFill>
-                  <a:srgbClr val="5F5A63"/>
-                </a:solidFill>
-                <a:latin typeface="Arial"/>
-                <a:ea typeface="Arial"/>
-                <a:cs typeface="Arial"/>
-              </a:defRPr>
-            </a:lvl3pPr>
-            <a:lvl4pPr>
-              <a:defRPr sz="1575" b="0">
-                <a:solidFill>
-                  <a:srgbClr val="5F5A63"/>
-                </a:solidFill>
-                <a:latin typeface="Arial"/>
-                <a:ea typeface="Arial"/>
-                <a:cs typeface="Arial"/>
-              </a:defRPr>
-            </a:lvl4pPr>
-            <a:lvl5pPr>
-              <a:defRPr sz="1575" b="0">
-                <a:solidFill>
-                  <a:srgbClr val="5F5A63"/>
-                </a:solidFill>
-                <a:latin typeface="Arial"/>
-                <a:ea typeface="Arial"/>
-                <a:cs typeface="Arial"/>
-              </a:defRPr>
-            </a:lvl5pPr>
-            <a:lvl6pPr>
-              <a:defRPr sz="1575" b="0">
-                <a:solidFill>
-                  <a:srgbClr val="5F5A63"/>
-                </a:solidFill>
-                <a:latin typeface="Arial"/>
-                <a:ea typeface="Arial"/>
-                <a:cs typeface="Arial"/>
-              </a:defRPr>
-            </a:lvl6pPr>
-            <a:lvl7pPr>
-              <a:defRPr sz="1575" b="0">
-                <a:solidFill>
-                  <a:srgbClr val="5F5A63"/>
-                </a:solidFill>
-                <a:latin typeface="Arial"/>
-                <a:ea typeface="Arial"/>
-                <a:cs typeface="Arial"/>
-              </a:defRPr>
-            </a:lvl7pPr>
-            <a:lvl8pPr>
-              <a:defRPr sz="1575" b="0">
-                <a:solidFill>
-                  <a:srgbClr val="5F5A63"/>
-                </a:solidFill>
-                <a:latin typeface="Arial"/>
-                <a:ea typeface="Arial"/>
-                <a:cs typeface="Arial"/>
-              </a:defRPr>
-            </a:lvl8pPr>
-            <a:lvl9pPr>
-              <a:defRPr sz="1575" b="0">
-                <a:solidFill>
-                  <a:srgbClr val="5F5A63"/>
-                </a:solidFill>
-                <a:latin typeface="Arial"/>
-                <a:ea typeface="Arial"/>
-                <a:cs typeface="Arial"/>
-              </a:defRPr>
-            </a:lvl9pPr>
-          </a:lstStyle>
-          <a:p xmlns:a="http://schemas.openxmlformats.org/drawingml/2006/main">
-            <a:pPr>
-              <a:defRPr sz="1575" b="0">
-                <a:solidFill>
-                  <a:srgbClr val="5F5A63"/>
-                </a:solidFill>
-                <a:latin typeface="Arial"/>
-                <a:ea typeface="Arial"/>
-                <a:cs typeface="Arial"/>
-              </a:defRPr>
-            </a:pPr>
-            <a:r>
-              <a:rPr sz="1575" b="0">
-                <a:solidFill>
-                  <a:srgbClr val="5F5A63"/>
-                </a:solidFill>
-                <a:latin typeface="Arial"/>
-                <a:ea typeface="Arial"/>
-                <a:cs typeface="Arial"/>
-              </a:rPr>
-              <a:t>Avaliações de ferramentas e materiais para arte digital e tradicional, incluindo mesas digitalizadoras, tablets, canetas digitais, softwares, tintas, pincéis e outros recursos artísticos, explorando qualidade, desempenho e experiência de uso.</a:t>
-            </a:r>
-          </a:p>
-        </p:txBody>
-      </p:sp>
-      <p:sp>
-        <p:nvSpPr>
-          <p:cNvPr id="15" name="text-162">
-            <a:extLst xmlns:a="http://schemas.openxmlformats.org/drawingml/2006/main">
-              <a:ext uri="{FF2B5EF4-FFF2-40B4-BE49-F238E27FC236}">
-                <a16:creationId xmlns:a16="http://schemas.microsoft.com/office/drawing/2014/main" id="{B24B103D-28BF-43E0-A3E4-5F4C84444BCF}"/>
-              </a:ext>
-            </a:extLst>
-          </p:cNvPr>
-          <p:cNvSpPr>
-            <a:spLocks xmlns:a="http://schemas.openxmlformats.org/drawingml/2006/main" noGrp="1"/>
-          </p:cNvSpPr>
-          <p:nvPr/>
-        </p:nvSpPr>
-        <p:spPr>
-          <a:xfrm xmlns:a="http://schemas.openxmlformats.org/drawingml/2006/main">
-            <a:off x="6286500" y="5238750"/>
-            <a:ext cx="5238750" cy="381000"/>
-          </a:xfrm>
-          <a:prstGeom xmlns:a="http://schemas.openxmlformats.org/drawingml/2006/main" prst="rect">
-            <a:avLst/>
-          </a:prstGeom>
-          <a:noFill xmlns:a="http://schemas.openxmlformats.org/drawingml/2006/main"/>
-          <a:ln xmlns:a="http://schemas.openxmlformats.org/drawingml/2006/main" w="0">
-            <a:noFill/>
-          </a:ln>
-        </p:spPr>
-        <p:txBody>
-          <a:bodyPr xmlns:a="http://schemas.openxmlformats.org/drawingml/2006/main" lIns="0" tIns="0" rIns="0" bIns="0" anchor="t">
-            <a:noAutofit/>
-          </a:bodyPr>
-          <a:lstStyle xmlns:a="http://schemas.openxmlformats.org/drawingml/2006/main">
-            <a:defPPr>
-              <a:defRPr sz="1800" b="1">
-                <a:solidFill>
-                  <a:srgbClr val="111015"/>
-                </a:solidFill>
-                <a:latin typeface="Georgia"/>
-                <a:ea typeface="Georgia"/>
-                <a:cs typeface="Georgia"/>
-              </a:defRPr>
-            </a:defPPr>
-            <a:lvl1pPr>
-              <a:defRPr sz="1800" b="1">
-                <a:solidFill>
-                  <a:srgbClr val="111015"/>
-                </a:solidFill>
-                <a:latin typeface="Georgia"/>
-                <a:ea typeface="Georgia"/>
-                <a:cs typeface="Georgia"/>
-              </a:defRPr>
-            </a:lvl1pPr>
-            <a:lvl2pPr>
-              <a:defRPr sz="1800" b="1">
-                <a:solidFill>
-                  <a:srgbClr val="111015"/>
-                </a:solidFill>
-                <a:latin typeface="Georgia"/>
-                <a:ea typeface="Georgia"/>
-                <a:cs typeface="Georgia"/>
-              </a:defRPr>
-            </a:lvl2pPr>
-            <a:lvl3pPr>
-              <a:defRPr sz="1800" b="1">
-                <a:solidFill>
-                  <a:srgbClr val="111015"/>
-                </a:solidFill>
-                <a:latin typeface="Georgia"/>
-                <a:ea typeface="Georgia"/>
-                <a:cs typeface="Georgia"/>
-              </a:defRPr>
-            </a:lvl3pPr>
-            <a:lvl4pPr>
-              <a:defRPr sz="1800" b="1">
-                <a:solidFill>
-                  <a:srgbClr val="111015"/>
-                </a:solidFill>
-                <a:latin typeface="Georgia"/>
-                <a:ea typeface="Georgia"/>
-                <a:cs typeface="Georgia"/>
-              </a:defRPr>
-            </a:lvl4pPr>
-            <a:lvl5pPr>
-              <a:defRPr sz="1800" b="1">
-                <a:solidFill>
-                  <a:srgbClr val="111015"/>
-                </a:solidFill>
-                <a:latin typeface="Georgia"/>
-                <a:ea typeface="Georgia"/>
-                <a:cs typeface="Georgia"/>
-              </a:defRPr>
-            </a:lvl5pPr>
-            <a:lvl6pPr>
-              <a:defRPr sz="1800" b="1">
-                <a:solidFill>
-                  <a:srgbClr val="111015"/>
-                </a:solidFill>
-                <a:latin typeface="Georgia"/>
-                <a:ea typeface="Georgia"/>
-                <a:cs typeface="Georgia"/>
-              </a:defRPr>
-            </a:lvl6pPr>
-            <a:lvl7pPr>
-              <a:defRPr sz="1800" b="1">
-                <a:solidFill>
-                  <a:srgbClr val="111015"/>
-                </a:solidFill>
-                <a:latin typeface="Georgia"/>
-                <a:ea typeface="Georgia"/>
-                <a:cs typeface="Georgia"/>
-              </a:defRPr>
-            </a:lvl7pPr>
-            <a:lvl8pPr>
-              <a:defRPr sz="1800" b="1">
-                <a:solidFill>
-                  <a:srgbClr val="111015"/>
-                </a:solidFill>
-                <a:latin typeface="Georgia"/>
-                <a:ea typeface="Georgia"/>
-                <a:cs typeface="Georgia"/>
-              </a:defRPr>
-            </a:lvl8pPr>
-            <a:lvl9pPr>
-              <a:defRPr sz="1800" b="1">
-                <a:solidFill>
-                  <a:srgbClr val="111015"/>
-                </a:solidFill>
-                <a:latin typeface="Georgia"/>
-                <a:ea typeface="Georgia"/>
-                <a:cs typeface="Georgia"/>
-              </a:defRPr>
-            </a:lvl9pPr>
-          </a:lstStyle>
-          <a:p xmlns:a="http://schemas.openxmlformats.org/drawingml/2006/main">
-            <a:pPr>
-              <a:defRPr sz="1800" b="1">
-                <a:solidFill>
-                  <a:srgbClr val="111015"/>
-                </a:solidFill>
-                <a:latin typeface="Georgia"/>
-                <a:ea typeface="Georgia"/>
-                <a:cs typeface="Georgia"/>
-              </a:defRPr>
-            </a:pPr>
-            <a:r>
-              <a:rPr sz="1800" b="1">
-                <a:solidFill>
-                  <a:srgbClr val="111015"/>
-                </a:solidFill>
-                <a:latin typeface="Georgia"/>
-                <a:ea typeface="Georgia"/>
-                <a:cs typeface="Georgia"/>
-              </a:rPr>
-              <a:t>Conteúdo artístico &amp; demonstrações</a:t>
-            </a:r>
-          </a:p>
-        </p:txBody>
-      </p:sp>
-      <p:sp>
-        <p:nvSpPr>
-          <p:cNvPr id="16" name="text-163">
-            <a:extLst xmlns:a="http://schemas.openxmlformats.org/drawingml/2006/main">
-              <a:ext uri="{FF2B5EF4-FFF2-40B4-BE49-F238E27FC236}">
-                <a16:creationId xmlns:a16="http://schemas.microsoft.com/office/drawing/2014/main" id="{5E59186B-FC06-450A-8B41-33A3A19EB37D}"/>
-              </a:ext>
-            </a:extLst>
-          </p:cNvPr>
-          <p:cNvSpPr>
-            <a:spLocks xmlns:a="http://schemas.openxmlformats.org/drawingml/2006/main" noGrp="1"/>
-          </p:cNvSpPr>
-          <p:nvPr/>
-        </p:nvSpPr>
-        <p:spPr>
-          <a:xfrm xmlns:a="http://schemas.openxmlformats.org/drawingml/2006/main">
-            <a:off x="6286500" y="5648325"/>
-            <a:ext cx="5238750" cy="857250"/>
-          </a:xfrm>
-          <a:prstGeom xmlns:a="http://schemas.openxmlformats.org/drawingml/2006/main" prst="rect">
-            <a:avLst/>
-          </a:prstGeom>
-          <a:noFill xmlns:a="http://schemas.openxmlformats.org/drawingml/2006/main"/>
-          <a:ln xmlns:a="http://schemas.openxmlformats.org/drawingml/2006/main" w="0">
-            <a:noFill/>
-          </a:ln>
-        </p:spPr>
-        <p:txBody>
-          <a:bodyPr xmlns:a="http://schemas.openxmlformats.org/drawingml/2006/main" lIns="0" tIns="0" rIns="0" bIns="0" anchor="t">
-            <a:noAutofit/>
-          </a:bodyPr>
-          <a:lstStyle xmlns:a="http://schemas.openxmlformats.org/drawingml/2006/main">
-            <a:defPPr>
-              <a:defRPr sz="1575" b="0">
-                <a:solidFill>
-                  <a:srgbClr val="5F5A63"/>
-                </a:solidFill>
-                <a:latin typeface="Arial"/>
-                <a:ea typeface="Arial"/>
-                <a:cs typeface="Arial"/>
-              </a:defRPr>
-            </a:defPPr>
-            <a:lvl1pPr>
-              <a:defRPr sz="1575" b="0">
-                <a:solidFill>
-                  <a:srgbClr val="5F5A63"/>
-                </a:solidFill>
-                <a:latin typeface="Arial"/>
-                <a:ea typeface="Arial"/>
-                <a:cs typeface="Arial"/>
-              </a:defRPr>
-            </a:lvl1pPr>
-            <a:lvl2pPr>
-              <a:defRPr sz="1575" b="0">
-                <a:solidFill>
-                  <a:srgbClr val="5F5A63"/>
-                </a:solidFill>
-                <a:latin typeface="Arial"/>
-                <a:ea typeface="Arial"/>
-                <a:cs typeface="Arial"/>
-              </a:defRPr>
-            </a:lvl2pPr>
-            <a:lvl3pPr>
-              <a:defRPr sz="1575" b="0">
-                <a:solidFill>
-                  <a:srgbClr val="5F5A63"/>
-                </a:solidFill>
-                <a:latin typeface="Arial"/>
-                <a:ea typeface="Arial"/>
-                <a:cs typeface="Arial"/>
-              </a:defRPr>
-            </a:lvl3pPr>
-            <a:lvl4pPr>
-              <a:defRPr sz="1575" b="0">
-                <a:solidFill>
-                  <a:srgbClr val="5F5A63"/>
-                </a:solidFill>
-                <a:latin typeface="Arial"/>
-                <a:ea typeface="Arial"/>
-                <a:cs typeface="Arial"/>
-              </a:defRPr>
-            </a:lvl4pPr>
-            <a:lvl5pPr>
-              <a:defRPr sz="1575" b="0">
-                <a:solidFill>
-                  <a:srgbClr val="5F5A63"/>
-                </a:solidFill>
-                <a:latin typeface="Arial"/>
-                <a:ea typeface="Arial"/>
-                <a:cs typeface="Arial"/>
-              </a:defRPr>
-            </a:lvl5pPr>
-            <a:lvl6pPr>
-              <a:defRPr sz="1575" b="0">
-                <a:solidFill>
-                  <a:srgbClr val="5F5A63"/>
-                </a:solidFill>
-                <a:latin typeface="Arial"/>
-                <a:ea typeface="Arial"/>
-                <a:cs typeface="Arial"/>
-              </a:defRPr>
-            </a:lvl6pPr>
-            <a:lvl7pPr>
-              <a:defRPr sz="1575" b="0">
-                <a:solidFill>
-                  <a:srgbClr val="5F5A63"/>
-                </a:solidFill>
-                <a:latin typeface="Arial"/>
-                <a:ea typeface="Arial"/>
-                <a:cs typeface="Arial"/>
-              </a:defRPr>
-            </a:lvl7pPr>
-            <a:lvl8pPr>
-              <a:defRPr sz="1575" b="0">
-                <a:solidFill>
-                  <a:srgbClr val="5F5A63"/>
-                </a:solidFill>
-                <a:latin typeface="Arial"/>
-                <a:ea typeface="Arial"/>
-                <a:cs typeface="Arial"/>
-              </a:defRPr>
-            </a:lvl8pPr>
-            <a:lvl9pPr>
-              <a:defRPr sz="1575" b="0">
-                <a:solidFill>
-                  <a:srgbClr val="5F5A63"/>
-                </a:solidFill>
-                <a:latin typeface="Arial"/>
-                <a:ea typeface="Arial"/>
-                <a:cs typeface="Arial"/>
-              </a:defRPr>
-            </a:lvl9pPr>
-          </a:lstStyle>
-          <a:p xmlns:a="http://schemas.openxmlformats.org/drawingml/2006/main">
-            <a:pPr>
-              <a:defRPr sz="1575" b="0">
-                <a:solidFill>
-                  <a:srgbClr val="5F5A63"/>
-                </a:solidFill>
-                <a:latin typeface="Arial"/>
-                <a:ea typeface="Arial"/>
-                <a:cs typeface="Arial"/>
-              </a:defRPr>
-            </a:pPr>
-            <a:r>
-              <a:rPr sz="1575" b="0">
-                <a:solidFill>
-                  <a:srgbClr val="5F5A63"/>
-                </a:solidFill>
-                <a:latin typeface="Arial"/>
-                <a:ea typeface="Arial"/>
-                <a:cs typeface="Arial"/>
-              </a:rPr>
-              <a:t>Produção de ilustrações, tutoriais e demonstrações com produtos digitais e tradicionais, destacando suas aplicações criativas em conteúdos para divulgação.</a:t>
+              <a:t>Conteúdos pensados para conectar a marca à comunidade criativa. Avaliações de ferramentas e materiais para artes digitais e tradicionais, produção de ilustrações, tutoriais e demonstrações, destacando suas aplicações em conteúdos branding.</a:t>
             </a:r>
           </a:p>
         </p:txBody>
@@ -10551,7 +9287,7 @@
     </p:spTree>
     <p:extLst>
       <p:ext uri="{BB962C8B-B14F-4D97-AF65-F5344CB8AC3E}">
-        <p14:creationId xmlns:p14="http://schemas.microsoft.com/office/powerpoint/2010/main" val="629098828"/>
+        <p14:creationId xmlns:p14="http://schemas.microsoft.com/office/powerpoint/2010/main" val="476571668"/>
       </p:ext>
     </p:extLst>
   </p:cSld>
@@ -10579,10 +9315,10 @@
       </p:grpSpPr>
       <p:sp>
         <p:nvSpPr>
-          <p:cNvPr id="12" name="text-164">
+          <p:cNvPr id="12" name="text-148">
             <a:extLst xmlns:a="http://schemas.openxmlformats.org/drawingml/2006/main">
               <a:ext uri="{FF2B5EF4-FFF2-40B4-BE49-F238E27FC236}">
-                <a16:creationId xmlns:a16="http://schemas.microsoft.com/office/drawing/2014/main" id="{709DC691-7EB5-4148-ADA5-D1339742DD39}"/>
+                <a16:creationId xmlns:a16="http://schemas.microsoft.com/office/drawing/2014/main" id="{D8589FDB-061B-4E2C-9C84-15C04C82F186}"/>
               </a:ext>
             </a:extLst>
           </p:cNvPr>
@@ -10737,10 +9473,10 @@
       </p:sp>
       <p:sp>
         <p:nvSpPr>
-          <p:cNvPr id="2" name="text-165">
+          <p:cNvPr id="2" name="text-149">
             <a:extLst xmlns:a="http://schemas.openxmlformats.org/drawingml/2006/main">
               <a:ext uri="{FF2B5EF4-FFF2-40B4-BE49-F238E27FC236}">
-                <a16:creationId xmlns:a16="http://schemas.microsoft.com/office/drawing/2014/main" id="{88CC9CF3-E13B-43D5-9B50-AF3BE0C51DE7}"/>
+                <a16:creationId xmlns:a16="http://schemas.microsoft.com/office/drawing/2014/main" id="{3A1307C1-C299-4F69-8E10-0F4E9F37C964}"/>
               </a:ext>
             </a:extLst>
           </p:cNvPr>
@@ -10895,10 +9631,10 @@
       </p:sp>
       <p:sp>
         <p:nvSpPr>
-          <p:cNvPr id="3" name="text-166">
+          <p:cNvPr id="3" name="text-150">
             <a:extLst xmlns:a="http://schemas.openxmlformats.org/drawingml/2006/main">
               <a:ext uri="{FF2B5EF4-FFF2-40B4-BE49-F238E27FC236}">
-                <a16:creationId xmlns:a16="http://schemas.microsoft.com/office/drawing/2014/main" id="{4D6B2D48-AC17-4587-80DE-A321B81CE424}"/>
+                <a16:creationId xmlns:a16="http://schemas.microsoft.com/office/drawing/2014/main" id="{D44275DE-CF93-467B-8A0B-592B7EBA34F2}"/>
               </a:ext>
             </a:extLst>
           </p:cNvPr>
@@ -11053,10 +9789,10 @@
       </p:sp>
       <p:sp>
         <p:nvSpPr>
-          <p:cNvPr id="4" name="text-167">
+          <p:cNvPr id="4" name="text-151">
             <a:extLst xmlns:a="http://schemas.openxmlformats.org/drawingml/2006/main">
               <a:ext uri="{FF2B5EF4-FFF2-40B4-BE49-F238E27FC236}">
-                <a16:creationId xmlns:a16="http://schemas.microsoft.com/office/drawing/2014/main" id="{9367B8D5-F299-47A2-B46D-72DE4E0AB640}"/>
+                <a16:creationId xmlns:a16="http://schemas.microsoft.com/office/drawing/2014/main" id="{0EF7A302-34FD-456F-A6D4-D00230F1EB78}"/>
               </a:ext>
             </a:extLst>
           </p:cNvPr>
@@ -11211,10 +9947,10 @@
       </p:sp>
       <p:sp>
         <p:nvSpPr>
-          <p:cNvPr id="5" name="text-168">
+          <p:cNvPr id="5" name="text-152">
             <a:extLst xmlns:a="http://schemas.openxmlformats.org/drawingml/2006/main">
               <a:ext uri="{FF2B5EF4-FFF2-40B4-BE49-F238E27FC236}">
-                <a16:creationId xmlns:a16="http://schemas.microsoft.com/office/drawing/2014/main" id="{9D7BC7B1-E0C8-45E1-8BDE-3420E3214BA1}"/>
+                <a16:creationId xmlns:a16="http://schemas.microsoft.com/office/drawing/2014/main" id="{F6B91AFF-2BDB-49A5-81CD-701103F4073F}"/>
               </a:ext>
             </a:extLst>
           </p:cNvPr>
@@ -11369,10 +10105,10 @@
       </p:sp>
       <p:sp>
         <p:nvSpPr>
-          <p:cNvPr id="6" name="text-169">
+          <p:cNvPr id="6" name="text-153">
             <a:extLst xmlns:a="http://schemas.openxmlformats.org/drawingml/2006/main">
               <a:ext uri="{FF2B5EF4-FFF2-40B4-BE49-F238E27FC236}">
-                <a16:creationId xmlns:a16="http://schemas.microsoft.com/office/drawing/2014/main" id="{F0503216-C05A-413B-BF51-6216B90FC2D7}"/>
+                <a16:creationId xmlns:a16="http://schemas.microsoft.com/office/drawing/2014/main" id="{88BB3165-9DB7-4091-AAB3-440DD50E8F88}"/>
               </a:ext>
             </a:extLst>
           </p:cNvPr>
@@ -11527,10 +10263,10 @@
       </p:sp>
       <p:sp>
         <p:nvSpPr>
-          <p:cNvPr id="7" name="text-170">
+          <p:cNvPr id="7" name="text-154">
             <a:extLst xmlns:a="http://schemas.openxmlformats.org/drawingml/2006/main">
               <a:ext uri="{FF2B5EF4-FFF2-40B4-BE49-F238E27FC236}">
-                <a16:creationId xmlns:a16="http://schemas.microsoft.com/office/drawing/2014/main" id="{93E1512C-DF0E-4A75-9E02-5B7F527CF658}"/>
+                <a16:creationId xmlns:a16="http://schemas.microsoft.com/office/drawing/2014/main" id="{AC6BF74E-E48A-401E-87AA-066BF38B07E9}"/>
               </a:ext>
             </a:extLst>
           </p:cNvPr>
@@ -11685,10 +10421,10 @@
       </p:sp>
       <p:sp>
         <p:nvSpPr>
-          <p:cNvPr id="8" name="text-171">
+          <p:cNvPr id="8" name="text-155">
             <a:extLst xmlns:a="http://schemas.openxmlformats.org/drawingml/2006/main">
               <a:ext uri="{FF2B5EF4-FFF2-40B4-BE49-F238E27FC236}">
-                <a16:creationId xmlns:a16="http://schemas.microsoft.com/office/drawing/2014/main" id="{51BE238F-ABD2-40CB-95A2-67AAE1CDBA72}"/>
+                <a16:creationId xmlns:a16="http://schemas.microsoft.com/office/drawing/2014/main" id="{3E4EF484-7F4D-4F47-A736-576515B2938D}"/>
               </a:ext>
             </a:extLst>
           </p:cNvPr>
@@ -11835,7 +10571,7 @@
                 <a:latin typeface="Arial"/>
                 <a:ea typeface="Arial"/>
                 <a:cs typeface="Arial"/>
-                <a:hlinkClick xmlns:r="http://schemas.openxmlformats.org/officeDocument/2006/relationships" r:id="Rdc7cdd40b8864b06"/>
+                <a:hlinkClick xmlns:r="http://schemas.openxmlformats.org/officeDocument/2006/relationships" r:id="Ra8f806ec1307408a"/>
               </a:rPr>
               <a:t>patreon.com/giums</a:t>
             </a:r>
@@ -11847,7 +10583,7 @@
           <p:cNvPr id="9" name="">
             <a:extLst xmlns:a="http://schemas.openxmlformats.org/drawingml/2006/main">
               <a:ext uri="{FF2B5EF4-FFF2-40B4-BE49-F238E27FC236}">
-                <a16:creationId xmlns:a16="http://schemas.microsoft.com/office/drawing/2014/main" id="{9413F8FF-3B0F-4F3E-9EA6-76E869560A1D}"/>
+                <a16:creationId xmlns:a16="http://schemas.microsoft.com/office/drawing/2014/main" id="{404BFE32-72F2-463F-BA7A-FBF6FE4E26AA}"/>
               </a:ext>
             </a:extLst>
           </p:cNvPr>
@@ -11857,7 +10593,7 @@
           <p:nvPr/>
         </p:nvPicPr>
         <p:blipFill>
-          <a:blip xmlns:r="http://schemas.openxmlformats.org/officeDocument/2006/relationships" xmlns:a="http://schemas.openxmlformats.org/drawingml/2006/main" r:embed="R84e10277bf284803"/>
+          <a:blip xmlns:r="http://schemas.openxmlformats.org/officeDocument/2006/relationships" xmlns:a="http://schemas.openxmlformats.org/drawingml/2006/main" r:embed="R544e18b54b2342f9"/>
           <a:srcRect xmlns:a="http://schemas.openxmlformats.org/drawingml/2006/main" l="10811" t="0" r="10811" b="0"/>
           <a:stretch xmlns:a="http://schemas.openxmlformats.org/drawingml/2006/main">
             <a:fillRect l="0" t="0" r="0" b="0"/>
@@ -11878,7 +10614,7 @@
           <p:cNvPr id="10" name="">
             <a:extLst xmlns:a="http://schemas.openxmlformats.org/drawingml/2006/main">
               <a:ext uri="{FF2B5EF4-FFF2-40B4-BE49-F238E27FC236}">
-                <a16:creationId xmlns:a16="http://schemas.microsoft.com/office/drawing/2014/main" id="{288E93FF-8605-4CAE-A5CA-14B7F8F6C415}"/>
+                <a16:creationId xmlns:a16="http://schemas.microsoft.com/office/drawing/2014/main" id="{954A1E11-55FB-4807-B0B8-184A3D151163}"/>
               </a:ext>
             </a:extLst>
           </p:cNvPr>
@@ -11888,7 +10624,7 @@
           <p:nvPr/>
         </p:nvPicPr>
         <p:blipFill>
-          <a:blip xmlns:r="http://schemas.openxmlformats.org/officeDocument/2006/relationships" xmlns:a="http://schemas.openxmlformats.org/drawingml/2006/main" r:embed="Re7517d2f03d246a6"/>
+          <a:blip xmlns:r="http://schemas.openxmlformats.org/officeDocument/2006/relationships" xmlns:a="http://schemas.openxmlformats.org/drawingml/2006/main" r:embed="R102f72d0443842e4"/>
           <a:srcRect xmlns:a="http://schemas.openxmlformats.org/drawingml/2006/main" l="10811" t="0" r="10811" b="0"/>
           <a:stretch xmlns:a="http://schemas.openxmlformats.org/drawingml/2006/main">
             <a:fillRect l="0" t="0" r="0" b="0"/>
@@ -11909,7 +10645,7 @@
           <p:cNvPr id="11" name="">
             <a:extLst xmlns:a="http://schemas.openxmlformats.org/drawingml/2006/main">
               <a:ext uri="{FF2B5EF4-FFF2-40B4-BE49-F238E27FC236}">
-                <a16:creationId xmlns:a16="http://schemas.microsoft.com/office/drawing/2014/main" id="{F731A8B3-F967-4535-AFBC-73B258049868}"/>
+                <a16:creationId xmlns:a16="http://schemas.microsoft.com/office/drawing/2014/main" id="{68260C8D-AC04-4529-A16E-5824C44A0794}"/>
               </a:ext>
             </a:extLst>
           </p:cNvPr>
@@ -11919,7 +10655,7 @@
           <p:nvPr/>
         </p:nvPicPr>
         <p:blipFill>
-          <a:blip xmlns:r="http://schemas.openxmlformats.org/officeDocument/2006/relationships" xmlns:a="http://schemas.openxmlformats.org/drawingml/2006/main" r:embed="R924dfe8da0d04698"/>
+          <a:blip xmlns:r="http://schemas.openxmlformats.org/officeDocument/2006/relationships" xmlns:a="http://schemas.openxmlformats.org/drawingml/2006/main" r:embed="R0e5107ac03334dc8"/>
           <a:srcRect xmlns:a="http://schemas.openxmlformats.org/drawingml/2006/main" l="10811" t="0" r="10811" b="0"/>
           <a:stretch xmlns:a="http://schemas.openxmlformats.org/drawingml/2006/main">
             <a:fillRect l="0" t="0" r="0" b="0"/>
@@ -11938,7 +10674,7 @@
     </p:spTree>
     <p:extLst>
       <p:ext uri="{BB962C8B-B14F-4D97-AF65-F5344CB8AC3E}">
-        <p14:creationId xmlns:p14="http://schemas.microsoft.com/office/powerpoint/2010/main" val="1165549923"/>
+        <p14:creationId xmlns:p14="http://schemas.microsoft.com/office/powerpoint/2010/main" val="2107318005"/>
       </p:ext>
     </p:extLst>
   </p:cSld>
@@ -11966,10 +10702,10 @@
       </p:grpSpPr>
       <p:sp>
         <p:nvSpPr>
-          <p:cNvPr id="20" name="text-172">
+          <p:cNvPr id="20" name="text-156">
             <a:extLst xmlns:a="http://schemas.openxmlformats.org/drawingml/2006/main">
               <a:ext uri="{FF2B5EF4-FFF2-40B4-BE49-F238E27FC236}">
-                <a16:creationId xmlns:a16="http://schemas.microsoft.com/office/drawing/2014/main" id="{F33305B4-40FE-40D0-B6D0-BD5D8517162A}"/>
+                <a16:creationId xmlns:a16="http://schemas.microsoft.com/office/drawing/2014/main" id="{BE4F68AE-327F-4EB3-8D72-ABBBF9F342B1}"/>
               </a:ext>
             </a:extLst>
           </p:cNvPr>
@@ -12124,10 +10860,10 @@
       </p:sp>
       <p:sp>
         <p:nvSpPr>
-          <p:cNvPr id="2" name="text-173">
+          <p:cNvPr id="2" name="text-157">
             <a:extLst xmlns:a="http://schemas.openxmlformats.org/drawingml/2006/main">
               <a:ext uri="{FF2B5EF4-FFF2-40B4-BE49-F238E27FC236}">
-                <a16:creationId xmlns:a16="http://schemas.microsoft.com/office/drawing/2014/main" id="{785964EA-6D04-404F-A301-6CE85AF12F24}"/>
+                <a16:creationId xmlns:a16="http://schemas.microsoft.com/office/drawing/2014/main" id="{5C58021B-1C46-44C5-AD3E-F09E93163BFD}"/>
               </a:ext>
             </a:extLst>
           </p:cNvPr>
@@ -12282,10 +11018,10 @@
       </p:sp>
       <p:sp>
         <p:nvSpPr>
-          <p:cNvPr id="3" name="text-174">
+          <p:cNvPr id="3" name="text-158">
             <a:extLst xmlns:a="http://schemas.openxmlformats.org/drawingml/2006/main">
               <a:ext uri="{FF2B5EF4-FFF2-40B4-BE49-F238E27FC236}">
-                <a16:creationId xmlns:a16="http://schemas.microsoft.com/office/drawing/2014/main" id="{1080C4A6-43EC-4524-A3FA-DE5F2150CAF8}"/>
+                <a16:creationId xmlns:a16="http://schemas.microsoft.com/office/drawing/2014/main" id="{6A00E4AB-6174-4F5F-A7A8-585F37A4C8E1}"/>
               </a:ext>
             </a:extLst>
           </p:cNvPr>
@@ -12440,10 +11176,10 @@
       </p:sp>
       <p:sp>
         <p:nvSpPr>
-          <p:cNvPr id="4" name="text-175">
+          <p:cNvPr id="4" name="text-159">
             <a:extLst xmlns:a="http://schemas.openxmlformats.org/drawingml/2006/main">
               <a:ext uri="{FF2B5EF4-FFF2-40B4-BE49-F238E27FC236}">
-                <a16:creationId xmlns:a16="http://schemas.microsoft.com/office/drawing/2014/main" id="{7D01F4D3-803C-4346-B456-A3AB40531879}"/>
+                <a16:creationId xmlns:a16="http://schemas.microsoft.com/office/drawing/2014/main" id="{7417324E-1C4E-45D0-8AE0-7F5B69CD2731}"/>
               </a:ext>
             </a:extLst>
           </p:cNvPr>
@@ -12598,10 +11334,10 @@
       </p:sp>
       <p:sp>
         <p:nvSpPr>
-          <p:cNvPr id="5" name="text-176">
+          <p:cNvPr id="5" name="text-160">
             <a:extLst xmlns:a="http://schemas.openxmlformats.org/drawingml/2006/main">
               <a:ext uri="{FF2B5EF4-FFF2-40B4-BE49-F238E27FC236}">
-                <a16:creationId xmlns:a16="http://schemas.microsoft.com/office/drawing/2014/main" id="{3F802ACC-333B-4F0D-B0CF-675422DDC8E0}"/>
+                <a16:creationId xmlns:a16="http://schemas.microsoft.com/office/drawing/2014/main" id="{68AEE549-F15D-44A0-9617-87413F00EA1E}"/>
               </a:ext>
             </a:extLst>
           </p:cNvPr>
@@ -12756,10 +11492,10 @@
       </p:sp>
       <p:sp>
         <p:nvSpPr>
-          <p:cNvPr id="6" name="text-177">
+          <p:cNvPr id="6" name="text-161">
             <a:extLst xmlns:a="http://schemas.openxmlformats.org/drawingml/2006/main">
               <a:ext uri="{FF2B5EF4-FFF2-40B4-BE49-F238E27FC236}">
-                <a16:creationId xmlns:a16="http://schemas.microsoft.com/office/drawing/2014/main" id="{EE25DBBE-0025-40BB-835E-795BA15F6898}"/>
+                <a16:creationId xmlns:a16="http://schemas.microsoft.com/office/drawing/2014/main" id="{DFCEFE22-D92E-4F2D-9B9D-F9144AF7641F}"/>
               </a:ext>
             </a:extLst>
           </p:cNvPr>
@@ -12914,10 +11650,10 @@
       </p:sp>
       <p:sp>
         <p:nvSpPr>
-          <p:cNvPr id="7" name="text-178">
+          <p:cNvPr id="7" name="text-162">
             <a:extLst xmlns:a="http://schemas.openxmlformats.org/drawingml/2006/main">
               <a:ext uri="{FF2B5EF4-FFF2-40B4-BE49-F238E27FC236}">
-                <a16:creationId xmlns:a16="http://schemas.microsoft.com/office/drawing/2014/main" id="{DFA06B19-D748-4285-90C5-76BCCEA3D44C}"/>
+                <a16:creationId xmlns:a16="http://schemas.microsoft.com/office/drawing/2014/main" id="{AFEFFD67-B1AF-4128-A664-205791474E76}"/>
               </a:ext>
             </a:extLst>
           </p:cNvPr>
@@ -13072,10 +11808,10 @@
       </p:sp>
       <p:sp>
         <p:nvSpPr>
-          <p:cNvPr id="8" name="text-179">
+          <p:cNvPr id="8" name="text-163">
             <a:extLst xmlns:a="http://schemas.openxmlformats.org/drawingml/2006/main">
               <a:ext uri="{FF2B5EF4-FFF2-40B4-BE49-F238E27FC236}">
-                <a16:creationId xmlns:a16="http://schemas.microsoft.com/office/drawing/2014/main" id="{8A432B55-5F92-4F5A-AA03-71E83FA00593}"/>
+                <a16:creationId xmlns:a16="http://schemas.microsoft.com/office/drawing/2014/main" id="{42EFA57A-C88E-45DE-B07A-3354D8E97CDF}"/>
               </a:ext>
             </a:extLst>
           </p:cNvPr>
@@ -13230,10 +11966,10 @@
       </p:sp>
       <p:sp>
         <p:nvSpPr>
-          <p:cNvPr id="9" name="text-180">
+          <p:cNvPr id="9" name="text-164">
             <a:extLst xmlns:a="http://schemas.openxmlformats.org/drawingml/2006/main">
               <a:ext uri="{FF2B5EF4-FFF2-40B4-BE49-F238E27FC236}">
-                <a16:creationId xmlns:a16="http://schemas.microsoft.com/office/drawing/2014/main" id="{F45F04F5-2953-4D0F-903B-A6578879EC3D}"/>
+                <a16:creationId xmlns:a16="http://schemas.microsoft.com/office/drawing/2014/main" id="{B3A8922F-4C12-4B0A-B9BC-3EB793EA49F9}"/>
               </a:ext>
             </a:extLst>
           </p:cNvPr>
@@ -13388,10 +12124,10 @@
       </p:sp>
       <p:sp>
         <p:nvSpPr>
-          <p:cNvPr id="10" name="text-181">
+          <p:cNvPr id="10" name="text-165">
             <a:extLst xmlns:a="http://schemas.openxmlformats.org/drawingml/2006/main">
               <a:ext uri="{FF2B5EF4-FFF2-40B4-BE49-F238E27FC236}">
-                <a16:creationId xmlns:a16="http://schemas.microsoft.com/office/drawing/2014/main" id="{6FBDE79D-F80C-4689-A10B-96ED784089AE}"/>
+                <a16:creationId xmlns:a16="http://schemas.microsoft.com/office/drawing/2014/main" id="{B851DF93-6FA0-456D-AE85-F9E623334C73}"/>
               </a:ext>
             </a:extLst>
           </p:cNvPr>
@@ -13546,10 +12282,10 @@
       </p:sp>
       <p:sp>
         <p:nvSpPr>
-          <p:cNvPr id="11" name="text-182">
+          <p:cNvPr id="11" name="text-166">
             <a:extLst xmlns:a="http://schemas.openxmlformats.org/drawingml/2006/main">
               <a:ext uri="{FF2B5EF4-FFF2-40B4-BE49-F238E27FC236}">
-                <a16:creationId xmlns:a16="http://schemas.microsoft.com/office/drawing/2014/main" id="{8D80DFCF-1CBB-439B-8345-25C365B6ADC2}"/>
+                <a16:creationId xmlns:a16="http://schemas.microsoft.com/office/drawing/2014/main" id="{B14DAAFD-1276-4393-AD2F-E99AEE17DABA}"/>
               </a:ext>
             </a:extLst>
           </p:cNvPr>
@@ -13704,10 +12440,10 @@
       </p:sp>
       <p:sp>
         <p:nvSpPr>
-          <p:cNvPr id="12" name="text-183">
+          <p:cNvPr id="12" name="text-167">
             <a:extLst xmlns:a="http://schemas.openxmlformats.org/drawingml/2006/main">
               <a:ext uri="{FF2B5EF4-FFF2-40B4-BE49-F238E27FC236}">
-                <a16:creationId xmlns:a16="http://schemas.microsoft.com/office/drawing/2014/main" id="{E439E6F8-7162-4703-9472-B8364DC2BE39}"/>
+                <a16:creationId xmlns:a16="http://schemas.microsoft.com/office/drawing/2014/main" id="{BC17CA80-6315-4BA0-9CF9-A42ABC39953A}"/>
               </a:ext>
             </a:extLst>
           </p:cNvPr>
@@ -13862,10 +12598,10 @@
       </p:sp>
       <p:sp>
         <p:nvSpPr>
-          <p:cNvPr id="13" name="text-184">
+          <p:cNvPr id="13" name="text-168">
             <a:extLst xmlns:a="http://schemas.openxmlformats.org/drawingml/2006/main">
               <a:ext uri="{FF2B5EF4-FFF2-40B4-BE49-F238E27FC236}">
-                <a16:creationId xmlns:a16="http://schemas.microsoft.com/office/drawing/2014/main" id="{9D1045C9-33E3-421E-BF00-3DA34C4DCA3F}"/>
+                <a16:creationId xmlns:a16="http://schemas.microsoft.com/office/drawing/2014/main" id="{712A60A4-A893-4A6B-BAC3-CD4B737450E2}"/>
               </a:ext>
             </a:extLst>
           </p:cNvPr>
@@ -14020,10 +12756,10 @@
       </p:sp>
       <p:sp>
         <p:nvSpPr>
-          <p:cNvPr id="14" name="text-185">
+          <p:cNvPr id="14" name="text-169">
             <a:extLst xmlns:a="http://schemas.openxmlformats.org/drawingml/2006/main">
               <a:ext uri="{FF2B5EF4-FFF2-40B4-BE49-F238E27FC236}">
-                <a16:creationId xmlns:a16="http://schemas.microsoft.com/office/drawing/2014/main" id="{21101EE3-F330-4222-B890-D7E9730FA016}"/>
+                <a16:creationId xmlns:a16="http://schemas.microsoft.com/office/drawing/2014/main" id="{39238543-58D8-47E9-B132-4400E86114BA}"/>
               </a:ext>
             </a:extLst>
           </p:cNvPr>
@@ -14178,10 +12914,10 @@
       </p:sp>
       <p:sp>
         <p:nvSpPr>
-          <p:cNvPr id="15" name="text-186">
+          <p:cNvPr id="15" name="text-170">
             <a:extLst xmlns:a="http://schemas.openxmlformats.org/drawingml/2006/main">
               <a:ext uri="{FF2B5EF4-FFF2-40B4-BE49-F238E27FC236}">
-                <a16:creationId xmlns:a16="http://schemas.microsoft.com/office/drawing/2014/main" id="{8BBAFC08-4A87-4BCF-AF6E-0EBDF0BEB277}"/>
+                <a16:creationId xmlns:a16="http://schemas.microsoft.com/office/drawing/2014/main" id="{C548F83B-CDB8-4390-9BA8-E2F9CC2DC240}"/>
               </a:ext>
             </a:extLst>
           </p:cNvPr>
@@ -14336,10 +13072,10 @@
       </p:sp>
       <p:sp>
         <p:nvSpPr>
-          <p:cNvPr id="16" name="text-187">
+          <p:cNvPr id="16" name="text-171">
             <a:extLst xmlns:a="http://schemas.openxmlformats.org/drawingml/2006/main">
               <a:ext uri="{FF2B5EF4-FFF2-40B4-BE49-F238E27FC236}">
-                <a16:creationId xmlns:a16="http://schemas.microsoft.com/office/drawing/2014/main" id="{D8EE0BDC-F537-4A0E-BAFB-B93972304D0B}"/>
+                <a16:creationId xmlns:a16="http://schemas.microsoft.com/office/drawing/2014/main" id="{C7E0E239-9DB8-4DB5-81C9-38A06138A5EB}"/>
               </a:ext>
             </a:extLst>
           </p:cNvPr>
@@ -14494,10 +13230,10 @@
       </p:sp>
       <p:sp>
         <p:nvSpPr>
-          <p:cNvPr id="17" name="text-188">
+          <p:cNvPr id="17" name="text-172">
             <a:extLst xmlns:a="http://schemas.openxmlformats.org/drawingml/2006/main">
               <a:ext uri="{FF2B5EF4-FFF2-40B4-BE49-F238E27FC236}">
-                <a16:creationId xmlns:a16="http://schemas.microsoft.com/office/drawing/2014/main" id="{4811672B-A5CD-4DDA-8861-32D2014ACC59}"/>
+                <a16:creationId xmlns:a16="http://schemas.microsoft.com/office/drawing/2014/main" id="{6A944680-2EBB-4A62-ACE6-2F7D2FB35DDA}"/>
               </a:ext>
             </a:extLst>
           </p:cNvPr>
@@ -14652,10 +13388,10 @@
       </p:sp>
       <p:sp>
         <p:nvSpPr>
-          <p:cNvPr id="18" name="text-189">
+          <p:cNvPr id="18" name="text-173">
             <a:extLst xmlns:a="http://schemas.openxmlformats.org/drawingml/2006/main">
               <a:ext uri="{FF2B5EF4-FFF2-40B4-BE49-F238E27FC236}">
-                <a16:creationId xmlns:a16="http://schemas.microsoft.com/office/drawing/2014/main" id="{DA1D8791-C757-4BE8-84EA-B413418BB558}"/>
+                <a16:creationId xmlns:a16="http://schemas.microsoft.com/office/drawing/2014/main" id="{BF13018A-3C57-452F-AE5D-0731FE218AF0}"/>
               </a:ext>
             </a:extLst>
           </p:cNvPr>
@@ -14810,10 +13546,10 @@
       </p:sp>
       <p:sp>
         <p:nvSpPr>
-          <p:cNvPr id="19" name="text-190">
+          <p:cNvPr id="19" name="text-174">
             <a:extLst xmlns:a="http://schemas.openxmlformats.org/drawingml/2006/main">
               <a:ext uri="{FF2B5EF4-FFF2-40B4-BE49-F238E27FC236}">
-                <a16:creationId xmlns:a16="http://schemas.microsoft.com/office/drawing/2014/main" id="{C49DC413-FD0F-4C01-B5DA-81C8E172710F}"/>
+                <a16:creationId xmlns:a16="http://schemas.microsoft.com/office/drawing/2014/main" id="{1721E09F-77CA-4161-9291-5CDBE3E8DB51}"/>
               </a:ext>
             </a:extLst>
           </p:cNvPr>
@@ -14969,7 +13705,7 @@
     </p:spTree>
     <p:extLst>
       <p:ext uri="{BB962C8B-B14F-4D97-AF65-F5344CB8AC3E}">
-        <p14:creationId xmlns:p14="http://schemas.microsoft.com/office/powerpoint/2010/main" val="1776739090"/>
+        <p14:creationId xmlns:p14="http://schemas.microsoft.com/office/powerpoint/2010/main" val="290691041"/>
       </p:ext>
     </p:extLst>
   </p:cSld>
@@ -14997,10 +13733,10 @@
       </p:grpSpPr>
       <p:sp>
         <p:nvSpPr>
-          <p:cNvPr id="14" name="text-191">
+          <p:cNvPr id="14" name="text-175">
             <a:extLst xmlns:a="http://schemas.openxmlformats.org/drawingml/2006/main">
               <a:ext uri="{FF2B5EF4-FFF2-40B4-BE49-F238E27FC236}">
-                <a16:creationId xmlns:a16="http://schemas.microsoft.com/office/drawing/2014/main" id="{7A5FD643-FAC2-4052-A8DF-E87163444061}"/>
+                <a16:creationId xmlns:a16="http://schemas.microsoft.com/office/drawing/2014/main" id="{01656A5C-A47E-402A-8650-EAE97FBDFFC8}"/>
               </a:ext>
             </a:extLst>
           </p:cNvPr>
@@ -15155,10 +13891,10 @@
       </p:sp>
       <p:sp>
         <p:nvSpPr>
-          <p:cNvPr id="2" name="text-192">
+          <p:cNvPr id="2" name="text-176">
             <a:extLst xmlns:a="http://schemas.openxmlformats.org/drawingml/2006/main">
               <a:ext uri="{FF2B5EF4-FFF2-40B4-BE49-F238E27FC236}">
-                <a16:creationId xmlns:a16="http://schemas.microsoft.com/office/drawing/2014/main" id="{96A9BA3A-1A12-4422-B902-05B33DEA6DC0}"/>
+                <a16:creationId xmlns:a16="http://schemas.microsoft.com/office/drawing/2014/main" id="{CC0592CC-9A6D-4672-8923-ED471FB95D14}"/>
               </a:ext>
             </a:extLst>
           </p:cNvPr>
@@ -15313,10 +14049,10 @@
       </p:sp>
       <p:sp>
         <p:nvSpPr>
-          <p:cNvPr id="3" name="text-193">
+          <p:cNvPr id="3" name="text-177">
             <a:extLst xmlns:a="http://schemas.openxmlformats.org/drawingml/2006/main">
               <a:ext uri="{FF2B5EF4-FFF2-40B4-BE49-F238E27FC236}">
-                <a16:creationId xmlns:a16="http://schemas.microsoft.com/office/drawing/2014/main" id="{E40B2E25-34C2-4F54-AC72-52DFF23649D2}"/>
+                <a16:creationId xmlns:a16="http://schemas.microsoft.com/office/drawing/2014/main" id="{1ECA5B12-7715-4D8A-AAF1-4BE36D4783B7}"/>
               </a:ext>
             </a:extLst>
           </p:cNvPr>
@@ -15471,10 +14207,10 @@
       </p:sp>
       <p:sp>
         <p:nvSpPr>
-          <p:cNvPr id="4" name="text-194">
+          <p:cNvPr id="4" name="text-178">
             <a:extLst xmlns:a="http://schemas.openxmlformats.org/drawingml/2006/main">
               <a:ext uri="{FF2B5EF4-FFF2-40B4-BE49-F238E27FC236}">
-                <a16:creationId xmlns:a16="http://schemas.microsoft.com/office/drawing/2014/main" id="{D215F35B-1D8A-4B1E-AA22-873CBE0EC6BF}"/>
+                <a16:creationId xmlns:a16="http://schemas.microsoft.com/office/drawing/2014/main" id="{7B451925-3F99-49FE-8E44-B84F66CA8A6F}"/>
               </a:ext>
             </a:extLst>
           </p:cNvPr>
@@ -15629,10 +14365,10 @@
       </p:sp>
       <p:sp>
         <p:nvSpPr>
-          <p:cNvPr id="5" name="text-195">
+          <p:cNvPr id="5" name="text-179">
             <a:extLst xmlns:a="http://schemas.openxmlformats.org/drawingml/2006/main">
               <a:ext uri="{FF2B5EF4-FFF2-40B4-BE49-F238E27FC236}">
-                <a16:creationId xmlns:a16="http://schemas.microsoft.com/office/drawing/2014/main" id="{DD35E292-7507-4629-ACB4-92D4C1AC54BE}"/>
+                <a16:creationId xmlns:a16="http://schemas.microsoft.com/office/drawing/2014/main" id="{01ADBF07-4188-4D5A-8540-2DEBCE6E46A1}"/>
               </a:ext>
             </a:extLst>
           </p:cNvPr>
@@ -15787,10 +14523,10 @@
       </p:sp>
       <p:sp>
         <p:nvSpPr>
-          <p:cNvPr id="6" name="text-196">
+          <p:cNvPr id="6" name="text-180">
             <a:extLst xmlns:a="http://schemas.openxmlformats.org/drawingml/2006/main">
               <a:ext uri="{FF2B5EF4-FFF2-40B4-BE49-F238E27FC236}">
-                <a16:creationId xmlns:a16="http://schemas.microsoft.com/office/drawing/2014/main" id="{C954C253-E273-4E80-8126-5091B7264DB9}"/>
+                <a16:creationId xmlns:a16="http://schemas.microsoft.com/office/drawing/2014/main" id="{B071B873-B739-4423-90AD-A9FDD70D3736}"/>
               </a:ext>
             </a:extLst>
           </p:cNvPr>
@@ -15945,10 +14681,10 @@
       </p:sp>
       <p:sp>
         <p:nvSpPr>
-          <p:cNvPr id="7" name="text-197">
+          <p:cNvPr id="7" name="text-181">
             <a:extLst xmlns:a="http://schemas.openxmlformats.org/drawingml/2006/main">
               <a:ext uri="{FF2B5EF4-FFF2-40B4-BE49-F238E27FC236}">
-                <a16:creationId xmlns:a16="http://schemas.microsoft.com/office/drawing/2014/main" id="{B8D7CDD7-58DC-40FB-AF58-A1F76ECE3416}"/>
+                <a16:creationId xmlns:a16="http://schemas.microsoft.com/office/drawing/2014/main" id="{DE311BB1-8383-482C-92DF-C8FBE2FE5F5D}"/>
               </a:ext>
             </a:extLst>
           </p:cNvPr>
@@ -16103,10 +14839,10 @@
       </p:sp>
       <p:sp>
         <p:nvSpPr>
-          <p:cNvPr id="8" name="text-198">
+          <p:cNvPr id="8" name="text-182">
             <a:extLst xmlns:a="http://schemas.openxmlformats.org/drawingml/2006/main">
               <a:ext uri="{FF2B5EF4-FFF2-40B4-BE49-F238E27FC236}">
-                <a16:creationId xmlns:a16="http://schemas.microsoft.com/office/drawing/2014/main" id="{57D833DC-07D0-4FCD-B9E2-26FDFC84C5D6}"/>
+                <a16:creationId xmlns:a16="http://schemas.microsoft.com/office/drawing/2014/main" id="{9A33DF4A-A1C9-4C5A-9E35-BB715DF335E7}"/>
               </a:ext>
             </a:extLst>
           </p:cNvPr>
@@ -16261,10 +14997,10 @@
       </p:sp>
       <p:sp>
         <p:nvSpPr>
-          <p:cNvPr id="9" name="text-199">
+          <p:cNvPr id="9" name="text-183">
             <a:extLst xmlns:a="http://schemas.openxmlformats.org/drawingml/2006/main">
               <a:ext uri="{FF2B5EF4-FFF2-40B4-BE49-F238E27FC236}">
-                <a16:creationId xmlns:a16="http://schemas.microsoft.com/office/drawing/2014/main" id="{3EFB8624-8FD8-460F-9FF2-DB9B183E5B58}"/>
+                <a16:creationId xmlns:a16="http://schemas.microsoft.com/office/drawing/2014/main" id="{2CA3D0D3-B7FC-41DF-A16B-62ED2EF7D84D}"/>
               </a:ext>
             </a:extLst>
           </p:cNvPr>
@@ -16419,10 +15155,10 @@
       </p:sp>
       <p:sp>
         <p:nvSpPr>
-          <p:cNvPr id="10" name="text-200">
+          <p:cNvPr id="10" name="text-184">
             <a:extLst xmlns:a="http://schemas.openxmlformats.org/drawingml/2006/main">
               <a:ext uri="{FF2B5EF4-FFF2-40B4-BE49-F238E27FC236}">
-                <a16:creationId xmlns:a16="http://schemas.microsoft.com/office/drawing/2014/main" id="{AB6082E0-D63F-4A79-A1D6-2A41F9C0159F}"/>
+                <a16:creationId xmlns:a16="http://schemas.microsoft.com/office/drawing/2014/main" id="{D533F61A-FC1C-4F95-9C27-F622F87F4A1A}"/>
               </a:ext>
             </a:extLst>
           </p:cNvPr>
@@ -16577,10 +15313,10 @@
       </p:sp>
       <p:sp>
         <p:nvSpPr>
-          <p:cNvPr id="11" name="text-201">
+          <p:cNvPr id="11" name="text-185">
             <a:extLst xmlns:a="http://schemas.openxmlformats.org/drawingml/2006/main">
               <a:ext uri="{FF2B5EF4-FFF2-40B4-BE49-F238E27FC236}">
-                <a16:creationId xmlns:a16="http://schemas.microsoft.com/office/drawing/2014/main" id="{7D6F0D70-3758-45F9-AE7B-A53EEAF233EC}"/>
+                <a16:creationId xmlns:a16="http://schemas.microsoft.com/office/drawing/2014/main" id="{05DD937B-E60C-4C21-95A2-744C55ADD6F6}"/>
               </a:ext>
             </a:extLst>
           </p:cNvPr>
@@ -16735,10 +15471,10 @@
       </p:sp>
       <p:sp>
         <p:nvSpPr>
-          <p:cNvPr id="12" name="text-202">
+          <p:cNvPr id="12" name="text-186">
             <a:extLst xmlns:a="http://schemas.openxmlformats.org/drawingml/2006/main">
               <a:ext uri="{FF2B5EF4-FFF2-40B4-BE49-F238E27FC236}">
-                <a16:creationId xmlns:a16="http://schemas.microsoft.com/office/drawing/2014/main" id="{CC9BB8EE-48CA-4BC0-B5CB-FEAD3F1D4809}"/>
+                <a16:creationId xmlns:a16="http://schemas.microsoft.com/office/drawing/2014/main" id="{03B9CE11-8E3B-45AD-9518-8313F58EE9B9}"/>
               </a:ext>
             </a:extLst>
           </p:cNvPr>
@@ -16893,10 +15629,10 @@
       </p:sp>
       <p:sp>
         <p:nvSpPr>
-          <p:cNvPr id="13" name="text-203">
+          <p:cNvPr id="13" name="text-187">
             <a:extLst xmlns:a="http://schemas.openxmlformats.org/drawingml/2006/main">
               <a:ext uri="{FF2B5EF4-FFF2-40B4-BE49-F238E27FC236}">
-                <a16:creationId xmlns:a16="http://schemas.microsoft.com/office/drawing/2014/main" id="{28D4E00B-BF49-47BF-8083-11BEBDA57B2D}"/>
+                <a16:creationId xmlns:a16="http://schemas.microsoft.com/office/drawing/2014/main" id="{B81542EB-BECF-41A8-98E4-9D42AA9F278E}"/>
               </a:ext>
             </a:extLst>
           </p:cNvPr>
@@ -17052,7 +15788,7 @@
     </p:spTree>
     <p:extLst>
       <p:ext uri="{BB962C8B-B14F-4D97-AF65-F5344CB8AC3E}">
-        <p14:creationId xmlns:p14="http://schemas.microsoft.com/office/powerpoint/2010/main" val="22569304"/>
+        <p14:creationId xmlns:p14="http://schemas.microsoft.com/office/powerpoint/2010/main" val="1766214086"/>
       </p:ext>
     </p:extLst>
   </p:cSld>
@@ -17080,10 +15816,10 @@
       </p:grpSpPr>
       <p:sp>
         <p:nvSpPr>
-          <p:cNvPr id="31" name="text-204">
+          <p:cNvPr id="31" name="text-188">
             <a:extLst xmlns:a="http://schemas.openxmlformats.org/drawingml/2006/main">
               <a:ext uri="{FF2B5EF4-FFF2-40B4-BE49-F238E27FC236}">
-                <a16:creationId xmlns:a16="http://schemas.microsoft.com/office/drawing/2014/main" id="{B7716FD4-F7C5-465D-9449-620DD20A08E2}"/>
+                <a16:creationId xmlns:a16="http://schemas.microsoft.com/office/drawing/2014/main" id="{C684AF5F-E3B0-4C4D-81C5-0B31FAD23991}"/>
               </a:ext>
             </a:extLst>
           </p:cNvPr>
@@ -17238,10 +15974,10 @@
       </p:sp>
       <p:sp>
         <p:nvSpPr>
-          <p:cNvPr id="2" name="text-205">
+          <p:cNvPr id="2" name="text-189">
             <a:extLst xmlns:a="http://schemas.openxmlformats.org/drawingml/2006/main">
               <a:ext uri="{FF2B5EF4-FFF2-40B4-BE49-F238E27FC236}">
-                <a16:creationId xmlns:a16="http://schemas.microsoft.com/office/drawing/2014/main" id="{D0D2D711-652B-40C0-8023-0CD2898F2403}"/>
+                <a16:creationId xmlns:a16="http://schemas.microsoft.com/office/drawing/2014/main" id="{41DCCEE5-7D93-4F49-8D5A-E3EC0915029C}"/>
               </a:ext>
             </a:extLst>
           </p:cNvPr>
@@ -17396,10 +16132,10 @@
       </p:sp>
       <p:sp>
         <p:nvSpPr>
-          <p:cNvPr id="3" name="text-206">
+          <p:cNvPr id="3" name="text-190">
             <a:extLst xmlns:a="http://schemas.openxmlformats.org/drawingml/2006/main">
               <a:ext uri="{FF2B5EF4-FFF2-40B4-BE49-F238E27FC236}">
-                <a16:creationId xmlns:a16="http://schemas.microsoft.com/office/drawing/2014/main" id="{D22BEE82-3D61-4C8B-A9E2-2029063C0F29}"/>
+                <a16:creationId xmlns:a16="http://schemas.microsoft.com/office/drawing/2014/main" id="{1EEB35D8-4D28-479A-B557-1027691B44FB}"/>
               </a:ext>
             </a:extLst>
           </p:cNvPr>
@@ -17554,10 +16290,10 @@
       </p:sp>
       <p:sp>
         <p:nvSpPr>
-          <p:cNvPr id="4" name="text-207">
+          <p:cNvPr id="4" name="text-191">
             <a:extLst xmlns:a="http://schemas.openxmlformats.org/drawingml/2006/main">
               <a:ext uri="{FF2B5EF4-FFF2-40B4-BE49-F238E27FC236}">
-                <a16:creationId xmlns:a16="http://schemas.microsoft.com/office/drawing/2014/main" id="{EF5ED1DB-3F5F-4202-BC27-304233832EDF}"/>
+                <a16:creationId xmlns:a16="http://schemas.microsoft.com/office/drawing/2014/main" id="{FB191EE9-651A-40BF-8CCF-7A171E48F069}"/>
               </a:ext>
             </a:extLst>
           </p:cNvPr>
@@ -17712,10 +16448,10 @@
       </p:sp>
       <p:sp>
         <p:nvSpPr>
-          <p:cNvPr id="5" name="text-208">
+          <p:cNvPr id="5" name="text-192">
             <a:extLst xmlns:a="http://schemas.openxmlformats.org/drawingml/2006/main">
               <a:ext uri="{FF2B5EF4-FFF2-40B4-BE49-F238E27FC236}">
-                <a16:creationId xmlns:a16="http://schemas.microsoft.com/office/drawing/2014/main" id="{5E0D11CE-F721-4BD7-AC2A-948804103B06}"/>
+                <a16:creationId xmlns:a16="http://schemas.microsoft.com/office/drawing/2014/main" id="{6AC3A4EF-6139-4CA5-B569-C33D85B40926}"/>
               </a:ext>
             </a:extLst>
           </p:cNvPr>
@@ -17870,10 +16606,10 @@
       </p:sp>
       <p:sp>
         <p:nvSpPr>
-          <p:cNvPr id="6" name="text-209">
+          <p:cNvPr id="6" name="text-193">
             <a:extLst xmlns:a="http://schemas.openxmlformats.org/drawingml/2006/main">
               <a:ext uri="{FF2B5EF4-FFF2-40B4-BE49-F238E27FC236}">
-                <a16:creationId xmlns:a16="http://schemas.microsoft.com/office/drawing/2014/main" id="{B337B7E1-DE11-4ECD-BAE5-CFC93E43023D}"/>
+                <a16:creationId xmlns:a16="http://schemas.microsoft.com/office/drawing/2014/main" id="{EABF1504-05FF-444A-9DD5-C15B537BB41B}"/>
               </a:ext>
             </a:extLst>
           </p:cNvPr>
@@ -18028,10 +16764,10 @@
       </p:sp>
       <p:sp>
         <p:nvSpPr>
-          <p:cNvPr id="7" name="text-210">
+          <p:cNvPr id="7" name="text-194">
             <a:extLst xmlns:a="http://schemas.openxmlformats.org/drawingml/2006/main">
               <a:ext uri="{FF2B5EF4-FFF2-40B4-BE49-F238E27FC236}">
-                <a16:creationId xmlns:a16="http://schemas.microsoft.com/office/drawing/2014/main" id="{98216CE3-3654-4015-80D0-14932DC0A41C}"/>
+                <a16:creationId xmlns:a16="http://schemas.microsoft.com/office/drawing/2014/main" id="{6B793D9E-31CA-4F86-A461-800674DC2D39}"/>
               </a:ext>
             </a:extLst>
           </p:cNvPr>
@@ -18186,10 +16922,10 @@
       </p:sp>
       <p:sp>
         <p:nvSpPr>
-          <p:cNvPr id="8" name="text-211">
+          <p:cNvPr id="8" name="text-195">
             <a:extLst xmlns:a="http://schemas.openxmlformats.org/drawingml/2006/main">
               <a:ext uri="{FF2B5EF4-FFF2-40B4-BE49-F238E27FC236}">
-                <a16:creationId xmlns:a16="http://schemas.microsoft.com/office/drawing/2014/main" id="{1EEFCE6A-8501-4400-897B-E4B9B7339117}"/>
+                <a16:creationId xmlns:a16="http://schemas.microsoft.com/office/drawing/2014/main" id="{8AF1A49E-A902-48B0-9EC3-FCFFAC41D9EE}"/>
               </a:ext>
             </a:extLst>
           </p:cNvPr>
@@ -18344,10 +17080,10 @@
       </p:sp>
       <p:sp>
         <p:nvSpPr>
-          <p:cNvPr id="9" name="text-212">
+          <p:cNvPr id="9" name="text-196">
             <a:extLst xmlns:a="http://schemas.openxmlformats.org/drawingml/2006/main">
               <a:ext uri="{FF2B5EF4-FFF2-40B4-BE49-F238E27FC236}">
-                <a16:creationId xmlns:a16="http://schemas.microsoft.com/office/drawing/2014/main" id="{B5758918-29F5-40E4-9F18-994C12E2B8D7}"/>
+                <a16:creationId xmlns:a16="http://schemas.microsoft.com/office/drawing/2014/main" id="{4DACE008-97AB-4496-831C-82F5D570332C}"/>
               </a:ext>
             </a:extLst>
           </p:cNvPr>
@@ -18502,10 +17238,10 @@
       </p:sp>
       <p:sp>
         <p:nvSpPr>
-          <p:cNvPr id="10" name="text-213">
+          <p:cNvPr id="10" name="text-197">
             <a:extLst xmlns:a="http://schemas.openxmlformats.org/drawingml/2006/main">
               <a:ext uri="{FF2B5EF4-FFF2-40B4-BE49-F238E27FC236}">
-                <a16:creationId xmlns:a16="http://schemas.microsoft.com/office/drawing/2014/main" id="{FCD92282-8C57-44C0-A48A-D77343F812E8}"/>
+                <a16:creationId xmlns:a16="http://schemas.microsoft.com/office/drawing/2014/main" id="{5BC086B1-AB30-4857-82E4-E7C6840990D4}"/>
               </a:ext>
             </a:extLst>
           </p:cNvPr>
@@ -18660,10 +17396,10 @@
       </p:sp>
       <p:sp>
         <p:nvSpPr>
-          <p:cNvPr id="11" name="text-214">
+          <p:cNvPr id="11" name="text-198">
             <a:extLst xmlns:a="http://schemas.openxmlformats.org/drawingml/2006/main">
               <a:ext uri="{FF2B5EF4-FFF2-40B4-BE49-F238E27FC236}">
-                <a16:creationId xmlns:a16="http://schemas.microsoft.com/office/drawing/2014/main" id="{124C4529-22DE-4F01-8B9C-9A9DB442A50A}"/>
+                <a16:creationId xmlns:a16="http://schemas.microsoft.com/office/drawing/2014/main" id="{85A27FA4-2E12-4734-B0E1-7223B98ED213}"/>
               </a:ext>
             </a:extLst>
           </p:cNvPr>
@@ -18818,10 +17554,10 @@
       </p:sp>
       <p:sp>
         <p:nvSpPr>
-          <p:cNvPr id="12" name="text-215">
+          <p:cNvPr id="12" name="text-199">
             <a:extLst xmlns:a="http://schemas.openxmlformats.org/drawingml/2006/main">
               <a:ext uri="{FF2B5EF4-FFF2-40B4-BE49-F238E27FC236}">
-                <a16:creationId xmlns:a16="http://schemas.microsoft.com/office/drawing/2014/main" id="{0DDC6F55-7A3F-4C9B-B1A9-41DD4E055132}"/>
+                <a16:creationId xmlns:a16="http://schemas.microsoft.com/office/drawing/2014/main" id="{47A34985-92F3-4423-BAB7-1566641B763A}"/>
               </a:ext>
             </a:extLst>
           </p:cNvPr>
@@ -18976,10 +17712,10 @@
       </p:sp>
       <p:sp>
         <p:nvSpPr>
-          <p:cNvPr id="13" name="text-216">
+          <p:cNvPr id="13" name="text-200">
             <a:extLst xmlns:a="http://schemas.openxmlformats.org/drawingml/2006/main">
               <a:ext uri="{FF2B5EF4-FFF2-40B4-BE49-F238E27FC236}">
-                <a16:creationId xmlns:a16="http://schemas.microsoft.com/office/drawing/2014/main" id="{91EBA187-D9FC-41B2-860F-03C0DD6F5875}"/>
+                <a16:creationId xmlns:a16="http://schemas.microsoft.com/office/drawing/2014/main" id="{216EFF3F-910B-4B54-B60E-FB214975A0DB}"/>
               </a:ext>
             </a:extLst>
           </p:cNvPr>
@@ -19134,10 +17870,10 @@
       </p:sp>
       <p:sp>
         <p:nvSpPr>
-          <p:cNvPr id="14" name="text-217">
+          <p:cNvPr id="14" name="text-201">
             <a:extLst xmlns:a="http://schemas.openxmlformats.org/drawingml/2006/main">
               <a:ext uri="{FF2B5EF4-FFF2-40B4-BE49-F238E27FC236}">
-                <a16:creationId xmlns:a16="http://schemas.microsoft.com/office/drawing/2014/main" id="{49586D03-38D5-417F-B8D5-DE9BAC3C2EB6}"/>
+                <a16:creationId xmlns:a16="http://schemas.microsoft.com/office/drawing/2014/main" id="{4B69D7E2-F3E7-478C-8ADB-8E9DFAC24DD1}"/>
               </a:ext>
             </a:extLst>
           </p:cNvPr>
@@ -19292,10 +18028,10 @@
       </p:sp>
       <p:sp>
         <p:nvSpPr>
-          <p:cNvPr id="15" name="text-218">
+          <p:cNvPr id="15" name="text-202">
             <a:extLst xmlns:a="http://schemas.openxmlformats.org/drawingml/2006/main">
               <a:ext uri="{FF2B5EF4-FFF2-40B4-BE49-F238E27FC236}">
-                <a16:creationId xmlns:a16="http://schemas.microsoft.com/office/drawing/2014/main" id="{09D53653-B0BD-4474-916E-16F7189997DF}"/>
+                <a16:creationId xmlns:a16="http://schemas.microsoft.com/office/drawing/2014/main" id="{AC7937B9-19D0-4FC7-B2BA-C3C45913CCCB}"/>
               </a:ext>
             </a:extLst>
           </p:cNvPr>
@@ -19450,10 +18186,10 @@
       </p:sp>
       <p:sp>
         <p:nvSpPr>
-          <p:cNvPr id="16" name="text-219">
+          <p:cNvPr id="16" name="text-203">
             <a:extLst xmlns:a="http://schemas.openxmlformats.org/drawingml/2006/main">
               <a:ext uri="{FF2B5EF4-FFF2-40B4-BE49-F238E27FC236}">
-                <a16:creationId xmlns:a16="http://schemas.microsoft.com/office/drawing/2014/main" id="{FFAB701C-EE57-4BF9-BF32-83BE4D9AE433}"/>
+                <a16:creationId xmlns:a16="http://schemas.microsoft.com/office/drawing/2014/main" id="{165E6478-26D1-423F-B83A-7AA59920F5FC}"/>
               </a:ext>
             </a:extLst>
           </p:cNvPr>
@@ -19608,10 +18344,10 @@
       </p:sp>
       <p:sp>
         <p:nvSpPr>
-          <p:cNvPr id="17" name="text-220">
+          <p:cNvPr id="17" name="text-204">
             <a:extLst xmlns:a="http://schemas.openxmlformats.org/drawingml/2006/main">
               <a:ext uri="{FF2B5EF4-FFF2-40B4-BE49-F238E27FC236}">
-                <a16:creationId xmlns:a16="http://schemas.microsoft.com/office/drawing/2014/main" id="{2BBEA905-7913-44DD-AB1D-9DE07DE129E1}"/>
+                <a16:creationId xmlns:a16="http://schemas.microsoft.com/office/drawing/2014/main" id="{F7A19D27-6ACC-49C4-A7DB-5FF462418E3C}"/>
               </a:ext>
             </a:extLst>
           </p:cNvPr>
@@ -19766,10 +18502,10 @@
       </p:sp>
       <p:sp>
         <p:nvSpPr>
-          <p:cNvPr id="18" name="text-221">
+          <p:cNvPr id="18" name="text-205">
             <a:extLst xmlns:a="http://schemas.openxmlformats.org/drawingml/2006/main">
               <a:ext uri="{FF2B5EF4-FFF2-40B4-BE49-F238E27FC236}">
-                <a16:creationId xmlns:a16="http://schemas.microsoft.com/office/drawing/2014/main" id="{84ABB5BA-E61E-484E-AE48-F06734131830}"/>
+                <a16:creationId xmlns:a16="http://schemas.microsoft.com/office/drawing/2014/main" id="{ED39656D-9078-4343-9CEF-A215C54EC9A1}"/>
               </a:ext>
             </a:extLst>
           </p:cNvPr>
@@ -19924,10 +18660,10 @@
       </p:sp>
       <p:sp>
         <p:nvSpPr>
-          <p:cNvPr id="19" name="text-222">
+          <p:cNvPr id="19" name="text-206">
             <a:extLst xmlns:a="http://schemas.openxmlformats.org/drawingml/2006/main">
               <a:ext uri="{FF2B5EF4-FFF2-40B4-BE49-F238E27FC236}">
-                <a16:creationId xmlns:a16="http://schemas.microsoft.com/office/drawing/2014/main" id="{70BD3199-86A0-4654-9495-8AF04A531E9B}"/>
+                <a16:creationId xmlns:a16="http://schemas.microsoft.com/office/drawing/2014/main" id="{9DC2FF19-F12A-40D8-9D32-EAA5EFC9F440}"/>
               </a:ext>
             </a:extLst>
           </p:cNvPr>
@@ -20082,10 +18818,10 @@
       </p:sp>
       <p:sp>
         <p:nvSpPr>
-          <p:cNvPr id="20" name="text-223">
+          <p:cNvPr id="20" name="text-207">
             <a:extLst xmlns:a="http://schemas.openxmlformats.org/drawingml/2006/main">
               <a:ext uri="{FF2B5EF4-FFF2-40B4-BE49-F238E27FC236}">
-                <a16:creationId xmlns:a16="http://schemas.microsoft.com/office/drawing/2014/main" id="{D7F9FA21-3426-4C4B-9E75-DC3D1011E8E2}"/>
+                <a16:creationId xmlns:a16="http://schemas.microsoft.com/office/drawing/2014/main" id="{CBF981AD-C0E0-4967-BDE8-430F25BA438C}"/>
               </a:ext>
             </a:extLst>
           </p:cNvPr>
@@ -20240,10 +18976,10 @@
       </p:sp>
       <p:sp>
         <p:nvSpPr>
-          <p:cNvPr id="21" name="text-224">
+          <p:cNvPr id="21" name="text-208">
             <a:extLst xmlns:a="http://schemas.openxmlformats.org/drawingml/2006/main">
               <a:ext uri="{FF2B5EF4-FFF2-40B4-BE49-F238E27FC236}">
-                <a16:creationId xmlns:a16="http://schemas.microsoft.com/office/drawing/2014/main" id="{BD3F646F-923A-4444-8E67-CBA2713B5589}"/>
+                <a16:creationId xmlns:a16="http://schemas.microsoft.com/office/drawing/2014/main" id="{0030F9FE-8355-4EFF-90C2-6C75CAE84F10}"/>
               </a:ext>
             </a:extLst>
           </p:cNvPr>
@@ -20398,10 +19134,10 @@
       </p:sp>
       <p:sp>
         <p:nvSpPr>
-          <p:cNvPr id="22" name="text-225">
+          <p:cNvPr id="22" name="text-209">
             <a:extLst xmlns:a="http://schemas.openxmlformats.org/drawingml/2006/main">
               <a:ext uri="{FF2B5EF4-FFF2-40B4-BE49-F238E27FC236}">
-                <a16:creationId xmlns:a16="http://schemas.microsoft.com/office/drawing/2014/main" id="{437CFED1-B4B8-4C93-A357-252ADA1DC3BB}"/>
+                <a16:creationId xmlns:a16="http://schemas.microsoft.com/office/drawing/2014/main" id="{CE30B6B0-7795-44F0-819B-20FD46BA9E45}"/>
               </a:ext>
             </a:extLst>
           </p:cNvPr>
@@ -20556,10 +19292,10 @@
       </p:sp>
       <p:sp>
         <p:nvSpPr>
-          <p:cNvPr id="23" name="text-226">
+          <p:cNvPr id="23" name="text-210">
             <a:extLst xmlns:a="http://schemas.openxmlformats.org/drawingml/2006/main">
               <a:ext uri="{FF2B5EF4-FFF2-40B4-BE49-F238E27FC236}">
-                <a16:creationId xmlns:a16="http://schemas.microsoft.com/office/drawing/2014/main" id="{B0DBFC6D-09DA-4823-9CAE-3A165012B6DA}"/>
+                <a16:creationId xmlns:a16="http://schemas.microsoft.com/office/drawing/2014/main" id="{D79416FE-BF82-46FC-A12D-E6BA3D206204}"/>
               </a:ext>
             </a:extLst>
           </p:cNvPr>
@@ -20714,10 +19450,10 @@
       </p:sp>
       <p:sp>
         <p:nvSpPr>
-          <p:cNvPr id="24" name="text-227">
+          <p:cNvPr id="24" name="text-211">
             <a:extLst xmlns:a="http://schemas.openxmlformats.org/drawingml/2006/main">
               <a:ext uri="{FF2B5EF4-FFF2-40B4-BE49-F238E27FC236}">
-                <a16:creationId xmlns:a16="http://schemas.microsoft.com/office/drawing/2014/main" id="{BBABEDDD-8CF1-470A-AD1D-F1753FFF03CE}"/>
+                <a16:creationId xmlns:a16="http://schemas.microsoft.com/office/drawing/2014/main" id="{05FC2111-61D0-4DF3-893E-B52CBD0498EC}"/>
               </a:ext>
             </a:extLst>
           </p:cNvPr>
@@ -20872,10 +19608,10 @@
       </p:sp>
       <p:sp>
         <p:nvSpPr>
-          <p:cNvPr id="25" name="text-228">
+          <p:cNvPr id="25" name="text-212">
             <a:extLst xmlns:a="http://schemas.openxmlformats.org/drawingml/2006/main">
               <a:ext uri="{FF2B5EF4-FFF2-40B4-BE49-F238E27FC236}">
-                <a16:creationId xmlns:a16="http://schemas.microsoft.com/office/drawing/2014/main" id="{CE017F74-A107-4C3B-B10E-0AAF6679E442}"/>
+                <a16:creationId xmlns:a16="http://schemas.microsoft.com/office/drawing/2014/main" id="{C72D2699-D16C-4CB9-BB0A-E48619757C8C}"/>
               </a:ext>
             </a:extLst>
           </p:cNvPr>
@@ -21030,10 +19766,10 @@
       </p:sp>
       <p:sp>
         <p:nvSpPr>
-          <p:cNvPr id="26" name="text-229">
+          <p:cNvPr id="26" name="text-213">
             <a:extLst xmlns:a="http://schemas.openxmlformats.org/drawingml/2006/main">
               <a:ext uri="{FF2B5EF4-FFF2-40B4-BE49-F238E27FC236}">
-                <a16:creationId xmlns:a16="http://schemas.microsoft.com/office/drawing/2014/main" id="{928A6D9A-2D63-4B5B-9C82-BF1281C65B75}"/>
+                <a16:creationId xmlns:a16="http://schemas.microsoft.com/office/drawing/2014/main" id="{3A436B39-C0C8-4B6F-8038-7D07DCA08B4A}"/>
               </a:ext>
             </a:extLst>
           </p:cNvPr>
@@ -21188,10 +19924,10 @@
       </p:sp>
       <p:sp>
         <p:nvSpPr>
-          <p:cNvPr id="27" name="text-230">
+          <p:cNvPr id="27" name="text-214">
             <a:extLst xmlns:a="http://schemas.openxmlformats.org/drawingml/2006/main">
               <a:ext uri="{FF2B5EF4-FFF2-40B4-BE49-F238E27FC236}">
-                <a16:creationId xmlns:a16="http://schemas.microsoft.com/office/drawing/2014/main" id="{1B9122A5-5961-410F-8D4D-A74D65C9DEAD}"/>
+                <a16:creationId xmlns:a16="http://schemas.microsoft.com/office/drawing/2014/main" id="{E6974D8E-3799-4AD3-B3E4-3F390F36C9D8}"/>
               </a:ext>
             </a:extLst>
           </p:cNvPr>
@@ -21346,10 +20082,10 @@
       </p:sp>
       <p:sp>
         <p:nvSpPr>
-          <p:cNvPr id="28" name="text-231">
+          <p:cNvPr id="28" name="text-215">
             <a:extLst xmlns:a="http://schemas.openxmlformats.org/drawingml/2006/main">
               <a:ext uri="{FF2B5EF4-FFF2-40B4-BE49-F238E27FC236}">
-                <a16:creationId xmlns:a16="http://schemas.microsoft.com/office/drawing/2014/main" id="{2DDDC82C-B4FF-4076-8605-EEFA68587D2A}"/>
+                <a16:creationId xmlns:a16="http://schemas.microsoft.com/office/drawing/2014/main" id="{D5B2A86E-59DA-4E4F-811E-D39B6384B86E}"/>
               </a:ext>
             </a:extLst>
           </p:cNvPr>
@@ -21504,10 +20240,10 @@
       </p:sp>
       <p:sp>
         <p:nvSpPr>
-          <p:cNvPr id="29" name="text-232">
+          <p:cNvPr id="29" name="text-216">
             <a:extLst xmlns:a="http://schemas.openxmlformats.org/drawingml/2006/main">
               <a:ext uri="{FF2B5EF4-FFF2-40B4-BE49-F238E27FC236}">
-                <a16:creationId xmlns:a16="http://schemas.microsoft.com/office/drawing/2014/main" id="{2507065D-715E-4B00-AF27-5E3C2F174F5B}"/>
+                <a16:creationId xmlns:a16="http://schemas.microsoft.com/office/drawing/2014/main" id="{13C82126-DA24-47EB-B184-F9D2944B70AE}"/>
               </a:ext>
             </a:extLst>
           </p:cNvPr>
@@ -21662,10 +20398,10 @@
       </p:sp>
       <p:sp>
         <p:nvSpPr>
-          <p:cNvPr id="30" name="text-233">
+          <p:cNvPr id="30" name="text-217">
             <a:extLst xmlns:a="http://schemas.openxmlformats.org/drawingml/2006/main">
               <a:ext uri="{FF2B5EF4-FFF2-40B4-BE49-F238E27FC236}">
-                <a16:creationId xmlns:a16="http://schemas.microsoft.com/office/drawing/2014/main" id="{80F40E15-90EC-4B23-8D70-DFE547D0904E}"/>
+                <a16:creationId xmlns:a16="http://schemas.microsoft.com/office/drawing/2014/main" id="{C501E941-E123-46ED-BD14-09C9A67E8E74}"/>
               </a:ext>
             </a:extLst>
           </p:cNvPr>
@@ -21821,7 +20557,7 @@
     </p:spTree>
     <p:extLst>
       <p:ext uri="{BB962C8B-B14F-4D97-AF65-F5344CB8AC3E}">
-        <p14:creationId xmlns:p14="http://schemas.microsoft.com/office/powerpoint/2010/main" val="1192017409"/>
+        <p14:creationId xmlns:p14="http://schemas.microsoft.com/office/powerpoint/2010/main" val="182572040"/>
       </p:ext>
     </p:extLst>
   </p:cSld>
@@ -21849,10 +20585,10 @@
       </p:grpSpPr>
       <p:sp>
         <p:nvSpPr>
-          <p:cNvPr id="17" name="text-234">
+          <p:cNvPr id="17" name="text-218">
             <a:extLst xmlns:a="http://schemas.openxmlformats.org/drawingml/2006/main">
               <a:ext uri="{FF2B5EF4-FFF2-40B4-BE49-F238E27FC236}">
-                <a16:creationId xmlns:a16="http://schemas.microsoft.com/office/drawing/2014/main" id="{4B0A30A2-97AD-47E8-AC5F-1DE8C759E15A}"/>
+                <a16:creationId xmlns:a16="http://schemas.microsoft.com/office/drawing/2014/main" id="{465552EE-E239-40F9-B698-24382384DEA8}"/>
               </a:ext>
             </a:extLst>
           </p:cNvPr>
@@ -22007,10 +20743,10 @@
       </p:sp>
       <p:sp>
         <p:nvSpPr>
-          <p:cNvPr id="2" name="text-235">
+          <p:cNvPr id="2" name="text-219">
             <a:extLst xmlns:a="http://schemas.openxmlformats.org/drawingml/2006/main">
               <a:ext uri="{FF2B5EF4-FFF2-40B4-BE49-F238E27FC236}">
-                <a16:creationId xmlns:a16="http://schemas.microsoft.com/office/drawing/2014/main" id="{F7E6CA34-57E3-472B-BE83-8A575A5AE5D9}"/>
+                <a16:creationId xmlns:a16="http://schemas.microsoft.com/office/drawing/2014/main" id="{A9397113-55B6-4B91-98E0-D7A188039416}"/>
               </a:ext>
             </a:extLst>
           </p:cNvPr>
@@ -22165,10 +20901,10 @@
       </p:sp>
       <p:sp>
         <p:nvSpPr>
-          <p:cNvPr id="3" name="text-236">
+          <p:cNvPr id="3" name="text-220">
             <a:extLst xmlns:a="http://schemas.openxmlformats.org/drawingml/2006/main">
               <a:ext uri="{FF2B5EF4-FFF2-40B4-BE49-F238E27FC236}">
-                <a16:creationId xmlns:a16="http://schemas.microsoft.com/office/drawing/2014/main" id="{E41A5E18-A3F7-4560-A81C-EE7A7BA84E76}"/>
+                <a16:creationId xmlns:a16="http://schemas.microsoft.com/office/drawing/2014/main" id="{AD809E6F-CB3B-4048-8AF6-43EDEA95BAF4}"/>
               </a:ext>
             </a:extLst>
           </p:cNvPr>
@@ -22323,10 +21059,10 @@
       </p:sp>
       <p:sp>
         <p:nvSpPr>
-          <p:cNvPr id="4" name="text-237">
+          <p:cNvPr id="4" name="text-221">
             <a:extLst xmlns:a="http://schemas.openxmlformats.org/drawingml/2006/main">
               <a:ext uri="{FF2B5EF4-FFF2-40B4-BE49-F238E27FC236}">
-                <a16:creationId xmlns:a16="http://schemas.microsoft.com/office/drawing/2014/main" id="{EF467634-87A5-415F-98B1-1CF9E8627390}"/>
+                <a16:creationId xmlns:a16="http://schemas.microsoft.com/office/drawing/2014/main" id="{0184630F-14C2-46CD-B815-957D1152D0B3}"/>
               </a:ext>
             </a:extLst>
           </p:cNvPr>
@@ -22481,10 +21217,10 @@
       </p:sp>
       <p:sp>
         <p:nvSpPr>
-          <p:cNvPr id="5" name="text-238">
+          <p:cNvPr id="5" name="text-222">
             <a:extLst xmlns:a="http://schemas.openxmlformats.org/drawingml/2006/main">
               <a:ext uri="{FF2B5EF4-FFF2-40B4-BE49-F238E27FC236}">
-                <a16:creationId xmlns:a16="http://schemas.microsoft.com/office/drawing/2014/main" id="{1B1BAB9E-B719-4022-886E-198AA2FA7A05}"/>
+                <a16:creationId xmlns:a16="http://schemas.microsoft.com/office/drawing/2014/main" id="{F233DD57-7696-4A3B-A308-8DF46D36982F}"/>
               </a:ext>
             </a:extLst>
           </p:cNvPr>
@@ -22639,10 +21375,10 @@
       </p:sp>
       <p:sp>
         <p:nvSpPr>
-          <p:cNvPr id="6" name="text-239">
+          <p:cNvPr id="6" name="text-223">
             <a:extLst xmlns:a="http://schemas.openxmlformats.org/drawingml/2006/main">
               <a:ext uri="{FF2B5EF4-FFF2-40B4-BE49-F238E27FC236}">
-                <a16:creationId xmlns:a16="http://schemas.microsoft.com/office/drawing/2014/main" id="{63CB984A-C3A1-49B2-B2A4-2D44A0717750}"/>
+                <a16:creationId xmlns:a16="http://schemas.microsoft.com/office/drawing/2014/main" id="{B2A4E5FB-2FD3-4997-93B9-794D29E8D6BE}"/>
               </a:ext>
             </a:extLst>
           </p:cNvPr>
@@ -22797,10 +21533,10 @@
       </p:sp>
       <p:sp>
         <p:nvSpPr>
-          <p:cNvPr id="7" name="text-240">
+          <p:cNvPr id="7" name="text-224">
             <a:extLst xmlns:a="http://schemas.openxmlformats.org/drawingml/2006/main">
               <a:ext uri="{FF2B5EF4-FFF2-40B4-BE49-F238E27FC236}">
-                <a16:creationId xmlns:a16="http://schemas.microsoft.com/office/drawing/2014/main" id="{1515CF1D-B9B3-4124-980C-E6C9CCA6DAC6}"/>
+                <a16:creationId xmlns:a16="http://schemas.microsoft.com/office/drawing/2014/main" id="{913304C5-48F0-4463-A27C-20A38366CC2F}"/>
               </a:ext>
             </a:extLst>
           </p:cNvPr>
@@ -22955,10 +21691,10 @@
       </p:sp>
       <p:sp>
         <p:nvSpPr>
-          <p:cNvPr id="8" name="text-241">
+          <p:cNvPr id="8" name="text-225">
             <a:extLst xmlns:a="http://schemas.openxmlformats.org/drawingml/2006/main">
               <a:ext uri="{FF2B5EF4-FFF2-40B4-BE49-F238E27FC236}">
-                <a16:creationId xmlns:a16="http://schemas.microsoft.com/office/drawing/2014/main" id="{F37FDF29-353B-451F-924E-479184132A22}"/>
+                <a16:creationId xmlns:a16="http://schemas.microsoft.com/office/drawing/2014/main" id="{84EEA030-4B2E-40E9-A641-B0A642B03C0B}"/>
               </a:ext>
             </a:extLst>
           </p:cNvPr>
@@ -23113,10 +21849,10 @@
       </p:sp>
       <p:sp>
         <p:nvSpPr>
-          <p:cNvPr id="9" name="text-242">
+          <p:cNvPr id="9" name="text-226">
             <a:extLst xmlns:a="http://schemas.openxmlformats.org/drawingml/2006/main">
               <a:ext uri="{FF2B5EF4-FFF2-40B4-BE49-F238E27FC236}">
-                <a16:creationId xmlns:a16="http://schemas.microsoft.com/office/drawing/2014/main" id="{3E940362-29F7-47C5-96CF-C8D789B167EA}"/>
+                <a16:creationId xmlns:a16="http://schemas.microsoft.com/office/drawing/2014/main" id="{FAD3302C-B693-4820-BAA9-B88B6075C6CC}"/>
               </a:ext>
             </a:extLst>
           </p:cNvPr>
@@ -23271,10 +22007,10 @@
       </p:sp>
       <p:sp>
         <p:nvSpPr>
-          <p:cNvPr id="10" name="text-243">
+          <p:cNvPr id="10" name="text-227">
             <a:extLst xmlns:a="http://schemas.openxmlformats.org/drawingml/2006/main">
               <a:ext uri="{FF2B5EF4-FFF2-40B4-BE49-F238E27FC236}">
-                <a16:creationId xmlns:a16="http://schemas.microsoft.com/office/drawing/2014/main" id="{352B1F5C-BB58-440B-B9BF-F626C1A176A1}"/>
+                <a16:creationId xmlns:a16="http://schemas.microsoft.com/office/drawing/2014/main" id="{3BBDEA82-8137-4756-8AEC-03609836A631}"/>
               </a:ext>
             </a:extLst>
           </p:cNvPr>
@@ -23429,10 +22165,10 @@
       </p:sp>
       <p:sp>
         <p:nvSpPr>
-          <p:cNvPr id="11" name="text-244">
+          <p:cNvPr id="11" name="text-228">
             <a:extLst xmlns:a="http://schemas.openxmlformats.org/drawingml/2006/main">
               <a:ext uri="{FF2B5EF4-FFF2-40B4-BE49-F238E27FC236}">
-                <a16:creationId xmlns:a16="http://schemas.microsoft.com/office/drawing/2014/main" id="{4D1F66BA-19F6-4C42-84F5-09FDE7340C33}"/>
+                <a16:creationId xmlns:a16="http://schemas.microsoft.com/office/drawing/2014/main" id="{38CCDFDB-D1EC-42DA-9E27-6976DAE4C9AB}"/>
               </a:ext>
             </a:extLst>
           </p:cNvPr>
@@ -23587,10 +22323,10 @@
       </p:sp>
       <p:sp>
         <p:nvSpPr>
-          <p:cNvPr id="12" name="text-245">
+          <p:cNvPr id="12" name="text-229">
             <a:extLst xmlns:a="http://schemas.openxmlformats.org/drawingml/2006/main">
               <a:ext uri="{FF2B5EF4-FFF2-40B4-BE49-F238E27FC236}">
-                <a16:creationId xmlns:a16="http://schemas.microsoft.com/office/drawing/2014/main" id="{CC10EFFF-4A36-4791-B6E5-1344DC04BAEC}"/>
+                <a16:creationId xmlns:a16="http://schemas.microsoft.com/office/drawing/2014/main" id="{B4E3EE6D-C431-4FD3-BBAC-E5570DC0FB69}"/>
               </a:ext>
             </a:extLst>
           </p:cNvPr>
@@ -23745,10 +22481,10 @@
       </p:sp>
       <p:sp>
         <p:nvSpPr>
-          <p:cNvPr id="13" name="text-246">
+          <p:cNvPr id="13" name="text-230">
             <a:extLst xmlns:a="http://schemas.openxmlformats.org/drawingml/2006/main">
               <a:ext uri="{FF2B5EF4-FFF2-40B4-BE49-F238E27FC236}">
-                <a16:creationId xmlns:a16="http://schemas.microsoft.com/office/drawing/2014/main" id="{D96AADAF-1470-40F8-B62F-3058F8389A6C}"/>
+                <a16:creationId xmlns:a16="http://schemas.microsoft.com/office/drawing/2014/main" id="{170A1DD6-22E9-468D-9DDD-EDF15FA6D4C8}"/>
               </a:ext>
             </a:extLst>
           </p:cNvPr>
@@ -23903,10 +22639,10 @@
       </p:sp>
       <p:sp>
         <p:nvSpPr>
-          <p:cNvPr id="14" name="text-247">
+          <p:cNvPr id="14" name="text-231">
             <a:extLst xmlns:a="http://schemas.openxmlformats.org/drawingml/2006/main">
               <a:ext uri="{FF2B5EF4-FFF2-40B4-BE49-F238E27FC236}">
-                <a16:creationId xmlns:a16="http://schemas.microsoft.com/office/drawing/2014/main" id="{DA92381C-A711-4122-8248-3DA8A6649ECD}"/>
+                <a16:creationId xmlns:a16="http://schemas.microsoft.com/office/drawing/2014/main" id="{51BA64D5-3AC7-40E0-87C8-FE2CF7C93C4A}"/>
               </a:ext>
             </a:extLst>
           </p:cNvPr>
@@ -24061,10 +22797,10 @@
       </p:sp>
       <p:sp>
         <p:nvSpPr>
-          <p:cNvPr id="15" name="text-248">
+          <p:cNvPr id="15" name="text-232">
             <a:extLst xmlns:a="http://schemas.openxmlformats.org/drawingml/2006/main">
               <a:ext uri="{FF2B5EF4-FFF2-40B4-BE49-F238E27FC236}">
-                <a16:creationId xmlns:a16="http://schemas.microsoft.com/office/drawing/2014/main" id="{AF061005-DFDE-4FAB-9E95-4C486E1B4B6F}"/>
+                <a16:creationId xmlns:a16="http://schemas.microsoft.com/office/drawing/2014/main" id="{A7280B69-E807-4586-9FA8-241617B4A95B}"/>
               </a:ext>
             </a:extLst>
           </p:cNvPr>
@@ -24219,10 +22955,10 @@
       </p:sp>
       <p:sp>
         <p:nvSpPr>
-          <p:cNvPr id="16" name="text-249">
+          <p:cNvPr id="16" name="text-233">
             <a:extLst xmlns:a="http://schemas.openxmlformats.org/drawingml/2006/main">
               <a:ext uri="{FF2B5EF4-FFF2-40B4-BE49-F238E27FC236}">
-                <a16:creationId xmlns:a16="http://schemas.microsoft.com/office/drawing/2014/main" id="{ADDE1968-1D13-4BF1-B7CB-6F4F1FF2EDF6}"/>
+                <a16:creationId xmlns:a16="http://schemas.microsoft.com/office/drawing/2014/main" id="{90EC21FF-B9A7-4A40-A2B3-67FBAAC6BE96}"/>
               </a:ext>
             </a:extLst>
           </p:cNvPr>
@@ -24378,7 +23114,7 @@
     </p:spTree>
     <p:extLst>
       <p:ext uri="{BB962C8B-B14F-4D97-AF65-F5344CB8AC3E}">
-        <p14:creationId xmlns:p14="http://schemas.microsoft.com/office/powerpoint/2010/main" val="1764637278"/>
+        <p14:creationId xmlns:p14="http://schemas.microsoft.com/office/powerpoint/2010/main" val="1038083516"/>
       </p:ext>
     </p:extLst>
   </p:cSld>
@@ -24406,10 +23142,10 @@
       </p:grpSpPr>
       <p:sp>
         <p:nvSpPr>
-          <p:cNvPr id="16" name="text-250">
+          <p:cNvPr id="16" name="text-234">
             <a:extLst xmlns:a="http://schemas.openxmlformats.org/drawingml/2006/main">
               <a:ext uri="{FF2B5EF4-FFF2-40B4-BE49-F238E27FC236}">
-                <a16:creationId xmlns:a16="http://schemas.microsoft.com/office/drawing/2014/main" id="{65903520-C085-4FF1-94F9-931E17CA7C2B}"/>
+                <a16:creationId xmlns:a16="http://schemas.microsoft.com/office/drawing/2014/main" id="{4E10F16A-1168-4B87-B84C-945F9EF0019B}"/>
               </a:ext>
             </a:extLst>
           </p:cNvPr>
@@ -24564,10 +23300,10 @@
       </p:sp>
       <p:sp>
         <p:nvSpPr>
-          <p:cNvPr id="2" name="text-251">
+          <p:cNvPr id="2" name="text-235">
             <a:extLst xmlns:a="http://schemas.openxmlformats.org/drawingml/2006/main">
               <a:ext uri="{FF2B5EF4-FFF2-40B4-BE49-F238E27FC236}">
-                <a16:creationId xmlns:a16="http://schemas.microsoft.com/office/drawing/2014/main" id="{758D8E38-DC4B-4F63-9B29-90B5CEE1541F}"/>
+                <a16:creationId xmlns:a16="http://schemas.microsoft.com/office/drawing/2014/main" id="{F7E4B360-3184-44AB-B707-4D7EA896D8FD}"/>
               </a:ext>
             </a:extLst>
           </p:cNvPr>
@@ -24722,10 +23458,10 @@
       </p:sp>
       <p:sp>
         <p:nvSpPr>
-          <p:cNvPr id="3" name="text-252">
+          <p:cNvPr id="3" name="text-236">
             <a:extLst xmlns:a="http://schemas.openxmlformats.org/drawingml/2006/main">
               <a:ext uri="{FF2B5EF4-FFF2-40B4-BE49-F238E27FC236}">
-                <a16:creationId xmlns:a16="http://schemas.microsoft.com/office/drawing/2014/main" id="{98E40863-A1DC-48AA-9D80-D4A1C19E4204}"/>
+                <a16:creationId xmlns:a16="http://schemas.microsoft.com/office/drawing/2014/main" id="{81035CAE-6F25-4605-A284-E58614400F77}"/>
               </a:ext>
             </a:extLst>
           </p:cNvPr>
@@ -24880,10 +23616,10 @@
       </p:sp>
       <p:sp>
         <p:nvSpPr>
-          <p:cNvPr id="4" name="text-253">
+          <p:cNvPr id="4" name="text-237">
             <a:extLst xmlns:a="http://schemas.openxmlformats.org/drawingml/2006/main">
               <a:ext uri="{FF2B5EF4-FFF2-40B4-BE49-F238E27FC236}">
-                <a16:creationId xmlns:a16="http://schemas.microsoft.com/office/drawing/2014/main" id="{BFBD02CC-0990-46D1-9465-0DBD71C4FE49}"/>
+                <a16:creationId xmlns:a16="http://schemas.microsoft.com/office/drawing/2014/main" id="{8F84BE91-6F5C-4A54-BAAB-B3864177C474}"/>
               </a:ext>
             </a:extLst>
           </p:cNvPr>
@@ -25038,10 +23774,10 @@
       </p:sp>
       <p:sp>
         <p:nvSpPr>
-          <p:cNvPr id="5" name="text-254">
+          <p:cNvPr id="5" name="text-238">
             <a:extLst xmlns:a="http://schemas.openxmlformats.org/drawingml/2006/main">
               <a:ext uri="{FF2B5EF4-FFF2-40B4-BE49-F238E27FC236}">
-                <a16:creationId xmlns:a16="http://schemas.microsoft.com/office/drawing/2014/main" id="{FAB37BC9-592C-4731-86E3-64D944A12FB9}"/>
+                <a16:creationId xmlns:a16="http://schemas.microsoft.com/office/drawing/2014/main" id="{C2C8D4C9-1E42-412A-98B9-AEEF6E229C0E}"/>
               </a:ext>
             </a:extLst>
           </p:cNvPr>
@@ -25199,7 +23935,7 @@
           <p:cNvPr id="6" name="">
             <a:extLst xmlns:a="http://schemas.openxmlformats.org/drawingml/2006/main">
               <a:ext uri="{FF2B5EF4-FFF2-40B4-BE49-F238E27FC236}">
-                <a16:creationId xmlns:a16="http://schemas.microsoft.com/office/drawing/2014/main" id="{7387141B-D1E6-40FE-B8C2-5E867888515E}"/>
+                <a16:creationId xmlns:a16="http://schemas.microsoft.com/office/drawing/2014/main" id="{8D49504E-E544-43A9-8C27-980FB207EB6F}"/>
               </a:ext>
             </a:extLst>
           </p:cNvPr>
@@ -25209,7 +23945,7 @@
           <p:nvPr/>
         </p:nvPicPr>
         <p:blipFill>
-          <a:blip xmlns:r="http://schemas.openxmlformats.org/officeDocument/2006/relationships" xmlns:a="http://schemas.openxmlformats.org/drawingml/2006/main" r:embed="R011f119412d7406f"/>
+          <a:blip xmlns:r="http://schemas.openxmlformats.org/officeDocument/2006/relationships" xmlns:a="http://schemas.openxmlformats.org/drawingml/2006/main" r:embed="Rd8d724a0f07f459b"/>
           <a:stretch xmlns:a="http://schemas.openxmlformats.org/drawingml/2006/main"/>
         </p:blipFill>
         <p:spPr>
@@ -25227,7 +23963,7 @@
           <p:cNvPr id="7" name="">
             <a:extLst xmlns:a="http://schemas.openxmlformats.org/drawingml/2006/main">
               <a:ext uri="{FF2B5EF4-FFF2-40B4-BE49-F238E27FC236}">
-                <a16:creationId xmlns:a16="http://schemas.microsoft.com/office/drawing/2014/main" id="{87D95263-E009-4515-86A9-7FCB33A4B688}"/>
+                <a16:creationId xmlns:a16="http://schemas.microsoft.com/office/drawing/2014/main" id="{9458AE71-A0E4-498C-AF2E-73ED088DAC62}"/>
               </a:ext>
             </a:extLst>
           </p:cNvPr>
@@ -25237,7 +23973,7 @@
           <p:nvPr/>
         </p:nvPicPr>
         <p:blipFill>
-          <a:blip xmlns:r="http://schemas.openxmlformats.org/officeDocument/2006/relationships" xmlns:a="http://schemas.openxmlformats.org/drawingml/2006/main" r:embed="R6c6ced4df1094276"/>
+          <a:blip xmlns:r="http://schemas.openxmlformats.org/officeDocument/2006/relationships" xmlns:a="http://schemas.openxmlformats.org/drawingml/2006/main" r:embed="R994ee3e4fe6b448d"/>
           <a:stretch xmlns:a="http://schemas.openxmlformats.org/drawingml/2006/main"/>
         </p:blipFill>
         <p:spPr>
@@ -25252,10 +23988,10 @@
       </p:pic>
       <p:sp>
         <p:nvSpPr>
-          <p:cNvPr id="8" name="text-255">
+          <p:cNvPr id="8" name="text-239">
             <a:extLst xmlns:a="http://schemas.openxmlformats.org/drawingml/2006/main">
               <a:ext uri="{FF2B5EF4-FFF2-40B4-BE49-F238E27FC236}">
-                <a16:creationId xmlns:a16="http://schemas.microsoft.com/office/drawing/2014/main" id="{AA0195A4-BB74-4FCA-BB53-0ADAAAB89C61}"/>
+                <a16:creationId xmlns:a16="http://schemas.microsoft.com/office/drawing/2014/main" id="{CBD65BB4-A5BF-48CB-A616-A847F4596E95}"/>
               </a:ext>
             </a:extLst>
           </p:cNvPr>
@@ -25410,10 +24146,10 @@
       </p:sp>
       <p:sp>
         <p:nvSpPr>
-          <p:cNvPr id="9" name="text-256">
+          <p:cNvPr id="9" name="text-240">
             <a:extLst xmlns:a="http://schemas.openxmlformats.org/drawingml/2006/main">
               <a:ext uri="{FF2B5EF4-FFF2-40B4-BE49-F238E27FC236}">
-                <a16:creationId xmlns:a16="http://schemas.microsoft.com/office/drawing/2014/main" id="{DB8EEFB1-B77D-41A7-A01D-74EAD1DAE306}"/>
+                <a16:creationId xmlns:a16="http://schemas.microsoft.com/office/drawing/2014/main" id="{2D5EDD6C-A65D-472F-8B8E-33DD312C093C}"/>
               </a:ext>
             </a:extLst>
           </p:cNvPr>
@@ -25568,10 +24304,10 @@
       </p:sp>
       <p:sp>
         <p:nvSpPr>
-          <p:cNvPr id="10" name="text-257">
+          <p:cNvPr id="10" name="text-241">
             <a:extLst xmlns:a="http://schemas.openxmlformats.org/drawingml/2006/main">
               <a:ext uri="{FF2B5EF4-FFF2-40B4-BE49-F238E27FC236}">
-                <a16:creationId xmlns:a16="http://schemas.microsoft.com/office/drawing/2014/main" id="{201995A6-B402-471F-BC32-A6C249280D06}"/>
+                <a16:creationId xmlns:a16="http://schemas.microsoft.com/office/drawing/2014/main" id="{61857F8E-12B3-4D81-B4AE-B152EE3D5044}"/>
               </a:ext>
             </a:extLst>
           </p:cNvPr>
@@ -25726,10 +24462,10 @@
       </p:sp>
       <p:sp>
         <p:nvSpPr>
-          <p:cNvPr id="11" name="text-258">
+          <p:cNvPr id="11" name="text-242">
             <a:extLst xmlns:a="http://schemas.openxmlformats.org/drawingml/2006/main">
               <a:ext uri="{FF2B5EF4-FFF2-40B4-BE49-F238E27FC236}">
-                <a16:creationId xmlns:a16="http://schemas.microsoft.com/office/drawing/2014/main" id="{F2BFC51C-F9B7-4993-A3BF-D55CADBD5CC4}"/>
+                <a16:creationId xmlns:a16="http://schemas.microsoft.com/office/drawing/2014/main" id="{B3A5FF70-E7F5-4CC1-BCBF-C7FA4E55FAA3}"/>
               </a:ext>
             </a:extLst>
           </p:cNvPr>
@@ -25884,10 +24620,10 @@
       </p:sp>
       <p:sp>
         <p:nvSpPr>
-          <p:cNvPr id="12" name="text-259">
+          <p:cNvPr id="12" name="text-243">
             <a:extLst xmlns:a="http://schemas.openxmlformats.org/drawingml/2006/main">
               <a:ext uri="{FF2B5EF4-FFF2-40B4-BE49-F238E27FC236}">
-                <a16:creationId xmlns:a16="http://schemas.microsoft.com/office/drawing/2014/main" id="{A2A90505-420F-4443-B733-99D0D08E8F5F}"/>
+                <a16:creationId xmlns:a16="http://schemas.microsoft.com/office/drawing/2014/main" id="{3E197A47-5F83-441E-9219-363E017A4A3B}"/>
               </a:ext>
             </a:extLst>
           </p:cNvPr>
@@ -26042,10 +24778,10 @@
       </p:sp>
       <p:sp>
         <p:nvSpPr>
-          <p:cNvPr id="13" name="text-260">
+          <p:cNvPr id="13" name="text-244">
             <a:extLst xmlns:a="http://schemas.openxmlformats.org/drawingml/2006/main">
               <a:ext uri="{FF2B5EF4-FFF2-40B4-BE49-F238E27FC236}">
-                <a16:creationId xmlns:a16="http://schemas.microsoft.com/office/drawing/2014/main" id="{136251E1-67C8-4D6B-A53D-87BBC2BEE678}"/>
+                <a16:creationId xmlns:a16="http://schemas.microsoft.com/office/drawing/2014/main" id="{564A911F-26CD-4A79-AF61-DEDCA81E2FA9}"/>
               </a:ext>
             </a:extLst>
           </p:cNvPr>
@@ -26200,10 +24936,10 @@
       </p:sp>
       <p:sp>
         <p:nvSpPr>
-          <p:cNvPr id="14" name="text-261">
+          <p:cNvPr id="14" name="text-245">
             <a:extLst xmlns:a="http://schemas.openxmlformats.org/drawingml/2006/main">
               <a:ext uri="{FF2B5EF4-FFF2-40B4-BE49-F238E27FC236}">
-                <a16:creationId xmlns:a16="http://schemas.microsoft.com/office/drawing/2014/main" id="{068B198F-3E74-429E-821E-B144EEFD39CF}"/>
+                <a16:creationId xmlns:a16="http://schemas.microsoft.com/office/drawing/2014/main" id="{79DA90B6-38DC-4792-B557-F00171FB472D}"/>
               </a:ext>
             </a:extLst>
           </p:cNvPr>
@@ -26350,7 +25086,7 @@
                 <a:latin typeface="Arial"/>
                 <a:ea typeface="Arial"/>
                 <a:cs typeface="Arial"/>
-                <a:hlinkClick xmlns:r="http://schemas.openxmlformats.org/officeDocument/2006/relationships" r:id="R1c6d1ae8f8d14447"/>
+                <a:hlinkClick xmlns:r="http://schemas.openxmlformats.org/officeDocument/2006/relationships" r:id="Rb7bf71a08f7e4cae"/>
               </a:rPr>
               <a:t>YouTube</a:t>
             </a:r>
@@ -26359,10 +25095,10 @@
       </p:sp>
       <p:sp>
         <p:nvSpPr>
-          <p:cNvPr id="15" name="text-262">
+          <p:cNvPr id="15" name="text-246">
             <a:extLst xmlns:a="http://schemas.openxmlformats.org/drawingml/2006/main">
               <a:ext uri="{FF2B5EF4-FFF2-40B4-BE49-F238E27FC236}">
-                <a16:creationId xmlns:a16="http://schemas.microsoft.com/office/drawing/2014/main" id="{7C915A1D-3DFF-432D-8362-4220BF93E7AA}"/>
+                <a16:creationId xmlns:a16="http://schemas.microsoft.com/office/drawing/2014/main" id="{391A1DE5-76BE-4218-BC2A-B8CB672F5FEE}"/>
               </a:ext>
             </a:extLst>
           </p:cNvPr>
@@ -26509,7 +25245,7 @@
                 <a:latin typeface="Arial"/>
                 <a:ea typeface="Arial"/>
                 <a:cs typeface="Arial"/>
-                <a:hlinkClick xmlns:r="http://schemas.openxmlformats.org/officeDocument/2006/relationships" r:id="R924ab273b6174738"/>
+                <a:hlinkClick xmlns:r="http://schemas.openxmlformats.org/officeDocument/2006/relationships" r:id="Rc833b5a76912422b"/>
               </a:rPr>
               <a:t>Instagram</a:t>
             </a:r>
@@ -26519,7 +25255,7 @@
     </p:spTree>
     <p:extLst>
       <p:ext uri="{BB962C8B-B14F-4D97-AF65-F5344CB8AC3E}">
-        <p14:creationId xmlns:p14="http://schemas.microsoft.com/office/powerpoint/2010/main" val="612416020"/>
+        <p14:creationId xmlns:p14="http://schemas.microsoft.com/office/powerpoint/2010/main" val="1223977727"/>
       </p:ext>
     </p:extLst>
   </p:cSld>

--- a/GIUMS-MediaKit-PT.pptx
+++ b/GIUMS-MediaKit-PT.pptx
@@ -2,18 +2,18 @@
 <file path=ppt/presentation.xml><?xml version="1.0" encoding="utf-8"?>
 <p:presentation xmlns:p="http://schemas.openxmlformats.org/presentationml/2006/main">
   <p:sldMasterIdLst>
-    <p:sldMasterId xmlns:r="http://schemas.openxmlformats.org/officeDocument/2006/relationships" id="2147483648" r:id="Rbc22d38c5893489e"/>
+    <p:sldMasterId xmlns:r="http://schemas.openxmlformats.org/officeDocument/2006/relationships" id="2147483648" r:id="Rbd3c34f9cb2b4281"/>
   </p:sldMasterIdLst>
   <p:notesMasterIdLst>
-    <p:notesMasterId xmlns:r="http://schemas.openxmlformats.org/officeDocument/2006/relationships" r:id="R251a87bfd9304985"/>
+    <p:notesMasterId xmlns:r="http://schemas.openxmlformats.org/officeDocument/2006/relationships" r:id="Rdbdf2c0f5e5a430d"/>
   </p:notesMasterIdLst>
   <p:sldIdLst>
-    <p:sldId xmlns:r="http://schemas.openxmlformats.org/officeDocument/2006/relationships" id="256" r:id="R475452e8aa1b461c"/>
-    <p:sldId xmlns:r="http://schemas.openxmlformats.org/officeDocument/2006/relationships" id="257" r:id="Rf29be22a718e4e4a"/>
-    <p:sldId xmlns:r="http://schemas.openxmlformats.org/officeDocument/2006/relationships" id="258" r:id="R55d43d9e7607432b"/>
-    <p:sldId xmlns:r="http://schemas.openxmlformats.org/officeDocument/2006/relationships" id="259" r:id="R5261b0ba153d4fd6"/>
-    <p:sldId xmlns:r="http://schemas.openxmlformats.org/officeDocument/2006/relationships" id="260" r:id="R74e80209ff6b4d91"/>
-    <p:sldId xmlns:r="http://schemas.openxmlformats.org/officeDocument/2006/relationships" id="261" r:id="Rfaca3c1b4d964f9e"/>
+    <p:sldId xmlns:r="http://schemas.openxmlformats.org/officeDocument/2006/relationships" id="256" r:id="R0f3051f99dbb42fb"/>
+    <p:sldId xmlns:r="http://schemas.openxmlformats.org/officeDocument/2006/relationships" id="257" r:id="Rdcabbe6a1db14661"/>
+    <p:sldId xmlns:r="http://schemas.openxmlformats.org/officeDocument/2006/relationships" id="258" r:id="R8a5118b9d27c4f15"/>
+    <p:sldId xmlns:r="http://schemas.openxmlformats.org/officeDocument/2006/relationships" id="259" r:id="R7cd3a5c38c764ddb"/>
+    <p:sldId xmlns:r="http://schemas.openxmlformats.org/officeDocument/2006/relationships" id="260" r:id="R1f7aec35f37d4fb8"/>
+    <p:sldId xmlns:r="http://schemas.openxmlformats.org/officeDocument/2006/relationships" id="261" r:id="R7c7a3e54e1e44fba"/>
   </p:sldIdLst>
   <p:sldSz cx="12192000" cy="6858000"/>
   <p:notesSz cx="6858000" cy="9144000"/>
@@ -844,7 +844,7 @@
           <p:cNvPr id="3" name="Title">
             <a:extLst xmlns:a="http://schemas.openxmlformats.org/drawingml/2006/main">
               <a:ext uri="{FF2B5EF4-FFF2-40B4-BE49-F238E27FC236}">
-                <a16:creationId xmlns:a16="http://schemas.microsoft.com/office/drawing/2014/main" id="{F9C10AB0-09FD-4643-87EE-AE123989BCC3}"/>
+                <a16:creationId xmlns:a16="http://schemas.microsoft.com/office/drawing/2014/main" id="{9C055592-D07C-4005-953C-B6CE337142BC}"/>
               </a:ext>
             </a:extLst>
           </p:cNvPr>
@@ -1073,7 +1073,7 @@
           <p:cNvPr id="2" name="Subtitle">
             <a:extLst xmlns:a="http://schemas.openxmlformats.org/drawingml/2006/main">
               <a:ext uri="{FF2B5EF4-FFF2-40B4-BE49-F238E27FC236}">
-                <a16:creationId xmlns:a16="http://schemas.microsoft.com/office/drawing/2014/main" id="{78E92B8B-6EA1-44D3-B07C-B422CCF95925}"/>
+                <a16:creationId xmlns:a16="http://schemas.microsoft.com/office/drawing/2014/main" id="{8CB29565-F29D-49CF-BE69-4261A191D2CE}"/>
               </a:ext>
             </a:extLst>
           </p:cNvPr>
@@ -1319,7 +1319,7 @@
           <p:cNvPr id="2" name="Section title">
             <a:extLst xmlns:a="http://schemas.openxmlformats.org/drawingml/2006/main">
               <a:ext uri="{FF2B5EF4-FFF2-40B4-BE49-F238E27FC236}">
-                <a16:creationId xmlns:a16="http://schemas.microsoft.com/office/drawing/2014/main" id="{884C2A9E-EDB6-4F13-ACD5-C6E2083699E3}"/>
+                <a16:creationId xmlns:a16="http://schemas.microsoft.com/office/drawing/2014/main" id="{9D21796B-4421-4E12-A0E1-A314E488DC2B}"/>
               </a:ext>
             </a:extLst>
           </p:cNvPr>
@@ -1565,7 +1565,7 @@
           <p:cNvPr id="3" name="Title">
             <a:extLst xmlns:a="http://schemas.openxmlformats.org/drawingml/2006/main">
               <a:ext uri="{FF2B5EF4-FFF2-40B4-BE49-F238E27FC236}">
-                <a16:creationId xmlns:a16="http://schemas.microsoft.com/office/drawing/2014/main" id="{55BC4B47-87BE-47D9-924C-0BCEBE658556}"/>
+                <a16:creationId xmlns:a16="http://schemas.microsoft.com/office/drawing/2014/main" id="{3014D8AC-2B2B-4BDD-9399-FF971C7486DB}"/>
               </a:ext>
             </a:extLst>
           </p:cNvPr>
@@ -1794,7 +1794,7 @@
           <p:cNvPr id="2" name="Body">
             <a:extLst xmlns:a="http://schemas.openxmlformats.org/drawingml/2006/main">
               <a:ext uri="{FF2B5EF4-FFF2-40B4-BE49-F238E27FC236}">
-                <a16:creationId xmlns:a16="http://schemas.microsoft.com/office/drawing/2014/main" id="{7F3AC674-1FC5-44FE-8239-1E4E3AF122B1}"/>
+                <a16:creationId xmlns:a16="http://schemas.microsoft.com/office/drawing/2014/main" id="{BE6C85CE-C151-4F1E-A4E3-12691E7093A8}"/>
               </a:ext>
             </a:extLst>
           </p:cNvPr>
@@ -2040,7 +2040,7 @@
           <p:cNvPr id="4" name="Title">
             <a:extLst xmlns:a="http://schemas.openxmlformats.org/drawingml/2006/main">
               <a:ext uri="{FF2B5EF4-FFF2-40B4-BE49-F238E27FC236}">
-                <a16:creationId xmlns:a16="http://schemas.microsoft.com/office/drawing/2014/main" id="{C95A20BF-9DFA-400B-9CA3-0A5B9A594613}"/>
+                <a16:creationId xmlns:a16="http://schemas.microsoft.com/office/drawing/2014/main" id="{42034BA0-C0D5-44E7-A885-0E1DB34FCEB7}"/>
               </a:ext>
             </a:extLst>
           </p:cNvPr>
@@ -2269,7 +2269,7 @@
           <p:cNvPr id="2" name="Left column">
             <a:extLst xmlns:a="http://schemas.openxmlformats.org/drawingml/2006/main">
               <a:ext uri="{FF2B5EF4-FFF2-40B4-BE49-F238E27FC236}">
-                <a16:creationId xmlns:a16="http://schemas.microsoft.com/office/drawing/2014/main" id="{54E654FB-932D-4859-914A-8628ADD1FDAB}"/>
+                <a16:creationId xmlns:a16="http://schemas.microsoft.com/office/drawing/2014/main" id="{6C748D4C-196F-472B-8237-67E9B5C6EB80}"/>
               </a:ext>
             </a:extLst>
           </p:cNvPr>
@@ -2498,7 +2498,7 @@
           <p:cNvPr id="3" name="Right column">
             <a:extLst xmlns:a="http://schemas.openxmlformats.org/drawingml/2006/main">
               <a:ext uri="{FF2B5EF4-FFF2-40B4-BE49-F238E27FC236}">
-                <a16:creationId xmlns:a16="http://schemas.microsoft.com/office/drawing/2014/main" id="{8905B48B-8741-4045-A933-0CC6FB463601}"/>
+                <a16:creationId xmlns:a16="http://schemas.microsoft.com/office/drawing/2014/main" id="{1EAADBB5-ABBC-4FDD-9F29-8B3FE57CB698}"/>
               </a:ext>
             </a:extLst>
           </p:cNvPr>
@@ -2744,7 +2744,7 @@
           <p:cNvPr id="3" name="Title">
             <a:extLst xmlns:a="http://schemas.openxmlformats.org/drawingml/2006/main">
               <a:ext uri="{FF2B5EF4-FFF2-40B4-BE49-F238E27FC236}">
-                <a16:creationId xmlns:a16="http://schemas.microsoft.com/office/drawing/2014/main" id="{0E85B8A2-CDE2-4A89-864C-36F87032FEC0}"/>
+                <a16:creationId xmlns:a16="http://schemas.microsoft.com/office/drawing/2014/main" id="{4994426E-4593-4BBA-9681-FFE53DC37222}"/>
               </a:ext>
             </a:extLst>
           </p:cNvPr>
@@ -2973,7 +2973,7 @@
           <p:cNvPr id="2" name="Left column">
             <a:extLst xmlns:a="http://schemas.openxmlformats.org/drawingml/2006/main">
               <a:ext uri="{FF2B5EF4-FFF2-40B4-BE49-F238E27FC236}">
-                <a16:creationId xmlns:a16="http://schemas.microsoft.com/office/drawing/2014/main" id="{DE3B8F88-286F-4341-BD1F-6969467CDAAE}"/>
+                <a16:creationId xmlns:a16="http://schemas.microsoft.com/office/drawing/2014/main" id="{027D81C3-5512-466F-9122-DC952AEBB571}"/>
               </a:ext>
             </a:extLst>
           </p:cNvPr>
@@ -3240,12 +3240,12 @@
   </p:cSld>
   <p:clrMap bg1="lt1" tx1="dk1" bg2="lt2" tx2="dk2" accent1="accent1" accent2="accent2" accent3="accent3" accent4="accent4" accent5="accent5" accent6="accent6" hlink="hlink" folHlink="folHlink"/>
   <p:sldLayoutIdLst>
-    <p:sldLayoutId xmlns:r="http://schemas.openxmlformats.org/officeDocument/2006/relationships" id="2147483649" r:id="Rb243d33f161e4371"/>
-    <p:sldLayoutId xmlns:r="http://schemas.openxmlformats.org/officeDocument/2006/relationships" id="2147483650" r:id="Rdebcf112753748bf"/>
-    <p:sldLayoutId xmlns:r="http://schemas.openxmlformats.org/officeDocument/2006/relationships" id="2147483651" r:id="R0cbd4d8aa87b4e52"/>
-    <p:sldLayoutId xmlns:r="http://schemas.openxmlformats.org/officeDocument/2006/relationships" id="2147483652" r:id="R72a369b64e0247a5"/>
-    <p:sldLayoutId xmlns:r="http://schemas.openxmlformats.org/officeDocument/2006/relationships" id="2147483653" r:id="R4ab1af3bda8047fc"/>
-    <p:sldLayoutId xmlns:r="http://schemas.openxmlformats.org/officeDocument/2006/relationships" id="2147483654" r:id="R5b137c97995a4ba4"/>
+    <p:sldLayoutId xmlns:r="http://schemas.openxmlformats.org/officeDocument/2006/relationships" id="2147483649" r:id="R287897abd33a400c"/>
+    <p:sldLayoutId xmlns:r="http://schemas.openxmlformats.org/officeDocument/2006/relationships" id="2147483650" r:id="R79ab2e2bad124b82"/>
+    <p:sldLayoutId xmlns:r="http://schemas.openxmlformats.org/officeDocument/2006/relationships" id="2147483651" r:id="R3dd2ea4547aa4cbc"/>
+    <p:sldLayoutId xmlns:r="http://schemas.openxmlformats.org/officeDocument/2006/relationships" id="2147483652" r:id="Rb9ca0f42130e4e53"/>
+    <p:sldLayoutId xmlns:r="http://schemas.openxmlformats.org/officeDocument/2006/relationships" id="2147483653" r:id="Rf0eaa61c6fad44b5"/>
+    <p:sldLayoutId xmlns:r="http://schemas.openxmlformats.org/officeDocument/2006/relationships" id="2147483654" r:id="R946f7b5934fd4633"/>
   </p:sldLayoutIdLst>
   <p:txStyles>
     <p:titleStyle>
@@ -3796,7 +3796,7 @@
           <p:cNvPr id="2" name="">
             <a:extLst xmlns:a="http://schemas.openxmlformats.org/drawingml/2006/main">
               <a:ext uri="{FF2B5EF4-FFF2-40B4-BE49-F238E27FC236}">
-                <a16:creationId xmlns:a16="http://schemas.microsoft.com/office/drawing/2014/main" id="{2561825A-842B-489D-A6B4-8799E0200B18}"/>
+                <a16:creationId xmlns:a16="http://schemas.microsoft.com/office/drawing/2014/main" id="{453EE571-DCBF-48DA-9AF1-CA4089B582DA}"/>
               </a:ext>
             </a:extLst>
           </p:cNvPr>
@@ -3806,7 +3806,7 @@
           <p:nvPr/>
         </p:nvPicPr>
         <p:blipFill>
-          <a:blip xmlns:r="http://schemas.openxmlformats.org/officeDocument/2006/relationships" xmlns:a="http://schemas.openxmlformats.org/drawingml/2006/main" r:embed="R0674f279f0114d2f"/>
+          <a:blip xmlns:r="http://schemas.openxmlformats.org/officeDocument/2006/relationships" xmlns:a="http://schemas.openxmlformats.org/drawingml/2006/main" r:embed="R900990bd805e4500"/>
           <a:stretch xmlns:a="http://schemas.openxmlformats.org/drawingml/2006/main"/>
         </p:blipFill>
         <p:spPr>
@@ -3822,7 +3822,7 @@
     </p:spTree>
     <p:extLst>
       <p:ext uri="{BB962C8B-B14F-4D97-AF65-F5344CB8AC3E}">
-        <p14:creationId xmlns:p14="http://schemas.microsoft.com/office/powerpoint/2010/main" val="958260686"/>
+        <p14:creationId xmlns:p14="http://schemas.microsoft.com/office/powerpoint/2010/main" val="2144492008"/>
       </p:ext>
     </p:extLst>
   </p:cSld>
@@ -3853,7 +3853,7 @@
           <p:cNvPr id="2" name="">
             <a:extLst xmlns:a="http://schemas.openxmlformats.org/drawingml/2006/main">
               <a:ext uri="{FF2B5EF4-FFF2-40B4-BE49-F238E27FC236}">
-                <a16:creationId xmlns:a16="http://schemas.microsoft.com/office/drawing/2014/main" id="{AD249ABA-A336-4A83-AC8F-336F3AB73D78}"/>
+                <a16:creationId xmlns:a16="http://schemas.microsoft.com/office/drawing/2014/main" id="{D0ABC65E-B7FE-483F-8DCC-74F5D5A1E368}"/>
               </a:ext>
             </a:extLst>
           </p:cNvPr>
@@ -3863,7 +3863,7 @@
           <p:nvPr/>
         </p:nvPicPr>
         <p:blipFill>
-          <a:blip xmlns:r="http://schemas.openxmlformats.org/officeDocument/2006/relationships" xmlns:a="http://schemas.openxmlformats.org/drawingml/2006/main" r:embed="R8b3b640ca9aa42c5"/>
+          <a:blip xmlns:r="http://schemas.openxmlformats.org/officeDocument/2006/relationships" xmlns:a="http://schemas.openxmlformats.org/drawingml/2006/main" r:embed="R5bd6632e8f5c4d29"/>
           <a:stretch xmlns:a="http://schemas.openxmlformats.org/drawingml/2006/main"/>
         </p:blipFill>
         <p:spPr>
@@ -3879,7 +3879,7 @@
     </p:spTree>
     <p:extLst>
       <p:ext uri="{BB962C8B-B14F-4D97-AF65-F5344CB8AC3E}">
-        <p14:creationId xmlns:p14="http://schemas.microsoft.com/office/powerpoint/2010/main" val="1169123562"/>
+        <p14:creationId xmlns:p14="http://schemas.microsoft.com/office/powerpoint/2010/main" val="1192010909"/>
       </p:ext>
     </p:extLst>
   </p:cSld>
@@ -3910,7 +3910,7 @@
           <p:cNvPr id="3" name="">
             <a:extLst xmlns:a="http://schemas.openxmlformats.org/drawingml/2006/main">
               <a:ext uri="{FF2B5EF4-FFF2-40B4-BE49-F238E27FC236}">
-                <a16:creationId xmlns:a16="http://schemas.microsoft.com/office/drawing/2014/main" id="{4A92CAE0-2BC2-4B0B-A91E-FBE2D383B8CF}"/>
+                <a16:creationId xmlns:a16="http://schemas.microsoft.com/office/drawing/2014/main" id="{35BCD8F4-B5A7-4F38-A5B4-1C4F7D3CA18C}"/>
               </a:ext>
             </a:extLst>
           </p:cNvPr>
@@ -3920,7 +3920,7 @@
           <p:nvPr/>
         </p:nvPicPr>
         <p:blipFill>
-          <a:blip xmlns:r="http://schemas.openxmlformats.org/officeDocument/2006/relationships" xmlns:a="http://schemas.openxmlformats.org/drawingml/2006/main" r:embed="R58113c52ae994c77"/>
+          <a:blip xmlns:r="http://schemas.openxmlformats.org/officeDocument/2006/relationships" xmlns:a="http://schemas.openxmlformats.org/drawingml/2006/main" r:embed="Raf90631749f041de"/>
           <a:stretch xmlns:a="http://schemas.openxmlformats.org/drawingml/2006/main"/>
         </p:blipFill>
         <p:spPr>
@@ -3938,7 +3938,7 @@
           <p:cNvPr id="2" name="hotspot-1">
             <a:extLst xmlns:a="http://schemas.openxmlformats.org/drawingml/2006/main">
               <a:ext uri="{FF2B5EF4-FFF2-40B4-BE49-F238E27FC236}">
-                <a16:creationId xmlns:a16="http://schemas.microsoft.com/office/drawing/2014/main" id="{D8B4AFC4-6587-47B4-8308-B1F662E870D7}"/>
+                <a16:creationId xmlns:a16="http://schemas.microsoft.com/office/drawing/2014/main" id="{ADA98265-D0DB-4AB8-AA6F-B2F77E553C4E}"/>
               </a:ext>
             </a:extLst>
             <ns0:hlinkClick xmlns:ns0="http://schemas.openxmlformats.org/drawingml/2006/main" xmlns:ns1="http://schemas.openxmlformats.org/officeDocument/2006/relationships" ns1:id="rIdClick1"/>
@@ -3969,7 +3969,7 @@
     </p:spTree>
     <p:extLst>
       <p:ext uri="{BB962C8B-B14F-4D97-AF65-F5344CB8AC3E}">
-        <p14:creationId xmlns:p14="http://schemas.microsoft.com/office/powerpoint/2010/main" val="1513720396"/>
+        <p14:creationId xmlns:p14="http://schemas.microsoft.com/office/powerpoint/2010/main" val="1493999298"/>
       </p:ext>
     </p:extLst>
   </p:cSld>
@@ -4000,7 +4000,7 @@
           <p:cNvPr id="4" name="">
             <a:extLst xmlns:a="http://schemas.openxmlformats.org/drawingml/2006/main">
               <a:ext uri="{FF2B5EF4-FFF2-40B4-BE49-F238E27FC236}">
-                <a16:creationId xmlns:a16="http://schemas.microsoft.com/office/drawing/2014/main" id="{F5A3652F-514E-47FD-854C-2FD8BD2B0D4B}"/>
+                <a16:creationId xmlns:a16="http://schemas.microsoft.com/office/drawing/2014/main" id="{A9B0665F-2666-4FB3-9D8F-8D2580E95931}"/>
               </a:ext>
             </a:extLst>
           </p:cNvPr>
@@ -4010,7 +4010,7 @@
           <p:nvPr/>
         </p:nvPicPr>
         <p:blipFill>
-          <a:blip xmlns:r="http://schemas.openxmlformats.org/officeDocument/2006/relationships" xmlns:a="http://schemas.openxmlformats.org/drawingml/2006/main" r:embed="R35b8bb66b1354d4a"/>
+          <a:blip xmlns:r="http://schemas.openxmlformats.org/officeDocument/2006/relationships" xmlns:a="http://schemas.openxmlformats.org/drawingml/2006/main" r:embed="R4ae9842c598b4e4e"/>
           <a:stretch xmlns:a="http://schemas.openxmlformats.org/drawingml/2006/main"/>
         </p:blipFill>
         <p:spPr>
@@ -4028,7 +4028,7 @@
           <p:cNvPr id="2" name="hotspot-1">
             <a:extLst xmlns:a="http://schemas.openxmlformats.org/drawingml/2006/main">
               <a:ext uri="{FF2B5EF4-FFF2-40B4-BE49-F238E27FC236}">
-                <a16:creationId xmlns:a16="http://schemas.microsoft.com/office/drawing/2014/main" id="{9E2467C0-F4F0-4435-9792-742734927BA0}"/>
+                <a16:creationId xmlns:a16="http://schemas.microsoft.com/office/drawing/2014/main" id="{978852DA-9347-41C6-BAFA-2BBAC0C2E467}"/>
               </a:ext>
             </a:extLst>
             <ns0:hlinkClick xmlns:ns0="http://schemas.openxmlformats.org/drawingml/2006/main" xmlns:ns1="http://schemas.openxmlformats.org/officeDocument/2006/relationships" ns1:id="rIdClick1"/>
@@ -4061,7 +4061,7 @@
           <p:cNvPr id="3" name="hotspot-2">
             <a:extLst xmlns:a="http://schemas.openxmlformats.org/drawingml/2006/main">
               <a:ext uri="{FF2B5EF4-FFF2-40B4-BE49-F238E27FC236}">
-                <a16:creationId xmlns:a16="http://schemas.microsoft.com/office/drawing/2014/main" id="{C6005E3D-AEF7-4D12-916D-403E600BC676}"/>
+                <a16:creationId xmlns:a16="http://schemas.microsoft.com/office/drawing/2014/main" id="{716F66CF-7535-41B1-B435-6A591D7FB40F}"/>
               </a:ext>
             </a:extLst>
             <ns2:hlinkClick xmlns:ns2="http://schemas.openxmlformats.org/drawingml/2006/main" xmlns:ns3="http://schemas.openxmlformats.org/officeDocument/2006/relationships" ns3:id="rIdClick2"/>
@@ -4092,7 +4092,7 @@
     </p:spTree>
     <p:extLst>
       <p:ext uri="{BB962C8B-B14F-4D97-AF65-F5344CB8AC3E}">
-        <p14:creationId xmlns:p14="http://schemas.microsoft.com/office/powerpoint/2010/main" val="207570471"/>
+        <p14:creationId xmlns:p14="http://schemas.microsoft.com/office/powerpoint/2010/main" val="1102027454"/>
       </p:ext>
     </p:extLst>
   </p:cSld>
@@ -4123,7 +4123,7 @@
           <p:cNvPr id="5" name="">
             <a:extLst xmlns:a="http://schemas.openxmlformats.org/drawingml/2006/main">
               <a:ext uri="{FF2B5EF4-FFF2-40B4-BE49-F238E27FC236}">
-                <a16:creationId xmlns:a16="http://schemas.microsoft.com/office/drawing/2014/main" id="{788440F6-9D57-4745-A2DE-729ECE6315AD}"/>
+                <a16:creationId xmlns:a16="http://schemas.microsoft.com/office/drawing/2014/main" id="{7F83894C-E1C6-444F-BD9C-1FD7C711CAC0}"/>
               </a:ext>
             </a:extLst>
           </p:cNvPr>
@@ -4133,7 +4133,7 @@
           <p:nvPr/>
         </p:nvPicPr>
         <p:blipFill>
-          <a:blip xmlns:r="http://schemas.openxmlformats.org/officeDocument/2006/relationships" xmlns:a="http://schemas.openxmlformats.org/drawingml/2006/main" r:embed="R64e9553f851c4cc1"/>
+          <a:blip xmlns:r="http://schemas.openxmlformats.org/officeDocument/2006/relationships" xmlns:a="http://schemas.openxmlformats.org/drawingml/2006/main" r:embed="R5b189558111a48cd"/>
           <a:stretch xmlns:a="http://schemas.openxmlformats.org/drawingml/2006/main"/>
         </p:blipFill>
         <p:spPr>
@@ -4151,7 +4151,7 @@
           <p:cNvPr id="2" name="hotspot-1">
             <a:extLst xmlns:a="http://schemas.openxmlformats.org/drawingml/2006/main">
               <a:ext uri="{FF2B5EF4-FFF2-40B4-BE49-F238E27FC236}">
-                <a16:creationId xmlns:a16="http://schemas.microsoft.com/office/drawing/2014/main" id="{F027141C-A0B0-4B5A-A279-F13C511F7ABF}"/>
+                <a16:creationId xmlns:a16="http://schemas.microsoft.com/office/drawing/2014/main" id="{FF7E3C33-70B7-48A4-AAAC-DBED7F58EDFE}"/>
               </a:ext>
             </a:extLst>
             <ns0:hlinkClick xmlns:ns0="http://schemas.openxmlformats.org/drawingml/2006/main" xmlns:ns1="http://schemas.openxmlformats.org/officeDocument/2006/relationships" ns1:id="rIdClick1"/>
@@ -4184,7 +4184,7 @@
           <p:cNvPr id="3" name="hotspot-2">
             <a:extLst xmlns:a="http://schemas.openxmlformats.org/drawingml/2006/main">
               <a:ext uri="{FF2B5EF4-FFF2-40B4-BE49-F238E27FC236}">
-                <a16:creationId xmlns:a16="http://schemas.microsoft.com/office/drawing/2014/main" id="{E8EC7C5C-AE5C-4F14-A9C7-EAD0A5228B13}"/>
+                <a16:creationId xmlns:a16="http://schemas.microsoft.com/office/drawing/2014/main" id="{D0AFDA18-AA03-4C9B-B198-AE0FE761B78D}"/>
               </a:ext>
             </a:extLst>
             <ns2:hlinkClick xmlns:ns2="http://schemas.openxmlformats.org/drawingml/2006/main" xmlns:ns3="http://schemas.openxmlformats.org/officeDocument/2006/relationships" ns3:id="rIdClick2"/>
@@ -4217,7 +4217,7 @@
           <p:cNvPr id="4" name="hotspot-3">
             <a:extLst xmlns:a="http://schemas.openxmlformats.org/drawingml/2006/main">
               <a:ext uri="{FF2B5EF4-FFF2-40B4-BE49-F238E27FC236}">
-                <a16:creationId xmlns:a16="http://schemas.microsoft.com/office/drawing/2014/main" id="{8F6BD92D-CD8B-46F0-85B3-5F4597233ED1}"/>
+                <a16:creationId xmlns:a16="http://schemas.microsoft.com/office/drawing/2014/main" id="{42A2B996-C607-4001-8B3B-7916539689CF}"/>
               </a:ext>
             </a:extLst>
             <ns4:hlinkClick xmlns:ns4="http://schemas.openxmlformats.org/drawingml/2006/main" xmlns:ns5="http://schemas.openxmlformats.org/officeDocument/2006/relationships" ns5:id="rIdClick3"/>
@@ -4248,7 +4248,7 @@
     </p:spTree>
     <p:extLst>
       <p:ext uri="{BB962C8B-B14F-4D97-AF65-F5344CB8AC3E}">
-        <p14:creationId xmlns:p14="http://schemas.microsoft.com/office/powerpoint/2010/main" val="2065517402"/>
+        <p14:creationId xmlns:p14="http://schemas.microsoft.com/office/powerpoint/2010/main" val="273736721"/>
       </p:ext>
     </p:extLst>
   </p:cSld>
@@ -4279,7 +4279,7 @@
           <p:cNvPr id="9" name="">
             <a:extLst xmlns:a="http://schemas.openxmlformats.org/drawingml/2006/main">
               <a:ext uri="{FF2B5EF4-FFF2-40B4-BE49-F238E27FC236}">
-                <a16:creationId xmlns:a16="http://schemas.microsoft.com/office/drawing/2014/main" id="{903DF796-5302-4418-A788-48494B93F5FD}"/>
+                <a16:creationId xmlns:a16="http://schemas.microsoft.com/office/drawing/2014/main" id="{44276371-7660-424C-983D-E53321875DC3}"/>
               </a:ext>
             </a:extLst>
           </p:cNvPr>
@@ -4289,7 +4289,7 @@
           <p:nvPr/>
         </p:nvPicPr>
         <p:blipFill>
-          <a:blip xmlns:r="http://schemas.openxmlformats.org/officeDocument/2006/relationships" xmlns:a="http://schemas.openxmlformats.org/drawingml/2006/main" r:embed="R7ef00000a8d84449"/>
+          <a:blip xmlns:r="http://schemas.openxmlformats.org/officeDocument/2006/relationships" xmlns:a="http://schemas.openxmlformats.org/drawingml/2006/main" r:embed="Rbaeccaa66a5f4dd6"/>
           <a:stretch xmlns:a="http://schemas.openxmlformats.org/drawingml/2006/main"/>
         </p:blipFill>
         <p:spPr>
@@ -4307,7 +4307,7 @@
           <p:cNvPr id="2" name="hotspot-1">
             <a:extLst xmlns:a="http://schemas.openxmlformats.org/drawingml/2006/main">
               <a:ext uri="{FF2B5EF4-FFF2-40B4-BE49-F238E27FC236}">
-                <a16:creationId xmlns:a16="http://schemas.microsoft.com/office/drawing/2014/main" id="{D62A6D83-3999-443E-837B-4E7BD05B9E91}"/>
+                <a16:creationId xmlns:a16="http://schemas.microsoft.com/office/drawing/2014/main" id="{EC909C11-509B-4763-B44B-B30693D8FF9A}"/>
               </a:ext>
             </a:extLst>
             <ns0:hlinkClick xmlns:ns0="http://schemas.openxmlformats.org/drawingml/2006/main" xmlns:ns1="http://schemas.openxmlformats.org/officeDocument/2006/relationships" ns1:id="rIdClick1"/>
@@ -4340,7 +4340,7 @@
           <p:cNvPr id="3" name="hotspot-2">
             <a:extLst xmlns:a="http://schemas.openxmlformats.org/drawingml/2006/main">
               <a:ext uri="{FF2B5EF4-FFF2-40B4-BE49-F238E27FC236}">
-                <a16:creationId xmlns:a16="http://schemas.microsoft.com/office/drawing/2014/main" id="{E954C3DF-EB70-46F0-880B-E004C551E92D}"/>
+                <a16:creationId xmlns:a16="http://schemas.microsoft.com/office/drawing/2014/main" id="{C18D917F-39FF-40C5-806A-7F4BE02F1E22}"/>
               </a:ext>
             </a:extLst>
             <ns2:hlinkClick xmlns:ns2="http://schemas.openxmlformats.org/drawingml/2006/main" xmlns:ns3="http://schemas.openxmlformats.org/officeDocument/2006/relationships" ns3:id="rIdClick2"/>
@@ -4373,7 +4373,7 @@
           <p:cNvPr id="4" name="hotspot-3">
             <a:extLst xmlns:a="http://schemas.openxmlformats.org/drawingml/2006/main">
               <a:ext uri="{FF2B5EF4-FFF2-40B4-BE49-F238E27FC236}">
-                <a16:creationId xmlns:a16="http://schemas.microsoft.com/office/drawing/2014/main" id="{46605022-DF78-403B-AD1D-041D3D381197}"/>
+                <a16:creationId xmlns:a16="http://schemas.microsoft.com/office/drawing/2014/main" id="{293AE454-C82E-4DE6-AE17-5C2AB0C04CBC}"/>
               </a:ext>
             </a:extLst>
             <ns4:hlinkClick xmlns:ns4="http://schemas.openxmlformats.org/drawingml/2006/main" xmlns:ns5="http://schemas.openxmlformats.org/officeDocument/2006/relationships" ns5:id="rIdClick3"/>
@@ -4406,7 +4406,7 @@
           <p:cNvPr id="5" name="hotspot-4">
             <a:extLst xmlns:a="http://schemas.openxmlformats.org/drawingml/2006/main">
               <a:ext uri="{FF2B5EF4-FFF2-40B4-BE49-F238E27FC236}">
-                <a16:creationId xmlns:a16="http://schemas.microsoft.com/office/drawing/2014/main" id="{6E2AEDB3-0B8D-42DD-BB80-2CE458478DDB}"/>
+                <a16:creationId xmlns:a16="http://schemas.microsoft.com/office/drawing/2014/main" id="{F5FD183A-EB92-4F13-B557-8CACA3BF0DF8}"/>
               </a:ext>
             </a:extLst>
             <ns6:hlinkClick xmlns:ns6="http://schemas.openxmlformats.org/drawingml/2006/main" xmlns:ns7="http://schemas.openxmlformats.org/officeDocument/2006/relationships" ns7:id="rIdClick4"/>
@@ -4439,7 +4439,7 @@
           <p:cNvPr id="6" name="hotspot-5">
             <a:extLst xmlns:a="http://schemas.openxmlformats.org/drawingml/2006/main">
               <a:ext uri="{FF2B5EF4-FFF2-40B4-BE49-F238E27FC236}">
-                <a16:creationId xmlns:a16="http://schemas.microsoft.com/office/drawing/2014/main" id="{567864A6-B989-40B9-AB1D-4CDED1644603}"/>
+                <a16:creationId xmlns:a16="http://schemas.microsoft.com/office/drawing/2014/main" id="{7FFBEFDC-0617-4F53-88FF-3A8EE73467B6}"/>
               </a:ext>
             </a:extLst>
             <ns8:hlinkClick xmlns:ns8="http://schemas.openxmlformats.org/drawingml/2006/main" xmlns:ns9="http://schemas.openxmlformats.org/officeDocument/2006/relationships" ns9:id="rIdClick5"/>
@@ -4472,7 +4472,7 @@
           <p:cNvPr id="7" name="hotspot-6">
             <a:extLst xmlns:a="http://schemas.openxmlformats.org/drawingml/2006/main">
               <a:ext uri="{FF2B5EF4-FFF2-40B4-BE49-F238E27FC236}">
-                <a16:creationId xmlns:a16="http://schemas.microsoft.com/office/drawing/2014/main" id="{CCFA0BBC-A6E0-4064-8201-2044459F42DD}"/>
+                <a16:creationId xmlns:a16="http://schemas.microsoft.com/office/drawing/2014/main" id="{83634A9E-20CF-44AB-9E4C-6F0E30717A07}"/>
               </a:ext>
             </a:extLst>
             <ns10:hlinkClick xmlns:ns10="http://schemas.openxmlformats.org/drawingml/2006/main" xmlns:ns11="http://schemas.openxmlformats.org/officeDocument/2006/relationships" ns11:id="rIdClick6"/>
@@ -4505,7 +4505,7 @@
           <p:cNvPr id="8" name="hotspot-7">
             <a:extLst xmlns:a="http://schemas.openxmlformats.org/drawingml/2006/main">
               <a:ext uri="{FF2B5EF4-FFF2-40B4-BE49-F238E27FC236}">
-                <a16:creationId xmlns:a16="http://schemas.microsoft.com/office/drawing/2014/main" id="{DD892DD6-7FA7-4924-8A71-36D6B27A2DB8}"/>
+                <a16:creationId xmlns:a16="http://schemas.microsoft.com/office/drawing/2014/main" id="{027E608C-C233-4949-B191-80DE2E1D6DA9}"/>
               </a:ext>
             </a:extLst>
             <ns12:hlinkClick xmlns:ns12="http://schemas.openxmlformats.org/drawingml/2006/main" xmlns:ns13="http://schemas.openxmlformats.org/officeDocument/2006/relationships" ns13:id="rIdClick7"/>
@@ -4536,7 +4536,7 @@
     </p:spTree>
     <p:extLst>
       <p:ext uri="{BB962C8B-B14F-4D97-AF65-F5344CB8AC3E}">
-        <p14:creationId xmlns:p14="http://schemas.microsoft.com/office/powerpoint/2010/main" val="1520101466"/>
+        <p14:creationId xmlns:p14="http://schemas.microsoft.com/office/powerpoint/2010/main" val="2002164812"/>
       </p:ext>
     </p:extLst>
   </p:cSld>

--- a/GIUMS-MediaKit-PT.pptx
+++ b/GIUMS-MediaKit-PT.pptx
@@ -2,18 +2,18 @@
 <file path=ppt/presentation.xml><?xml version="1.0" encoding="utf-8"?>
 <p:presentation xmlns:p="http://schemas.openxmlformats.org/presentationml/2006/main">
   <p:sldMasterIdLst>
-    <p:sldMasterId xmlns:r="http://schemas.openxmlformats.org/officeDocument/2006/relationships" id="2147483648" r:id="Rbd3c34f9cb2b4281"/>
+    <p:sldMasterId xmlns:r="http://schemas.openxmlformats.org/officeDocument/2006/relationships" id="2147483648" r:id="Rd9e0c88dec2e4277"/>
   </p:sldMasterIdLst>
   <p:notesMasterIdLst>
-    <p:notesMasterId xmlns:r="http://schemas.openxmlformats.org/officeDocument/2006/relationships" r:id="Rdbdf2c0f5e5a430d"/>
+    <p:notesMasterId xmlns:r="http://schemas.openxmlformats.org/officeDocument/2006/relationships" r:id="R691bb485c65041b2"/>
   </p:notesMasterIdLst>
   <p:sldIdLst>
-    <p:sldId xmlns:r="http://schemas.openxmlformats.org/officeDocument/2006/relationships" id="256" r:id="R0f3051f99dbb42fb"/>
-    <p:sldId xmlns:r="http://schemas.openxmlformats.org/officeDocument/2006/relationships" id="257" r:id="Rdcabbe6a1db14661"/>
-    <p:sldId xmlns:r="http://schemas.openxmlformats.org/officeDocument/2006/relationships" id="258" r:id="R8a5118b9d27c4f15"/>
-    <p:sldId xmlns:r="http://schemas.openxmlformats.org/officeDocument/2006/relationships" id="259" r:id="R7cd3a5c38c764ddb"/>
-    <p:sldId xmlns:r="http://schemas.openxmlformats.org/officeDocument/2006/relationships" id="260" r:id="R1f7aec35f37d4fb8"/>
-    <p:sldId xmlns:r="http://schemas.openxmlformats.org/officeDocument/2006/relationships" id="261" r:id="R7c7a3e54e1e44fba"/>
+    <p:sldId xmlns:r="http://schemas.openxmlformats.org/officeDocument/2006/relationships" id="256" r:id="Rbc72b23fb8ce4d58"/>
+    <p:sldId xmlns:r="http://schemas.openxmlformats.org/officeDocument/2006/relationships" id="257" r:id="R3cabac63af30486c"/>
+    <p:sldId xmlns:r="http://schemas.openxmlformats.org/officeDocument/2006/relationships" id="258" r:id="R0c30e59b886c4927"/>
+    <p:sldId xmlns:r="http://schemas.openxmlformats.org/officeDocument/2006/relationships" id="259" r:id="R97ff30c3453148d5"/>
+    <p:sldId xmlns:r="http://schemas.openxmlformats.org/officeDocument/2006/relationships" id="260" r:id="Rc87c150b3fee42fd"/>
+    <p:sldId xmlns:r="http://schemas.openxmlformats.org/officeDocument/2006/relationships" id="261" r:id="R5845eeddeb95403b"/>
   </p:sldIdLst>
   <p:sldSz cx="12192000" cy="6858000"/>
   <p:notesSz cx="6858000" cy="9144000"/>
@@ -844,7 +844,7 @@
           <p:cNvPr id="3" name="Title">
             <a:extLst xmlns:a="http://schemas.openxmlformats.org/drawingml/2006/main">
               <a:ext uri="{FF2B5EF4-FFF2-40B4-BE49-F238E27FC236}">
-                <a16:creationId xmlns:a16="http://schemas.microsoft.com/office/drawing/2014/main" id="{9C055592-D07C-4005-953C-B6CE337142BC}"/>
+                <a16:creationId xmlns:a16="http://schemas.microsoft.com/office/drawing/2014/main" id="{1BA42ED6-9FC6-4579-A730-AFF941E91C82}"/>
               </a:ext>
             </a:extLst>
           </p:cNvPr>
@@ -1073,7 +1073,7 @@
           <p:cNvPr id="2" name="Subtitle">
             <a:extLst xmlns:a="http://schemas.openxmlformats.org/drawingml/2006/main">
               <a:ext uri="{FF2B5EF4-FFF2-40B4-BE49-F238E27FC236}">
-                <a16:creationId xmlns:a16="http://schemas.microsoft.com/office/drawing/2014/main" id="{8CB29565-F29D-49CF-BE69-4261A191D2CE}"/>
+                <a16:creationId xmlns:a16="http://schemas.microsoft.com/office/drawing/2014/main" id="{B2002722-BA97-4A28-8092-07D047D9DFFF}"/>
               </a:ext>
             </a:extLst>
           </p:cNvPr>
@@ -1319,7 +1319,7 @@
           <p:cNvPr id="2" name="Section title">
             <a:extLst xmlns:a="http://schemas.openxmlformats.org/drawingml/2006/main">
               <a:ext uri="{FF2B5EF4-FFF2-40B4-BE49-F238E27FC236}">
-                <a16:creationId xmlns:a16="http://schemas.microsoft.com/office/drawing/2014/main" id="{9D21796B-4421-4E12-A0E1-A314E488DC2B}"/>
+                <a16:creationId xmlns:a16="http://schemas.microsoft.com/office/drawing/2014/main" id="{297237AF-DA46-4134-A0B5-843591E46F98}"/>
               </a:ext>
             </a:extLst>
           </p:cNvPr>
@@ -1565,7 +1565,7 @@
           <p:cNvPr id="3" name="Title">
             <a:extLst xmlns:a="http://schemas.openxmlformats.org/drawingml/2006/main">
               <a:ext uri="{FF2B5EF4-FFF2-40B4-BE49-F238E27FC236}">
-                <a16:creationId xmlns:a16="http://schemas.microsoft.com/office/drawing/2014/main" id="{3014D8AC-2B2B-4BDD-9399-FF971C7486DB}"/>
+                <a16:creationId xmlns:a16="http://schemas.microsoft.com/office/drawing/2014/main" id="{9064250D-D478-4335-BB5E-7F2A597D2DEF}"/>
               </a:ext>
             </a:extLst>
           </p:cNvPr>
@@ -1794,7 +1794,7 @@
           <p:cNvPr id="2" name="Body">
             <a:extLst xmlns:a="http://schemas.openxmlformats.org/drawingml/2006/main">
               <a:ext uri="{FF2B5EF4-FFF2-40B4-BE49-F238E27FC236}">
-                <a16:creationId xmlns:a16="http://schemas.microsoft.com/office/drawing/2014/main" id="{BE6C85CE-C151-4F1E-A4E3-12691E7093A8}"/>
+                <a16:creationId xmlns:a16="http://schemas.microsoft.com/office/drawing/2014/main" id="{A558AA5D-3AE4-42A6-ACBE-A4D413602D64}"/>
               </a:ext>
             </a:extLst>
           </p:cNvPr>
@@ -2040,7 +2040,7 @@
           <p:cNvPr id="4" name="Title">
             <a:extLst xmlns:a="http://schemas.openxmlformats.org/drawingml/2006/main">
               <a:ext uri="{FF2B5EF4-FFF2-40B4-BE49-F238E27FC236}">
-                <a16:creationId xmlns:a16="http://schemas.microsoft.com/office/drawing/2014/main" id="{42034BA0-C0D5-44E7-A885-0E1DB34FCEB7}"/>
+                <a16:creationId xmlns:a16="http://schemas.microsoft.com/office/drawing/2014/main" id="{EACF1EA4-BC8C-488E-9F42-1CF16284F2A9}"/>
               </a:ext>
             </a:extLst>
           </p:cNvPr>
@@ -2269,7 +2269,7 @@
           <p:cNvPr id="2" name="Left column">
             <a:extLst xmlns:a="http://schemas.openxmlformats.org/drawingml/2006/main">
               <a:ext uri="{FF2B5EF4-FFF2-40B4-BE49-F238E27FC236}">
-                <a16:creationId xmlns:a16="http://schemas.microsoft.com/office/drawing/2014/main" id="{6C748D4C-196F-472B-8237-67E9B5C6EB80}"/>
+                <a16:creationId xmlns:a16="http://schemas.microsoft.com/office/drawing/2014/main" id="{28A7189D-BEA8-4507-A037-62B78DC5DDE9}"/>
               </a:ext>
             </a:extLst>
           </p:cNvPr>
@@ -2498,7 +2498,7 @@
           <p:cNvPr id="3" name="Right column">
             <a:extLst xmlns:a="http://schemas.openxmlformats.org/drawingml/2006/main">
               <a:ext uri="{FF2B5EF4-FFF2-40B4-BE49-F238E27FC236}">
-                <a16:creationId xmlns:a16="http://schemas.microsoft.com/office/drawing/2014/main" id="{1EAADBB5-ABBC-4FDD-9F29-8B3FE57CB698}"/>
+                <a16:creationId xmlns:a16="http://schemas.microsoft.com/office/drawing/2014/main" id="{6D808CEE-D61D-4C49-9312-3E4981A6ACE0}"/>
               </a:ext>
             </a:extLst>
           </p:cNvPr>
@@ -2744,7 +2744,7 @@
           <p:cNvPr id="3" name="Title">
             <a:extLst xmlns:a="http://schemas.openxmlformats.org/drawingml/2006/main">
               <a:ext uri="{FF2B5EF4-FFF2-40B4-BE49-F238E27FC236}">
-                <a16:creationId xmlns:a16="http://schemas.microsoft.com/office/drawing/2014/main" id="{4994426E-4593-4BBA-9681-FFE53DC37222}"/>
+                <a16:creationId xmlns:a16="http://schemas.microsoft.com/office/drawing/2014/main" id="{E3AF98CB-1064-406B-B59B-ED2ED4D119C5}"/>
               </a:ext>
             </a:extLst>
           </p:cNvPr>
@@ -2973,7 +2973,7 @@
           <p:cNvPr id="2" name="Left column">
             <a:extLst xmlns:a="http://schemas.openxmlformats.org/drawingml/2006/main">
               <a:ext uri="{FF2B5EF4-FFF2-40B4-BE49-F238E27FC236}">
-                <a16:creationId xmlns:a16="http://schemas.microsoft.com/office/drawing/2014/main" id="{027D81C3-5512-466F-9122-DC952AEBB571}"/>
+                <a16:creationId xmlns:a16="http://schemas.microsoft.com/office/drawing/2014/main" id="{396BD7F4-167A-4DDA-9591-0CF5A79360B6}"/>
               </a:ext>
             </a:extLst>
           </p:cNvPr>
@@ -3240,12 +3240,12 @@
   </p:cSld>
   <p:clrMap bg1="lt1" tx1="dk1" bg2="lt2" tx2="dk2" accent1="accent1" accent2="accent2" accent3="accent3" accent4="accent4" accent5="accent5" accent6="accent6" hlink="hlink" folHlink="folHlink"/>
   <p:sldLayoutIdLst>
-    <p:sldLayoutId xmlns:r="http://schemas.openxmlformats.org/officeDocument/2006/relationships" id="2147483649" r:id="R287897abd33a400c"/>
-    <p:sldLayoutId xmlns:r="http://schemas.openxmlformats.org/officeDocument/2006/relationships" id="2147483650" r:id="R79ab2e2bad124b82"/>
-    <p:sldLayoutId xmlns:r="http://schemas.openxmlformats.org/officeDocument/2006/relationships" id="2147483651" r:id="R3dd2ea4547aa4cbc"/>
-    <p:sldLayoutId xmlns:r="http://schemas.openxmlformats.org/officeDocument/2006/relationships" id="2147483652" r:id="Rb9ca0f42130e4e53"/>
-    <p:sldLayoutId xmlns:r="http://schemas.openxmlformats.org/officeDocument/2006/relationships" id="2147483653" r:id="Rf0eaa61c6fad44b5"/>
-    <p:sldLayoutId xmlns:r="http://schemas.openxmlformats.org/officeDocument/2006/relationships" id="2147483654" r:id="R946f7b5934fd4633"/>
+    <p:sldLayoutId xmlns:r="http://schemas.openxmlformats.org/officeDocument/2006/relationships" id="2147483649" r:id="Rf83cd3eda9854d0d"/>
+    <p:sldLayoutId xmlns:r="http://schemas.openxmlformats.org/officeDocument/2006/relationships" id="2147483650" r:id="R61c9c34001014a57"/>
+    <p:sldLayoutId xmlns:r="http://schemas.openxmlformats.org/officeDocument/2006/relationships" id="2147483651" r:id="Radabe19cd3c94d6b"/>
+    <p:sldLayoutId xmlns:r="http://schemas.openxmlformats.org/officeDocument/2006/relationships" id="2147483652" r:id="Rc8bb49e1299e4ca9"/>
+    <p:sldLayoutId xmlns:r="http://schemas.openxmlformats.org/officeDocument/2006/relationships" id="2147483653" r:id="Ra8af3038d17c4e39"/>
+    <p:sldLayoutId xmlns:r="http://schemas.openxmlformats.org/officeDocument/2006/relationships" id="2147483654" r:id="R1a229ad4e6bb4120"/>
   </p:sldLayoutIdLst>
   <p:txStyles>
     <p:titleStyle>
@@ -3796,7 +3796,7 @@
           <p:cNvPr id="2" name="">
             <a:extLst xmlns:a="http://schemas.openxmlformats.org/drawingml/2006/main">
               <a:ext uri="{FF2B5EF4-FFF2-40B4-BE49-F238E27FC236}">
-                <a16:creationId xmlns:a16="http://schemas.microsoft.com/office/drawing/2014/main" id="{453EE571-DCBF-48DA-9AF1-CA4089B582DA}"/>
+                <a16:creationId xmlns:a16="http://schemas.microsoft.com/office/drawing/2014/main" id="{0D8CF176-0627-470F-BF2D-DE5BAEADF545}"/>
               </a:ext>
             </a:extLst>
           </p:cNvPr>
@@ -3806,7 +3806,7 @@
           <p:nvPr/>
         </p:nvPicPr>
         <p:blipFill>
-          <a:blip xmlns:r="http://schemas.openxmlformats.org/officeDocument/2006/relationships" xmlns:a="http://schemas.openxmlformats.org/drawingml/2006/main" r:embed="R900990bd805e4500"/>
+          <a:blip xmlns:r="http://schemas.openxmlformats.org/officeDocument/2006/relationships" xmlns:a="http://schemas.openxmlformats.org/drawingml/2006/main" r:embed="Rd49f7fc597c24718"/>
           <a:stretch xmlns:a="http://schemas.openxmlformats.org/drawingml/2006/main"/>
         </p:blipFill>
         <p:spPr>
@@ -3822,7 +3822,7 @@
     </p:spTree>
     <p:extLst>
       <p:ext uri="{BB962C8B-B14F-4D97-AF65-F5344CB8AC3E}">
-        <p14:creationId xmlns:p14="http://schemas.microsoft.com/office/powerpoint/2010/main" val="2144492008"/>
+        <p14:creationId xmlns:p14="http://schemas.microsoft.com/office/powerpoint/2010/main" val="1732663639"/>
       </p:ext>
     </p:extLst>
   </p:cSld>
@@ -3853,7 +3853,7 @@
           <p:cNvPr id="2" name="">
             <a:extLst xmlns:a="http://schemas.openxmlformats.org/drawingml/2006/main">
               <a:ext uri="{FF2B5EF4-FFF2-40B4-BE49-F238E27FC236}">
-                <a16:creationId xmlns:a16="http://schemas.microsoft.com/office/drawing/2014/main" id="{D0ABC65E-B7FE-483F-8DCC-74F5D5A1E368}"/>
+                <a16:creationId xmlns:a16="http://schemas.microsoft.com/office/drawing/2014/main" id="{F34C9C96-270A-4F1E-8A28-54945791C3EB}"/>
               </a:ext>
             </a:extLst>
           </p:cNvPr>
@@ -3863,7 +3863,7 @@
           <p:nvPr/>
         </p:nvPicPr>
         <p:blipFill>
-          <a:blip xmlns:r="http://schemas.openxmlformats.org/officeDocument/2006/relationships" xmlns:a="http://schemas.openxmlformats.org/drawingml/2006/main" r:embed="R5bd6632e8f5c4d29"/>
+          <a:blip xmlns:r="http://schemas.openxmlformats.org/officeDocument/2006/relationships" xmlns:a="http://schemas.openxmlformats.org/drawingml/2006/main" r:embed="Rcbd081957f7c47f0"/>
           <a:stretch xmlns:a="http://schemas.openxmlformats.org/drawingml/2006/main"/>
         </p:blipFill>
         <p:spPr>
@@ -3879,7 +3879,7 @@
     </p:spTree>
     <p:extLst>
       <p:ext uri="{BB962C8B-B14F-4D97-AF65-F5344CB8AC3E}">
-        <p14:creationId xmlns:p14="http://schemas.microsoft.com/office/powerpoint/2010/main" val="1192010909"/>
+        <p14:creationId xmlns:p14="http://schemas.microsoft.com/office/powerpoint/2010/main" val="562554676"/>
       </p:ext>
     </p:extLst>
   </p:cSld>
@@ -3910,7 +3910,7 @@
           <p:cNvPr id="3" name="">
             <a:extLst xmlns:a="http://schemas.openxmlformats.org/drawingml/2006/main">
               <a:ext uri="{FF2B5EF4-FFF2-40B4-BE49-F238E27FC236}">
-                <a16:creationId xmlns:a16="http://schemas.microsoft.com/office/drawing/2014/main" id="{35BCD8F4-B5A7-4F38-A5B4-1C4F7D3CA18C}"/>
+                <a16:creationId xmlns:a16="http://schemas.microsoft.com/office/drawing/2014/main" id="{756AA2B0-2266-4F0D-ADF7-00F6EDB0A51D}"/>
               </a:ext>
             </a:extLst>
           </p:cNvPr>
@@ -3920,7 +3920,7 @@
           <p:nvPr/>
         </p:nvPicPr>
         <p:blipFill>
-          <a:blip xmlns:r="http://schemas.openxmlformats.org/officeDocument/2006/relationships" xmlns:a="http://schemas.openxmlformats.org/drawingml/2006/main" r:embed="Raf90631749f041de"/>
+          <a:blip xmlns:r="http://schemas.openxmlformats.org/officeDocument/2006/relationships" xmlns:a="http://schemas.openxmlformats.org/drawingml/2006/main" r:embed="R33532a5707cd481f"/>
           <a:stretch xmlns:a="http://schemas.openxmlformats.org/drawingml/2006/main"/>
         </p:blipFill>
         <p:spPr>
@@ -3938,7 +3938,7 @@
           <p:cNvPr id="2" name="hotspot-1">
             <a:extLst xmlns:a="http://schemas.openxmlformats.org/drawingml/2006/main">
               <a:ext uri="{FF2B5EF4-FFF2-40B4-BE49-F238E27FC236}">
-                <a16:creationId xmlns:a16="http://schemas.microsoft.com/office/drawing/2014/main" id="{ADA98265-D0DB-4AB8-AA6F-B2F77E553C4E}"/>
+                <a16:creationId xmlns:a16="http://schemas.microsoft.com/office/drawing/2014/main" id="{08BCC421-3EC8-4266-978B-B44C270809CD}"/>
               </a:ext>
             </a:extLst>
             <ns0:hlinkClick xmlns:ns0="http://schemas.openxmlformats.org/drawingml/2006/main" xmlns:ns1="http://schemas.openxmlformats.org/officeDocument/2006/relationships" ns1:id="rIdClick1"/>
@@ -3950,7 +3950,7 @@
         </p:nvSpPr>
         <p:spPr>
           <a:xfrm xmlns:a="http://schemas.openxmlformats.org/drawingml/2006/main">
-            <a:off x="737250" y="5902650"/>
+            <a:off x="737250" y="5233050"/>
             <a:ext cx="1894950" cy="144000"/>
           </a:xfrm>
           <a:prstGeom xmlns:a="http://schemas.openxmlformats.org/drawingml/2006/main" prst="rect">
@@ -3969,7 +3969,7 @@
     </p:spTree>
     <p:extLst>
       <p:ext uri="{BB962C8B-B14F-4D97-AF65-F5344CB8AC3E}">
-        <p14:creationId xmlns:p14="http://schemas.microsoft.com/office/powerpoint/2010/main" val="1493999298"/>
+        <p14:creationId xmlns:p14="http://schemas.microsoft.com/office/powerpoint/2010/main" val="427090879"/>
       </p:ext>
     </p:extLst>
   </p:cSld>
@@ -4000,7 +4000,7 @@
           <p:cNvPr id="4" name="">
             <a:extLst xmlns:a="http://schemas.openxmlformats.org/drawingml/2006/main">
               <a:ext uri="{FF2B5EF4-FFF2-40B4-BE49-F238E27FC236}">
-                <a16:creationId xmlns:a16="http://schemas.microsoft.com/office/drawing/2014/main" id="{A9B0665F-2666-4FB3-9D8F-8D2580E95931}"/>
+                <a16:creationId xmlns:a16="http://schemas.microsoft.com/office/drawing/2014/main" id="{4877BF80-21C6-4E15-8672-E1F5A21924A8}"/>
               </a:ext>
             </a:extLst>
           </p:cNvPr>
@@ -4010,7 +4010,7 @@
           <p:nvPr/>
         </p:nvPicPr>
         <p:blipFill>
-          <a:blip xmlns:r="http://schemas.openxmlformats.org/officeDocument/2006/relationships" xmlns:a="http://schemas.openxmlformats.org/drawingml/2006/main" r:embed="R4ae9842c598b4e4e"/>
+          <a:blip xmlns:r="http://schemas.openxmlformats.org/officeDocument/2006/relationships" xmlns:a="http://schemas.openxmlformats.org/drawingml/2006/main" r:embed="R09c6852061fc46a4"/>
           <a:stretch xmlns:a="http://schemas.openxmlformats.org/drawingml/2006/main"/>
         </p:blipFill>
         <p:spPr>
@@ -4028,7 +4028,7 @@
           <p:cNvPr id="2" name="hotspot-1">
             <a:extLst xmlns:a="http://schemas.openxmlformats.org/drawingml/2006/main">
               <a:ext uri="{FF2B5EF4-FFF2-40B4-BE49-F238E27FC236}">
-                <a16:creationId xmlns:a16="http://schemas.microsoft.com/office/drawing/2014/main" id="{978852DA-9347-41C6-BAFA-2BBAC0C2E467}"/>
+                <a16:creationId xmlns:a16="http://schemas.microsoft.com/office/drawing/2014/main" id="{5E25BCE5-3514-4B5E-B35C-3D9EEAC65F47}"/>
               </a:ext>
             </a:extLst>
             <ns0:hlinkClick xmlns:ns0="http://schemas.openxmlformats.org/drawingml/2006/main" xmlns:ns1="http://schemas.openxmlformats.org/officeDocument/2006/relationships" ns1:id="rIdClick1"/>
@@ -4061,7 +4061,7 @@
           <p:cNvPr id="3" name="hotspot-2">
             <a:extLst xmlns:a="http://schemas.openxmlformats.org/drawingml/2006/main">
               <a:ext uri="{FF2B5EF4-FFF2-40B4-BE49-F238E27FC236}">
-                <a16:creationId xmlns:a16="http://schemas.microsoft.com/office/drawing/2014/main" id="{716F66CF-7535-41B1-B435-6A591D7FB40F}"/>
+                <a16:creationId xmlns:a16="http://schemas.microsoft.com/office/drawing/2014/main" id="{B0A09213-9291-470F-AA8A-0DA9BB85A170}"/>
               </a:ext>
             </a:extLst>
             <ns2:hlinkClick xmlns:ns2="http://schemas.openxmlformats.org/drawingml/2006/main" xmlns:ns3="http://schemas.openxmlformats.org/officeDocument/2006/relationships" ns3:id="rIdClick2"/>
@@ -4092,7 +4092,7 @@
     </p:spTree>
     <p:extLst>
       <p:ext uri="{BB962C8B-B14F-4D97-AF65-F5344CB8AC3E}">
-        <p14:creationId xmlns:p14="http://schemas.microsoft.com/office/powerpoint/2010/main" val="1102027454"/>
+        <p14:creationId xmlns:p14="http://schemas.microsoft.com/office/powerpoint/2010/main" val="121558911"/>
       </p:ext>
     </p:extLst>
   </p:cSld>
@@ -4123,7 +4123,7 @@
           <p:cNvPr id="5" name="">
             <a:extLst xmlns:a="http://schemas.openxmlformats.org/drawingml/2006/main">
               <a:ext uri="{FF2B5EF4-FFF2-40B4-BE49-F238E27FC236}">
-                <a16:creationId xmlns:a16="http://schemas.microsoft.com/office/drawing/2014/main" id="{7F83894C-E1C6-444F-BD9C-1FD7C711CAC0}"/>
+                <a16:creationId xmlns:a16="http://schemas.microsoft.com/office/drawing/2014/main" id="{7065795A-32F2-4120-A072-2D9BABC89715}"/>
               </a:ext>
             </a:extLst>
           </p:cNvPr>
@@ -4133,7 +4133,7 @@
           <p:nvPr/>
         </p:nvPicPr>
         <p:blipFill>
-          <a:blip xmlns:r="http://schemas.openxmlformats.org/officeDocument/2006/relationships" xmlns:a="http://schemas.openxmlformats.org/drawingml/2006/main" r:embed="R5b189558111a48cd"/>
+          <a:blip xmlns:r="http://schemas.openxmlformats.org/officeDocument/2006/relationships" xmlns:a="http://schemas.openxmlformats.org/drawingml/2006/main" r:embed="Rd9f117d01efb476d"/>
           <a:stretch xmlns:a="http://schemas.openxmlformats.org/drawingml/2006/main"/>
         </p:blipFill>
         <p:spPr>
@@ -4151,7 +4151,7 @@
           <p:cNvPr id="2" name="hotspot-1">
             <a:extLst xmlns:a="http://schemas.openxmlformats.org/drawingml/2006/main">
               <a:ext uri="{FF2B5EF4-FFF2-40B4-BE49-F238E27FC236}">
-                <a16:creationId xmlns:a16="http://schemas.microsoft.com/office/drawing/2014/main" id="{FF7E3C33-70B7-48A4-AAAC-DBED7F58EDFE}"/>
+                <a16:creationId xmlns:a16="http://schemas.microsoft.com/office/drawing/2014/main" id="{118472DE-8C95-48A1-B36B-3B35B6009489}"/>
               </a:ext>
             </a:extLst>
             <ns0:hlinkClick xmlns:ns0="http://schemas.openxmlformats.org/drawingml/2006/main" xmlns:ns1="http://schemas.openxmlformats.org/officeDocument/2006/relationships" ns1:id="rIdClick1"/>
@@ -4184,7 +4184,7 @@
           <p:cNvPr id="3" name="hotspot-2">
             <a:extLst xmlns:a="http://schemas.openxmlformats.org/drawingml/2006/main">
               <a:ext uri="{FF2B5EF4-FFF2-40B4-BE49-F238E27FC236}">
-                <a16:creationId xmlns:a16="http://schemas.microsoft.com/office/drawing/2014/main" id="{D0AFDA18-AA03-4C9B-B198-AE0FE761B78D}"/>
+                <a16:creationId xmlns:a16="http://schemas.microsoft.com/office/drawing/2014/main" id="{74CA7304-59D6-4B9E-87CE-2E13C8273A66}"/>
               </a:ext>
             </a:extLst>
             <ns2:hlinkClick xmlns:ns2="http://schemas.openxmlformats.org/drawingml/2006/main" xmlns:ns3="http://schemas.openxmlformats.org/officeDocument/2006/relationships" ns3:id="rIdClick2"/>
@@ -4217,7 +4217,7 @@
           <p:cNvPr id="4" name="hotspot-3">
             <a:extLst xmlns:a="http://schemas.openxmlformats.org/drawingml/2006/main">
               <a:ext uri="{FF2B5EF4-FFF2-40B4-BE49-F238E27FC236}">
-                <a16:creationId xmlns:a16="http://schemas.microsoft.com/office/drawing/2014/main" id="{42A2B996-C607-4001-8B3B-7916539689CF}"/>
+                <a16:creationId xmlns:a16="http://schemas.microsoft.com/office/drawing/2014/main" id="{ACC0563E-1EDC-4F58-8FA1-83D506716671}"/>
               </a:ext>
             </a:extLst>
             <ns4:hlinkClick xmlns:ns4="http://schemas.openxmlformats.org/drawingml/2006/main" xmlns:ns5="http://schemas.openxmlformats.org/officeDocument/2006/relationships" ns5:id="rIdClick3"/>
@@ -4248,7 +4248,7 @@
     </p:spTree>
     <p:extLst>
       <p:ext uri="{BB962C8B-B14F-4D97-AF65-F5344CB8AC3E}">
-        <p14:creationId xmlns:p14="http://schemas.microsoft.com/office/powerpoint/2010/main" val="273736721"/>
+        <p14:creationId xmlns:p14="http://schemas.microsoft.com/office/powerpoint/2010/main" val="129853747"/>
       </p:ext>
     </p:extLst>
   </p:cSld>
@@ -4279,7 +4279,7 @@
           <p:cNvPr id="9" name="">
             <a:extLst xmlns:a="http://schemas.openxmlformats.org/drawingml/2006/main">
               <a:ext uri="{FF2B5EF4-FFF2-40B4-BE49-F238E27FC236}">
-                <a16:creationId xmlns:a16="http://schemas.microsoft.com/office/drawing/2014/main" id="{44276371-7660-424C-983D-E53321875DC3}"/>
+                <a16:creationId xmlns:a16="http://schemas.microsoft.com/office/drawing/2014/main" id="{C10F6FDF-3080-4946-BD02-B5A8ED2EF6B6}"/>
               </a:ext>
             </a:extLst>
           </p:cNvPr>
@@ -4289,7 +4289,7 @@
           <p:nvPr/>
         </p:nvPicPr>
         <p:blipFill>
-          <a:blip xmlns:r="http://schemas.openxmlformats.org/officeDocument/2006/relationships" xmlns:a="http://schemas.openxmlformats.org/drawingml/2006/main" r:embed="Rbaeccaa66a5f4dd6"/>
+          <a:blip xmlns:r="http://schemas.openxmlformats.org/officeDocument/2006/relationships" xmlns:a="http://schemas.openxmlformats.org/drawingml/2006/main" r:embed="R1a2023c6042240c7"/>
           <a:stretch xmlns:a="http://schemas.openxmlformats.org/drawingml/2006/main"/>
         </p:blipFill>
         <p:spPr>
@@ -4307,7 +4307,7 @@
           <p:cNvPr id="2" name="hotspot-1">
             <a:extLst xmlns:a="http://schemas.openxmlformats.org/drawingml/2006/main">
               <a:ext uri="{FF2B5EF4-FFF2-40B4-BE49-F238E27FC236}">
-                <a16:creationId xmlns:a16="http://schemas.microsoft.com/office/drawing/2014/main" id="{EC909C11-509B-4763-B44B-B30693D8FF9A}"/>
+                <a16:creationId xmlns:a16="http://schemas.microsoft.com/office/drawing/2014/main" id="{E2D297C4-881F-467E-895B-127B2F2E1382}"/>
               </a:ext>
             </a:extLst>
             <ns0:hlinkClick xmlns:ns0="http://schemas.openxmlformats.org/drawingml/2006/main" xmlns:ns1="http://schemas.openxmlformats.org/officeDocument/2006/relationships" ns1:id="rIdClick1"/>
@@ -4340,7 +4340,7 @@
           <p:cNvPr id="3" name="hotspot-2">
             <a:extLst xmlns:a="http://schemas.openxmlformats.org/drawingml/2006/main">
               <a:ext uri="{FF2B5EF4-FFF2-40B4-BE49-F238E27FC236}">
-                <a16:creationId xmlns:a16="http://schemas.microsoft.com/office/drawing/2014/main" id="{C18D917F-39FF-40C5-806A-7F4BE02F1E22}"/>
+                <a16:creationId xmlns:a16="http://schemas.microsoft.com/office/drawing/2014/main" id="{E143E8F4-BBBC-4FA0-8543-F02E91AB1D7A}"/>
               </a:ext>
             </a:extLst>
             <ns2:hlinkClick xmlns:ns2="http://schemas.openxmlformats.org/drawingml/2006/main" xmlns:ns3="http://schemas.openxmlformats.org/officeDocument/2006/relationships" ns3:id="rIdClick2"/>
@@ -4373,7 +4373,7 @@
           <p:cNvPr id="4" name="hotspot-3">
             <a:extLst xmlns:a="http://schemas.openxmlformats.org/drawingml/2006/main">
               <a:ext uri="{FF2B5EF4-FFF2-40B4-BE49-F238E27FC236}">
-                <a16:creationId xmlns:a16="http://schemas.microsoft.com/office/drawing/2014/main" id="{293AE454-C82E-4DE6-AE17-5C2AB0C04CBC}"/>
+                <a16:creationId xmlns:a16="http://schemas.microsoft.com/office/drawing/2014/main" id="{E610D462-9A4E-4796-B986-6625920822C0}"/>
               </a:ext>
             </a:extLst>
             <ns4:hlinkClick xmlns:ns4="http://schemas.openxmlformats.org/drawingml/2006/main" xmlns:ns5="http://schemas.openxmlformats.org/officeDocument/2006/relationships" ns5:id="rIdClick3"/>
@@ -4406,7 +4406,7 @@
           <p:cNvPr id="5" name="hotspot-4">
             <a:extLst xmlns:a="http://schemas.openxmlformats.org/drawingml/2006/main">
               <a:ext uri="{FF2B5EF4-FFF2-40B4-BE49-F238E27FC236}">
-                <a16:creationId xmlns:a16="http://schemas.microsoft.com/office/drawing/2014/main" id="{F5FD183A-EB92-4F13-B557-8CACA3BF0DF8}"/>
+                <a16:creationId xmlns:a16="http://schemas.microsoft.com/office/drawing/2014/main" id="{7279870E-B89A-43BE-9BBF-42BF3CB6B1DD}"/>
               </a:ext>
             </a:extLst>
             <ns6:hlinkClick xmlns:ns6="http://schemas.openxmlformats.org/drawingml/2006/main" xmlns:ns7="http://schemas.openxmlformats.org/officeDocument/2006/relationships" ns7:id="rIdClick4"/>
@@ -4439,7 +4439,7 @@
           <p:cNvPr id="6" name="hotspot-5">
             <a:extLst xmlns:a="http://schemas.openxmlformats.org/drawingml/2006/main">
               <a:ext uri="{FF2B5EF4-FFF2-40B4-BE49-F238E27FC236}">
-                <a16:creationId xmlns:a16="http://schemas.microsoft.com/office/drawing/2014/main" id="{7FFBEFDC-0617-4F53-88FF-3A8EE73467B6}"/>
+                <a16:creationId xmlns:a16="http://schemas.microsoft.com/office/drawing/2014/main" id="{ED35AAD3-45D9-4B9C-AF51-3D42E9373AF7}"/>
               </a:ext>
             </a:extLst>
             <ns8:hlinkClick xmlns:ns8="http://schemas.openxmlformats.org/drawingml/2006/main" xmlns:ns9="http://schemas.openxmlformats.org/officeDocument/2006/relationships" ns9:id="rIdClick5"/>
@@ -4472,7 +4472,7 @@
           <p:cNvPr id="7" name="hotspot-6">
             <a:extLst xmlns:a="http://schemas.openxmlformats.org/drawingml/2006/main">
               <a:ext uri="{FF2B5EF4-FFF2-40B4-BE49-F238E27FC236}">
-                <a16:creationId xmlns:a16="http://schemas.microsoft.com/office/drawing/2014/main" id="{83634A9E-20CF-44AB-9E4C-6F0E30717A07}"/>
+                <a16:creationId xmlns:a16="http://schemas.microsoft.com/office/drawing/2014/main" id="{800272DC-3476-4DC2-897F-52ED3729DC2D}"/>
               </a:ext>
             </a:extLst>
             <ns10:hlinkClick xmlns:ns10="http://schemas.openxmlformats.org/drawingml/2006/main" xmlns:ns11="http://schemas.openxmlformats.org/officeDocument/2006/relationships" ns11:id="rIdClick6"/>
@@ -4505,7 +4505,7 @@
           <p:cNvPr id="8" name="hotspot-7">
             <a:extLst xmlns:a="http://schemas.openxmlformats.org/drawingml/2006/main">
               <a:ext uri="{FF2B5EF4-FFF2-40B4-BE49-F238E27FC236}">
-                <a16:creationId xmlns:a16="http://schemas.microsoft.com/office/drawing/2014/main" id="{027E608C-C233-4949-B191-80DE2E1D6DA9}"/>
+                <a16:creationId xmlns:a16="http://schemas.microsoft.com/office/drawing/2014/main" id="{F70ADA0A-58AC-4072-961B-C357F7F38BBE}"/>
               </a:ext>
             </a:extLst>
             <ns12:hlinkClick xmlns:ns12="http://schemas.openxmlformats.org/drawingml/2006/main" xmlns:ns13="http://schemas.openxmlformats.org/officeDocument/2006/relationships" ns13:id="rIdClick7"/>
@@ -4536,7 +4536,7 @@
     </p:spTree>
     <p:extLst>
       <p:ext uri="{BB962C8B-B14F-4D97-AF65-F5344CB8AC3E}">
-        <p14:creationId xmlns:p14="http://schemas.microsoft.com/office/powerpoint/2010/main" val="2002164812"/>
+        <p14:creationId xmlns:p14="http://schemas.microsoft.com/office/powerpoint/2010/main" val="859155815"/>
       </p:ext>
     </p:extLst>
   </p:cSld>

--- a/GIUMS-MediaKit-PT.pptx
+++ b/GIUMS-MediaKit-PT.pptx
@@ -2,18 +2,18 @@
 <file path=ppt/presentation.xml><?xml version="1.0" encoding="utf-8"?>
 <p:presentation xmlns:p="http://schemas.openxmlformats.org/presentationml/2006/main">
   <p:sldMasterIdLst>
-    <p:sldMasterId xmlns:r="http://schemas.openxmlformats.org/officeDocument/2006/relationships" id="2147483648" r:id="Rd9e0c88dec2e4277"/>
+    <p:sldMasterId xmlns:r="http://schemas.openxmlformats.org/officeDocument/2006/relationships" id="2147483648" r:id="Rbcd3613d28ce4ee8"/>
   </p:sldMasterIdLst>
   <p:notesMasterIdLst>
-    <p:notesMasterId xmlns:r="http://schemas.openxmlformats.org/officeDocument/2006/relationships" r:id="R691bb485c65041b2"/>
+    <p:notesMasterId xmlns:r="http://schemas.openxmlformats.org/officeDocument/2006/relationships" r:id="R494316b1af8e4367"/>
   </p:notesMasterIdLst>
   <p:sldIdLst>
-    <p:sldId xmlns:r="http://schemas.openxmlformats.org/officeDocument/2006/relationships" id="256" r:id="Rbc72b23fb8ce4d58"/>
-    <p:sldId xmlns:r="http://schemas.openxmlformats.org/officeDocument/2006/relationships" id="257" r:id="R3cabac63af30486c"/>
-    <p:sldId xmlns:r="http://schemas.openxmlformats.org/officeDocument/2006/relationships" id="258" r:id="R0c30e59b886c4927"/>
-    <p:sldId xmlns:r="http://schemas.openxmlformats.org/officeDocument/2006/relationships" id="259" r:id="R97ff30c3453148d5"/>
-    <p:sldId xmlns:r="http://schemas.openxmlformats.org/officeDocument/2006/relationships" id="260" r:id="Rc87c150b3fee42fd"/>
-    <p:sldId xmlns:r="http://schemas.openxmlformats.org/officeDocument/2006/relationships" id="261" r:id="R5845eeddeb95403b"/>
+    <p:sldId xmlns:r="http://schemas.openxmlformats.org/officeDocument/2006/relationships" id="256" r:id="R02ec567dcc794d1c"/>
+    <p:sldId xmlns:r="http://schemas.openxmlformats.org/officeDocument/2006/relationships" id="257" r:id="Rf846b6fc12d54f40"/>
+    <p:sldId xmlns:r="http://schemas.openxmlformats.org/officeDocument/2006/relationships" id="258" r:id="Rf8e0341267234103"/>
+    <p:sldId xmlns:r="http://schemas.openxmlformats.org/officeDocument/2006/relationships" id="259" r:id="R0cbfc77d05b542d1"/>
+    <p:sldId xmlns:r="http://schemas.openxmlformats.org/officeDocument/2006/relationships" id="260" r:id="R87e1836026094d96"/>
+    <p:sldId xmlns:r="http://schemas.openxmlformats.org/officeDocument/2006/relationships" id="261" r:id="R1f29f81f0e0e4c5a"/>
   </p:sldIdLst>
   <p:sldSz cx="12192000" cy="6858000"/>
   <p:notesSz cx="6858000" cy="9144000"/>
@@ -844,7 +844,7 @@
           <p:cNvPr id="3" name="Title">
             <a:extLst xmlns:a="http://schemas.openxmlformats.org/drawingml/2006/main">
               <a:ext uri="{FF2B5EF4-FFF2-40B4-BE49-F238E27FC236}">
-                <a16:creationId xmlns:a16="http://schemas.microsoft.com/office/drawing/2014/main" id="{1BA42ED6-9FC6-4579-A730-AFF941E91C82}"/>
+                <a16:creationId xmlns:a16="http://schemas.microsoft.com/office/drawing/2014/main" id="{F3B8B950-B56D-4D17-8EB0-89FEAD1A2827}"/>
               </a:ext>
             </a:extLst>
           </p:cNvPr>
@@ -1073,7 +1073,7 @@
           <p:cNvPr id="2" name="Subtitle">
             <a:extLst xmlns:a="http://schemas.openxmlformats.org/drawingml/2006/main">
               <a:ext uri="{FF2B5EF4-FFF2-40B4-BE49-F238E27FC236}">
-                <a16:creationId xmlns:a16="http://schemas.microsoft.com/office/drawing/2014/main" id="{B2002722-BA97-4A28-8092-07D047D9DFFF}"/>
+                <a16:creationId xmlns:a16="http://schemas.microsoft.com/office/drawing/2014/main" id="{641C13C8-9DF3-42E5-A447-A3B0BAEAC6BD}"/>
               </a:ext>
             </a:extLst>
           </p:cNvPr>
@@ -1319,7 +1319,7 @@
           <p:cNvPr id="2" name="Section title">
             <a:extLst xmlns:a="http://schemas.openxmlformats.org/drawingml/2006/main">
               <a:ext uri="{FF2B5EF4-FFF2-40B4-BE49-F238E27FC236}">
-                <a16:creationId xmlns:a16="http://schemas.microsoft.com/office/drawing/2014/main" id="{297237AF-DA46-4134-A0B5-843591E46F98}"/>
+                <a16:creationId xmlns:a16="http://schemas.microsoft.com/office/drawing/2014/main" id="{59357DDF-3E8E-4DE3-A003-54212C5447D2}"/>
               </a:ext>
             </a:extLst>
           </p:cNvPr>
@@ -1565,7 +1565,7 @@
           <p:cNvPr id="3" name="Title">
             <a:extLst xmlns:a="http://schemas.openxmlformats.org/drawingml/2006/main">
               <a:ext uri="{FF2B5EF4-FFF2-40B4-BE49-F238E27FC236}">
-                <a16:creationId xmlns:a16="http://schemas.microsoft.com/office/drawing/2014/main" id="{9064250D-D478-4335-BB5E-7F2A597D2DEF}"/>
+                <a16:creationId xmlns:a16="http://schemas.microsoft.com/office/drawing/2014/main" id="{D37B90F1-349A-4188-AB6E-05AA7707BA34}"/>
               </a:ext>
             </a:extLst>
           </p:cNvPr>
@@ -1794,7 +1794,7 @@
           <p:cNvPr id="2" name="Body">
             <a:extLst xmlns:a="http://schemas.openxmlformats.org/drawingml/2006/main">
               <a:ext uri="{FF2B5EF4-FFF2-40B4-BE49-F238E27FC236}">
-                <a16:creationId xmlns:a16="http://schemas.microsoft.com/office/drawing/2014/main" id="{A558AA5D-3AE4-42A6-ACBE-A4D413602D64}"/>
+                <a16:creationId xmlns:a16="http://schemas.microsoft.com/office/drawing/2014/main" id="{3C3DE567-41CB-475F-B557-02FD76E37B0D}"/>
               </a:ext>
             </a:extLst>
           </p:cNvPr>
@@ -2040,7 +2040,7 @@
           <p:cNvPr id="4" name="Title">
             <a:extLst xmlns:a="http://schemas.openxmlformats.org/drawingml/2006/main">
               <a:ext uri="{FF2B5EF4-FFF2-40B4-BE49-F238E27FC236}">
-                <a16:creationId xmlns:a16="http://schemas.microsoft.com/office/drawing/2014/main" id="{EACF1EA4-BC8C-488E-9F42-1CF16284F2A9}"/>
+                <a16:creationId xmlns:a16="http://schemas.microsoft.com/office/drawing/2014/main" id="{FA629D75-ED68-47F4-AD43-FF885C301072}"/>
               </a:ext>
             </a:extLst>
           </p:cNvPr>
@@ -2269,7 +2269,7 @@
           <p:cNvPr id="2" name="Left column">
             <a:extLst xmlns:a="http://schemas.openxmlformats.org/drawingml/2006/main">
               <a:ext uri="{FF2B5EF4-FFF2-40B4-BE49-F238E27FC236}">
-                <a16:creationId xmlns:a16="http://schemas.microsoft.com/office/drawing/2014/main" id="{28A7189D-BEA8-4507-A037-62B78DC5DDE9}"/>
+                <a16:creationId xmlns:a16="http://schemas.microsoft.com/office/drawing/2014/main" id="{5829F329-C245-4664-8E40-9B01356C2046}"/>
               </a:ext>
             </a:extLst>
           </p:cNvPr>
@@ -2498,7 +2498,7 @@
           <p:cNvPr id="3" name="Right column">
             <a:extLst xmlns:a="http://schemas.openxmlformats.org/drawingml/2006/main">
               <a:ext uri="{FF2B5EF4-FFF2-40B4-BE49-F238E27FC236}">
-                <a16:creationId xmlns:a16="http://schemas.microsoft.com/office/drawing/2014/main" id="{6D808CEE-D61D-4C49-9312-3E4981A6ACE0}"/>
+                <a16:creationId xmlns:a16="http://schemas.microsoft.com/office/drawing/2014/main" id="{1BAEC684-991A-487F-9B8F-B01296DC8F4C}"/>
               </a:ext>
             </a:extLst>
           </p:cNvPr>
@@ -2744,7 +2744,7 @@
           <p:cNvPr id="3" name="Title">
             <a:extLst xmlns:a="http://schemas.openxmlformats.org/drawingml/2006/main">
               <a:ext uri="{FF2B5EF4-FFF2-40B4-BE49-F238E27FC236}">
-                <a16:creationId xmlns:a16="http://schemas.microsoft.com/office/drawing/2014/main" id="{E3AF98CB-1064-406B-B59B-ED2ED4D119C5}"/>
+                <a16:creationId xmlns:a16="http://schemas.microsoft.com/office/drawing/2014/main" id="{6C3D733E-F31D-4503-A653-90E2FD1AFCE9}"/>
               </a:ext>
             </a:extLst>
           </p:cNvPr>
@@ -2973,7 +2973,7 @@
           <p:cNvPr id="2" name="Left column">
             <a:extLst xmlns:a="http://schemas.openxmlformats.org/drawingml/2006/main">
               <a:ext uri="{FF2B5EF4-FFF2-40B4-BE49-F238E27FC236}">
-                <a16:creationId xmlns:a16="http://schemas.microsoft.com/office/drawing/2014/main" id="{396BD7F4-167A-4DDA-9591-0CF5A79360B6}"/>
+                <a16:creationId xmlns:a16="http://schemas.microsoft.com/office/drawing/2014/main" id="{9C3FEDAE-7F7D-421B-9A86-C89797D8A3AD}"/>
               </a:ext>
             </a:extLst>
           </p:cNvPr>
@@ -3240,12 +3240,12 @@
   </p:cSld>
   <p:clrMap bg1="lt1" tx1="dk1" bg2="lt2" tx2="dk2" accent1="accent1" accent2="accent2" accent3="accent3" accent4="accent4" accent5="accent5" accent6="accent6" hlink="hlink" folHlink="folHlink"/>
   <p:sldLayoutIdLst>
-    <p:sldLayoutId xmlns:r="http://schemas.openxmlformats.org/officeDocument/2006/relationships" id="2147483649" r:id="Rf83cd3eda9854d0d"/>
-    <p:sldLayoutId xmlns:r="http://schemas.openxmlformats.org/officeDocument/2006/relationships" id="2147483650" r:id="R61c9c34001014a57"/>
-    <p:sldLayoutId xmlns:r="http://schemas.openxmlformats.org/officeDocument/2006/relationships" id="2147483651" r:id="Radabe19cd3c94d6b"/>
-    <p:sldLayoutId xmlns:r="http://schemas.openxmlformats.org/officeDocument/2006/relationships" id="2147483652" r:id="Rc8bb49e1299e4ca9"/>
-    <p:sldLayoutId xmlns:r="http://schemas.openxmlformats.org/officeDocument/2006/relationships" id="2147483653" r:id="Ra8af3038d17c4e39"/>
-    <p:sldLayoutId xmlns:r="http://schemas.openxmlformats.org/officeDocument/2006/relationships" id="2147483654" r:id="R1a229ad4e6bb4120"/>
+    <p:sldLayoutId xmlns:r="http://schemas.openxmlformats.org/officeDocument/2006/relationships" id="2147483649" r:id="R92dc811bfd494771"/>
+    <p:sldLayoutId xmlns:r="http://schemas.openxmlformats.org/officeDocument/2006/relationships" id="2147483650" r:id="Ra1c0ac294a7f4c9b"/>
+    <p:sldLayoutId xmlns:r="http://schemas.openxmlformats.org/officeDocument/2006/relationships" id="2147483651" r:id="Rdf566204d30e4ffd"/>
+    <p:sldLayoutId xmlns:r="http://schemas.openxmlformats.org/officeDocument/2006/relationships" id="2147483652" r:id="R28deebf7ab26451e"/>
+    <p:sldLayoutId xmlns:r="http://schemas.openxmlformats.org/officeDocument/2006/relationships" id="2147483653" r:id="Rc84ee9f13ddd4f93"/>
+    <p:sldLayoutId xmlns:r="http://schemas.openxmlformats.org/officeDocument/2006/relationships" id="2147483654" r:id="R2f68555de27c4e90"/>
   </p:sldLayoutIdLst>
   <p:txStyles>
     <p:titleStyle>
@@ -3796,7 +3796,7 @@
           <p:cNvPr id="2" name="">
             <a:extLst xmlns:a="http://schemas.openxmlformats.org/drawingml/2006/main">
               <a:ext uri="{FF2B5EF4-FFF2-40B4-BE49-F238E27FC236}">
-                <a16:creationId xmlns:a16="http://schemas.microsoft.com/office/drawing/2014/main" id="{0D8CF176-0627-470F-BF2D-DE5BAEADF545}"/>
+                <a16:creationId xmlns:a16="http://schemas.microsoft.com/office/drawing/2014/main" id="{1046EED7-1128-486F-A9C7-0AF2BDEF3C17}"/>
               </a:ext>
             </a:extLst>
           </p:cNvPr>
@@ -3806,7 +3806,7 @@
           <p:nvPr/>
         </p:nvPicPr>
         <p:blipFill>
-          <a:blip xmlns:r="http://schemas.openxmlformats.org/officeDocument/2006/relationships" xmlns:a="http://schemas.openxmlformats.org/drawingml/2006/main" r:embed="Rd49f7fc597c24718"/>
+          <a:blip xmlns:r="http://schemas.openxmlformats.org/officeDocument/2006/relationships" xmlns:a="http://schemas.openxmlformats.org/drawingml/2006/main" r:embed="R5835ee88a44f481a"/>
           <a:stretch xmlns:a="http://schemas.openxmlformats.org/drawingml/2006/main"/>
         </p:blipFill>
         <p:spPr>
@@ -3822,7 +3822,7 @@
     </p:spTree>
     <p:extLst>
       <p:ext uri="{BB962C8B-B14F-4D97-AF65-F5344CB8AC3E}">
-        <p14:creationId xmlns:p14="http://schemas.microsoft.com/office/powerpoint/2010/main" val="1732663639"/>
+        <p14:creationId xmlns:p14="http://schemas.microsoft.com/office/powerpoint/2010/main" val="299561096"/>
       </p:ext>
     </p:extLst>
   </p:cSld>
@@ -3853,7 +3853,7 @@
           <p:cNvPr id="2" name="">
             <a:extLst xmlns:a="http://schemas.openxmlformats.org/drawingml/2006/main">
               <a:ext uri="{FF2B5EF4-FFF2-40B4-BE49-F238E27FC236}">
-                <a16:creationId xmlns:a16="http://schemas.microsoft.com/office/drawing/2014/main" id="{F34C9C96-270A-4F1E-8A28-54945791C3EB}"/>
+                <a16:creationId xmlns:a16="http://schemas.microsoft.com/office/drawing/2014/main" id="{0B72DD26-629C-4FE1-BA8E-D44E5DF064E4}"/>
               </a:ext>
             </a:extLst>
           </p:cNvPr>
@@ -3863,7 +3863,7 @@
           <p:nvPr/>
         </p:nvPicPr>
         <p:blipFill>
-          <a:blip xmlns:r="http://schemas.openxmlformats.org/officeDocument/2006/relationships" xmlns:a="http://schemas.openxmlformats.org/drawingml/2006/main" r:embed="Rcbd081957f7c47f0"/>
+          <a:blip xmlns:r="http://schemas.openxmlformats.org/officeDocument/2006/relationships" xmlns:a="http://schemas.openxmlformats.org/drawingml/2006/main" r:embed="R5dd62984414b4cef"/>
           <a:stretch xmlns:a="http://schemas.openxmlformats.org/drawingml/2006/main"/>
         </p:blipFill>
         <p:spPr>
@@ -3879,7 +3879,7 @@
     </p:spTree>
     <p:extLst>
       <p:ext uri="{BB962C8B-B14F-4D97-AF65-F5344CB8AC3E}">
-        <p14:creationId xmlns:p14="http://schemas.microsoft.com/office/powerpoint/2010/main" val="562554676"/>
+        <p14:creationId xmlns:p14="http://schemas.microsoft.com/office/powerpoint/2010/main" val="177904639"/>
       </p:ext>
     </p:extLst>
   </p:cSld>
@@ -3910,7 +3910,7 @@
           <p:cNvPr id="3" name="">
             <a:extLst xmlns:a="http://schemas.openxmlformats.org/drawingml/2006/main">
               <a:ext uri="{FF2B5EF4-FFF2-40B4-BE49-F238E27FC236}">
-                <a16:creationId xmlns:a16="http://schemas.microsoft.com/office/drawing/2014/main" id="{756AA2B0-2266-4F0D-ADF7-00F6EDB0A51D}"/>
+                <a16:creationId xmlns:a16="http://schemas.microsoft.com/office/drawing/2014/main" id="{18A659E6-2488-482E-A7D0-BD241E82AE8E}"/>
               </a:ext>
             </a:extLst>
           </p:cNvPr>
@@ -3920,7 +3920,7 @@
           <p:nvPr/>
         </p:nvPicPr>
         <p:blipFill>
-          <a:blip xmlns:r="http://schemas.openxmlformats.org/officeDocument/2006/relationships" xmlns:a="http://schemas.openxmlformats.org/drawingml/2006/main" r:embed="R33532a5707cd481f"/>
+          <a:blip xmlns:r="http://schemas.openxmlformats.org/officeDocument/2006/relationships" xmlns:a="http://schemas.openxmlformats.org/drawingml/2006/main" r:embed="R053414f55c2d4f1f"/>
           <a:stretch xmlns:a="http://schemas.openxmlformats.org/drawingml/2006/main"/>
         </p:blipFill>
         <p:spPr>
@@ -3938,7 +3938,7 @@
           <p:cNvPr id="2" name="hotspot-1">
             <a:extLst xmlns:a="http://schemas.openxmlformats.org/drawingml/2006/main">
               <a:ext uri="{FF2B5EF4-FFF2-40B4-BE49-F238E27FC236}">
-                <a16:creationId xmlns:a16="http://schemas.microsoft.com/office/drawing/2014/main" id="{08BCC421-3EC8-4266-978B-B44C270809CD}"/>
+                <a16:creationId xmlns:a16="http://schemas.microsoft.com/office/drawing/2014/main" id="{47C30BDC-0CDD-4D94-AB9B-7EF59F7786CB}"/>
               </a:ext>
             </a:extLst>
             <ns0:hlinkClick xmlns:ns0="http://schemas.openxmlformats.org/drawingml/2006/main" xmlns:ns1="http://schemas.openxmlformats.org/officeDocument/2006/relationships" ns1:id="rIdClick1"/>
@@ -3950,7 +3950,7 @@
         </p:nvSpPr>
         <p:spPr>
           <a:xfrm xmlns:a="http://schemas.openxmlformats.org/drawingml/2006/main">
-            <a:off x="737250" y="5233050"/>
+            <a:off x="737250" y="5902650"/>
             <a:ext cx="1894950" cy="144000"/>
           </a:xfrm>
           <a:prstGeom xmlns:a="http://schemas.openxmlformats.org/drawingml/2006/main" prst="rect">
@@ -3969,7 +3969,7 @@
     </p:spTree>
     <p:extLst>
       <p:ext uri="{BB962C8B-B14F-4D97-AF65-F5344CB8AC3E}">
-        <p14:creationId xmlns:p14="http://schemas.microsoft.com/office/powerpoint/2010/main" val="427090879"/>
+        <p14:creationId xmlns:p14="http://schemas.microsoft.com/office/powerpoint/2010/main" val="1630577396"/>
       </p:ext>
     </p:extLst>
   </p:cSld>
@@ -4000,7 +4000,7 @@
           <p:cNvPr id="4" name="">
             <a:extLst xmlns:a="http://schemas.openxmlformats.org/drawingml/2006/main">
               <a:ext uri="{FF2B5EF4-FFF2-40B4-BE49-F238E27FC236}">
-                <a16:creationId xmlns:a16="http://schemas.microsoft.com/office/drawing/2014/main" id="{4877BF80-21C6-4E15-8672-E1F5A21924A8}"/>
+                <a16:creationId xmlns:a16="http://schemas.microsoft.com/office/drawing/2014/main" id="{BBB1467A-969B-4B35-BF3D-450A9415C1F1}"/>
               </a:ext>
             </a:extLst>
           </p:cNvPr>
@@ -4010,7 +4010,7 @@
           <p:nvPr/>
         </p:nvPicPr>
         <p:blipFill>
-          <a:blip xmlns:r="http://schemas.openxmlformats.org/officeDocument/2006/relationships" xmlns:a="http://schemas.openxmlformats.org/drawingml/2006/main" r:embed="R09c6852061fc46a4"/>
+          <a:blip xmlns:r="http://schemas.openxmlformats.org/officeDocument/2006/relationships" xmlns:a="http://schemas.openxmlformats.org/drawingml/2006/main" r:embed="R3b71ada80c52478a"/>
           <a:stretch xmlns:a="http://schemas.openxmlformats.org/drawingml/2006/main"/>
         </p:blipFill>
         <p:spPr>
@@ -4028,7 +4028,7 @@
           <p:cNvPr id="2" name="hotspot-1">
             <a:extLst xmlns:a="http://schemas.openxmlformats.org/drawingml/2006/main">
               <a:ext uri="{FF2B5EF4-FFF2-40B4-BE49-F238E27FC236}">
-                <a16:creationId xmlns:a16="http://schemas.microsoft.com/office/drawing/2014/main" id="{5E25BCE5-3514-4B5E-B35C-3D9EEAC65F47}"/>
+                <a16:creationId xmlns:a16="http://schemas.microsoft.com/office/drawing/2014/main" id="{39A8604F-0BFC-4E01-A294-3E4E26F994B9}"/>
               </a:ext>
             </a:extLst>
             <ns0:hlinkClick xmlns:ns0="http://schemas.openxmlformats.org/drawingml/2006/main" xmlns:ns1="http://schemas.openxmlformats.org/officeDocument/2006/relationships" ns1:id="rIdClick1"/>
@@ -4061,7 +4061,7 @@
           <p:cNvPr id="3" name="hotspot-2">
             <a:extLst xmlns:a="http://schemas.openxmlformats.org/drawingml/2006/main">
               <a:ext uri="{FF2B5EF4-FFF2-40B4-BE49-F238E27FC236}">
-                <a16:creationId xmlns:a16="http://schemas.microsoft.com/office/drawing/2014/main" id="{B0A09213-9291-470F-AA8A-0DA9BB85A170}"/>
+                <a16:creationId xmlns:a16="http://schemas.microsoft.com/office/drawing/2014/main" id="{530DFB1E-D40D-471E-9573-3BFBEE2C1C5E}"/>
               </a:ext>
             </a:extLst>
             <ns2:hlinkClick xmlns:ns2="http://schemas.openxmlformats.org/drawingml/2006/main" xmlns:ns3="http://schemas.openxmlformats.org/officeDocument/2006/relationships" ns3:id="rIdClick2"/>
@@ -4092,7 +4092,7 @@
     </p:spTree>
     <p:extLst>
       <p:ext uri="{BB962C8B-B14F-4D97-AF65-F5344CB8AC3E}">
-        <p14:creationId xmlns:p14="http://schemas.microsoft.com/office/powerpoint/2010/main" val="121558911"/>
+        <p14:creationId xmlns:p14="http://schemas.microsoft.com/office/powerpoint/2010/main" val="1491113317"/>
       </p:ext>
     </p:extLst>
   </p:cSld>
@@ -4123,7 +4123,7 @@
           <p:cNvPr id="5" name="">
             <a:extLst xmlns:a="http://schemas.openxmlformats.org/drawingml/2006/main">
               <a:ext uri="{FF2B5EF4-FFF2-40B4-BE49-F238E27FC236}">
-                <a16:creationId xmlns:a16="http://schemas.microsoft.com/office/drawing/2014/main" id="{7065795A-32F2-4120-A072-2D9BABC89715}"/>
+                <a16:creationId xmlns:a16="http://schemas.microsoft.com/office/drawing/2014/main" id="{491B4EB8-ACCB-41AB-A89D-5AC4E94A5453}"/>
               </a:ext>
             </a:extLst>
           </p:cNvPr>
@@ -4133,7 +4133,7 @@
           <p:nvPr/>
         </p:nvPicPr>
         <p:blipFill>
-          <a:blip xmlns:r="http://schemas.openxmlformats.org/officeDocument/2006/relationships" xmlns:a="http://schemas.openxmlformats.org/drawingml/2006/main" r:embed="Rd9f117d01efb476d"/>
+          <a:blip xmlns:r="http://schemas.openxmlformats.org/officeDocument/2006/relationships" xmlns:a="http://schemas.openxmlformats.org/drawingml/2006/main" r:embed="Rdacd68a458e14ed1"/>
           <a:stretch xmlns:a="http://schemas.openxmlformats.org/drawingml/2006/main"/>
         </p:blipFill>
         <p:spPr>
@@ -4151,7 +4151,7 @@
           <p:cNvPr id="2" name="hotspot-1">
             <a:extLst xmlns:a="http://schemas.openxmlformats.org/drawingml/2006/main">
               <a:ext uri="{FF2B5EF4-FFF2-40B4-BE49-F238E27FC236}">
-                <a16:creationId xmlns:a16="http://schemas.microsoft.com/office/drawing/2014/main" id="{118472DE-8C95-48A1-B36B-3B35B6009489}"/>
+                <a16:creationId xmlns:a16="http://schemas.microsoft.com/office/drawing/2014/main" id="{822CFAC4-AC7F-4CFE-9429-52C6676D7A5F}"/>
               </a:ext>
             </a:extLst>
             <ns0:hlinkClick xmlns:ns0="http://schemas.openxmlformats.org/drawingml/2006/main" xmlns:ns1="http://schemas.openxmlformats.org/officeDocument/2006/relationships" ns1:id="rIdClick1"/>
@@ -4184,7 +4184,7 @@
           <p:cNvPr id="3" name="hotspot-2">
             <a:extLst xmlns:a="http://schemas.openxmlformats.org/drawingml/2006/main">
               <a:ext uri="{FF2B5EF4-FFF2-40B4-BE49-F238E27FC236}">
-                <a16:creationId xmlns:a16="http://schemas.microsoft.com/office/drawing/2014/main" id="{74CA7304-59D6-4B9E-87CE-2E13C8273A66}"/>
+                <a16:creationId xmlns:a16="http://schemas.microsoft.com/office/drawing/2014/main" id="{2B213E13-99EA-4922-9BD9-662E29765722}"/>
               </a:ext>
             </a:extLst>
             <ns2:hlinkClick xmlns:ns2="http://schemas.openxmlformats.org/drawingml/2006/main" xmlns:ns3="http://schemas.openxmlformats.org/officeDocument/2006/relationships" ns3:id="rIdClick2"/>
@@ -4217,7 +4217,7 @@
           <p:cNvPr id="4" name="hotspot-3">
             <a:extLst xmlns:a="http://schemas.openxmlformats.org/drawingml/2006/main">
               <a:ext uri="{FF2B5EF4-FFF2-40B4-BE49-F238E27FC236}">
-                <a16:creationId xmlns:a16="http://schemas.microsoft.com/office/drawing/2014/main" id="{ACC0563E-1EDC-4F58-8FA1-83D506716671}"/>
+                <a16:creationId xmlns:a16="http://schemas.microsoft.com/office/drawing/2014/main" id="{7750BE96-AC98-4EAE-8050-0D0C5F790842}"/>
               </a:ext>
             </a:extLst>
             <ns4:hlinkClick xmlns:ns4="http://schemas.openxmlformats.org/drawingml/2006/main" xmlns:ns5="http://schemas.openxmlformats.org/officeDocument/2006/relationships" ns5:id="rIdClick3"/>
@@ -4248,7 +4248,7 @@
     </p:spTree>
     <p:extLst>
       <p:ext uri="{BB962C8B-B14F-4D97-AF65-F5344CB8AC3E}">
-        <p14:creationId xmlns:p14="http://schemas.microsoft.com/office/powerpoint/2010/main" val="129853747"/>
+        <p14:creationId xmlns:p14="http://schemas.microsoft.com/office/powerpoint/2010/main" val="305053527"/>
       </p:ext>
     </p:extLst>
   </p:cSld>
@@ -4279,7 +4279,7 @@
           <p:cNvPr id="9" name="">
             <a:extLst xmlns:a="http://schemas.openxmlformats.org/drawingml/2006/main">
               <a:ext uri="{FF2B5EF4-FFF2-40B4-BE49-F238E27FC236}">
-                <a16:creationId xmlns:a16="http://schemas.microsoft.com/office/drawing/2014/main" id="{C10F6FDF-3080-4946-BD02-B5A8ED2EF6B6}"/>
+                <a16:creationId xmlns:a16="http://schemas.microsoft.com/office/drawing/2014/main" id="{43E14B93-1598-4D61-9C6F-F90D23C0FA64}"/>
               </a:ext>
             </a:extLst>
           </p:cNvPr>
@@ -4289,7 +4289,7 @@
           <p:nvPr/>
         </p:nvPicPr>
         <p:blipFill>
-          <a:blip xmlns:r="http://schemas.openxmlformats.org/officeDocument/2006/relationships" xmlns:a="http://schemas.openxmlformats.org/drawingml/2006/main" r:embed="R1a2023c6042240c7"/>
+          <a:blip xmlns:r="http://schemas.openxmlformats.org/officeDocument/2006/relationships" xmlns:a="http://schemas.openxmlformats.org/drawingml/2006/main" r:embed="R33146d89c6934d13"/>
           <a:stretch xmlns:a="http://schemas.openxmlformats.org/drawingml/2006/main"/>
         </p:blipFill>
         <p:spPr>
@@ -4307,7 +4307,7 @@
           <p:cNvPr id="2" name="hotspot-1">
             <a:extLst xmlns:a="http://schemas.openxmlformats.org/drawingml/2006/main">
               <a:ext uri="{FF2B5EF4-FFF2-40B4-BE49-F238E27FC236}">
-                <a16:creationId xmlns:a16="http://schemas.microsoft.com/office/drawing/2014/main" id="{E2D297C4-881F-467E-895B-127B2F2E1382}"/>
+                <a16:creationId xmlns:a16="http://schemas.microsoft.com/office/drawing/2014/main" id="{6DCED2A7-6F1F-4F48-ACBD-1BC41D25BA98}"/>
               </a:ext>
             </a:extLst>
             <ns0:hlinkClick xmlns:ns0="http://schemas.openxmlformats.org/drawingml/2006/main" xmlns:ns1="http://schemas.openxmlformats.org/officeDocument/2006/relationships" ns1:id="rIdClick1"/>
@@ -4340,7 +4340,7 @@
           <p:cNvPr id="3" name="hotspot-2">
             <a:extLst xmlns:a="http://schemas.openxmlformats.org/drawingml/2006/main">
               <a:ext uri="{FF2B5EF4-FFF2-40B4-BE49-F238E27FC236}">
-                <a16:creationId xmlns:a16="http://schemas.microsoft.com/office/drawing/2014/main" id="{E143E8F4-BBBC-4FA0-8543-F02E91AB1D7A}"/>
+                <a16:creationId xmlns:a16="http://schemas.microsoft.com/office/drawing/2014/main" id="{C59D6FB4-BC33-450B-8392-3C5C938AAC4E}"/>
               </a:ext>
             </a:extLst>
             <ns2:hlinkClick xmlns:ns2="http://schemas.openxmlformats.org/drawingml/2006/main" xmlns:ns3="http://schemas.openxmlformats.org/officeDocument/2006/relationships" ns3:id="rIdClick2"/>
@@ -4373,7 +4373,7 @@
           <p:cNvPr id="4" name="hotspot-3">
             <a:extLst xmlns:a="http://schemas.openxmlformats.org/drawingml/2006/main">
               <a:ext uri="{FF2B5EF4-FFF2-40B4-BE49-F238E27FC236}">
-                <a16:creationId xmlns:a16="http://schemas.microsoft.com/office/drawing/2014/main" id="{E610D462-9A4E-4796-B986-6625920822C0}"/>
+                <a16:creationId xmlns:a16="http://schemas.microsoft.com/office/drawing/2014/main" id="{9219BC7F-092A-4AD8-A20E-F243A1DB6BB1}"/>
               </a:ext>
             </a:extLst>
             <ns4:hlinkClick xmlns:ns4="http://schemas.openxmlformats.org/drawingml/2006/main" xmlns:ns5="http://schemas.openxmlformats.org/officeDocument/2006/relationships" ns5:id="rIdClick3"/>
@@ -4406,7 +4406,7 @@
           <p:cNvPr id="5" name="hotspot-4">
             <a:extLst xmlns:a="http://schemas.openxmlformats.org/drawingml/2006/main">
               <a:ext uri="{FF2B5EF4-FFF2-40B4-BE49-F238E27FC236}">
-                <a16:creationId xmlns:a16="http://schemas.microsoft.com/office/drawing/2014/main" id="{7279870E-B89A-43BE-9BBF-42BF3CB6B1DD}"/>
+                <a16:creationId xmlns:a16="http://schemas.microsoft.com/office/drawing/2014/main" id="{D0AD9D5D-1B11-474B-8582-7D53C51AC8BB}"/>
               </a:ext>
             </a:extLst>
             <ns6:hlinkClick xmlns:ns6="http://schemas.openxmlformats.org/drawingml/2006/main" xmlns:ns7="http://schemas.openxmlformats.org/officeDocument/2006/relationships" ns7:id="rIdClick4"/>
@@ -4439,7 +4439,7 @@
           <p:cNvPr id="6" name="hotspot-5">
             <a:extLst xmlns:a="http://schemas.openxmlformats.org/drawingml/2006/main">
               <a:ext uri="{FF2B5EF4-FFF2-40B4-BE49-F238E27FC236}">
-                <a16:creationId xmlns:a16="http://schemas.microsoft.com/office/drawing/2014/main" id="{ED35AAD3-45D9-4B9C-AF51-3D42E9373AF7}"/>
+                <a16:creationId xmlns:a16="http://schemas.microsoft.com/office/drawing/2014/main" id="{F2000013-5A61-4C51-B5F3-F4A1C318D0DA}"/>
               </a:ext>
             </a:extLst>
             <ns8:hlinkClick xmlns:ns8="http://schemas.openxmlformats.org/drawingml/2006/main" xmlns:ns9="http://schemas.openxmlformats.org/officeDocument/2006/relationships" ns9:id="rIdClick5"/>
@@ -4472,7 +4472,7 @@
           <p:cNvPr id="7" name="hotspot-6">
             <a:extLst xmlns:a="http://schemas.openxmlformats.org/drawingml/2006/main">
               <a:ext uri="{FF2B5EF4-FFF2-40B4-BE49-F238E27FC236}">
-                <a16:creationId xmlns:a16="http://schemas.microsoft.com/office/drawing/2014/main" id="{800272DC-3476-4DC2-897F-52ED3729DC2D}"/>
+                <a16:creationId xmlns:a16="http://schemas.microsoft.com/office/drawing/2014/main" id="{D7FFC548-B17D-4082-AD36-C8D7A69CE8F3}"/>
               </a:ext>
             </a:extLst>
             <ns10:hlinkClick xmlns:ns10="http://schemas.openxmlformats.org/drawingml/2006/main" xmlns:ns11="http://schemas.openxmlformats.org/officeDocument/2006/relationships" ns11:id="rIdClick6"/>
@@ -4505,7 +4505,7 @@
           <p:cNvPr id="8" name="hotspot-7">
             <a:extLst xmlns:a="http://schemas.openxmlformats.org/drawingml/2006/main">
               <a:ext uri="{FF2B5EF4-FFF2-40B4-BE49-F238E27FC236}">
-                <a16:creationId xmlns:a16="http://schemas.microsoft.com/office/drawing/2014/main" id="{F70ADA0A-58AC-4072-961B-C357F7F38BBE}"/>
+                <a16:creationId xmlns:a16="http://schemas.microsoft.com/office/drawing/2014/main" id="{B615973C-223C-494A-968D-E25631BEB6E7}"/>
               </a:ext>
             </a:extLst>
             <ns12:hlinkClick xmlns:ns12="http://schemas.openxmlformats.org/drawingml/2006/main" xmlns:ns13="http://schemas.openxmlformats.org/officeDocument/2006/relationships" ns13:id="rIdClick7"/>
@@ -4536,7 +4536,7 @@
     </p:spTree>
     <p:extLst>
       <p:ext uri="{BB962C8B-B14F-4D97-AF65-F5344CB8AC3E}">
-        <p14:creationId xmlns:p14="http://schemas.microsoft.com/office/powerpoint/2010/main" val="859155815"/>
+        <p14:creationId xmlns:p14="http://schemas.microsoft.com/office/powerpoint/2010/main" val="133521818"/>
       </p:ext>
     </p:extLst>
   </p:cSld>

--- a/GIUMS-MediaKit-PT.pptx
+++ b/GIUMS-MediaKit-PT.pptx
@@ -2,18 +2,18 @@
 <file path=ppt/presentation.xml><?xml version="1.0" encoding="utf-8"?>
 <p:presentation xmlns:p="http://schemas.openxmlformats.org/presentationml/2006/main">
   <p:sldMasterIdLst>
-    <p:sldMasterId xmlns:r="http://schemas.openxmlformats.org/officeDocument/2006/relationships" id="2147483648" r:id="Rbcd3613d28ce4ee8"/>
+    <p:sldMasterId xmlns:r="http://schemas.openxmlformats.org/officeDocument/2006/relationships" id="2147483648" r:id="R7ca1180c2f214719"/>
   </p:sldMasterIdLst>
   <p:notesMasterIdLst>
-    <p:notesMasterId xmlns:r="http://schemas.openxmlformats.org/officeDocument/2006/relationships" r:id="R494316b1af8e4367"/>
+    <p:notesMasterId xmlns:r="http://schemas.openxmlformats.org/officeDocument/2006/relationships" r:id="R553afbddb5d046d2"/>
   </p:notesMasterIdLst>
   <p:sldIdLst>
-    <p:sldId xmlns:r="http://schemas.openxmlformats.org/officeDocument/2006/relationships" id="256" r:id="R02ec567dcc794d1c"/>
-    <p:sldId xmlns:r="http://schemas.openxmlformats.org/officeDocument/2006/relationships" id="257" r:id="Rf846b6fc12d54f40"/>
-    <p:sldId xmlns:r="http://schemas.openxmlformats.org/officeDocument/2006/relationships" id="258" r:id="Rf8e0341267234103"/>
-    <p:sldId xmlns:r="http://schemas.openxmlformats.org/officeDocument/2006/relationships" id="259" r:id="R0cbfc77d05b542d1"/>
-    <p:sldId xmlns:r="http://schemas.openxmlformats.org/officeDocument/2006/relationships" id="260" r:id="R87e1836026094d96"/>
-    <p:sldId xmlns:r="http://schemas.openxmlformats.org/officeDocument/2006/relationships" id="261" r:id="R1f29f81f0e0e4c5a"/>
+    <p:sldId xmlns:r="http://schemas.openxmlformats.org/officeDocument/2006/relationships" id="256" r:id="R0c3811dbdf894e6b"/>
+    <p:sldId xmlns:r="http://schemas.openxmlformats.org/officeDocument/2006/relationships" id="257" r:id="Rfbdc9a25d02341b4"/>
+    <p:sldId xmlns:r="http://schemas.openxmlformats.org/officeDocument/2006/relationships" id="258" r:id="Ra18cbea7aef8409a"/>
+    <p:sldId xmlns:r="http://schemas.openxmlformats.org/officeDocument/2006/relationships" id="259" r:id="R8842f2878d01441a"/>
+    <p:sldId xmlns:r="http://schemas.openxmlformats.org/officeDocument/2006/relationships" id="260" r:id="Rf1652adc5f684925"/>
+    <p:sldId xmlns:r="http://schemas.openxmlformats.org/officeDocument/2006/relationships" id="261" r:id="R5ee59fcfe0804fd8"/>
   </p:sldIdLst>
   <p:sldSz cx="12192000" cy="6858000"/>
   <p:notesSz cx="6858000" cy="9144000"/>
@@ -844,7 +844,7 @@
           <p:cNvPr id="3" name="Title">
             <a:extLst xmlns:a="http://schemas.openxmlformats.org/drawingml/2006/main">
               <a:ext uri="{FF2B5EF4-FFF2-40B4-BE49-F238E27FC236}">
-                <a16:creationId xmlns:a16="http://schemas.microsoft.com/office/drawing/2014/main" id="{F3B8B950-B56D-4D17-8EB0-89FEAD1A2827}"/>
+                <a16:creationId xmlns:a16="http://schemas.microsoft.com/office/drawing/2014/main" id="{A71BA55F-E44E-4347-8CBF-01F5BEBD8C02}"/>
               </a:ext>
             </a:extLst>
           </p:cNvPr>
@@ -1073,7 +1073,7 @@
           <p:cNvPr id="2" name="Subtitle">
             <a:extLst xmlns:a="http://schemas.openxmlformats.org/drawingml/2006/main">
               <a:ext uri="{FF2B5EF4-FFF2-40B4-BE49-F238E27FC236}">
-                <a16:creationId xmlns:a16="http://schemas.microsoft.com/office/drawing/2014/main" id="{641C13C8-9DF3-42E5-A447-A3B0BAEAC6BD}"/>
+                <a16:creationId xmlns:a16="http://schemas.microsoft.com/office/drawing/2014/main" id="{81C69BE4-386E-40E8-B899-1571128AB48A}"/>
               </a:ext>
             </a:extLst>
           </p:cNvPr>
@@ -1319,7 +1319,7 @@
           <p:cNvPr id="2" name="Section title">
             <a:extLst xmlns:a="http://schemas.openxmlformats.org/drawingml/2006/main">
               <a:ext uri="{FF2B5EF4-FFF2-40B4-BE49-F238E27FC236}">
-                <a16:creationId xmlns:a16="http://schemas.microsoft.com/office/drawing/2014/main" id="{59357DDF-3E8E-4DE3-A003-54212C5447D2}"/>
+                <a16:creationId xmlns:a16="http://schemas.microsoft.com/office/drawing/2014/main" id="{5A6A23C7-BAB0-49A5-9802-1EA1967669DF}"/>
               </a:ext>
             </a:extLst>
           </p:cNvPr>
@@ -1565,7 +1565,7 @@
           <p:cNvPr id="3" name="Title">
             <a:extLst xmlns:a="http://schemas.openxmlformats.org/drawingml/2006/main">
               <a:ext uri="{FF2B5EF4-FFF2-40B4-BE49-F238E27FC236}">
-                <a16:creationId xmlns:a16="http://schemas.microsoft.com/office/drawing/2014/main" id="{D37B90F1-349A-4188-AB6E-05AA7707BA34}"/>
+                <a16:creationId xmlns:a16="http://schemas.microsoft.com/office/drawing/2014/main" id="{DB0AE0E0-6395-4082-ABEF-CE01772DC417}"/>
               </a:ext>
             </a:extLst>
           </p:cNvPr>
@@ -1794,7 +1794,7 @@
           <p:cNvPr id="2" name="Body">
             <a:extLst xmlns:a="http://schemas.openxmlformats.org/drawingml/2006/main">
               <a:ext uri="{FF2B5EF4-FFF2-40B4-BE49-F238E27FC236}">
-                <a16:creationId xmlns:a16="http://schemas.microsoft.com/office/drawing/2014/main" id="{3C3DE567-41CB-475F-B557-02FD76E37B0D}"/>
+                <a16:creationId xmlns:a16="http://schemas.microsoft.com/office/drawing/2014/main" id="{502BE956-6A88-4DD8-A105-B8B06090DDC5}"/>
               </a:ext>
             </a:extLst>
           </p:cNvPr>
@@ -2040,7 +2040,7 @@
           <p:cNvPr id="4" name="Title">
             <a:extLst xmlns:a="http://schemas.openxmlformats.org/drawingml/2006/main">
               <a:ext uri="{FF2B5EF4-FFF2-40B4-BE49-F238E27FC236}">
-                <a16:creationId xmlns:a16="http://schemas.microsoft.com/office/drawing/2014/main" id="{FA629D75-ED68-47F4-AD43-FF885C301072}"/>
+                <a16:creationId xmlns:a16="http://schemas.microsoft.com/office/drawing/2014/main" id="{F839039E-632E-4B57-89B8-867CA8693F95}"/>
               </a:ext>
             </a:extLst>
           </p:cNvPr>
@@ -2269,7 +2269,7 @@
           <p:cNvPr id="2" name="Left column">
             <a:extLst xmlns:a="http://schemas.openxmlformats.org/drawingml/2006/main">
               <a:ext uri="{FF2B5EF4-FFF2-40B4-BE49-F238E27FC236}">
-                <a16:creationId xmlns:a16="http://schemas.microsoft.com/office/drawing/2014/main" id="{5829F329-C245-4664-8E40-9B01356C2046}"/>
+                <a16:creationId xmlns:a16="http://schemas.microsoft.com/office/drawing/2014/main" id="{59D20699-FCF5-4F0E-AC58-1AD2AA402CDF}"/>
               </a:ext>
             </a:extLst>
           </p:cNvPr>
@@ -2498,7 +2498,7 @@
           <p:cNvPr id="3" name="Right column">
             <a:extLst xmlns:a="http://schemas.openxmlformats.org/drawingml/2006/main">
               <a:ext uri="{FF2B5EF4-FFF2-40B4-BE49-F238E27FC236}">
-                <a16:creationId xmlns:a16="http://schemas.microsoft.com/office/drawing/2014/main" id="{1BAEC684-991A-487F-9B8F-B01296DC8F4C}"/>
+                <a16:creationId xmlns:a16="http://schemas.microsoft.com/office/drawing/2014/main" id="{A28A2912-C6D4-4D72-ADB5-67AA9DBA7C00}"/>
               </a:ext>
             </a:extLst>
           </p:cNvPr>
@@ -2744,7 +2744,7 @@
           <p:cNvPr id="3" name="Title">
             <a:extLst xmlns:a="http://schemas.openxmlformats.org/drawingml/2006/main">
               <a:ext uri="{FF2B5EF4-FFF2-40B4-BE49-F238E27FC236}">
-                <a16:creationId xmlns:a16="http://schemas.microsoft.com/office/drawing/2014/main" id="{6C3D733E-F31D-4503-A653-90E2FD1AFCE9}"/>
+                <a16:creationId xmlns:a16="http://schemas.microsoft.com/office/drawing/2014/main" id="{B038DCF6-302D-417A-A6C1-AD50A73E3027}"/>
               </a:ext>
             </a:extLst>
           </p:cNvPr>
@@ -2973,7 +2973,7 @@
           <p:cNvPr id="2" name="Left column">
             <a:extLst xmlns:a="http://schemas.openxmlformats.org/drawingml/2006/main">
               <a:ext uri="{FF2B5EF4-FFF2-40B4-BE49-F238E27FC236}">
-                <a16:creationId xmlns:a16="http://schemas.microsoft.com/office/drawing/2014/main" id="{9C3FEDAE-7F7D-421B-9A86-C89797D8A3AD}"/>
+                <a16:creationId xmlns:a16="http://schemas.microsoft.com/office/drawing/2014/main" id="{49C7D7CD-1A5E-42BA-838C-7EEA59F95770}"/>
               </a:ext>
             </a:extLst>
           </p:cNvPr>
@@ -3240,12 +3240,12 @@
   </p:cSld>
   <p:clrMap bg1="lt1" tx1="dk1" bg2="lt2" tx2="dk2" accent1="accent1" accent2="accent2" accent3="accent3" accent4="accent4" accent5="accent5" accent6="accent6" hlink="hlink" folHlink="folHlink"/>
   <p:sldLayoutIdLst>
-    <p:sldLayoutId xmlns:r="http://schemas.openxmlformats.org/officeDocument/2006/relationships" id="2147483649" r:id="R92dc811bfd494771"/>
-    <p:sldLayoutId xmlns:r="http://schemas.openxmlformats.org/officeDocument/2006/relationships" id="2147483650" r:id="Ra1c0ac294a7f4c9b"/>
-    <p:sldLayoutId xmlns:r="http://schemas.openxmlformats.org/officeDocument/2006/relationships" id="2147483651" r:id="Rdf566204d30e4ffd"/>
-    <p:sldLayoutId xmlns:r="http://schemas.openxmlformats.org/officeDocument/2006/relationships" id="2147483652" r:id="R28deebf7ab26451e"/>
-    <p:sldLayoutId xmlns:r="http://schemas.openxmlformats.org/officeDocument/2006/relationships" id="2147483653" r:id="Rc84ee9f13ddd4f93"/>
-    <p:sldLayoutId xmlns:r="http://schemas.openxmlformats.org/officeDocument/2006/relationships" id="2147483654" r:id="R2f68555de27c4e90"/>
+    <p:sldLayoutId xmlns:r="http://schemas.openxmlformats.org/officeDocument/2006/relationships" id="2147483649" r:id="R44544c6a99ef4516"/>
+    <p:sldLayoutId xmlns:r="http://schemas.openxmlformats.org/officeDocument/2006/relationships" id="2147483650" r:id="Rd36581a96ed345b6"/>
+    <p:sldLayoutId xmlns:r="http://schemas.openxmlformats.org/officeDocument/2006/relationships" id="2147483651" r:id="R2f077cff91014cad"/>
+    <p:sldLayoutId xmlns:r="http://schemas.openxmlformats.org/officeDocument/2006/relationships" id="2147483652" r:id="Rd148a23b864740f1"/>
+    <p:sldLayoutId xmlns:r="http://schemas.openxmlformats.org/officeDocument/2006/relationships" id="2147483653" r:id="R747a84dc1db6412f"/>
+    <p:sldLayoutId xmlns:r="http://schemas.openxmlformats.org/officeDocument/2006/relationships" id="2147483654" r:id="Rc2bb2d91bad6427e"/>
   </p:sldLayoutIdLst>
   <p:txStyles>
     <p:titleStyle>
@@ -3796,7 +3796,7 @@
           <p:cNvPr id="2" name="">
             <a:extLst xmlns:a="http://schemas.openxmlformats.org/drawingml/2006/main">
               <a:ext uri="{FF2B5EF4-FFF2-40B4-BE49-F238E27FC236}">
-                <a16:creationId xmlns:a16="http://schemas.microsoft.com/office/drawing/2014/main" id="{1046EED7-1128-486F-A9C7-0AF2BDEF3C17}"/>
+                <a16:creationId xmlns:a16="http://schemas.microsoft.com/office/drawing/2014/main" id="{2414F82F-7261-48BB-801D-D8B05C949CF7}"/>
               </a:ext>
             </a:extLst>
           </p:cNvPr>
@@ -3806,7 +3806,7 @@
           <p:nvPr/>
         </p:nvPicPr>
         <p:blipFill>
-          <a:blip xmlns:r="http://schemas.openxmlformats.org/officeDocument/2006/relationships" xmlns:a="http://schemas.openxmlformats.org/drawingml/2006/main" r:embed="R5835ee88a44f481a"/>
+          <a:blip xmlns:r="http://schemas.openxmlformats.org/officeDocument/2006/relationships" xmlns:a="http://schemas.openxmlformats.org/drawingml/2006/main" r:embed="Rf34deb89942a4afb"/>
           <a:stretch xmlns:a="http://schemas.openxmlformats.org/drawingml/2006/main"/>
         </p:blipFill>
         <p:spPr>
@@ -3822,7 +3822,7 @@
     </p:spTree>
     <p:extLst>
       <p:ext uri="{BB962C8B-B14F-4D97-AF65-F5344CB8AC3E}">
-        <p14:creationId xmlns:p14="http://schemas.microsoft.com/office/powerpoint/2010/main" val="299561096"/>
+        <p14:creationId xmlns:p14="http://schemas.microsoft.com/office/powerpoint/2010/main" val="894835759"/>
       </p:ext>
     </p:extLst>
   </p:cSld>
@@ -3853,7 +3853,7 @@
           <p:cNvPr id="2" name="">
             <a:extLst xmlns:a="http://schemas.openxmlformats.org/drawingml/2006/main">
               <a:ext uri="{FF2B5EF4-FFF2-40B4-BE49-F238E27FC236}">
-                <a16:creationId xmlns:a16="http://schemas.microsoft.com/office/drawing/2014/main" id="{0B72DD26-629C-4FE1-BA8E-D44E5DF064E4}"/>
+                <a16:creationId xmlns:a16="http://schemas.microsoft.com/office/drawing/2014/main" id="{3454B660-3AEB-4DA5-9BDC-76AEF2952091}"/>
               </a:ext>
             </a:extLst>
           </p:cNvPr>
@@ -3863,7 +3863,7 @@
           <p:nvPr/>
         </p:nvPicPr>
         <p:blipFill>
-          <a:blip xmlns:r="http://schemas.openxmlformats.org/officeDocument/2006/relationships" xmlns:a="http://schemas.openxmlformats.org/drawingml/2006/main" r:embed="R5dd62984414b4cef"/>
+          <a:blip xmlns:r="http://schemas.openxmlformats.org/officeDocument/2006/relationships" xmlns:a="http://schemas.openxmlformats.org/drawingml/2006/main" r:embed="Rd066acc4b7ec47a3"/>
           <a:stretch xmlns:a="http://schemas.openxmlformats.org/drawingml/2006/main"/>
         </p:blipFill>
         <p:spPr>
@@ -3879,7 +3879,7 @@
     </p:spTree>
     <p:extLst>
       <p:ext uri="{BB962C8B-B14F-4D97-AF65-F5344CB8AC3E}">
-        <p14:creationId xmlns:p14="http://schemas.microsoft.com/office/powerpoint/2010/main" val="177904639"/>
+        <p14:creationId xmlns:p14="http://schemas.microsoft.com/office/powerpoint/2010/main" val="498238488"/>
       </p:ext>
     </p:extLst>
   </p:cSld>
@@ -3910,7 +3910,7 @@
           <p:cNvPr id="3" name="">
             <a:extLst xmlns:a="http://schemas.openxmlformats.org/drawingml/2006/main">
               <a:ext uri="{FF2B5EF4-FFF2-40B4-BE49-F238E27FC236}">
-                <a16:creationId xmlns:a16="http://schemas.microsoft.com/office/drawing/2014/main" id="{18A659E6-2488-482E-A7D0-BD241E82AE8E}"/>
+                <a16:creationId xmlns:a16="http://schemas.microsoft.com/office/drawing/2014/main" id="{8580FDFC-D3D0-4357-8BB0-B0805A75A197}"/>
               </a:ext>
             </a:extLst>
           </p:cNvPr>
@@ -3920,7 +3920,7 @@
           <p:nvPr/>
         </p:nvPicPr>
         <p:blipFill>
-          <a:blip xmlns:r="http://schemas.openxmlformats.org/officeDocument/2006/relationships" xmlns:a="http://schemas.openxmlformats.org/drawingml/2006/main" r:embed="R053414f55c2d4f1f"/>
+          <a:blip xmlns:r="http://schemas.openxmlformats.org/officeDocument/2006/relationships" xmlns:a="http://schemas.openxmlformats.org/drawingml/2006/main" r:embed="R73d54542c22d40d7"/>
           <a:stretch xmlns:a="http://schemas.openxmlformats.org/drawingml/2006/main"/>
         </p:blipFill>
         <p:spPr>
@@ -3938,7 +3938,7 @@
           <p:cNvPr id="2" name="hotspot-1">
             <a:extLst xmlns:a="http://schemas.openxmlformats.org/drawingml/2006/main">
               <a:ext uri="{FF2B5EF4-FFF2-40B4-BE49-F238E27FC236}">
-                <a16:creationId xmlns:a16="http://schemas.microsoft.com/office/drawing/2014/main" id="{47C30BDC-0CDD-4D94-AB9B-7EF59F7786CB}"/>
+                <a16:creationId xmlns:a16="http://schemas.microsoft.com/office/drawing/2014/main" id="{0F9AC09E-2EE9-458D-AFCC-726BF42C7906}"/>
               </a:ext>
             </a:extLst>
             <ns0:hlinkClick xmlns:ns0="http://schemas.openxmlformats.org/drawingml/2006/main" xmlns:ns1="http://schemas.openxmlformats.org/officeDocument/2006/relationships" ns1:id="rIdClick1"/>
@@ -3969,7 +3969,7 @@
     </p:spTree>
     <p:extLst>
       <p:ext uri="{BB962C8B-B14F-4D97-AF65-F5344CB8AC3E}">
-        <p14:creationId xmlns:p14="http://schemas.microsoft.com/office/powerpoint/2010/main" val="1630577396"/>
+        <p14:creationId xmlns:p14="http://schemas.microsoft.com/office/powerpoint/2010/main" val="318749044"/>
       </p:ext>
     </p:extLst>
   </p:cSld>
@@ -4000,7 +4000,7 @@
           <p:cNvPr id="4" name="">
             <a:extLst xmlns:a="http://schemas.openxmlformats.org/drawingml/2006/main">
               <a:ext uri="{FF2B5EF4-FFF2-40B4-BE49-F238E27FC236}">
-                <a16:creationId xmlns:a16="http://schemas.microsoft.com/office/drawing/2014/main" id="{BBB1467A-969B-4B35-BF3D-450A9415C1F1}"/>
+                <a16:creationId xmlns:a16="http://schemas.microsoft.com/office/drawing/2014/main" id="{9E37EE24-D1F0-4136-87C7-2238230CD116}"/>
               </a:ext>
             </a:extLst>
           </p:cNvPr>
@@ -4010,7 +4010,7 @@
           <p:nvPr/>
         </p:nvPicPr>
         <p:blipFill>
-          <a:blip xmlns:r="http://schemas.openxmlformats.org/officeDocument/2006/relationships" xmlns:a="http://schemas.openxmlformats.org/drawingml/2006/main" r:embed="R3b71ada80c52478a"/>
+          <a:blip xmlns:r="http://schemas.openxmlformats.org/officeDocument/2006/relationships" xmlns:a="http://schemas.openxmlformats.org/drawingml/2006/main" r:embed="R65ce45e6ca024af7"/>
           <a:stretch xmlns:a="http://schemas.openxmlformats.org/drawingml/2006/main"/>
         </p:blipFill>
         <p:spPr>
@@ -4028,7 +4028,7 @@
           <p:cNvPr id="2" name="hotspot-1">
             <a:extLst xmlns:a="http://schemas.openxmlformats.org/drawingml/2006/main">
               <a:ext uri="{FF2B5EF4-FFF2-40B4-BE49-F238E27FC236}">
-                <a16:creationId xmlns:a16="http://schemas.microsoft.com/office/drawing/2014/main" id="{39A8604F-0BFC-4E01-A294-3E4E26F994B9}"/>
+                <a16:creationId xmlns:a16="http://schemas.microsoft.com/office/drawing/2014/main" id="{39227935-79ED-48A5-86B6-262934C9A1C5}"/>
               </a:ext>
             </a:extLst>
             <ns0:hlinkClick xmlns:ns0="http://schemas.openxmlformats.org/drawingml/2006/main" xmlns:ns1="http://schemas.openxmlformats.org/officeDocument/2006/relationships" ns1:id="rIdClick1"/>
@@ -4061,7 +4061,7 @@
           <p:cNvPr id="3" name="hotspot-2">
             <a:extLst xmlns:a="http://schemas.openxmlformats.org/drawingml/2006/main">
               <a:ext uri="{FF2B5EF4-FFF2-40B4-BE49-F238E27FC236}">
-                <a16:creationId xmlns:a16="http://schemas.microsoft.com/office/drawing/2014/main" id="{530DFB1E-D40D-471E-9573-3BFBEE2C1C5E}"/>
+                <a16:creationId xmlns:a16="http://schemas.microsoft.com/office/drawing/2014/main" id="{C990242C-CF4C-4182-B500-CF70A2539D86}"/>
               </a:ext>
             </a:extLst>
             <ns2:hlinkClick xmlns:ns2="http://schemas.openxmlformats.org/drawingml/2006/main" xmlns:ns3="http://schemas.openxmlformats.org/officeDocument/2006/relationships" ns3:id="rIdClick2"/>
@@ -4092,7 +4092,7 @@
     </p:spTree>
     <p:extLst>
       <p:ext uri="{BB962C8B-B14F-4D97-AF65-F5344CB8AC3E}">
-        <p14:creationId xmlns:p14="http://schemas.microsoft.com/office/powerpoint/2010/main" val="1491113317"/>
+        <p14:creationId xmlns:p14="http://schemas.microsoft.com/office/powerpoint/2010/main" val="1416826293"/>
       </p:ext>
     </p:extLst>
   </p:cSld>
@@ -4123,7 +4123,7 @@
           <p:cNvPr id="5" name="">
             <a:extLst xmlns:a="http://schemas.openxmlformats.org/drawingml/2006/main">
               <a:ext uri="{FF2B5EF4-FFF2-40B4-BE49-F238E27FC236}">
-                <a16:creationId xmlns:a16="http://schemas.microsoft.com/office/drawing/2014/main" id="{491B4EB8-ACCB-41AB-A89D-5AC4E94A5453}"/>
+                <a16:creationId xmlns:a16="http://schemas.microsoft.com/office/drawing/2014/main" id="{FF8B40A6-DD74-4530-A368-EE2EF5B01D30}"/>
               </a:ext>
             </a:extLst>
           </p:cNvPr>
@@ -4133,7 +4133,7 @@
           <p:nvPr/>
         </p:nvPicPr>
         <p:blipFill>
-          <a:blip xmlns:r="http://schemas.openxmlformats.org/officeDocument/2006/relationships" xmlns:a="http://schemas.openxmlformats.org/drawingml/2006/main" r:embed="Rdacd68a458e14ed1"/>
+          <a:blip xmlns:r="http://schemas.openxmlformats.org/officeDocument/2006/relationships" xmlns:a="http://schemas.openxmlformats.org/drawingml/2006/main" r:embed="R5059f49ae82049ca"/>
           <a:stretch xmlns:a="http://schemas.openxmlformats.org/drawingml/2006/main"/>
         </p:blipFill>
         <p:spPr>
@@ -4151,7 +4151,7 @@
           <p:cNvPr id="2" name="hotspot-1">
             <a:extLst xmlns:a="http://schemas.openxmlformats.org/drawingml/2006/main">
               <a:ext uri="{FF2B5EF4-FFF2-40B4-BE49-F238E27FC236}">
-                <a16:creationId xmlns:a16="http://schemas.microsoft.com/office/drawing/2014/main" id="{822CFAC4-AC7F-4CFE-9429-52C6676D7A5F}"/>
+                <a16:creationId xmlns:a16="http://schemas.microsoft.com/office/drawing/2014/main" id="{FCCAFA95-0452-4957-9CA0-269227D11668}"/>
               </a:ext>
             </a:extLst>
             <ns0:hlinkClick xmlns:ns0="http://schemas.openxmlformats.org/drawingml/2006/main" xmlns:ns1="http://schemas.openxmlformats.org/officeDocument/2006/relationships" ns1:id="rIdClick1"/>
@@ -4184,7 +4184,7 @@
           <p:cNvPr id="3" name="hotspot-2">
             <a:extLst xmlns:a="http://schemas.openxmlformats.org/drawingml/2006/main">
               <a:ext uri="{FF2B5EF4-FFF2-40B4-BE49-F238E27FC236}">
-                <a16:creationId xmlns:a16="http://schemas.microsoft.com/office/drawing/2014/main" id="{2B213E13-99EA-4922-9BD9-662E29765722}"/>
+                <a16:creationId xmlns:a16="http://schemas.microsoft.com/office/drawing/2014/main" id="{D2E54FF0-79CD-4E94-90F3-591231209DE1}"/>
               </a:ext>
             </a:extLst>
             <ns2:hlinkClick xmlns:ns2="http://schemas.openxmlformats.org/drawingml/2006/main" xmlns:ns3="http://schemas.openxmlformats.org/officeDocument/2006/relationships" ns3:id="rIdClick2"/>
@@ -4217,7 +4217,7 @@
           <p:cNvPr id="4" name="hotspot-3">
             <a:extLst xmlns:a="http://schemas.openxmlformats.org/drawingml/2006/main">
               <a:ext uri="{FF2B5EF4-FFF2-40B4-BE49-F238E27FC236}">
-                <a16:creationId xmlns:a16="http://schemas.microsoft.com/office/drawing/2014/main" id="{7750BE96-AC98-4EAE-8050-0D0C5F790842}"/>
+                <a16:creationId xmlns:a16="http://schemas.microsoft.com/office/drawing/2014/main" id="{DC6E0650-6B6F-4D4C-B174-6672CB3EA881}"/>
               </a:ext>
             </a:extLst>
             <ns4:hlinkClick xmlns:ns4="http://schemas.openxmlformats.org/drawingml/2006/main" xmlns:ns5="http://schemas.openxmlformats.org/officeDocument/2006/relationships" ns5:id="rIdClick3"/>
@@ -4248,7 +4248,7 @@
     </p:spTree>
     <p:extLst>
       <p:ext uri="{BB962C8B-B14F-4D97-AF65-F5344CB8AC3E}">
-        <p14:creationId xmlns:p14="http://schemas.microsoft.com/office/powerpoint/2010/main" val="305053527"/>
+        <p14:creationId xmlns:p14="http://schemas.microsoft.com/office/powerpoint/2010/main" val="1369714733"/>
       </p:ext>
     </p:extLst>
   </p:cSld>
@@ -4279,7 +4279,7 @@
           <p:cNvPr id="9" name="">
             <a:extLst xmlns:a="http://schemas.openxmlformats.org/drawingml/2006/main">
               <a:ext uri="{FF2B5EF4-FFF2-40B4-BE49-F238E27FC236}">
-                <a16:creationId xmlns:a16="http://schemas.microsoft.com/office/drawing/2014/main" id="{43E14B93-1598-4D61-9C6F-F90D23C0FA64}"/>
+                <a16:creationId xmlns:a16="http://schemas.microsoft.com/office/drawing/2014/main" id="{390F67F2-072D-4AD5-9A66-B4B94C40C829}"/>
               </a:ext>
             </a:extLst>
           </p:cNvPr>
@@ -4289,7 +4289,7 @@
           <p:nvPr/>
         </p:nvPicPr>
         <p:blipFill>
-          <a:blip xmlns:r="http://schemas.openxmlformats.org/officeDocument/2006/relationships" xmlns:a="http://schemas.openxmlformats.org/drawingml/2006/main" r:embed="R33146d89c6934d13"/>
+          <a:blip xmlns:r="http://schemas.openxmlformats.org/officeDocument/2006/relationships" xmlns:a="http://schemas.openxmlformats.org/drawingml/2006/main" r:embed="R56e255505dbc4a83"/>
           <a:stretch xmlns:a="http://schemas.openxmlformats.org/drawingml/2006/main"/>
         </p:blipFill>
         <p:spPr>
@@ -4307,7 +4307,7 @@
           <p:cNvPr id="2" name="hotspot-1">
             <a:extLst xmlns:a="http://schemas.openxmlformats.org/drawingml/2006/main">
               <a:ext uri="{FF2B5EF4-FFF2-40B4-BE49-F238E27FC236}">
-                <a16:creationId xmlns:a16="http://schemas.microsoft.com/office/drawing/2014/main" id="{6DCED2A7-6F1F-4F48-ACBD-1BC41D25BA98}"/>
+                <a16:creationId xmlns:a16="http://schemas.microsoft.com/office/drawing/2014/main" id="{A1F4B53C-00F2-40DC-942F-2F5E90CC3304}"/>
               </a:ext>
             </a:extLst>
             <ns0:hlinkClick xmlns:ns0="http://schemas.openxmlformats.org/drawingml/2006/main" xmlns:ns1="http://schemas.openxmlformats.org/officeDocument/2006/relationships" ns1:id="rIdClick1"/>
@@ -4340,7 +4340,7 @@
           <p:cNvPr id="3" name="hotspot-2">
             <a:extLst xmlns:a="http://schemas.openxmlformats.org/drawingml/2006/main">
               <a:ext uri="{FF2B5EF4-FFF2-40B4-BE49-F238E27FC236}">
-                <a16:creationId xmlns:a16="http://schemas.microsoft.com/office/drawing/2014/main" id="{C59D6FB4-BC33-450B-8392-3C5C938AAC4E}"/>
+                <a16:creationId xmlns:a16="http://schemas.microsoft.com/office/drawing/2014/main" id="{44422357-244F-4F03-B3A5-5882AE93FDCC}"/>
               </a:ext>
             </a:extLst>
             <ns2:hlinkClick xmlns:ns2="http://schemas.openxmlformats.org/drawingml/2006/main" xmlns:ns3="http://schemas.openxmlformats.org/officeDocument/2006/relationships" ns3:id="rIdClick2"/>
@@ -4373,7 +4373,7 @@
           <p:cNvPr id="4" name="hotspot-3">
             <a:extLst xmlns:a="http://schemas.openxmlformats.org/drawingml/2006/main">
               <a:ext uri="{FF2B5EF4-FFF2-40B4-BE49-F238E27FC236}">
-                <a16:creationId xmlns:a16="http://schemas.microsoft.com/office/drawing/2014/main" id="{9219BC7F-092A-4AD8-A20E-F243A1DB6BB1}"/>
+                <a16:creationId xmlns:a16="http://schemas.microsoft.com/office/drawing/2014/main" id="{F7BCD1EA-7687-4D68-9EFB-9F7194434A8E}"/>
               </a:ext>
             </a:extLst>
             <ns4:hlinkClick xmlns:ns4="http://schemas.openxmlformats.org/drawingml/2006/main" xmlns:ns5="http://schemas.openxmlformats.org/officeDocument/2006/relationships" ns5:id="rIdClick3"/>
@@ -4406,7 +4406,7 @@
           <p:cNvPr id="5" name="hotspot-4">
             <a:extLst xmlns:a="http://schemas.openxmlformats.org/drawingml/2006/main">
               <a:ext uri="{FF2B5EF4-FFF2-40B4-BE49-F238E27FC236}">
-                <a16:creationId xmlns:a16="http://schemas.microsoft.com/office/drawing/2014/main" id="{D0AD9D5D-1B11-474B-8582-7D53C51AC8BB}"/>
+                <a16:creationId xmlns:a16="http://schemas.microsoft.com/office/drawing/2014/main" id="{E26AE29B-58F7-4EE4-BD74-B440E7A0FF59}"/>
               </a:ext>
             </a:extLst>
             <ns6:hlinkClick xmlns:ns6="http://schemas.openxmlformats.org/drawingml/2006/main" xmlns:ns7="http://schemas.openxmlformats.org/officeDocument/2006/relationships" ns7:id="rIdClick4"/>
@@ -4439,7 +4439,7 @@
           <p:cNvPr id="6" name="hotspot-5">
             <a:extLst xmlns:a="http://schemas.openxmlformats.org/drawingml/2006/main">
               <a:ext uri="{FF2B5EF4-FFF2-40B4-BE49-F238E27FC236}">
-                <a16:creationId xmlns:a16="http://schemas.microsoft.com/office/drawing/2014/main" id="{F2000013-5A61-4C51-B5F3-F4A1C318D0DA}"/>
+                <a16:creationId xmlns:a16="http://schemas.microsoft.com/office/drawing/2014/main" id="{6803A698-AC42-4CE0-8663-1C7FC000B89C}"/>
               </a:ext>
             </a:extLst>
             <ns8:hlinkClick xmlns:ns8="http://schemas.openxmlformats.org/drawingml/2006/main" xmlns:ns9="http://schemas.openxmlformats.org/officeDocument/2006/relationships" ns9:id="rIdClick5"/>
@@ -4472,7 +4472,7 @@
           <p:cNvPr id="7" name="hotspot-6">
             <a:extLst xmlns:a="http://schemas.openxmlformats.org/drawingml/2006/main">
               <a:ext uri="{FF2B5EF4-FFF2-40B4-BE49-F238E27FC236}">
-                <a16:creationId xmlns:a16="http://schemas.microsoft.com/office/drawing/2014/main" id="{D7FFC548-B17D-4082-AD36-C8D7A69CE8F3}"/>
+                <a16:creationId xmlns:a16="http://schemas.microsoft.com/office/drawing/2014/main" id="{B4104F5C-E320-4FD4-99E5-D71EB7039441}"/>
               </a:ext>
             </a:extLst>
             <ns10:hlinkClick xmlns:ns10="http://schemas.openxmlformats.org/drawingml/2006/main" xmlns:ns11="http://schemas.openxmlformats.org/officeDocument/2006/relationships" ns11:id="rIdClick6"/>
@@ -4505,7 +4505,7 @@
           <p:cNvPr id="8" name="hotspot-7">
             <a:extLst xmlns:a="http://schemas.openxmlformats.org/drawingml/2006/main">
               <a:ext uri="{FF2B5EF4-FFF2-40B4-BE49-F238E27FC236}">
-                <a16:creationId xmlns:a16="http://schemas.microsoft.com/office/drawing/2014/main" id="{B615973C-223C-494A-968D-E25631BEB6E7}"/>
+                <a16:creationId xmlns:a16="http://schemas.microsoft.com/office/drawing/2014/main" id="{F1ECD539-921B-4B94-AC46-060241D158D0}"/>
               </a:ext>
             </a:extLst>
             <ns12:hlinkClick xmlns:ns12="http://schemas.openxmlformats.org/drawingml/2006/main" xmlns:ns13="http://schemas.openxmlformats.org/officeDocument/2006/relationships" ns13:id="rIdClick7"/>
@@ -4536,7 +4536,7 @@
     </p:spTree>
     <p:extLst>
       <p:ext uri="{BB962C8B-B14F-4D97-AF65-F5344CB8AC3E}">
-        <p14:creationId xmlns:p14="http://schemas.microsoft.com/office/powerpoint/2010/main" val="133521818"/>
+        <p14:creationId xmlns:p14="http://schemas.microsoft.com/office/powerpoint/2010/main" val="740102227"/>
       </p:ext>
     </p:extLst>
   </p:cSld>

--- a/GIUMS-MediaKit-PT.pptx
+++ b/GIUMS-MediaKit-PT.pptx
@@ -2,18 +2,18 @@
 <file path=ppt/presentation.xml><?xml version="1.0" encoding="utf-8"?>
 <p:presentation xmlns:p="http://schemas.openxmlformats.org/presentationml/2006/main">
   <p:sldMasterIdLst>
-    <p:sldMasterId xmlns:r="http://schemas.openxmlformats.org/officeDocument/2006/relationships" id="2147483648" r:id="Rf0ec73797c5d4fee"/>
+    <p:sldMasterId xmlns:r="http://schemas.openxmlformats.org/officeDocument/2006/relationships" id="2147483648" r:id="Re9f15f7e1c8e451e"/>
   </p:sldMasterIdLst>
   <p:notesMasterIdLst>
-    <p:notesMasterId xmlns:r="http://schemas.openxmlformats.org/officeDocument/2006/relationships" r:id="Rb460d550ca6d4dc6"/>
+    <p:notesMasterId xmlns:r="http://schemas.openxmlformats.org/officeDocument/2006/relationships" r:id="R7c82511f504b4c73"/>
   </p:notesMasterIdLst>
   <p:sldIdLst>
-    <p:sldId xmlns:r="http://schemas.openxmlformats.org/officeDocument/2006/relationships" id="256" r:id="R58198dc3c6904070"/>
-    <p:sldId xmlns:r="http://schemas.openxmlformats.org/officeDocument/2006/relationships" id="257" r:id="R58642caacf964c45"/>
-    <p:sldId xmlns:r="http://schemas.openxmlformats.org/officeDocument/2006/relationships" id="258" r:id="R6f8971c20ab94392"/>
-    <p:sldId xmlns:r="http://schemas.openxmlformats.org/officeDocument/2006/relationships" id="259" r:id="R85383cf9626640aa"/>
-    <p:sldId xmlns:r="http://schemas.openxmlformats.org/officeDocument/2006/relationships" id="260" r:id="R0455682d60504ba5"/>
-    <p:sldId xmlns:r="http://schemas.openxmlformats.org/officeDocument/2006/relationships" id="261" r:id="Ra862232ed8354244"/>
+    <p:sldId xmlns:r="http://schemas.openxmlformats.org/officeDocument/2006/relationships" id="256" r:id="R26102fa3eeff4e0d"/>
+    <p:sldId xmlns:r="http://schemas.openxmlformats.org/officeDocument/2006/relationships" id="257" r:id="Rba026b8f96c14494"/>
+    <p:sldId xmlns:r="http://schemas.openxmlformats.org/officeDocument/2006/relationships" id="258" r:id="Re093d810e2674d2e"/>
+    <p:sldId xmlns:r="http://schemas.openxmlformats.org/officeDocument/2006/relationships" id="259" r:id="Rbe0b6234493540f6"/>
+    <p:sldId xmlns:r="http://schemas.openxmlformats.org/officeDocument/2006/relationships" id="260" r:id="Rc277b57fa7e846fb"/>
+    <p:sldId xmlns:r="http://schemas.openxmlformats.org/officeDocument/2006/relationships" id="261" r:id="Ra170e68a776b4c13"/>
   </p:sldIdLst>
   <p:sldSz cx="12192000" cy="6858000"/>
   <p:notesSz cx="6858000" cy="9144000"/>
@@ -844,7 +844,7 @@
           <p:cNvPr id="3" name="Title">
             <a:extLst xmlns:a="http://schemas.openxmlformats.org/drawingml/2006/main">
               <a:ext uri="{FF2B5EF4-FFF2-40B4-BE49-F238E27FC236}">
-                <a16:creationId xmlns:a16="http://schemas.microsoft.com/office/drawing/2014/main" id="{3381F78C-2FBA-4128-8232-4DD7CC16FC53}"/>
+                <a16:creationId xmlns:a16="http://schemas.microsoft.com/office/drawing/2014/main" id="{7FF21BDE-80DB-4692-A729-52097FB684F0}"/>
               </a:ext>
             </a:extLst>
           </p:cNvPr>
@@ -1073,7 +1073,7 @@
           <p:cNvPr id="2" name="Subtitle">
             <a:extLst xmlns:a="http://schemas.openxmlformats.org/drawingml/2006/main">
               <a:ext uri="{FF2B5EF4-FFF2-40B4-BE49-F238E27FC236}">
-                <a16:creationId xmlns:a16="http://schemas.microsoft.com/office/drawing/2014/main" id="{BCC9309B-9352-4770-829B-E038072DA195}"/>
+                <a16:creationId xmlns:a16="http://schemas.microsoft.com/office/drawing/2014/main" id="{10582063-6485-4B09-BEE6-6C0ED8DFEAC4}"/>
               </a:ext>
             </a:extLst>
           </p:cNvPr>
@@ -1319,7 +1319,7 @@
           <p:cNvPr id="2" name="Section title">
             <a:extLst xmlns:a="http://schemas.openxmlformats.org/drawingml/2006/main">
               <a:ext uri="{FF2B5EF4-FFF2-40B4-BE49-F238E27FC236}">
-                <a16:creationId xmlns:a16="http://schemas.microsoft.com/office/drawing/2014/main" id="{24CDF31D-81A8-4839-B594-CD18B3E61A7A}"/>
+                <a16:creationId xmlns:a16="http://schemas.microsoft.com/office/drawing/2014/main" id="{154890C0-F465-4163-B3BE-A5544FD3B540}"/>
               </a:ext>
             </a:extLst>
           </p:cNvPr>
@@ -1565,7 +1565,7 @@
           <p:cNvPr id="3" name="Title">
             <a:extLst xmlns:a="http://schemas.openxmlformats.org/drawingml/2006/main">
               <a:ext uri="{FF2B5EF4-FFF2-40B4-BE49-F238E27FC236}">
-                <a16:creationId xmlns:a16="http://schemas.microsoft.com/office/drawing/2014/main" id="{741C7622-39BF-493A-ABA3-C16FB04C7558}"/>
+                <a16:creationId xmlns:a16="http://schemas.microsoft.com/office/drawing/2014/main" id="{C777AB51-ED89-4F10-98E0-7F13041C2BFF}"/>
               </a:ext>
             </a:extLst>
           </p:cNvPr>
@@ -1794,7 +1794,7 @@
           <p:cNvPr id="2" name="Body">
             <a:extLst xmlns:a="http://schemas.openxmlformats.org/drawingml/2006/main">
               <a:ext uri="{FF2B5EF4-FFF2-40B4-BE49-F238E27FC236}">
-                <a16:creationId xmlns:a16="http://schemas.microsoft.com/office/drawing/2014/main" id="{69EEEC97-D0B9-43F5-A731-A0F5EC8CB6A6}"/>
+                <a16:creationId xmlns:a16="http://schemas.microsoft.com/office/drawing/2014/main" id="{681DB00F-903B-4671-B069-4E36491FE6B9}"/>
               </a:ext>
             </a:extLst>
           </p:cNvPr>
@@ -2040,7 +2040,7 @@
           <p:cNvPr id="4" name="Title">
             <a:extLst xmlns:a="http://schemas.openxmlformats.org/drawingml/2006/main">
               <a:ext uri="{FF2B5EF4-FFF2-40B4-BE49-F238E27FC236}">
-                <a16:creationId xmlns:a16="http://schemas.microsoft.com/office/drawing/2014/main" id="{13DDCC9D-9B16-49DB-AD3C-1C6394833622}"/>
+                <a16:creationId xmlns:a16="http://schemas.microsoft.com/office/drawing/2014/main" id="{EAEF5C10-6525-4FDC-86E5-A17F3D4C3123}"/>
               </a:ext>
             </a:extLst>
           </p:cNvPr>
@@ -2269,7 +2269,7 @@
           <p:cNvPr id="2" name="Left column">
             <a:extLst xmlns:a="http://schemas.openxmlformats.org/drawingml/2006/main">
               <a:ext uri="{FF2B5EF4-FFF2-40B4-BE49-F238E27FC236}">
-                <a16:creationId xmlns:a16="http://schemas.microsoft.com/office/drawing/2014/main" id="{1EC8D258-70B1-49A5-A000-DF21F1F51C86}"/>
+                <a16:creationId xmlns:a16="http://schemas.microsoft.com/office/drawing/2014/main" id="{A290E2C1-F061-4761-B4A6-D8BF22CA1BD1}"/>
               </a:ext>
             </a:extLst>
           </p:cNvPr>
@@ -2498,7 +2498,7 @@
           <p:cNvPr id="3" name="Right column">
             <a:extLst xmlns:a="http://schemas.openxmlformats.org/drawingml/2006/main">
               <a:ext uri="{FF2B5EF4-FFF2-40B4-BE49-F238E27FC236}">
-                <a16:creationId xmlns:a16="http://schemas.microsoft.com/office/drawing/2014/main" id="{862D9CC9-33AD-4541-B198-A1193BD8830E}"/>
+                <a16:creationId xmlns:a16="http://schemas.microsoft.com/office/drawing/2014/main" id="{E90432D4-CCFD-4AD7-8F10-BA1409AD5924}"/>
               </a:ext>
             </a:extLst>
           </p:cNvPr>
@@ -2744,7 +2744,7 @@
           <p:cNvPr id="3" name="Title">
             <a:extLst xmlns:a="http://schemas.openxmlformats.org/drawingml/2006/main">
               <a:ext uri="{FF2B5EF4-FFF2-40B4-BE49-F238E27FC236}">
-                <a16:creationId xmlns:a16="http://schemas.microsoft.com/office/drawing/2014/main" id="{B4B0F75E-1164-4519-8287-827DC3E33C23}"/>
+                <a16:creationId xmlns:a16="http://schemas.microsoft.com/office/drawing/2014/main" id="{633CC545-F712-4C13-A367-28F76FB4ED6B}"/>
               </a:ext>
             </a:extLst>
           </p:cNvPr>
@@ -2973,7 +2973,7 @@
           <p:cNvPr id="2" name="Left column">
             <a:extLst xmlns:a="http://schemas.openxmlformats.org/drawingml/2006/main">
               <a:ext uri="{FF2B5EF4-FFF2-40B4-BE49-F238E27FC236}">
-                <a16:creationId xmlns:a16="http://schemas.microsoft.com/office/drawing/2014/main" id="{246AFB93-C6E5-4EE6-9823-682E244F69B8}"/>
+                <a16:creationId xmlns:a16="http://schemas.microsoft.com/office/drawing/2014/main" id="{84E29C39-9BE0-41CB-B744-6D529B10974B}"/>
               </a:ext>
             </a:extLst>
           </p:cNvPr>
@@ -3240,12 +3240,12 @@
   </p:cSld>
   <p:clrMap bg1="lt1" tx1="dk1" bg2="lt2" tx2="dk2" accent1="accent1" accent2="accent2" accent3="accent3" accent4="accent4" accent5="accent5" accent6="accent6" hlink="hlink" folHlink="folHlink"/>
   <p:sldLayoutIdLst>
-    <p:sldLayoutId xmlns:r="http://schemas.openxmlformats.org/officeDocument/2006/relationships" id="2147483649" r:id="R8e09d1711e3f4984"/>
-    <p:sldLayoutId xmlns:r="http://schemas.openxmlformats.org/officeDocument/2006/relationships" id="2147483650" r:id="Rdf078f9e92f14b13"/>
-    <p:sldLayoutId xmlns:r="http://schemas.openxmlformats.org/officeDocument/2006/relationships" id="2147483651" r:id="R48d6d477b82a448d"/>
-    <p:sldLayoutId xmlns:r="http://schemas.openxmlformats.org/officeDocument/2006/relationships" id="2147483652" r:id="Rba1b6af5750e49bd"/>
-    <p:sldLayoutId xmlns:r="http://schemas.openxmlformats.org/officeDocument/2006/relationships" id="2147483653" r:id="R9593648fbf7347d0"/>
-    <p:sldLayoutId xmlns:r="http://schemas.openxmlformats.org/officeDocument/2006/relationships" id="2147483654" r:id="R64964a05d8044160"/>
+    <p:sldLayoutId xmlns:r="http://schemas.openxmlformats.org/officeDocument/2006/relationships" id="2147483649" r:id="Rae534b3a5cf74dad"/>
+    <p:sldLayoutId xmlns:r="http://schemas.openxmlformats.org/officeDocument/2006/relationships" id="2147483650" r:id="Rf1c8ab3334924058"/>
+    <p:sldLayoutId xmlns:r="http://schemas.openxmlformats.org/officeDocument/2006/relationships" id="2147483651" r:id="R3dd49d5b36984084"/>
+    <p:sldLayoutId xmlns:r="http://schemas.openxmlformats.org/officeDocument/2006/relationships" id="2147483652" r:id="Rf121f29cf67b4560"/>
+    <p:sldLayoutId xmlns:r="http://schemas.openxmlformats.org/officeDocument/2006/relationships" id="2147483653" r:id="Rf670502f66d543b7"/>
+    <p:sldLayoutId xmlns:r="http://schemas.openxmlformats.org/officeDocument/2006/relationships" id="2147483654" r:id="Rb0ea62fe127e4753"/>
   </p:sldLayoutIdLst>
   <p:txStyles>
     <p:titleStyle>
@@ -3793,10 +3793,10 @@
       </p:grpSpPr>
       <p:sp>
         <p:nvSpPr>
-          <p:cNvPr id="10" name="box-1">
+          <p:cNvPr id="8" name="box-1">
             <a:extLst xmlns:a="http://schemas.openxmlformats.org/drawingml/2006/main">
               <a:ext uri="{FF2B5EF4-FFF2-40B4-BE49-F238E27FC236}">
-                <a16:creationId xmlns:a16="http://schemas.microsoft.com/office/drawing/2014/main" id="{083B2832-3D92-4C02-8B50-2C70C0C11F70}"/>
+                <a16:creationId xmlns:a16="http://schemas.microsoft.com/office/drawing/2014/main" id="{7FAC91E3-464B-49AB-BBF9-4F283BE0EC85}"/>
               </a:ext>
             </a:extLst>
           </p:cNvPr>
@@ -3823,40 +3823,10 @@
       </p:sp>
       <p:sp>
         <p:nvSpPr>
-          <p:cNvPr id="2" name="box-2">
+          <p:cNvPr id="2" name="text-2">
             <a:extLst xmlns:a="http://schemas.openxmlformats.org/drawingml/2006/main">
               <a:ext uri="{FF2B5EF4-FFF2-40B4-BE49-F238E27FC236}">
-                <a16:creationId xmlns:a16="http://schemas.microsoft.com/office/drawing/2014/main" id="{6042E152-CFB2-45F1-B6E3-294345012D42}"/>
-              </a:ext>
-            </a:extLst>
-          </p:cNvPr>
-          <p:cNvSpPr>
-            <a:spLocks xmlns:a="http://schemas.openxmlformats.org/drawingml/2006/main" noGrp="1"/>
-          </p:cNvSpPr>
-          <p:nvPr/>
-        </p:nvSpPr>
-        <p:spPr>
-          <a:xfrm xmlns:a="http://schemas.openxmlformats.org/drawingml/2006/main">
-            <a:off x="0" y="5810250"/>
-            <a:ext cx="12192000" cy="1047750"/>
-          </a:xfrm>
-          <a:prstGeom xmlns:a="http://schemas.openxmlformats.org/drawingml/2006/main" prst="rect">
-            <a:avLst/>
-          </a:prstGeom>
-          <a:solidFill xmlns:a="http://schemas.openxmlformats.org/drawingml/2006/main">
-            <a:srgbClr val="26070F"/>
-          </a:solidFill>
-          <a:ln xmlns:a="http://schemas.openxmlformats.org/drawingml/2006/main" w="0">
-            <a:noFill/>
-          </a:ln>
-        </p:spPr>
-      </p:sp>
-      <p:sp>
-        <p:nvSpPr>
-          <p:cNvPr id="3" name="text-3">
-            <a:extLst xmlns:a="http://schemas.openxmlformats.org/drawingml/2006/main">
-              <a:ext uri="{FF2B5EF4-FFF2-40B4-BE49-F238E27FC236}">
-                <a16:creationId xmlns:a16="http://schemas.microsoft.com/office/drawing/2014/main" id="{818417AD-677C-421A-BEB8-3BA521B7AAA7}"/>
+                <a16:creationId xmlns:a16="http://schemas.microsoft.com/office/drawing/2014/main" id="{2FFB7971-F89A-40B1-BD4B-FFFB80889E71}"/>
               </a:ext>
             </a:extLst>
           </p:cNvPr>
@@ -4011,10 +3981,10 @@
       </p:sp>
       <p:sp>
         <p:nvSpPr>
-          <p:cNvPr id="4" name="text-4">
+          <p:cNvPr id="3" name="text-3">
             <a:extLst xmlns:a="http://schemas.openxmlformats.org/drawingml/2006/main">
               <a:ext uri="{FF2B5EF4-FFF2-40B4-BE49-F238E27FC236}">
-                <a16:creationId xmlns:a16="http://schemas.microsoft.com/office/drawing/2014/main" id="{D6E93C66-B9A7-4550-A9DD-3CB712F13448}"/>
+                <a16:creationId xmlns:a16="http://schemas.microsoft.com/office/drawing/2014/main" id="{9C987707-F791-4A4F-A740-C32C4EF49587}"/>
               </a:ext>
             </a:extLst>
           </p:cNvPr>
@@ -4169,10 +4139,10 @@
       </p:sp>
       <p:sp>
         <p:nvSpPr>
-          <p:cNvPr id="5" name="text-5">
+          <p:cNvPr id="4" name="text-4">
             <a:extLst xmlns:a="http://schemas.openxmlformats.org/drawingml/2006/main">
               <a:ext uri="{FF2B5EF4-FFF2-40B4-BE49-F238E27FC236}">
-                <a16:creationId xmlns:a16="http://schemas.microsoft.com/office/drawing/2014/main" id="{EB1F0FD1-D63E-4BA6-BF11-D629C618B192}"/>
+                <a16:creationId xmlns:a16="http://schemas.microsoft.com/office/drawing/2014/main" id="{4D51217F-A788-4502-91DE-834EBE57893B}"/>
               </a:ext>
             </a:extLst>
           </p:cNvPr>
@@ -4327,10 +4297,10 @@
       </p:sp>
       <p:sp>
         <p:nvSpPr>
-          <p:cNvPr id="6" name="text-6">
+          <p:cNvPr id="5" name="text-5">
             <a:extLst xmlns:a="http://schemas.openxmlformats.org/drawingml/2006/main">
               <a:ext uri="{FF2B5EF4-FFF2-40B4-BE49-F238E27FC236}">
-                <a16:creationId xmlns:a16="http://schemas.microsoft.com/office/drawing/2014/main" id="{AC3FB9E0-DD76-4375-AE49-3EC5CB0E5EE7}"/>
+                <a16:creationId xmlns:a16="http://schemas.microsoft.com/office/drawing/2014/main" id="{977B4AF5-CB80-43E1-8C8D-014B86A439AA}"/>
               </a:ext>
             </a:extLst>
           </p:cNvPr>
@@ -4485,10 +4455,10 @@
       </p:sp>
       <p:sp>
         <p:nvSpPr>
-          <p:cNvPr id="7" name="text-7">
+          <p:cNvPr id="6" name="text-6">
             <a:extLst xmlns:a="http://schemas.openxmlformats.org/drawingml/2006/main">
               <a:ext uri="{FF2B5EF4-FFF2-40B4-BE49-F238E27FC236}">
-                <a16:creationId xmlns:a16="http://schemas.microsoft.com/office/drawing/2014/main" id="{F50EF20D-8408-4020-B240-03F32C114F8E}"/>
+                <a16:creationId xmlns:a16="http://schemas.microsoft.com/office/drawing/2014/main" id="{167CC674-52C3-4BBA-8070-8945D2AF9843}"/>
               </a:ext>
             </a:extLst>
           </p:cNvPr>
@@ -4643,10 +4613,10 @@
       </p:sp>
       <p:pic>
         <p:nvPicPr>
-          <p:cNvPr id="8" name="">
+          <p:cNvPr id="7" name="">
             <a:extLst xmlns:a="http://schemas.openxmlformats.org/drawingml/2006/main">
               <a:ext uri="{FF2B5EF4-FFF2-40B4-BE49-F238E27FC236}">
-                <a16:creationId xmlns:a16="http://schemas.microsoft.com/office/drawing/2014/main" id="{78F07434-69FC-4AC8-ACF2-1770339CB9F9}"/>
+                <a16:creationId xmlns:a16="http://schemas.microsoft.com/office/drawing/2014/main" id="{800498D7-7BFE-44CA-A979-22CF5330EBD5}"/>
               </a:ext>
             </a:extLst>
           </p:cNvPr>
@@ -4656,7 +4626,7 @@
           <p:nvPr/>
         </p:nvPicPr>
         <p:blipFill>
-          <a:blip xmlns:r="http://schemas.openxmlformats.org/officeDocument/2006/relationships" xmlns:a="http://schemas.openxmlformats.org/drawingml/2006/main" r:embed="R5c9975e73b6c4414"/>
+          <a:blip xmlns:r="http://schemas.openxmlformats.org/officeDocument/2006/relationships" xmlns:a="http://schemas.openxmlformats.org/drawingml/2006/main" r:embed="R33386307f71e4f1f"/>
           <a:stretch xmlns:a="http://schemas.openxmlformats.org/drawingml/2006/main"/>
         </p:blipFill>
         <p:spPr>
@@ -4669,40 +4639,10 @@
           </a:prstGeom>
         </p:spPr>
       </p:pic>
-      <p:sp>
-        <p:nvSpPr>
-          <p:cNvPr id="9" name="rule-8">
-            <a:extLst xmlns:a="http://schemas.openxmlformats.org/drawingml/2006/main">
-              <a:ext uri="{FF2B5EF4-FFF2-40B4-BE49-F238E27FC236}">
-                <a16:creationId xmlns:a16="http://schemas.microsoft.com/office/drawing/2014/main" id="{7BA358B5-46BE-40D4-B0AD-377C2B3CEDDF}"/>
-              </a:ext>
-            </a:extLst>
-          </p:cNvPr>
-          <p:cNvSpPr>
-            <a:spLocks xmlns:a="http://schemas.openxmlformats.org/drawingml/2006/main" noGrp="1"/>
-          </p:cNvSpPr>
-          <p:nvPr/>
-        </p:nvSpPr>
-        <p:spPr>
-          <a:xfrm xmlns:a="http://schemas.openxmlformats.org/drawingml/2006/main">
-            <a:off x="0" y="6791325"/>
-            <a:ext cx="12192000" cy="66675"/>
-          </a:xfrm>
-          <a:prstGeom xmlns:a="http://schemas.openxmlformats.org/drawingml/2006/main" prst="rect">
-            <a:avLst/>
-          </a:prstGeom>
-          <a:solidFill xmlns:a="http://schemas.openxmlformats.org/drawingml/2006/main">
-            <a:srgbClr val="C2142F"/>
-          </a:solidFill>
-          <a:ln xmlns:a="http://schemas.openxmlformats.org/drawingml/2006/main" w="0">
-            <a:noFill/>
-          </a:ln>
-        </p:spPr>
-      </p:sp>
     </p:spTree>
     <p:extLst>
       <p:ext uri="{BB962C8B-B14F-4D97-AF65-F5344CB8AC3E}">
-        <p14:creationId xmlns:p14="http://schemas.microsoft.com/office/powerpoint/2010/main" val="1680714680"/>
+        <p14:creationId xmlns:p14="http://schemas.microsoft.com/office/powerpoint/2010/main" val="1643377523"/>
       </p:ext>
     </p:extLst>
   </p:cSld>
@@ -4730,10 +4670,10 @@
       </p:grpSpPr>
       <p:sp>
         <p:nvSpPr>
-          <p:cNvPr id="24" name="text-9">
+          <p:cNvPr id="24" name="text-7">
             <a:extLst xmlns:a="http://schemas.openxmlformats.org/drawingml/2006/main">
               <a:ext uri="{FF2B5EF4-FFF2-40B4-BE49-F238E27FC236}">
-                <a16:creationId xmlns:a16="http://schemas.microsoft.com/office/drawing/2014/main" id="{AFF95871-2499-4F32-B462-8C974D65A51D}"/>
+                <a16:creationId xmlns:a16="http://schemas.microsoft.com/office/drawing/2014/main" id="{58566145-8564-470C-8AA5-C0255C02EC7D}"/>
               </a:ext>
             </a:extLst>
           </p:cNvPr>
@@ -4888,10 +4828,10 @@
       </p:sp>
       <p:sp>
         <p:nvSpPr>
-          <p:cNvPr id="2" name="text-10">
+          <p:cNvPr id="2" name="text-8">
             <a:extLst xmlns:a="http://schemas.openxmlformats.org/drawingml/2006/main">
               <a:ext uri="{FF2B5EF4-FFF2-40B4-BE49-F238E27FC236}">
-                <a16:creationId xmlns:a16="http://schemas.microsoft.com/office/drawing/2014/main" id="{40470F55-7B3E-415B-8F1C-FBAB3B1504C9}"/>
+                <a16:creationId xmlns:a16="http://schemas.microsoft.com/office/drawing/2014/main" id="{F2E1C357-F316-4E40-958E-F4DC82E2F553}"/>
               </a:ext>
             </a:extLst>
           </p:cNvPr>
@@ -5046,10 +4986,10 @@
       </p:sp>
       <p:sp>
         <p:nvSpPr>
-          <p:cNvPr id="3" name="rule-11">
+          <p:cNvPr id="3" name="rule-9">
             <a:extLst xmlns:a="http://schemas.openxmlformats.org/drawingml/2006/main">
               <a:ext uri="{FF2B5EF4-FFF2-40B4-BE49-F238E27FC236}">
-                <a16:creationId xmlns:a16="http://schemas.microsoft.com/office/drawing/2014/main" id="{F3F56B9D-59EB-4DB3-A752-4251B8445809}"/>
+                <a16:creationId xmlns:a16="http://schemas.microsoft.com/office/drawing/2014/main" id="{9D22A112-4E7D-45DD-BF07-285F24DB9D1C}"/>
               </a:ext>
             </a:extLst>
           </p:cNvPr>
@@ -5076,10 +5016,10 @@
       </p:sp>
       <p:sp>
         <p:nvSpPr>
-          <p:cNvPr id="4" name="text-12">
+          <p:cNvPr id="4" name="text-10">
             <a:extLst xmlns:a="http://schemas.openxmlformats.org/drawingml/2006/main">
               <a:ext uri="{FF2B5EF4-FFF2-40B4-BE49-F238E27FC236}">
-                <a16:creationId xmlns:a16="http://schemas.microsoft.com/office/drawing/2014/main" id="{51EE0542-A20C-437D-9ABB-01ED871B1CF5}"/>
+                <a16:creationId xmlns:a16="http://schemas.microsoft.com/office/drawing/2014/main" id="{8F83F184-5275-4733-8A1E-DB1A7433C4D1}"/>
               </a:ext>
             </a:extLst>
           </p:cNvPr>
@@ -5234,10 +5174,10 @@
       </p:sp>
       <p:sp>
         <p:nvSpPr>
-          <p:cNvPr id="5" name="text-13">
+          <p:cNvPr id="5" name="text-11">
             <a:extLst xmlns:a="http://schemas.openxmlformats.org/drawingml/2006/main">
               <a:ext uri="{FF2B5EF4-FFF2-40B4-BE49-F238E27FC236}">
-                <a16:creationId xmlns:a16="http://schemas.microsoft.com/office/drawing/2014/main" id="{BDACDE1B-658A-4843-B4EF-C30A794FC3C7}"/>
+                <a16:creationId xmlns:a16="http://schemas.microsoft.com/office/drawing/2014/main" id="{D09973C8-ACE4-407E-A860-7067171FF592}"/>
               </a:ext>
             </a:extLst>
           </p:cNvPr>
@@ -5395,7 +5335,7 @@
           <p:cNvPr id="6" name="">
             <a:extLst xmlns:a="http://schemas.openxmlformats.org/drawingml/2006/main">
               <a:ext uri="{FF2B5EF4-FFF2-40B4-BE49-F238E27FC236}">
-                <a16:creationId xmlns:a16="http://schemas.microsoft.com/office/drawing/2014/main" id="{AFE55ACB-69EA-47C1-BB53-B9F513B29D9C}"/>
+                <a16:creationId xmlns:a16="http://schemas.microsoft.com/office/drawing/2014/main" id="{F32756AB-147C-43C1-BBEB-53E7C8DAD125}"/>
               </a:ext>
             </a:extLst>
           </p:cNvPr>
@@ -5405,7 +5345,7 @@
           <p:nvPr/>
         </p:nvPicPr>
         <p:blipFill>
-          <a:blip xmlns:r="http://schemas.openxmlformats.org/officeDocument/2006/relationships" xmlns:a="http://schemas.openxmlformats.org/drawingml/2006/main" r:embed="R381b12f2ea6142a5"/>
+          <a:blip xmlns:r="http://schemas.openxmlformats.org/officeDocument/2006/relationships" xmlns:a="http://schemas.openxmlformats.org/drawingml/2006/main" r:embed="R4216876b2fa24345"/>
           <a:srcRect xmlns:a="http://schemas.openxmlformats.org/drawingml/2006/main" l="0" t="6534" r="0" b="6534"/>
           <a:stretch xmlns:a="http://schemas.openxmlformats.org/drawingml/2006/main">
             <a:fillRect l="0" t="0" r="0" b="0"/>
@@ -5423,10 +5363,10 @@
       </p:pic>
       <p:sp>
         <p:nvSpPr>
-          <p:cNvPr id="7" name="rule-14">
+          <p:cNvPr id="7" name="rule-12">
             <a:extLst xmlns:a="http://schemas.openxmlformats.org/drawingml/2006/main">
               <a:ext uri="{FF2B5EF4-FFF2-40B4-BE49-F238E27FC236}">
-                <a16:creationId xmlns:a16="http://schemas.microsoft.com/office/drawing/2014/main" id="{9B4E0714-84D1-430D-B980-6897E7E8E5B5}"/>
+                <a16:creationId xmlns:a16="http://schemas.microsoft.com/office/drawing/2014/main" id="{8FF60206-E75C-4E5F-8B21-563563FDD9BB}"/>
               </a:ext>
             </a:extLst>
           </p:cNvPr>
@@ -5453,10 +5393,10 @@
       </p:sp>
       <p:sp>
         <p:nvSpPr>
-          <p:cNvPr id="8" name="text-15">
+          <p:cNvPr id="8" name="text-13">
             <a:extLst xmlns:a="http://schemas.openxmlformats.org/drawingml/2006/main">
               <a:ext uri="{FF2B5EF4-FFF2-40B4-BE49-F238E27FC236}">
-                <a16:creationId xmlns:a16="http://schemas.microsoft.com/office/drawing/2014/main" id="{F4CE5F3F-3488-43F6-8D18-A9850B391552}"/>
+                <a16:creationId xmlns:a16="http://schemas.microsoft.com/office/drawing/2014/main" id="{9E0A1FE5-6C55-4F43-9101-17D1D33518B7}"/>
               </a:ext>
             </a:extLst>
           </p:cNvPr>
@@ -5611,10 +5551,10 @@
       </p:sp>
       <p:sp>
         <p:nvSpPr>
-          <p:cNvPr id="9" name="text-16">
+          <p:cNvPr id="9" name="text-14">
             <a:extLst xmlns:a="http://schemas.openxmlformats.org/drawingml/2006/main">
               <a:ext uri="{FF2B5EF4-FFF2-40B4-BE49-F238E27FC236}">
-                <a16:creationId xmlns:a16="http://schemas.microsoft.com/office/drawing/2014/main" id="{36AFACFD-9706-4F33-8D68-92C5D7F860BB}"/>
+                <a16:creationId xmlns:a16="http://schemas.microsoft.com/office/drawing/2014/main" id="{C3FB3360-F7BA-4277-884C-F5CF7BDA3E5D}"/>
               </a:ext>
             </a:extLst>
           </p:cNvPr>
@@ -5769,10 +5709,10 @@
       </p:sp>
       <p:sp>
         <p:nvSpPr>
-          <p:cNvPr id="10" name="text-17">
+          <p:cNvPr id="10" name="text-15">
             <a:extLst xmlns:a="http://schemas.openxmlformats.org/drawingml/2006/main">
               <a:ext uri="{FF2B5EF4-FFF2-40B4-BE49-F238E27FC236}">
-                <a16:creationId xmlns:a16="http://schemas.microsoft.com/office/drawing/2014/main" id="{4C3E164E-AF04-4DD2-AAD5-1A55B1051D30}"/>
+                <a16:creationId xmlns:a16="http://schemas.microsoft.com/office/drawing/2014/main" id="{41F151C1-7D29-42D0-8A03-91F715E19922}"/>
               </a:ext>
             </a:extLst>
           </p:cNvPr>
@@ -5927,10 +5867,10 @@
       </p:sp>
       <p:sp>
         <p:nvSpPr>
-          <p:cNvPr id="11" name="text-18">
+          <p:cNvPr id="11" name="text-16">
             <a:extLst xmlns:a="http://schemas.openxmlformats.org/drawingml/2006/main">
               <a:ext uri="{FF2B5EF4-FFF2-40B4-BE49-F238E27FC236}">
-                <a16:creationId xmlns:a16="http://schemas.microsoft.com/office/drawing/2014/main" id="{86B622DC-0F4A-46A9-8251-8A92E0EB8FAB}"/>
+                <a16:creationId xmlns:a16="http://schemas.microsoft.com/office/drawing/2014/main" id="{BC408A23-4E34-4ACA-B1F3-79397A446702}"/>
               </a:ext>
             </a:extLst>
           </p:cNvPr>
@@ -6085,10 +6025,10 @@
       </p:sp>
       <p:sp>
         <p:nvSpPr>
-          <p:cNvPr id="12" name="text-19">
+          <p:cNvPr id="12" name="text-17">
             <a:extLst xmlns:a="http://schemas.openxmlformats.org/drawingml/2006/main">
               <a:ext uri="{FF2B5EF4-FFF2-40B4-BE49-F238E27FC236}">
-                <a16:creationId xmlns:a16="http://schemas.microsoft.com/office/drawing/2014/main" id="{566F31EA-CE8E-409F-89AA-0D277AE6F43F}"/>
+                <a16:creationId xmlns:a16="http://schemas.microsoft.com/office/drawing/2014/main" id="{546A37B8-5154-4B5B-BF0A-867DF5EC32B7}"/>
               </a:ext>
             </a:extLst>
           </p:cNvPr>
@@ -6243,10 +6183,10 @@
       </p:sp>
       <p:sp>
         <p:nvSpPr>
-          <p:cNvPr id="13" name="rule-20">
+          <p:cNvPr id="13" name="rule-18">
             <a:extLst xmlns:a="http://schemas.openxmlformats.org/drawingml/2006/main">
               <a:ext uri="{FF2B5EF4-FFF2-40B4-BE49-F238E27FC236}">
-                <a16:creationId xmlns:a16="http://schemas.microsoft.com/office/drawing/2014/main" id="{B0D8975E-0F4F-4A53-8169-C922B3217D55}"/>
+                <a16:creationId xmlns:a16="http://schemas.microsoft.com/office/drawing/2014/main" id="{83B40AB6-5DC8-4594-8864-1497A386F304}"/>
               </a:ext>
             </a:extLst>
           </p:cNvPr>
@@ -6276,7 +6216,7 @@
           <p:cNvPr id="14" name="hotspot-1">
             <a:extLst xmlns:a="http://schemas.openxmlformats.org/drawingml/2006/main">
               <a:ext uri="{FF2B5EF4-FFF2-40B4-BE49-F238E27FC236}">
-                <a16:creationId xmlns:a16="http://schemas.microsoft.com/office/drawing/2014/main" id="{1309A209-1591-4E5F-991A-4DC7815FFDB1}"/>
+                <a16:creationId xmlns:a16="http://schemas.microsoft.com/office/drawing/2014/main" id="{3D3A2DBC-500E-434D-9B2E-E6D035863705}"/>
               </a:ext>
             </a:extLst>
             <ns0:hlinkClick xmlns:ns0="http://schemas.openxmlformats.org/drawingml/2006/main" xmlns:ns1="http://schemas.openxmlformats.org/officeDocument/2006/relationships" ns1:id="rIdClick1"/>
@@ -6306,10 +6246,10 @@
       </p:sp>
       <p:sp>
         <p:nvSpPr>
-          <p:cNvPr id="15" name="text-22">
+          <p:cNvPr id="15" name="text-20">
             <a:extLst xmlns:a="http://schemas.openxmlformats.org/drawingml/2006/main">
               <a:ext uri="{FF2B5EF4-FFF2-40B4-BE49-F238E27FC236}">
-                <a16:creationId xmlns:a16="http://schemas.microsoft.com/office/drawing/2014/main" id="{1E52AA11-65E2-403B-B5A3-BB91C7AA0D1D}"/>
+                <a16:creationId xmlns:a16="http://schemas.microsoft.com/office/drawing/2014/main" id="{BB1AFDB5-C311-47BD-80BC-A1FC02CA1AAD}"/>
               </a:ext>
             </a:extLst>
           </p:cNvPr>
@@ -6464,10 +6404,10 @@
       </p:sp>
       <p:sp>
         <p:nvSpPr>
-          <p:cNvPr id="16" name="text-23">
+          <p:cNvPr id="16" name="text-21">
             <a:extLst xmlns:a="http://schemas.openxmlformats.org/drawingml/2006/main">
               <a:ext uri="{FF2B5EF4-FFF2-40B4-BE49-F238E27FC236}">
-                <a16:creationId xmlns:a16="http://schemas.microsoft.com/office/drawing/2014/main" id="{A88AC5CD-3A65-4AA9-9258-A2C0BCBC04E7}"/>
+                <a16:creationId xmlns:a16="http://schemas.microsoft.com/office/drawing/2014/main" id="{D59CE672-3472-401C-844E-C397FFF3B0D1}"/>
               </a:ext>
             </a:extLst>
           </p:cNvPr>
@@ -6622,10 +6562,10 @@
       </p:sp>
       <p:sp>
         <p:nvSpPr>
-          <p:cNvPr id="17" name="rule-24">
+          <p:cNvPr id="17" name="rule-22">
             <a:extLst xmlns:a="http://schemas.openxmlformats.org/drawingml/2006/main">
               <a:ext uri="{FF2B5EF4-FFF2-40B4-BE49-F238E27FC236}">
-                <a16:creationId xmlns:a16="http://schemas.microsoft.com/office/drawing/2014/main" id="{2151FB3E-45A6-413C-92E5-7987EDC7EA54}"/>
+                <a16:creationId xmlns:a16="http://schemas.microsoft.com/office/drawing/2014/main" id="{15D506C0-3E79-469F-8AB0-964DAB912130}"/>
               </a:ext>
             </a:extLst>
           </p:cNvPr>
@@ -6655,7 +6595,7 @@
           <p:cNvPr id="18" name="hotspot-2">
             <a:extLst xmlns:a="http://schemas.openxmlformats.org/drawingml/2006/main">
               <a:ext uri="{FF2B5EF4-FFF2-40B4-BE49-F238E27FC236}">
-                <a16:creationId xmlns:a16="http://schemas.microsoft.com/office/drawing/2014/main" id="{15B514A3-39C6-4096-AB27-F9AE2B7969B8}"/>
+                <a16:creationId xmlns:a16="http://schemas.microsoft.com/office/drawing/2014/main" id="{89F35251-BF3C-4163-8225-4565295D5433}"/>
               </a:ext>
             </a:extLst>
             <ns2:hlinkClick xmlns:ns2="http://schemas.openxmlformats.org/drawingml/2006/main" xmlns:ns3="http://schemas.openxmlformats.org/officeDocument/2006/relationships" ns3:id="rIdClick2"/>
@@ -6685,10 +6625,10 @@
       </p:sp>
       <p:sp>
         <p:nvSpPr>
-          <p:cNvPr id="19" name="text-26">
+          <p:cNvPr id="19" name="text-24">
             <a:extLst xmlns:a="http://schemas.openxmlformats.org/drawingml/2006/main">
               <a:ext uri="{FF2B5EF4-FFF2-40B4-BE49-F238E27FC236}">
-                <a16:creationId xmlns:a16="http://schemas.microsoft.com/office/drawing/2014/main" id="{DB5CD7B6-A1CB-44B9-8492-10DAE996C6E3}"/>
+                <a16:creationId xmlns:a16="http://schemas.microsoft.com/office/drawing/2014/main" id="{A5F001EB-B525-422A-B633-6DF8EA68B639}"/>
               </a:ext>
             </a:extLst>
           </p:cNvPr>
@@ -6843,10 +6783,10 @@
       </p:sp>
       <p:sp>
         <p:nvSpPr>
-          <p:cNvPr id="20" name="text-27">
+          <p:cNvPr id="20" name="text-25">
             <a:extLst xmlns:a="http://schemas.openxmlformats.org/drawingml/2006/main">
               <a:ext uri="{FF2B5EF4-FFF2-40B4-BE49-F238E27FC236}">
-                <a16:creationId xmlns:a16="http://schemas.microsoft.com/office/drawing/2014/main" id="{2E76E9E7-9224-4019-921A-39A9474B5B23}"/>
+                <a16:creationId xmlns:a16="http://schemas.microsoft.com/office/drawing/2014/main" id="{351FF4CB-1F30-4D04-B58C-14CFB0565F8D}"/>
               </a:ext>
             </a:extLst>
           </p:cNvPr>
@@ -7001,10 +6941,10 @@
       </p:sp>
       <p:sp>
         <p:nvSpPr>
-          <p:cNvPr id="21" name="rule-28">
+          <p:cNvPr id="21" name="rule-26">
             <a:extLst xmlns:a="http://schemas.openxmlformats.org/drawingml/2006/main">
               <a:ext uri="{FF2B5EF4-FFF2-40B4-BE49-F238E27FC236}">
-                <a16:creationId xmlns:a16="http://schemas.microsoft.com/office/drawing/2014/main" id="{EBAAB847-3FBA-4CA8-A60B-5DBA35DB8DD9}"/>
+                <a16:creationId xmlns:a16="http://schemas.microsoft.com/office/drawing/2014/main" id="{D19A60E3-4D1A-4E24-8574-3729F527FFEB}"/>
               </a:ext>
             </a:extLst>
           </p:cNvPr>
@@ -7034,7 +6974,7 @@
           <p:cNvPr id="22" name="hotspot-3">
             <a:extLst xmlns:a="http://schemas.openxmlformats.org/drawingml/2006/main">
               <a:ext uri="{FF2B5EF4-FFF2-40B4-BE49-F238E27FC236}">
-                <a16:creationId xmlns:a16="http://schemas.microsoft.com/office/drawing/2014/main" id="{7CA752B2-CED9-4FF8-834F-6CCE2A333526}"/>
+                <a16:creationId xmlns:a16="http://schemas.microsoft.com/office/drawing/2014/main" id="{9D07446E-9C33-4AEE-9E2F-A28C203ED05F}"/>
               </a:ext>
             </a:extLst>
             <ns4:hlinkClick xmlns:ns4="http://schemas.openxmlformats.org/drawingml/2006/main" xmlns:ns5="http://schemas.openxmlformats.org/officeDocument/2006/relationships" ns5:id="rIdClick3"/>
@@ -7064,10 +7004,10 @@
       </p:sp>
       <p:sp>
         <p:nvSpPr>
-          <p:cNvPr id="23" name="text-30">
+          <p:cNvPr id="23" name="text-28">
             <a:extLst xmlns:a="http://schemas.openxmlformats.org/drawingml/2006/main">
               <a:ext uri="{FF2B5EF4-FFF2-40B4-BE49-F238E27FC236}">
-                <a16:creationId xmlns:a16="http://schemas.microsoft.com/office/drawing/2014/main" id="{C507C0DB-6444-48F7-B766-F932FBAE1726}"/>
+                <a16:creationId xmlns:a16="http://schemas.microsoft.com/office/drawing/2014/main" id="{B42D0A0F-EE66-4D63-8373-F97DD4CD1921}"/>
               </a:ext>
             </a:extLst>
           </p:cNvPr>
@@ -7223,7 +7163,7 @@
     </p:spTree>
     <p:extLst>
       <p:ext uri="{BB962C8B-B14F-4D97-AF65-F5344CB8AC3E}">
-        <p14:creationId xmlns:p14="http://schemas.microsoft.com/office/powerpoint/2010/main" val="2078449061"/>
+        <p14:creationId xmlns:p14="http://schemas.microsoft.com/office/powerpoint/2010/main" val="1865943174"/>
       </p:ext>
     </p:extLst>
   </p:cSld>
@@ -7251,10 +7191,10 @@
       </p:grpSpPr>
       <p:sp>
         <p:nvSpPr>
-          <p:cNvPr id="15" name="text-31">
+          <p:cNvPr id="15" name="text-29">
             <a:extLst xmlns:a="http://schemas.openxmlformats.org/drawingml/2006/main">
               <a:ext uri="{FF2B5EF4-FFF2-40B4-BE49-F238E27FC236}">
-                <a16:creationId xmlns:a16="http://schemas.microsoft.com/office/drawing/2014/main" id="{4A5792E5-EA8B-4BBA-BD81-4FB931B5BCB7}"/>
+                <a16:creationId xmlns:a16="http://schemas.microsoft.com/office/drawing/2014/main" id="{B47565C3-6F55-4402-A726-C6E3A8AF23CC}"/>
               </a:ext>
             </a:extLst>
           </p:cNvPr>
@@ -7409,10 +7349,10 @@
       </p:sp>
       <p:sp>
         <p:nvSpPr>
-          <p:cNvPr id="2" name="text-32">
+          <p:cNvPr id="2" name="text-30">
             <a:extLst xmlns:a="http://schemas.openxmlformats.org/drawingml/2006/main">
               <a:ext uri="{FF2B5EF4-FFF2-40B4-BE49-F238E27FC236}">
-                <a16:creationId xmlns:a16="http://schemas.microsoft.com/office/drawing/2014/main" id="{06F940ED-C92A-4BE4-BC40-453B67482CD6}"/>
+                <a16:creationId xmlns:a16="http://schemas.microsoft.com/office/drawing/2014/main" id="{64B7A40F-0C6A-4435-B4A6-BEF673BDD5D3}"/>
               </a:ext>
             </a:extLst>
           </p:cNvPr>
@@ -7567,10 +7507,10 @@
       </p:sp>
       <p:sp>
         <p:nvSpPr>
-          <p:cNvPr id="3" name="rule-33">
+          <p:cNvPr id="3" name="rule-31">
             <a:extLst xmlns:a="http://schemas.openxmlformats.org/drawingml/2006/main">
               <a:ext uri="{FF2B5EF4-FFF2-40B4-BE49-F238E27FC236}">
-                <a16:creationId xmlns:a16="http://schemas.microsoft.com/office/drawing/2014/main" id="{771431D7-773F-437A-88CF-B89BA35319BD}"/>
+                <a16:creationId xmlns:a16="http://schemas.microsoft.com/office/drawing/2014/main" id="{0D699098-A710-416E-B097-CFA2DC7C7D00}"/>
               </a:ext>
             </a:extLst>
           </p:cNvPr>
@@ -7597,10 +7537,10 @@
       </p:sp>
       <p:sp>
         <p:nvSpPr>
-          <p:cNvPr id="4" name="text-34">
+          <p:cNvPr id="4" name="text-32">
             <a:extLst xmlns:a="http://schemas.openxmlformats.org/drawingml/2006/main">
               <a:ext uri="{FF2B5EF4-FFF2-40B4-BE49-F238E27FC236}">
-                <a16:creationId xmlns:a16="http://schemas.microsoft.com/office/drawing/2014/main" id="{BA418800-BD54-4CD6-B9F0-DE170FCBA6C2}"/>
+                <a16:creationId xmlns:a16="http://schemas.microsoft.com/office/drawing/2014/main" id="{21FF9619-303F-4102-9D9E-F4122338C9B2}"/>
               </a:ext>
             </a:extLst>
           </p:cNvPr>
@@ -7755,10 +7695,10 @@
       </p:sp>
       <p:sp>
         <p:nvSpPr>
-          <p:cNvPr id="5" name="text-35">
+          <p:cNvPr id="5" name="text-33">
             <a:extLst xmlns:a="http://schemas.openxmlformats.org/drawingml/2006/main">
               <a:ext uri="{FF2B5EF4-FFF2-40B4-BE49-F238E27FC236}">
-                <a16:creationId xmlns:a16="http://schemas.microsoft.com/office/drawing/2014/main" id="{2698067C-6117-446D-83BE-4268576B6D4A}"/>
+                <a16:creationId xmlns:a16="http://schemas.microsoft.com/office/drawing/2014/main" id="{EDCDEF70-FC7A-4677-8AB2-107F5121A3B8}"/>
               </a:ext>
             </a:extLst>
           </p:cNvPr>
@@ -7913,10 +7853,10 @@
       </p:sp>
       <p:sp>
         <p:nvSpPr>
-          <p:cNvPr id="6" name="text-36">
+          <p:cNvPr id="6" name="text-34">
             <a:extLst xmlns:a="http://schemas.openxmlformats.org/drawingml/2006/main">
               <a:ext uri="{FF2B5EF4-FFF2-40B4-BE49-F238E27FC236}">
-                <a16:creationId xmlns:a16="http://schemas.microsoft.com/office/drawing/2014/main" id="{FD6EA66D-741C-40FA-A8B5-4C7AC90F8469}"/>
+                <a16:creationId xmlns:a16="http://schemas.microsoft.com/office/drawing/2014/main" id="{9E856043-0608-4D0A-952D-C7A113CEB268}"/>
               </a:ext>
             </a:extLst>
           </p:cNvPr>
@@ -8071,10 +8011,10 @@
       </p:sp>
       <p:sp>
         <p:nvSpPr>
-          <p:cNvPr id="7" name="text-37">
+          <p:cNvPr id="7" name="text-35">
             <a:extLst xmlns:a="http://schemas.openxmlformats.org/drawingml/2006/main">
               <a:ext uri="{FF2B5EF4-FFF2-40B4-BE49-F238E27FC236}">
-                <a16:creationId xmlns:a16="http://schemas.microsoft.com/office/drawing/2014/main" id="{6DF3F46F-2532-4AAD-BD19-38271C07BF8A}"/>
+                <a16:creationId xmlns:a16="http://schemas.microsoft.com/office/drawing/2014/main" id="{9B720747-DC4F-4802-99F4-37F577F683FE}"/>
               </a:ext>
             </a:extLst>
           </p:cNvPr>
@@ -8229,10 +8169,10 @@
       </p:sp>
       <p:sp>
         <p:nvSpPr>
-          <p:cNvPr id="8" name="text-38">
+          <p:cNvPr id="8" name="text-36">
             <a:extLst xmlns:a="http://schemas.openxmlformats.org/drawingml/2006/main">
               <a:ext uri="{FF2B5EF4-FFF2-40B4-BE49-F238E27FC236}">
-                <a16:creationId xmlns:a16="http://schemas.microsoft.com/office/drawing/2014/main" id="{C6F1BE4C-1012-40F1-93AF-004767AAD3F7}"/>
+                <a16:creationId xmlns:a16="http://schemas.microsoft.com/office/drawing/2014/main" id="{E5E8E739-4C06-4C12-8371-6A7C4C22877E}"/>
               </a:ext>
             </a:extLst>
           </p:cNvPr>
@@ -8387,10 +8327,10 @@
       </p:sp>
       <p:sp>
         <p:nvSpPr>
-          <p:cNvPr id="9" name="text-39">
+          <p:cNvPr id="9" name="text-37">
             <a:extLst xmlns:a="http://schemas.openxmlformats.org/drawingml/2006/main">
               <a:ext uri="{FF2B5EF4-FFF2-40B4-BE49-F238E27FC236}">
-                <a16:creationId xmlns:a16="http://schemas.microsoft.com/office/drawing/2014/main" id="{4229E0C3-A710-4C35-8424-93ED218DBD4E}"/>
+                <a16:creationId xmlns:a16="http://schemas.microsoft.com/office/drawing/2014/main" id="{74482EF0-C711-41FB-AA45-13B125AA9105}"/>
               </a:ext>
             </a:extLst>
           </p:cNvPr>
@@ -8545,10 +8485,10 @@
       </p:sp>
       <p:sp>
         <p:nvSpPr>
-          <p:cNvPr id="10" name="rule-40">
+          <p:cNvPr id="10" name="rule-38">
             <a:extLst xmlns:a="http://schemas.openxmlformats.org/drawingml/2006/main">
               <a:ext uri="{FF2B5EF4-FFF2-40B4-BE49-F238E27FC236}">
-                <a16:creationId xmlns:a16="http://schemas.microsoft.com/office/drawing/2014/main" id="{71D9BF8D-16A4-4E6E-9B54-DEE022D41B91}"/>
+                <a16:creationId xmlns:a16="http://schemas.microsoft.com/office/drawing/2014/main" id="{5EB30006-FE37-437C-B137-858A96835597}"/>
               </a:ext>
             </a:extLst>
           </p:cNvPr>
@@ -8578,7 +8518,7 @@
           <p:cNvPr id="11" name="hotspot-1">
             <a:extLst xmlns:a="http://schemas.openxmlformats.org/drawingml/2006/main">
               <a:ext uri="{FF2B5EF4-FFF2-40B4-BE49-F238E27FC236}">
-                <a16:creationId xmlns:a16="http://schemas.microsoft.com/office/drawing/2014/main" id="{E5B2CD23-89F3-4707-904D-72850A183209}"/>
+                <a16:creationId xmlns:a16="http://schemas.microsoft.com/office/drawing/2014/main" id="{247A60DF-35ED-41BE-B9A4-05ADA6F3AB15}"/>
               </a:ext>
             </a:extLst>
             <ns0:hlinkClick xmlns:ns0="http://schemas.openxmlformats.org/drawingml/2006/main" xmlns:ns1="http://schemas.openxmlformats.org/officeDocument/2006/relationships" ns1:id="rIdClick1"/>
@@ -8611,7 +8551,7 @@
           <p:cNvPr id="12" name="">
             <a:extLst xmlns:a="http://schemas.openxmlformats.org/drawingml/2006/main">
               <a:ext uri="{FF2B5EF4-FFF2-40B4-BE49-F238E27FC236}">
-                <a16:creationId xmlns:a16="http://schemas.microsoft.com/office/drawing/2014/main" id="{CF566F91-BCED-4B0B-8DFD-76EAFC02CC85}"/>
+                <a16:creationId xmlns:a16="http://schemas.microsoft.com/office/drawing/2014/main" id="{B38BB7A5-1C82-4C87-9587-AC435ADB7345}"/>
               </a:ext>
             </a:extLst>
           </p:cNvPr>
@@ -8621,7 +8561,7 @@
           <p:nvPr/>
         </p:nvPicPr>
         <p:blipFill>
-          <a:blip xmlns:r="http://schemas.openxmlformats.org/officeDocument/2006/relationships" xmlns:a="http://schemas.openxmlformats.org/drawingml/2006/main" r:embed="R8eb66d399ec246a6"/>
+          <a:blip xmlns:r="http://schemas.openxmlformats.org/officeDocument/2006/relationships" xmlns:a="http://schemas.openxmlformats.org/drawingml/2006/main" r:embed="Rc2a2355f5e814c5b"/>
           <a:srcRect xmlns:a="http://schemas.openxmlformats.org/drawingml/2006/main" l="16053" t="0" r="16053" b="0"/>
           <a:stretch xmlns:a="http://schemas.openxmlformats.org/drawingml/2006/main">
             <a:fillRect l="0" t="0" r="0" b="0"/>
@@ -8642,7 +8582,7 @@
           <p:cNvPr id="13" name="">
             <a:extLst xmlns:a="http://schemas.openxmlformats.org/drawingml/2006/main">
               <a:ext uri="{FF2B5EF4-FFF2-40B4-BE49-F238E27FC236}">
-                <a16:creationId xmlns:a16="http://schemas.microsoft.com/office/drawing/2014/main" id="{889F8F87-5C84-45D1-815A-4DBE2DA62BB7}"/>
+                <a16:creationId xmlns:a16="http://schemas.microsoft.com/office/drawing/2014/main" id="{5CADA244-535B-42C5-A240-BFE4A1B847E5}"/>
               </a:ext>
             </a:extLst>
           </p:cNvPr>
@@ -8652,7 +8592,7 @@
           <p:nvPr/>
         </p:nvPicPr>
         <p:blipFill>
-          <a:blip xmlns:r="http://schemas.openxmlformats.org/officeDocument/2006/relationships" xmlns:a="http://schemas.openxmlformats.org/drawingml/2006/main" r:embed="R2d8db7dec3764d01"/>
+          <a:blip xmlns:r="http://schemas.openxmlformats.org/officeDocument/2006/relationships" xmlns:a="http://schemas.openxmlformats.org/drawingml/2006/main" r:embed="Rf9b96f7835d1464e"/>
           <a:srcRect xmlns:a="http://schemas.openxmlformats.org/drawingml/2006/main" l="16053" t="0" r="16053" b="0"/>
           <a:stretch xmlns:a="http://schemas.openxmlformats.org/drawingml/2006/main">
             <a:fillRect l="0" t="0" r="0" b="0"/>
@@ -8673,7 +8613,7 @@
           <p:cNvPr id="14" name="">
             <a:extLst xmlns:a="http://schemas.openxmlformats.org/drawingml/2006/main">
               <a:ext uri="{FF2B5EF4-FFF2-40B4-BE49-F238E27FC236}">
-                <a16:creationId xmlns:a16="http://schemas.microsoft.com/office/drawing/2014/main" id="{F79D0733-8773-4951-A3BC-115E7A9A7454}"/>
+                <a16:creationId xmlns:a16="http://schemas.microsoft.com/office/drawing/2014/main" id="{B8AB01DE-915E-43CD-94D5-E3371475466A}"/>
               </a:ext>
             </a:extLst>
           </p:cNvPr>
@@ -8683,7 +8623,7 @@
           <p:nvPr/>
         </p:nvPicPr>
         <p:blipFill>
-          <a:blip xmlns:r="http://schemas.openxmlformats.org/officeDocument/2006/relationships" xmlns:a="http://schemas.openxmlformats.org/drawingml/2006/main" r:embed="Ra9a98e56110e49d0"/>
+          <a:blip xmlns:r="http://schemas.openxmlformats.org/officeDocument/2006/relationships" xmlns:a="http://schemas.openxmlformats.org/drawingml/2006/main" r:embed="Rbfce357206e2449c"/>
           <a:srcRect xmlns:a="http://schemas.openxmlformats.org/drawingml/2006/main" l="16053" t="0" r="16053" b="0"/>
           <a:stretch xmlns:a="http://schemas.openxmlformats.org/drawingml/2006/main">
             <a:fillRect l="0" t="0" r="0" b="0"/>
@@ -8702,7 +8642,7 @@
     </p:spTree>
     <p:extLst>
       <p:ext uri="{BB962C8B-B14F-4D97-AF65-F5344CB8AC3E}">
-        <p14:creationId xmlns:p14="http://schemas.microsoft.com/office/powerpoint/2010/main" val="726699112"/>
+        <p14:creationId xmlns:p14="http://schemas.microsoft.com/office/powerpoint/2010/main" val="1900182782"/>
       </p:ext>
     </p:extLst>
   </p:cSld>
@@ -8730,10 +8670,10 @@
       </p:grpSpPr>
       <p:sp>
         <p:nvSpPr>
-          <p:cNvPr id="53" name="text-42">
+          <p:cNvPr id="53" name="text-40">
             <a:extLst xmlns:a="http://schemas.openxmlformats.org/drawingml/2006/main">
               <a:ext uri="{FF2B5EF4-FFF2-40B4-BE49-F238E27FC236}">
-                <a16:creationId xmlns:a16="http://schemas.microsoft.com/office/drawing/2014/main" id="{091A5531-7416-4BEC-A109-B9B6DE20C0EA}"/>
+                <a16:creationId xmlns:a16="http://schemas.microsoft.com/office/drawing/2014/main" id="{F3B3E984-462F-40A7-A359-FC236DD14812}"/>
               </a:ext>
             </a:extLst>
           </p:cNvPr>
@@ -8888,10 +8828,10 @@
       </p:sp>
       <p:sp>
         <p:nvSpPr>
-          <p:cNvPr id="2" name="text-43">
+          <p:cNvPr id="2" name="text-41">
             <a:extLst xmlns:a="http://schemas.openxmlformats.org/drawingml/2006/main">
               <a:ext uri="{FF2B5EF4-FFF2-40B4-BE49-F238E27FC236}">
-                <a16:creationId xmlns:a16="http://schemas.microsoft.com/office/drawing/2014/main" id="{EA3E65AE-375A-4BF5-B265-DA16FB0C9F9B}"/>
+                <a16:creationId xmlns:a16="http://schemas.microsoft.com/office/drawing/2014/main" id="{B5365F24-ABFB-418D-99F2-B455C45F0FEE}"/>
               </a:ext>
             </a:extLst>
           </p:cNvPr>
@@ -9046,10 +8986,10 @@
       </p:sp>
       <p:sp>
         <p:nvSpPr>
-          <p:cNvPr id="3" name="rule-44">
+          <p:cNvPr id="3" name="rule-42">
             <a:extLst xmlns:a="http://schemas.openxmlformats.org/drawingml/2006/main">
               <a:ext uri="{FF2B5EF4-FFF2-40B4-BE49-F238E27FC236}">
-                <a16:creationId xmlns:a16="http://schemas.microsoft.com/office/drawing/2014/main" id="{021A0DB8-03C5-4372-8C12-EE52470E8C6D}"/>
+                <a16:creationId xmlns:a16="http://schemas.microsoft.com/office/drawing/2014/main" id="{AB9FC7BD-1C00-45AD-9CB8-A8FB2C09306C}"/>
               </a:ext>
             </a:extLst>
           </p:cNvPr>
@@ -9076,10 +9016,10 @@
       </p:sp>
       <p:sp>
         <p:nvSpPr>
-          <p:cNvPr id="4" name="text-45">
+          <p:cNvPr id="4" name="text-43">
             <a:extLst xmlns:a="http://schemas.openxmlformats.org/drawingml/2006/main">
               <a:ext uri="{FF2B5EF4-FFF2-40B4-BE49-F238E27FC236}">
-                <a16:creationId xmlns:a16="http://schemas.microsoft.com/office/drawing/2014/main" id="{C5C5814E-B060-4328-92DE-697647889B06}"/>
+                <a16:creationId xmlns:a16="http://schemas.microsoft.com/office/drawing/2014/main" id="{EEE10C9D-3A91-4270-A892-F6D08BC71D6D}"/>
               </a:ext>
             </a:extLst>
           </p:cNvPr>
@@ -9234,10 +9174,10 @@
       </p:sp>
       <p:sp>
         <p:nvSpPr>
-          <p:cNvPr id="5" name="text-46">
+          <p:cNvPr id="5" name="text-44">
             <a:extLst xmlns:a="http://schemas.openxmlformats.org/drawingml/2006/main">
               <a:ext uri="{FF2B5EF4-FFF2-40B4-BE49-F238E27FC236}">
-                <a16:creationId xmlns:a16="http://schemas.microsoft.com/office/drawing/2014/main" id="{991EC097-D831-4247-A83B-8C7B5CE1EF21}"/>
+                <a16:creationId xmlns:a16="http://schemas.microsoft.com/office/drawing/2014/main" id="{5A6469DE-9320-49BA-9E82-DDECFC5C971E}"/>
               </a:ext>
             </a:extLst>
           </p:cNvPr>
@@ -9392,10 +9332,10 @@
       </p:sp>
       <p:sp>
         <p:nvSpPr>
-          <p:cNvPr id="6" name="text-47">
+          <p:cNvPr id="6" name="text-45">
             <a:extLst xmlns:a="http://schemas.openxmlformats.org/drawingml/2006/main">
               <a:ext uri="{FF2B5EF4-FFF2-40B4-BE49-F238E27FC236}">
-                <a16:creationId xmlns:a16="http://schemas.microsoft.com/office/drawing/2014/main" id="{A7BB2628-440E-4F49-BF7E-8C0689861B34}"/>
+                <a16:creationId xmlns:a16="http://schemas.microsoft.com/office/drawing/2014/main" id="{AE5CC1D5-123C-4F3E-BE20-CCBDC9653D02}"/>
               </a:ext>
             </a:extLst>
           </p:cNvPr>
@@ -9550,10 +9490,10 @@
       </p:sp>
       <p:sp>
         <p:nvSpPr>
-          <p:cNvPr id="7" name="text-48">
+          <p:cNvPr id="7" name="text-46">
             <a:extLst xmlns:a="http://schemas.openxmlformats.org/drawingml/2006/main">
               <a:ext uri="{FF2B5EF4-FFF2-40B4-BE49-F238E27FC236}">
-                <a16:creationId xmlns:a16="http://schemas.microsoft.com/office/drawing/2014/main" id="{5B0D6537-BB31-476D-9944-2FCB809A94D9}"/>
+                <a16:creationId xmlns:a16="http://schemas.microsoft.com/office/drawing/2014/main" id="{6D12576D-B3F1-4B1E-8D45-F1DBFEC8C49B}"/>
               </a:ext>
             </a:extLst>
           </p:cNvPr>
@@ -9708,10 +9648,10 @@
       </p:sp>
       <p:sp>
         <p:nvSpPr>
-          <p:cNvPr id="8" name="text-49">
+          <p:cNvPr id="8" name="text-47">
             <a:extLst xmlns:a="http://schemas.openxmlformats.org/drawingml/2006/main">
               <a:ext uri="{FF2B5EF4-FFF2-40B4-BE49-F238E27FC236}">
-                <a16:creationId xmlns:a16="http://schemas.microsoft.com/office/drawing/2014/main" id="{38A80171-249E-46FE-AAD3-4B643882D8E8}"/>
+                <a16:creationId xmlns:a16="http://schemas.microsoft.com/office/drawing/2014/main" id="{13FFB541-3617-4FCD-9D21-6225F90C3B6D}"/>
               </a:ext>
             </a:extLst>
           </p:cNvPr>
@@ -9722,8 +9662,8 @@
         </p:nvSpPr>
         <p:spPr>
           <a:xfrm xmlns:a="http://schemas.openxmlformats.org/drawingml/2006/main">
-            <a:off x="571500" y="2028825"/>
-            <a:ext cx="2952750" cy="666750"/>
+            <a:off x="571500" y="1971675"/>
+            <a:ext cx="3333750" cy="666750"/>
           </a:xfrm>
           <a:prstGeom xmlns:a="http://schemas.openxmlformats.org/drawingml/2006/main" prst="rect">
             <a:avLst/>
@@ -9739,7 +9679,7 @@
           </a:bodyPr>
           <a:lstStyle xmlns:a="http://schemas.openxmlformats.org/drawingml/2006/main">
             <a:defPPr>
-              <a:defRPr sz="5025" b="0">
+              <a:defRPr sz="4425" b="0">
                 <a:solidFill>
                   <a:srgbClr val="C2142F"/>
                 </a:solidFill>
@@ -9749,7 +9689,7 @@
               </a:defRPr>
             </a:defPPr>
             <a:lvl1pPr>
-              <a:defRPr sz="5025" b="0">
+              <a:defRPr sz="4425" b="0">
                 <a:solidFill>
                   <a:srgbClr val="C2142F"/>
                 </a:solidFill>
@@ -9759,7 +9699,7 @@
               </a:defRPr>
             </a:lvl1pPr>
             <a:lvl2pPr>
-              <a:defRPr sz="5025" b="0">
+              <a:defRPr sz="4425" b="0">
                 <a:solidFill>
                   <a:srgbClr val="C2142F"/>
                 </a:solidFill>
@@ -9769,7 +9709,7 @@
               </a:defRPr>
             </a:lvl2pPr>
             <a:lvl3pPr>
-              <a:defRPr sz="5025" b="0">
+              <a:defRPr sz="4425" b="0">
                 <a:solidFill>
                   <a:srgbClr val="C2142F"/>
                 </a:solidFill>
@@ -9779,7 +9719,7 @@
               </a:defRPr>
             </a:lvl3pPr>
             <a:lvl4pPr>
-              <a:defRPr sz="5025" b="0">
+              <a:defRPr sz="4425" b="0">
                 <a:solidFill>
                   <a:srgbClr val="C2142F"/>
                 </a:solidFill>
@@ -9789,7 +9729,7 @@
               </a:defRPr>
             </a:lvl4pPr>
             <a:lvl5pPr>
-              <a:defRPr sz="5025" b="0">
+              <a:defRPr sz="4425" b="0">
                 <a:solidFill>
                   <a:srgbClr val="C2142F"/>
                 </a:solidFill>
@@ -9799,7 +9739,7 @@
               </a:defRPr>
             </a:lvl5pPr>
             <a:lvl6pPr>
-              <a:defRPr sz="5025" b="0">
+              <a:defRPr sz="4425" b="0">
                 <a:solidFill>
                   <a:srgbClr val="C2142F"/>
                 </a:solidFill>
@@ -9809,7 +9749,7 @@
               </a:defRPr>
             </a:lvl6pPr>
             <a:lvl7pPr>
-              <a:defRPr sz="5025" b="0">
+              <a:defRPr sz="4425" b="0">
                 <a:solidFill>
                   <a:srgbClr val="C2142F"/>
                 </a:solidFill>
@@ -9819,7 +9759,7 @@
               </a:defRPr>
             </a:lvl7pPr>
             <a:lvl8pPr>
-              <a:defRPr sz="5025" b="0">
+              <a:defRPr sz="4425" b="0">
                 <a:solidFill>
                   <a:srgbClr val="C2142F"/>
                 </a:solidFill>
@@ -9829,7 +9769,7 @@
               </a:defRPr>
             </a:lvl8pPr>
             <a:lvl9pPr>
-              <a:defRPr sz="5025" b="0">
+              <a:defRPr sz="4425" b="0">
                 <a:solidFill>
                   <a:srgbClr val="C2142F"/>
                 </a:solidFill>
@@ -9841,7 +9781,7 @@
           </a:lstStyle>
           <a:p xmlns:a="http://schemas.openxmlformats.org/drawingml/2006/main">
             <a:pPr>
-              <a:defRPr sz="5025" b="0">
+              <a:defRPr sz="4425" b="0">
                 <a:solidFill>
                   <a:srgbClr val="C2142F"/>
                 </a:solidFill>
@@ -9851,7 +9791,7 @@
               </a:defRPr>
             </a:pPr>
             <a:r>
-              <a:rPr sz="5025" b="0">
+              <a:rPr sz="4425" b="0">
                 <a:solidFill>
                   <a:srgbClr val="C2142F"/>
                 </a:solidFill>
@@ -9866,10 +9806,10 @@
       </p:sp>
       <p:sp>
         <p:nvSpPr>
-          <p:cNvPr id="9" name="text-50">
+          <p:cNvPr id="9" name="text-48">
             <a:extLst xmlns:a="http://schemas.openxmlformats.org/drawingml/2006/main">
               <a:ext uri="{FF2B5EF4-FFF2-40B4-BE49-F238E27FC236}">
-                <a16:creationId xmlns:a16="http://schemas.microsoft.com/office/drawing/2014/main" id="{E4B1D52D-2CD3-4D47-91BB-4F54471BEA67}"/>
+                <a16:creationId xmlns:a16="http://schemas.microsoft.com/office/drawing/2014/main" id="{5EE50E13-17F7-49C2-B6BC-8AAE4BB18CCC}"/>
               </a:ext>
             </a:extLst>
           </p:cNvPr>
@@ -9880,8 +9820,8 @@
         </p:nvSpPr>
         <p:spPr>
           <a:xfrm xmlns:a="http://schemas.openxmlformats.org/drawingml/2006/main">
-            <a:off x="571500" y="2809875"/>
-            <a:ext cx="2952750" cy="323850"/>
+            <a:off x="571500" y="2752725"/>
+            <a:ext cx="3333750" cy="323850"/>
           </a:xfrm>
           <a:prstGeom xmlns:a="http://schemas.openxmlformats.org/drawingml/2006/main" prst="rect">
             <a:avLst/>
@@ -10024,10 +9964,10 @@
       </p:sp>
       <p:sp>
         <p:nvSpPr>
-          <p:cNvPr id="10" name="text-51">
+          <p:cNvPr id="10" name="text-49">
             <a:extLst xmlns:a="http://schemas.openxmlformats.org/drawingml/2006/main">
               <a:ext uri="{FF2B5EF4-FFF2-40B4-BE49-F238E27FC236}">
-                <a16:creationId xmlns:a16="http://schemas.microsoft.com/office/drawing/2014/main" id="{E907B996-E959-4F0D-AC11-808ADFBCA864}"/>
+                <a16:creationId xmlns:a16="http://schemas.microsoft.com/office/drawing/2014/main" id="{7CA7D1D8-6FA7-4980-8FA8-980FD131253E}"/>
               </a:ext>
             </a:extLst>
           </p:cNvPr>
@@ -10038,8 +9978,8 @@
         </p:nvSpPr>
         <p:spPr>
           <a:xfrm xmlns:a="http://schemas.openxmlformats.org/drawingml/2006/main">
-            <a:off x="3619500" y="2124075"/>
-            <a:ext cx="2476500" cy="666750"/>
+            <a:off x="4429125" y="1971675"/>
+            <a:ext cx="3333750" cy="666750"/>
           </a:xfrm>
           <a:prstGeom xmlns:a="http://schemas.openxmlformats.org/drawingml/2006/main" prst="rect">
             <a:avLst/>
@@ -10055,7 +9995,7 @@
           </a:bodyPr>
           <a:lstStyle xmlns:a="http://schemas.openxmlformats.org/drawingml/2006/main">
             <a:defPPr>
-              <a:defRPr sz="3225" b="0">
+              <a:defRPr sz="3750" b="0">
                 <a:solidFill>
                   <a:srgbClr val="0D0B10"/>
                 </a:solidFill>
@@ -10065,7 +10005,7 @@
               </a:defRPr>
             </a:defPPr>
             <a:lvl1pPr>
-              <a:defRPr sz="3225" b="0">
+              <a:defRPr sz="3750" b="0">
                 <a:solidFill>
                   <a:srgbClr val="0D0B10"/>
                 </a:solidFill>
@@ -10075,7 +10015,7 @@
               </a:defRPr>
             </a:lvl1pPr>
             <a:lvl2pPr>
-              <a:defRPr sz="3225" b="0">
+              <a:defRPr sz="3750" b="0">
                 <a:solidFill>
                   <a:srgbClr val="0D0B10"/>
                 </a:solidFill>
@@ -10085,7 +10025,7 @@
               </a:defRPr>
             </a:lvl2pPr>
             <a:lvl3pPr>
-              <a:defRPr sz="3225" b="0">
+              <a:defRPr sz="3750" b="0">
                 <a:solidFill>
                   <a:srgbClr val="0D0B10"/>
                 </a:solidFill>
@@ -10095,7 +10035,7 @@
               </a:defRPr>
             </a:lvl3pPr>
             <a:lvl4pPr>
-              <a:defRPr sz="3225" b="0">
+              <a:defRPr sz="3750" b="0">
                 <a:solidFill>
                   <a:srgbClr val="0D0B10"/>
                 </a:solidFill>
@@ -10105,7 +10045,7 @@
               </a:defRPr>
             </a:lvl4pPr>
             <a:lvl5pPr>
-              <a:defRPr sz="3225" b="0">
+              <a:defRPr sz="3750" b="0">
                 <a:solidFill>
                   <a:srgbClr val="0D0B10"/>
                 </a:solidFill>
@@ -10115,7 +10055,7 @@
               </a:defRPr>
             </a:lvl5pPr>
             <a:lvl6pPr>
-              <a:defRPr sz="3225" b="0">
+              <a:defRPr sz="3750" b="0">
                 <a:solidFill>
                   <a:srgbClr val="0D0B10"/>
                 </a:solidFill>
@@ -10125,7 +10065,7 @@
               </a:defRPr>
             </a:lvl6pPr>
             <a:lvl7pPr>
-              <a:defRPr sz="3225" b="0">
+              <a:defRPr sz="3750" b="0">
                 <a:solidFill>
                   <a:srgbClr val="0D0B10"/>
                 </a:solidFill>
@@ -10135,7 +10075,7 @@
               </a:defRPr>
             </a:lvl7pPr>
             <a:lvl8pPr>
-              <a:defRPr sz="3225" b="0">
+              <a:defRPr sz="3750" b="0">
                 <a:solidFill>
                   <a:srgbClr val="0D0B10"/>
                 </a:solidFill>
@@ -10145,7 +10085,7 @@
               </a:defRPr>
             </a:lvl8pPr>
             <a:lvl9pPr>
-              <a:defRPr sz="3225" b="0">
+              <a:defRPr sz="3750" b="0">
                 <a:solidFill>
                   <a:srgbClr val="0D0B10"/>
                 </a:solidFill>
@@ -10157,7 +10097,7 @@
           </a:lstStyle>
           <a:p xmlns:a="http://schemas.openxmlformats.org/drawingml/2006/main">
             <a:pPr>
-              <a:defRPr sz="3225" b="0">
+              <a:defRPr sz="3750" b="0">
                 <a:solidFill>
                   <a:srgbClr val="0D0B10"/>
                 </a:solidFill>
@@ -10167,7 +10107,7 @@
               </a:defRPr>
             </a:pPr>
             <a:r>
-              <a:rPr sz="3225" b="0">
+              <a:rPr sz="3750" b="0">
                 <a:solidFill>
                   <a:srgbClr val="0D0B10"/>
                 </a:solidFill>
@@ -10182,10 +10122,10 @@
       </p:sp>
       <p:sp>
         <p:nvSpPr>
-          <p:cNvPr id="11" name="text-52">
+          <p:cNvPr id="11" name="text-50">
             <a:extLst xmlns:a="http://schemas.openxmlformats.org/drawingml/2006/main">
               <a:ext uri="{FF2B5EF4-FFF2-40B4-BE49-F238E27FC236}">
-                <a16:creationId xmlns:a16="http://schemas.microsoft.com/office/drawing/2014/main" id="{92C10951-1339-4B1B-94CA-658A50442167}"/>
+                <a16:creationId xmlns:a16="http://schemas.microsoft.com/office/drawing/2014/main" id="{E46CB1A5-6413-427E-BF57-3E54D35F8AC9}"/>
               </a:ext>
             </a:extLst>
           </p:cNvPr>
@@ -10196,8 +10136,8 @@
         </p:nvSpPr>
         <p:spPr>
           <a:xfrm xmlns:a="http://schemas.openxmlformats.org/drawingml/2006/main">
-            <a:off x="3619500" y="2905125"/>
-            <a:ext cx="2476500" cy="323850"/>
+            <a:off x="4429125" y="2752725"/>
+            <a:ext cx="3333750" cy="323850"/>
           </a:xfrm>
           <a:prstGeom xmlns:a="http://schemas.openxmlformats.org/drawingml/2006/main" prst="rect">
             <a:avLst/>
@@ -10340,10 +10280,10 @@
       </p:sp>
       <p:sp>
         <p:nvSpPr>
-          <p:cNvPr id="12" name="text-53">
+          <p:cNvPr id="12" name="text-51">
             <a:extLst xmlns:a="http://schemas.openxmlformats.org/drawingml/2006/main">
               <a:ext uri="{FF2B5EF4-FFF2-40B4-BE49-F238E27FC236}">
-                <a16:creationId xmlns:a16="http://schemas.microsoft.com/office/drawing/2014/main" id="{5399AD87-E9A2-429A-9FDD-7F44272CCABF}"/>
+                <a16:creationId xmlns:a16="http://schemas.microsoft.com/office/drawing/2014/main" id="{09F05E8C-5ED3-49BA-A4B9-188392F4E9F9}"/>
               </a:ext>
             </a:extLst>
           </p:cNvPr>
@@ -10354,8 +10294,8 @@
         </p:nvSpPr>
         <p:spPr>
           <a:xfrm xmlns:a="http://schemas.openxmlformats.org/drawingml/2006/main">
-            <a:off x="6181725" y="2124075"/>
-            <a:ext cx="2476500" cy="666750"/>
+            <a:off x="8286750" y="1971675"/>
+            <a:ext cx="3333750" cy="666750"/>
           </a:xfrm>
           <a:prstGeom xmlns:a="http://schemas.openxmlformats.org/drawingml/2006/main" prst="rect">
             <a:avLst/>
@@ -10371,7 +10311,7 @@
           </a:bodyPr>
           <a:lstStyle xmlns:a="http://schemas.openxmlformats.org/drawingml/2006/main">
             <a:defPPr>
-              <a:defRPr sz="3225" b="0">
+              <a:defRPr sz="3750" b="0">
                 <a:solidFill>
                   <a:srgbClr val="0D0B10"/>
                 </a:solidFill>
@@ -10381,7 +10321,7 @@
               </a:defRPr>
             </a:defPPr>
             <a:lvl1pPr>
-              <a:defRPr sz="3225" b="0">
+              <a:defRPr sz="3750" b="0">
                 <a:solidFill>
                   <a:srgbClr val="0D0B10"/>
                 </a:solidFill>
@@ -10391,7 +10331,7 @@
               </a:defRPr>
             </a:lvl1pPr>
             <a:lvl2pPr>
-              <a:defRPr sz="3225" b="0">
+              <a:defRPr sz="3750" b="0">
                 <a:solidFill>
                   <a:srgbClr val="0D0B10"/>
                 </a:solidFill>
@@ -10401,7 +10341,7 @@
               </a:defRPr>
             </a:lvl2pPr>
             <a:lvl3pPr>
-              <a:defRPr sz="3225" b="0">
+              <a:defRPr sz="3750" b="0">
                 <a:solidFill>
                   <a:srgbClr val="0D0B10"/>
                 </a:solidFill>
@@ -10411,7 +10351,7 @@
               </a:defRPr>
             </a:lvl3pPr>
             <a:lvl4pPr>
-              <a:defRPr sz="3225" b="0">
+              <a:defRPr sz="3750" b="0">
                 <a:solidFill>
                   <a:srgbClr val="0D0B10"/>
                 </a:solidFill>
@@ -10421,7 +10361,7 @@
               </a:defRPr>
             </a:lvl4pPr>
             <a:lvl5pPr>
-              <a:defRPr sz="3225" b="0">
+              <a:defRPr sz="3750" b="0">
                 <a:solidFill>
                   <a:srgbClr val="0D0B10"/>
                 </a:solidFill>
@@ -10431,7 +10371,7 @@
               </a:defRPr>
             </a:lvl5pPr>
             <a:lvl6pPr>
-              <a:defRPr sz="3225" b="0">
+              <a:defRPr sz="3750" b="0">
                 <a:solidFill>
                   <a:srgbClr val="0D0B10"/>
                 </a:solidFill>
@@ -10441,7 +10381,7 @@
               </a:defRPr>
             </a:lvl6pPr>
             <a:lvl7pPr>
-              <a:defRPr sz="3225" b="0">
+              <a:defRPr sz="3750" b="0">
                 <a:solidFill>
                   <a:srgbClr val="0D0B10"/>
                 </a:solidFill>
@@ -10451,7 +10391,7 @@
               </a:defRPr>
             </a:lvl7pPr>
             <a:lvl8pPr>
-              <a:defRPr sz="3225" b="0">
+              <a:defRPr sz="3750" b="0">
                 <a:solidFill>
                   <a:srgbClr val="0D0B10"/>
                 </a:solidFill>
@@ -10461,7 +10401,7 @@
               </a:defRPr>
             </a:lvl8pPr>
             <a:lvl9pPr>
-              <a:defRPr sz="3225" b="0">
+              <a:defRPr sz="3750" b="0">
                 <a:solidFill>
                   <a:srgbClr val="0D0B10"/>
                 </a:solidFill>
@@ -10473,7 +10413,7 @@
           </a:lstStyle>
           <a:p xmlns:a="http://schemas.openxmlformats.org/drawingml/2006/main">
             <a:pPr>
-              <a:defRPr sz="3225" b="0">
+              <a:defRPr sz="3750" b="0">
                 <a:solidFill>
                   <a:srgbClr val="0D0B10"/>
                 </a:solidFill>
@@ -10483,7 +10423,7 @@
               </a:defRPr>
             </a:pPr>
             <a:r>
-              <a:rPr sz="3225" b="0">
+              <a:rPr sz="3750" b="0">
                 <a:solidFill>
                   <a:srgbClr val="0D0B10"/>
                 </a:solidFill>
@@ -10498,10 +10438,10 @@
       </p:sp>
       <p:sp>
         <p:nvSpPr>
-          <p:cNvPr id="13" name="text-54">
+          <p:cNvPr id="13" name="text-52">
             <a:extLst xmlns:a="http://schemas.openxmlformats.org/drawingml/2006/main">
               <a:ext uri="{FF2B5EF4-FFF2-40B4-BE49-F238E27FC236}">
-                <a16:creationId xmlns:a16="http://schemas.microsoft.com/office/drawing/2014/main" id="{0AD00C02-8D16-4104-98E0-FF6C31067B1F}"/>
+                <a16:creationId xmlns:a16="http://schemas.microsoft.com/office/drawing/2014/main" id="{CDCB7DE9-E310-49E8-9AF3-304F2BBCF6E0}"/>
               </a:ext>
             </a:extLst>
           </p:cNvPr>
@@ -10512,8 +10452,8 @@
         </p:nvSpPr>
         <p:spPr>
           <a:xfrm xmlns:a="http://schemas.openxmlformats.org/drawingml/2006/main">
-            <a:off x="6181725" y="2905125"/>
-            <a:ext cx="2476500" cy="323850"/>
+            <a:off x="8286750" y="2752725"/>
+            <a:ext cx="3333750" cy="323850"/>
           </a:xfrm>
           <a:prstGeom xmlns:a="http://schemas.openxmlformats.org/drawingml/2006/main" prst="rect">
             <a:avLst/>
@@ -10656,326 +10596,10 @@
       </p:sp>
       <p:sp>
         <p:nvSpPr>
-          <p:cNvPr id="14" name="text-55">
+          <p:cNvPr id="14" name="rule-53">
             <a:extLst xmlns:a="http://schemas.openxmlformats.org/drawingml/2006/main">
               <a:ext uri="{FF2B5EF4-FFF2-40B4-BE49-F238E27FC236}">
-                <a16:creationId xmlns:a16="http://schemas.microsoft.com/office/drawing/2014/main" id="{6CC6E41D-562E-452E-A822-1A53D633B2D0}"/>
-              </a:ext>
-            </a:extLst>
-          </p:cNvPr>
-          <p:cNvSpPr>
-            <a:spLocks xmlns:a="http://schemas.openxmlformats.org/drawingml/2006/main" noGrp="1"/>
-          </p:cNvSpPr>
-          <p:nvPr/>
-        </p:nvSpPr>
-        <p:spPr>
-          <a:xfrm xmlns:a="http://schemas.openxmlformats.org/drawingml/2006/main">
-            <a:off x="8810625" y="2124075"/>
-            <a:ext cx="2714625" cy="666750"/>
-          </a:xfrm>
-          <a:prstGeom xmlns:a="http://schemas.openxmlformats.org/drawingml/2006/main" prst="rect">
-            <a:avLst/>
-          </a:prstGeom>
-          <a:noFill xmlns:a="http://schemas.openxmlformats.org/drawingml/2006/main"/>
-          <a:ln xmlns:a="http://schemas.openxmlformats.org/drawingml/2006/main" w="0">
-            <a:noFill/>
-          </a:ln>
-        </p:spPr>
-        <p:txBody>
-          <a:bodyPr xmlns:a="http://schemas.openxmlformats.org/drawingml/2006/main" lIns="0" tIns="0" rIns="0" bIns="0" anchor="t">
-            <a:noAutofit/>
-          </a:bodyPr>
-          <a:lstStyle xmlns:a="http://schemas.openxmlformats.org/drawingml/2006/main">
-            <a:defPPr>
-              <a:defRPr sz="3225" b="0">
-                <a:solidFill>
-                  <a:srgbClr val="0D0B10"/>
-                </a:solidFill>
-                <a:latin typeface="Georgia"/>
-                <a:ea typeface="Georgia"/>
-                <a:cs typeface="Georgia"/>
-              </a:defRPr>
-            </a:defPPr>
-            <a:lvl1pPr>
-              <a:defRPr sz="3225" b="0">
-                <a:solidFill>
-                  <a:srgbClr val="0D0B10"/>
-                </a:solidFill>
-                <a:latin typeface="Georgia"/>
-                <a:ea typeface="Georgia"/>
-                <a:cs typeface="Georgia"/>
-              </a:defRPr>
-            </a:lvl1pPr>
-            <a:lvl2pPr>
-              <a:defRPr sz="3225" b="0">
-                <a:solidFill>
-                  <a:srgbClr val="0D0B10"/>
-                </a:solidFill>
-                <a:latin typeface="Georgia"/>
-                <a:ea typeface="Georgia"/>
-                <a:cs typeface="Georgia"/>
-              </a:defRPr>
-            </a:lvl2pPr>
-            <a:lvl3pPr>
-              <a:defRPr sz="3225" b="0">
-                <a:solidFill>
-                  <a:srgbClr val="0D0B10"/>
-                </a:solidFill>
-                <a:latin typeface="Georgia"/>
-                <a:ea typeface="Georgia"/>
-                <a:cs typeface="Georgia"/>
-              </a:defRPr>
-            </a:lvl3pPr>
-            <a:lvl4pPr>
-              <a:defRPr sz="3225" b="0">
-                <a:solidFill>
-                  <a:srgbClr val="0D0B10"/>
-                </a:solidFill>
-                <a:latin typeface="Georgia"/>
-                <a:ea typeface="Georgia"/>
-                <a:cs typeface="Georgia"/>
-              </a:defRPr>
-            </a:lvl4pPr>
-            <a:lvl5pPr>
-              <a:defRPr sz="3225" b="0">
-                <a:solidFill>
-                  <a:srgbClr val="0D0B10"/>
-                </a:solidFill>
-                <a:latin typeface="Georgia"/>
-                <a:ea typeface="Georgia"/>
-                <a:cs typeface="Georgia"/>
-              </a:defRPr>
-            </a:lvl5pPr>
-            <a:lvl6pPr>
-              <a:defRPr sz="3225" b="0">
-                <a:solidFill>
-                  <a:srgbClr val="0D0B10"/>
-                </a:solidFill>
-                <a:latin typeface="Georgia"/>
-                <a:ea typeface="Georgia"/>
-                <a:cs typeface="Georgia"/>
-              </a:defRPr>
-            </a:lvl6pPr>
-            <a:lvl7pPr>
-              <a:defRPr sz="3225" b="0">
-                <a:solidFill>
-                  <a:srgbClr val="0D0B10"/>
-                </a:solidFill>
-                <a:latin typeface="Georgia"/>
-                <a:ea typeface="Georgia"/>
-                <a:cs typeface="Georgia"/>
-              </a:defRPr>
-            </a:lvl7pPr>
-            <a:lvl8pPr>
-              <a:defRPr sz="3225" b="0">
-                <a:solidFill>
-                  <a:srgbClr val="0D0B10"/>
-                </a:solidFill>
-                <a:latin typeface="Georgia"/>
-                <a:ea typeface="Georgia"/>
-                <a:cs typeface="Georgia"/>
-              </a:defRPr>
-            </a:lvl8pPr>
-            <a:lvl9pPr>
-              <a:defRPr sz="3225" b="0">
-                <a:solidFill>
-                  <a:srgbClr val="0D0B10"/>
-                </a:solidFill>
-                <a:latin typeface="Georgia"/>
-                <a:ea typeface="Georgia"/>
-                <a:cs typeface="Georgia"/>
-              </a:defRPr>
-            </a:lvl9pPr>
-          </a:lstStyle>
-          <a:p xmlns:a="http://schemas.openxmlformats.org/drawingml/2006/main">
-            <a:pPr>
-              <a:defRPr sz="3225" b="0">
-                <a:solidFill>
-                  <a:srgbClr val="0D0B10"/>
-                </a:solidFill>
-                <a:latin typeface="Georgia"/>
-                <a:ea typeface="Georgia"/>
-                <a:cs typeface="Georgia"/>
-              </a:defRPr>
-            </a:pPr>
-            <a:r>
-              <a:rPr sz="3225" b="0">
-                <a:solidFill>
-                  <a:srgbClr val="0D0B10"/>
-                </a:solidFill>
-                <a:latin typeface="Georgia"/>
-                <a:ea typeface="Georgia"/>
-                <a:cs typeface="Georgia"/>
-              </a:rPr>
-              <a:t>31</a:t>
-            </a:r>
-          </a:p>
-        </p:txBody>
-      </p:sp>
-      <p:sp>
-        <p:nvSpPr>
-          <p:cNvPr id="15" name="text-56">
-            <a:extLst xmlns:a="http://schemas.openxmlformats.org/drawingml/2006/main">
-              <a:ext uri="{FF2B5EF4-FFF2-40B4-BE49-F238E27FC236}">
-                <a16:creationId xmlns:a16="http://schemas.microsoft.com/office/drawing/2014/main" id="{0073EBB5-9E62-4236-8896-2F198533CC2B}"/>
-              </a:ext>
-            </a:extLst>
-          </p:cNvPr>
-          <p:cNvSpPr>
-            <a:spLocks xmlns:a="http://schemas.openxmlformats.org/drawingml/2006/main" noGrp="1"/>
-          </p:cNvSpPr>
-          <p:nvPr/>
-        </p:nvSpPr>
-        <p:spPr>
-          <a:xfrm xmlns:a="http://schemas.openxmlformats.org/drawingml/2006/main">
-            <a:off x="8810625" y="2905125"/>
-            <a:ext cx="2714625" cy="323850"/>
-          </a:xfrm>
-          <a:prstGeom xmlns:a="http://schemas.openxmlformats.org/drawingml/2006/main" prst="rect">
-            <a:avLst/>
-          </a:prstGeom>
-          <a:noFill xmlns:a="http://schemas.openxmlformats.org/drawingml/2006/main"/>
-          <a:ln xmlns:a="http://schemas.openxmlformats.org/drawingml/2006/main" w="0">
-            <a:noFill/>
-          </a:ln>
-        </p:spPr>
-        <p:txBody>
-          <a:bodyPr xmlns:a="http://schemas.openxmlformats.org/drawingml/2006/main" lIns="0" tIns="0" rIns="0" bIns="0" anchor="t">
-            <a:noAutofit/>
-          </a:bodyPr>
-          <a:lstStyle xmlns:a="http://schemas.openxmlformats.org/drawingml/2006/main">
-            <a:defPPr>
-              <a:defRPr sz="1200" b="0">
-                <a:solidFill>
-                  <a:srgbClr val="5D555A"/>
-                </a:solidFill>
-                <a:latin typeface="Arial"/>
-                <a:ea typeface="Arial"/>
-                <a:cs typeface="Arial"/>
-              </a:defRPr>
-            </a:defPPr>
-            <a:lvl1pPr>
-              <a:defRPr sz="1200" b="0">
-                <a:solidFill>
-                  <a:srgbClr val="5D555A"/>
-                </a:solidFill>
-                <a:latin typeface="Arial"/>
-                <a:ea typeface="Arial"/>
-                <a:cs typeface="Arial"/>
-              </a:defRPr>
-            </a:lvl1pPr>
-            <a:lvl2pPr>
-              <a:defRPr sz="1200" b="0">
-                <a:solidFill>
-                  <a:srgbClr val="5D555A"/>
-                </a:solidFill>
-                <a:latin typeface="Arial"/>
-                <a:ea typeface="Arial"/>
-                <a:cs typeface="Arial"/>
-              </a:defRPr>
-            </a:lvl2pPr>
-            <a:lvl3pPr>
-              <a:defRPr sz="1200" b="0">
-                <a:solidFill>
-                  <a:srgbClr val="5D555A"/>
-                </a:solidFill>
-                <a:latin typeface="Arial"/>
-                <a:ea typeface="Arial"/>
-                <a:cs typeface="Arial"/>
-              </a:defRPr>
-            </a:lvl3pPr>
-            <a:lvl4pPr>
-              <a:defRPr sz="1200" b="0">
-                <a:solidFill>
-                  <a:srgbClr val="5D555A"/>
-                </a:solidFill>
-                <a:latin typeface="Arial"/>
-                <a:ea typeface="Arial"/>
-                <a:cs typeface="Arial"/>
-              </a:defRPr>
-            </a:lvl4pPr>
-            <a:lvl5pPr>
-              <a:defRPr sz="1200" b="0">
-                <a:solidFill>
-                  <a:srgbClr val="5D555A"/>
-                </a:solidFill>
-                <a:latin typeface="Arial"/>
-                <a:ea typeface="Arial"/>
-                <a:cs typeface="Arial"/>
-              </a:defRPr>
-            </a:lvl5pPr>
-            <a:lvl6pPr>
-              <a:defRPr sz="1200" b="0">
-                <a:solidFill>
-                  <a:srgbClr val="5D555A"/>
-                </a:solidFill>
-                <a:latin typeface="Arial"/>
-                <a:ea typeface="Arial"/>
-                <a:cs typeface="Arial"/>
-              </a:defRPr>
-            </a:lvl6pPr>
-            <a:lvl7pPr>
-              <a:defRPr sz="1200" b="0">
-                <a:solidFill>
-                  <a:srgbClr val="5D555A"/>
-                </a:solidFill>
-                <a:latin typeface="Arial"/>
-                <a:ea typeface="Arial"/>
-                <a:cs typeface="Arial"/>
-              </a:defRPr>
-            </a:lvl7pPr>
-            <a:lvl8pPr>
-              <a:defRPr sz="1200" b="0">
-                <a:solidFill>
-                  <a:srgbClr val="5D555A"/>
-                </a:solidFill>
-                <a:latin typeface="Arial"/>
-                <a:ea typeface="Arial"/>
-                <a:cs typeface="Arial"/>
-              </a:defRPr>
-            </a:lvl8pPr>
-            <a:lvl9pPr>
-              <a:defRPr sz="1200" b="0">
-                <a:solidFill>
-                  <a:srgbClr val="5D555A"/>
-                </a:solidFill>
-                <a:latin typeface="Arial"/>
-                <a:ea typeface="Arial"/>
-                <a:cs typeface="Arial"/>
-              </a:defRPr>
-            </a:lvl9pPr>
-          </a:lstStyle>
-          <a:p xmlns:a="http://schemas.openxmlformats.org/drawingml/2006/main">
-            <a:pPr>
-              <a:defRPr sz="1200" b="0">
-                <a:solidFill>
-                  <a:srgbClr val="5D555A"/>
-                </a:solidFill>
-                <a:latin typeface="Arial"/>
-                <a:ea typeface="Arial"/>
-                <a:cs typeface="Arial"/>
-              </a:defRPr>
-            </a:pPr>
-            <a:r>
-              <a:rPr sz="1200" b="0">
-                <a:solidFill>
-                  <a:srgbClr val="5D555A"/>
-                </a:solidFill>
-                <a:latin typeface="Arial"/>
-                <a:ea typeface="Arial"/>
-                <a:cs typeface="Arial"/>
-              </a:rPr>
-              <a:t>média de comentários por post</a:t>
-            </a:r>
-          </a:p>
-        </p:txBody>
-      </p:sp>
-      <p:sp>
-        <p:nvSpPr>
-          <p:cNvPr id="16" name="rule-57">
-            <a:extLst xmlns:a="http://schemas.openxmlformats.org/drawingml/2006/main">
-              <a:ext uri="{FF2B5EF4-FFF2-40B4-BE49-F238E27FC236}">
-                <a16:creationId xmlns:a16="http://schemas.microsoft.com/office/drawing/2014/main" id="{7ED3D777-E8F4-46A7-96DF-4DA309D0B12E}"/>
+                <a16:creationId xmlns:a16="http://schemas.microsoft.com/office/drawing/2014/main" id="{3A37D2F0-02A4-483C-9B84-F86A4E28AF6D}"/>
               </a:ext>
             </a:extLst>
           </p:cNvPr>
@@ -11002,10 +10626,10 @@
       </p:sp>
       <p:sp>
         <p:nvSpPr>
-          <p:cNvPr id="17" name="text-58">
+          <p:cNvPr id="15" name="text-54">
             <a:extLst xmlns:a="http://schemas.openxmlformats.org/drawingml/2006/main">
               <a:ext uri="{FF2B5EF4-FFF2-40B4-BE49-F238E27FC236}">
-                <a16:creationId xmlns:a16="http://schemas.microsoft.com/office/drawing/2014/main" id="{E496C64E-FF0F-4C24-943B-9849EDCDAF73}"/>
+                <a16:creationId xmlns:a16="http://schemas.microsoft.com/office/drawing/2014/main" id="{4CF948B0-CCF4-464E-8396-7BB3045EAA5C}"/>
               </a:ext>
             </a:extLst>
           </p:cNvPr>
@@ -11016,8 +10640,8 @@
         </p:nvSpPr>
         <p:spPr>
           <a:xfrm xmlns:a="http://schemas.openxmlformats.org/drawingml/2006/main">
-            <a:off x="571500" y="3257550"/>
-            <a:ext cx="5381625" cy="666750"/>
+            <a:off x="571500" y="3209925"/>
+            <a:ext cx="3333750" cy="666750"/>
           </a:xfrm>
           <a:prstGeom xmlns:a="http://schemas.openxmlformats.org/drawingml/2006/main" prst="rect">
             <a:avLst/>
@@ -11033,7 +10657,7 @@
           </a:bodyPr>
           <a:lstStyle xmlns:a="http://schemas.openxmlformats.org/drawingml/2006/main">
             <a:defPPr>
-              <a:defRPr sz="3150" b="0">
+              <a:defRPr sz="3750" b="0">
                 <a:solidFill>
                   <a:srgbClr val="0D0B10"/>
                 </a:solidFill>
@@ -11043,7 +10667,7 @@
               </a:defRPr>
             </a:defPPr>
             <a:lvl1pPr>
-              <a:defRPr sz="3150" b="0">
+              <a:defRPr sz="3750" b="0">
                 <a:solidFill>
                   <a:srgbClr val="0D0B10"/>
                 </a:solidFill>
@@ -11053,7 +10677,7 @@
               </a:defRPr>
             </a:lvl1pPr>
             <a:lvl2pPr>
-              <a:defRPr sz="3150" b="0">
+              <a:defRPr sz="3750" b="0">
                 <a:solidFill>
                   <a:srgbClr val="0D0B10"/>
                 </a:solidFill>
@@ -11063,7 +10687,7 @@
               </a:defRPr>
             </a:lvl2pPr>
             <a:lvl3pPr>
-              <a:defRPr sz="3150" b="0">
+              <a:defRPr sz="3750" b="0">
                 <a:solidFill>
                   <a:srgbClr val="0D0B10"/>
                 </a:solidFill>
@@ -11073,7 +10697,7 @@
               </a:defRPr>
             </a:lvl3pPr>
             <a:lvl4pPr>
-              <a:defRPr sz="3150" b="0">
+              <a:defRPr sz="3750" b="0">
                 <a:solidFill>
                   <a:srgbClr val="0D0B10"/>
                 </a:solidFill>
@@ -11083,7 +10707,7 @@
               </a:defRPr>
             </a:lvl4pPr>
             <a:lvl5pPr>
-              <a:defRPr sz="3150" b="0">
+              <a:defRPr sz="3750" b="0">
                 <a:solidFill>
                   <a:srgbClr val="0D0B10"/>
                 </a:solidFill>
@@ -11093,7 +10717,7 @@
               </a:defRPr>
             </a:lvl5pPr>
             <a:lvl6pPr>
-              <a:defRPr sz="3150" b="0">
+              <a:defRPr sz="3750" b="0">
                 <a:solidFill>
                   <a:srgbClr val="0D0B10"/>
                 </a:solidFill>
@@ -11103,7 +10727,7 @@
               </a:defRPr>
             </a:lvl6pPr>
             <a:lvl7pPr>
-              <a:defRPr sz="3150" b="0">
+              <a:defRPr sz="3750" b="0">
                 <a:solidFill>
                   <a:srgbClr val="0D0B10"/>
                 </a:solidFill>
@@ -11113,7 +10737,7 @@
               </a:defRPr>
             </a:lvl7pPr>
             <a:lvl8pPr>
-              <a:defRPr sz="3150" b="0">
+              <a:defRPr sz="3750" b="0">
                 <a:solidFill>
                   <a:srgbClr val="0D0B10"/>
                 </a:solidFill>
@@ -11123,7 +10747,7 @@
               </a:defRPr>
             </a:lvl8pPr>
             <a:lvl9pPr>
-              <a:defRPr sz="3150" b="0">
+              <a:defRPr sz="3750" b="0">
                 <a:solidFill>
                   <a:srgbClr val="0D0B10"/>
                 </a:solidFill>
@@ -11135,7 +10759,7 @@
           </a:lstStyle>
           <a:p xmlns:a="http://schemas.openxmlformats.org/drawingml/2006/main">
             <a:pPr>
-              <a:defRPr sz="3150" b="0">
+              <a:defRPr sz="3750" b="0">
                 <a:solidFill>
                   <a:srgbClr val="0D0B10"/>
                 </a:solidFill>
@@ -11145,7 +10769,7 @@
               </a:defRPr>
             </a:pPr>
             <a:r>
-              <a:rPr sz="3150" b="0">
+              <a:rPr sz="3750" b="0">
                 <a:solidFill>
                   <a:srgbClr val="0D0B10"/>
                 </a:solidFill>
@@ -11153,17 +10777,17 @@
                 <a:ea typeface="Georgia"/>
                 <a:cs typeface="Georgia"/>
               </a:rPr>
-              <a:t>37.9K</a:t>
+              <a:t>31</a:t>
             </a:r>
           </a:p>
         </p:txBody>
       </p:sp>
       <p:sp>
         <p:nvSpPr>
-          <p:cNvPr id="18" name="text-59">
+          <p:cNvPr id="16" name="text-55">
             <a:extLst xmlns:a="http://schemas.openxmlformats.org/drawingml/2006/main">
               <a:ext uri="{FF2B5EF4-FFF2-40B4-BE49-F238E27FC236}">
-                <a16:creationId xmlns:a16="http://schemas.microsoft.com/office/drawing/2014/main" id="{654BA26A-B13B-4743-B1A4-97D95E77DB24}"/>
+                <a16:creationId xmlns:a16="http://schemas.microsoft.com/office/drawing/2014/main" id="{DE9FA0BC-F7A7-4A45-96FA-27FBE3AA8CEC}"/>
               </a:ext>
             </a:extLst>
           </p:cNvPr>
@@ -11174,8 +10798,8 @@
         </p:nvSpPr>
         <p:spPr>
           <a:xfrm xmlns:a="http://schemas.openxmlformats.org/drawingml/2006/main">
-            <a:off x="571500" y="4038600"/>
-            <a:ext cx="5381625" cy="323850"/>
+            <a:off x="571500" y="3990975"/>
+            <a:ext cx="3333750" cy="323850"/>
           </a:xfrm>
           <a:prstGeom xmlns:a="http://schemas.openxmlformats.org/drawingml/2006/main" prst="rect">
             <a:avLst/>
@@ -11311,17 +10935,17 @@
                 <a:ea typeface="Arial"/>
                 <a:cs typeface="Arial"/>
               </a:rPr>
-              <a:t>visualizações em 30 dias</a:t>
+              <a:t>média de comentários por post</a:t>
             </a:r>
           </a:p>
         </p:txBody>
       </p:sp>
       <p:sp>
         <p:nvSpPr>
-          <p:cNvPr id="19" name="text-60">
+          <p:cNvPr id="17" name="text-56">
             <a:extLst xmlns:a="http://schemas.openxmlformats.org/drawingml/2006/main">
               <a:ext uri="{FF2B5EF4-FFF2-40B4-BE49-F238E27FC236}">
-                <a16:creationId xmlns:a16="http://schemas.microsoft.com/office/drawing/2014/main" id="{195037C0-F944-4BE2-963E-C868831AC517}"/>
+                <a16:creationId xmlns:a16="http://schemas.microsoft.com/office/drawing/2014/main" id="{4BC9CB55-2D13-4EB6-AFFF-19BA5637E296}"/>
               </a:ext>
             </a:extLst>
           </p:cNvPr>
@@ -11332,8 +10956,8 @@
         </p:nvSpPr>
         <p:spPr>
           <a:xfrm xmlns:a="http://schemas.openxmlformats.org/drawingml/2006/main">
-            <a:off x="6172200" y="3257550"/>
-            <a:ext cx="5381625" cy="666750"/>
+            <a:off x="4429125" y="3209925"/>
+            <a:ext cx="3333750" cy="666750"/>
           </a:xfrm>
           <a:prstGeom xmlns:a="http://schemas.openxmlformats.org/drawingml/2006/main" prst="rect">
             <a:avLst/>
@@ -11349,7 +10973,7 @@
           </a:bodyPr>
           <a:lstStyle xmlns:a="http://schemas.openxmlformats.org/drawingml/2006/main">
             <a:defPPr>
-              <a:defRPr sz="3150" b="0">
+              <a:defRPr sz="3750" b="0">
                 <a:solidFill>
                   <a:srgbClr val="0D0B10"/>
                 </a:solidFill>
@@ -11359,7 +10983,7 @@
               </a:defRPr>
             </a:defPPr>
             <a:lvl1pPr>
-              <a:defRPr sz="3150" b="0">
+              <a:defRPr sz="3750" b="0">
                 <a:solidFill>
                   <a:srgbClr val="0D0B10"/>
                 </a:solidFill>
@@ -11369,7 +10993,7 @@
               </a:defRPr>
             </a:lvl1pPr>
             <a:lvl2pPr>
-              <a:defRPr sz="3150" b="0">
+              <a:defRPr sz="3750" b="0">
                 <a:solidFill>
                   <a:srgbClr val="0D0B10"/>
                 </a:solidFill>
@@ -11379,7 +11003,7 @@
               </a:defRPr>
             </a:lvl2pPr>
             <a:lvl3pPr>
-              <a:defRPr sz="3150" b="0">
+              <a:defRPr sz="3750" b="0">
                 <a:solidFill>
                   <a:srgbClr val="0D0B10"/>
                 </a:solidFill>
@@ -11389,7 +11013,7 @@
               </a:defRPr>
             </a:lvl3pPr>
             <a:lvl4pPr>
-              <a:defRPr sz="3150" b="0">
+              <a:defRPr sz="3750" b="0">
                 <a:solidFill>
                   <a:srgbClr val="0D0B10"/>
                 </a:solidFill>
@@ -11399,7 +11023,7 @@
               </a:defRPr>
             </a:lvl4pPr>
             <a:lvl5pPr>
-              <a:defRPr sz="3150" b="0">
+              <a:defRPr sz="3750" b="0">
                 <a:solidFill>
                   <a:srgbClr val="0D0B10"/>
                 </a:solidFill>
@@ -11409,7 +11033,7 @@
               </a:defRPr>
             </a:lvl5pPr>
             <a:lvl6pPr>
-              <a:defRPr sz="3150" b="0">
+              <a:defRPr sz="3750" b="0">
                 <a:solidFill>
                   <a:srgbClr val="0D0B10"/>
                 </a:solidFill>
@@ -11419,7 +11043,7 @@
               </a:defRPr>
             </a:lvl6pPr>
             <a:lvl7pPr>
-              <a:defRPr sz="3150" b="0">
+              <a:defRPr sz="3750" b="0">
                 <a:solidFill>
                   <a:srgbClr val="0D0B10"/>
                 </a:solidFill>
@@ -11429,7 +11053,7 @@
               </a:defRPr>
             </a:lvl7pPr>
             <a:lvl8pPr>
-              <a:defRPr sz="3150" b="0">
+              <a:defRPr sz="3750" b="0">
                 <a:solidFill>
                   <a:srgbClr val="0D0B10"/>
                 </a:solidFill>
@@ -11439,7 +11063,7 @@
               </a:defRPr>
             </a:lvl8pPr>
             <a:lvl9pPr>
-              <a:defRPr sz="3150" b="0">
+              <a:defRPr sz="3750" b="0">
                 <a:solidFill>
                   <a:srgbClr val="0D0B10"/>
                 </a:solidFill>
@@ -11451,7 +11075,7 @@
           </a:lstStyle>
           <a:p xmlns:a="http://schemas.openxmlformats.org/drawingml/2006/main">
             <a:pPr>
-              <a:defRPr sz="3150" b="0">
+              <a:defRPr sz="3750" b="0">
                 <a:solidFill>
                   <a:srgbClr val="0D0B10"/>
                 </a:solidFill>
@@ -11461,7 +11085,7 @@
               </a:defRPr>
             </a:pPr>
             <a:r>
-              <a:rPr sz="3150" b="0">
+              <a:rPr sz="3750" b="0">
                 <a:solidFill>
                   <a:srgbClr val="0D0B10"/>
                 </a:solidFill>
@@ -11469,17 +11093,17 @@
                 <a:ea typeface="Georgia"/>
                 <a:cs typeface="Georgia"/>
               </a:rPr>
-              <a:t>9,090</a:t>
+              <a:t>37.9K</a:t>
             </a:r>
           </a:p>
         </p:txBody>
       </p:sp>
       <p:sp>
         <p:nvSpPr>
-          <p:cNvPr id="20" name="text-61">
+          <p:cNvPr id="18" name="text-57">
             <a:extLst xmlns:a="http://schemas.openxmlformats.org/drawingml/2006/main">
               <a:ext uri="{FF2B5EF4-FFF2-40B4-BE49-F238E27FC236}">
-                <a16:creationId xmlns:a16="http://schemas.microsoft.com/office/drawing/2014/main" id="{4F096BA6-5EBF-407E-BBF9-87DCF0492F38}"/>
+                <a16:creationId xmlns:a16="http://schemas.microsoft.com/office/drawing/2014/main" id="{9F9D9849-318C-499E-AEC6-D2C423B8AF4A}"/>
               </a:ext>
             </a:extLst>
           </p:cNvPr>
@@ -11490,8 +11114,8 @@
         </p:nvSpPr>
         <p:spPr>
           <a:xfrm xmlns:a="http://schemas.openxmlformats.org/drawingml/2006/main">
-            <a:off x="6172200" y="4038600"/>
-            <a:ext cx="5381625" cy="323850"/>
+            <a:off x="4429125" y="3990975"/>
+            <a:ext cx="3333750" cy="323850"/>
           </a:xfrm>
           <a:prstGeom xmlns:a="http://schemas.openxmlformats.org/drawingml/2006/main" prst="rect">
             <a:avLst/>
@@ -11627,6 +11251,322 @@
                 <a:ea typeface="Arial"/>
                 <a:cs typeface="Arial"/>
               </a:rPr>
+              <a:t>visualizações em 30 dias</a:t>
+            </a:r>
+          </a:p>
+        </p:txBody>
+      </p:sp>
+      <p:sp>
+        <p:nvSpPr>
+          <p:cNvPr id="19" name="text-58">
+            <a:extLst xmlns:a="http://schemas.openxmlformats.org/drawingml/2006/main">
+              <a:ext uri="{FF2B5EF4-FFF2-40B4-BE49-F238E27FC236}">
+                <a16:creationId xmlns:a16="http://schemas.microsoft.com/office/drawing/2014/main" id="{1822D982-AA26-4121-98CA-C80E2F242F03}"/>
+              </a:ext>
+            </a:extLst>
+          </p:cNvPr>
+          <p:cNvSpPr>
+            <a:spLocks xmlns:a="http://schemas.openxmlformats.org/drawingml/2006/main" noGrp="1"/>
+          </p:cNvSpPr>
+          <p:nvPr/>
+        </p:nvSpPr>
+        <p:spPr>
+          <a:xfrm xmlns:a="http://schemas.openxmlformats.org/drawingml/2006/main">
+            <a:off x="8286750" y="3209925"/>
+            <a:ext cx="3333750" cy="666750"/>
+          </a:xfrm>
+          <a:prstGeom xmlns:a="http://schemas.openxmlformats.org/drawingml/2006/main" prst="rect">
+            <a:avLst/>
+          </a:prstGeom>
+          <a:noFill xmlns:a="http://schemas.openxmlformats.org/drawingml/2006/main"/>
+          <a:ln xmlns:a="http://schemas.openxmlformats.org/drawingml/2006/main" w="0">
+            <a:noFill/>
+          </a:ln>
+        </p:spPr>
+        <p:txBody>
+          <a:bodyPr xmlns:a="http://schemas.openxmlformats.org/drawingml/2006/main" lIns="0" tIns="0" rIns="0" bIns="0" anchor="t">
+            <a:noAutofit/>
+          </a:bodyPr>
+          <a:lstStyle xmlns:a="http://schemas.openxmlformats.org/drawingml/2006/main">
+            <a:defPPr>
+              <a:defRPr sz="3750" b="0">
+                <a:solidFill>
+                  <a:srgbClr val="0D0B10"/>
+                </a:solidFill>
+                <a:latin typeface="Georgia"/>
+                <a:ea typeface="Georgia"/>
+                <a:cs typeface="Georgia"/>
+              </a:defRPr>
+            </a:defPPr>
+            <a:lvl1pPr>
+              <a:defRPr sz="3750" b="0">
+                <a:solidFill>
+                  <a:srgbClr val="0D0B10"/>
+                </a:solidFill>
+                <a:latin typeface="Georgia"/>
+                <a:ea typeface="Georgia"/>
+                <a:cs typeface="Georgia"/>
+              </a:defRPr>
+            </a:lvl1pPr>
+            <a:lvl2pPr>
+              <a:defRPr sz="3750" b="0">
+                <a:solidFill>
+                  <a:srgbClr val="0D0B10"/>
+                </a:solidFill>
+                <a:latin typeface="Georgia"/>
+                <a:ea typeface="Georgia"/>
+                <a:cs typeface="Georgia"/>
+              </a:defRPr>
+            </a:lvl2pPr>
+            <a:lvl3pPr>
+              <a:defRPr sz="3750" b="0">
+                <a:solidFill>
+                  <a:srgbClr val="0D0B10"/>
+                </a:solidFill>
+                <a:latin typeface="Georgia"/>
+                <a:ea typeface="Georgia"/>
+                <a:cs typeface="Georgia"/>
+              </a:defRPr>
+            </a:lvl3pPr>
+            <a:lvl4pPr>
+              <a:defRPr sz="3750" b="0">
+                <a:solidFill>
+                  <a:srgbClr val="0D0B10"/>
+                </a:solidFill>
+                <a:latin typeface="Georgia"/>
+                <a:ea typeface="Georgia"/>
+                <a:cs typeface="Georgia"/>
+              </a:defRPr>
+            </a:lvl4pPr>
+            <a:lvl5pPr>
+              <a:defRPr sz="3750" b="0">
+                <a:solidFill>
+                  <a:srgbClr val="0D0B10"/>
+                </a:solidFill>
+                <a:latin typeface="Georgia"/>
+                <a:ea typeface="Georgia"/>
+                <a:cs typeface="Georgia"/>
+              </a:defRPr>
+            </a:lvl5pPr>
+            <a:lvl6pPr>
+              <a:defRPr sz="3750" b="0">
+                <a:solidFill>
+                  <a:srgbClr val="0D0B10"/>
+                </a:solidFill>
+                <a:latin typeface="Georgia"/>
+                <a:ea typeface="Georgia"/>
+                <a:cs typeface="Georgia"/>
+              </a:defRPr>
+            </a:lvl6pPr>
+            <a:lvl7pPr>
+              <a:defRPr sz="3750" b="0">
+                <a:solidFill>
+                  <a:srgbClr val="0D0B10"/>
+                </a:solidFill>
+                <a:latin typeface="Georgia"/>
+                <a:ea typeface="Georgia"/>
+                <a:cs typeface="Georgia"/>
+              </a:defRPr>
+            </a:lvl7pPr>
+            <a:lvl8pPr>
+              <a:defRPr sz="3750" b="0">
+                <a:solidFill>
+                  <a:srgbClr val="0D0B10"/>
+                </a:solidFill>
+                <a:latin typeface="Georgia"/>
+                <a:ea typeface="Georgia"/>
+                <a:cs typeface="Georgia"/>
+              </a:defRPr>
+            </a:lvl8pPr>
+            <a:lvl9pPr>
+              <a:defRPr sz="3750" b="0">
+                <a:solidFill>
+                  <a:srgbClr val="0D0B10"/>
+                </a:solidFill>
+                <a:latin typeface="Georgia"/>
+                <a:ea typeface="Georgia"/>
+                <a:cs typeface="Georgia"/>
+              </a:defRPr>
+            </a:lvl9pPr>
+          </a:lstStyle>
+          <a:p xmlns:a="http://schemas.openxmlformats.org/drawingml/2006/main">
+            <a:pPr>
+              <a:defRPr sz="3750" b="0">
+                <a:solidFill>
+                  <a:srgbClr val="0D0B10"/>
+                </a:solidFill>
+                <a:latin typeface="Georgia"/>
+                <a:ea typeface="Georgia"/>
+                <a:cs typeface="Georgia"/>
+              </a:defRPr>
+            </a:pPr>
+            <a:r>
+              <a:rPr sz="3750" b="0">
+                <a:solidFill>
+                  <a:srgbClr val="0D0B10"/>
+                </a:solidFill>
+                <a:latin typeface="Georgia"/>
+                <a:ea typeface="Georgia"/>
+                <a:cs typeface="Georgia"/>
+              </a:rPr>
+              <a:t>9,090</a:t>
+            </a:r>
+          </a:p>
+        </p:txBody>
+      </p:sp>
+      <p:sp>
+        <p:nvSpPr>
+          <p:cNvPr id="20" name="text-59">
+            <a:extLst xmlns:a="http://schemas.openxmlformats.org/drawingml/2006/main">
+              <a:ext uri="{FF2B5EF4-FFF2-40B4-BE49-F238E27FC236}">
+                <a16:creationId xmlns:a16="http://schemas.microsoft.com/office/drawing/2014/main" id="{5C69FEBB-C797-439D-898E-4B28AEC17538}"/>
+              </a:ext>
+            </a:extLst>
+          </p:cNvPr>
+          <p:cNvSpPr>
+            <a:spLocks xmlns:a="http://schemas.openxmlformats.org/drawingml/2006/main" noGrp="1"/>
+          </p:cNvSpPr>
+          <p:nvPr/>
+        </p:nvSpPr>
+        <p:spPr>
+          <a:xfrm xmlns:a="http://schemas.openxmlformats.org/drawingml/2006/main">
+            <a:off x="8286750" y="3990975"/>
+            <a:ext cx="3333750" cy="323850"/>
+          </a:xfrm>
+          <a:prstGeom xmlns:a="http://schemas.openxmlformats.org/drawingml/2006/main" prst="rect">
+            <a:avLst/>
+          </a:prstGeom>
+          <a:noFill xmlns:a="http://schemas.openxmlformats.org/drawingml/2006/main"/>
+          <a:ln xmlns:a="http://schemas.openxmlformats.org/drawingml/2006/main" w="0">
+            <a:noFill/>
+          </a:ln>
+        </p:spPr>
+        <p:txBody>
+          <a:bodyPr xmlns:a="http://schemas.openxmlformats.org/drawingml/2006/main" lIns="0" tIns="0" rIns="0" bIns="0" anchor="t">
+            <a:noAutofit/>
+          </a:bodyPr>
+          <a:lstStyle xmlns:a="http://schemas.openxmlformats.org/drawingml/2006/main">
+            <a:defPPr>
+              <a:defRPr sz="1200" b="0">
+                <a:solidFill>
+                  <a:srgbClr val="5D555A"/>
+                </a:solidFill>
+                <a:latin typeface="Arial"/>
+                <a:ea typeface="Arial"/>
+                <a:cs typeface="Arial"/>
+              </a:defRPr>
+            </a:defPPr>
+            <a:lvl1pPr>
+              <a:defRPr sz="1200" b="0">
+                <a:solidFill>
+                  <a:srgbClr val="5D555A"/>
+                </a:solidFill>
+                <a:latin typeface="Arial"/>
+                <a:ea typeface="Arial"/>
+                <a:cs typeface="Arial"/>
+              </a:defRPr>
+            </a:lvl1pPr>
+            <a:lvl2pPr>
+              <a:defRPr sz="1200" b="0">
+                <a:solidFill>
+                  <a:srgbClr val="5D555A"/>
+                </a:solidFill>
+                <a:latin typeface="Arial"/>
+                <a:ea typeface="Arial"/>
+                <a:cs typeface="Arial"/>
+              </a:defRPr>
+            </a:lvl2pPr>
+            <a:lvl3pPr>
+              <a:defRPr sz="1200" b="0">
+                <a:solidFill>
+                  <a:srgbClr val="5D555A"/>
+                </a:solidFill>
+                <a:latin typeface="Arial"/>
+                <a:ea typeface="Arial"/>
+                <a:cs typeface="Arial"/>
+              </a:defRPr>
+            </a:lvl3pPr>
+            <a:lvl4pPr>
+              <a:defRPr sz="1200" b="0">
+                <a:solidFill>
+                  <a:srgbClr val="5D555A"/>
+                </a:solidFill>
+                <a:latin typeface="Arial"/>
+                <a:ea typeface="Arial"/>
+                <a:cs typeface="Arial"/>
+              </a:defRPr>
+            </a:lvl4pPr>
+            <a:lvl5pPr>
+              <a:defRPr sz="1200" b="0">
+                <a:solidFill>
+                  <a:srgbClr val="5D555A"/>
+                </a:solidFill>
+                <a:latin typeface="Arial"/>
+                <a:ea typeface="Arial"/>
+                <a:cs typeface="Arial"/>
+              </a:defRPr>
+            </a:lvl5pPr>
+            <a:lvl6pPr>
+              <a:defRPr sz="1200" b="0">
+                <a:solidFill>
+                  <a:srgbClr val="5D555A"/>
+                </a:solidFill>
+                <a:latin typeface="Arial"/>
+                <a:ea typeface="Arial"/>
+                <a:cs typeface="Arial"/>
+              </a:defRPr>
+            </a:lvl6pPr>
+            <a:lvl7pPr>
+              <a:defRPr sz="1200" b="0">
+                <a:solidFill>
+                  <a:srgbClr val="5D555A"/>
+                </a:solidFill>
+                <a:latin typeface="Arial"/>
+                <a:ea typeface="Arial"/>
+                <a:cs typeface="Arial"/>
+              </a:defRPr>
+            </a:lvl7pPr>
+            <a:lvl8pPr>
+              <a:defRPr sz="1200" b="0">
+                <a:solidFill>
+                  <a:srgbClr val="5D555A"/>
+                </a:solidFill>
+                <a:latin typeface="Arial"/>
+                <a:ea typeface="Arial"/>
+                <a:cs typeface="Arial"/>
+              </a:defRPr>
+            </a:lvl8pPr>
+            <a:lvl9pPr>
+              <a:defRPr sz="1200" b="0">
+                <a:solidFill>
+                  <a:srgbClr val="5D555A"/>
+                </a:solidFill>
+                <a:latin typeface="Arial"/>
+                <a:ea typeface="Arial"/>
+                <a:cs typeface="Arial"/>
+              </a:defRPr>
+            </a:lvl9pPr>
+          </a:lstStyle>
+          <a:p xmlns:a="http://schemas.openxmlformats.org/drawingml/2006/main">
+            <a:pPr>
+              <a:defRPr sz="1200" b="0">
+                <a:solidFill>
+                  <a:srgbClr val="5D555A"/>
+                </a:solidFill>
+                <a:latin typeface="Arial"/>
+                <a:ea typeface="Arial"/>
+                <a:cs typeface="Arial"/>
+              </a:defRPr>
+            </a:pPr>
+            <a:r>
+              <a:rPr sz="1200" b="0">
+                <a:solidFill>
+                  <a:srgbClr val="5D555A"/>
+                </a:solidFill>
+                <a:latin typeface="Arial"/>
+                <a:ea typeface="Arial"/>
+                <a:cs typeface="Arial"/>
+              </a:rPr>
               <a:t>contas que viram o conteúdo</a:t>
             </a:r>
           </a:p>
@@ -11634,10 +11574,10 @@
       </p:sp>
       <p:sp>
         <p:nvSpPr>
-          <p:cNvPr id="21" name="rule-62">
+          <p:cNvPr id="21" name="rule-60">
             <a:extLst xmlns:a="http://schemas.openxmlformats.org/drawingml/2006/main">
               <a:ext uri="{FF2B5EF4-FFF2-40B4-BE49-F238E27FC236}">
-                <a16:creationId xmlns:a16="http://schemas.microsoft.com/office/drawing/2014/main" id="{B49C7D42-1ED9-4A13-8B30-E4FFD9A67CEE}"/>
+                <a16:creationId xmlns:a16="http://schemas.microsoft.com/office/drawing/2014/main" id="{F4C2AEFB-5D13-4897-8721-BC576E358E24}"/>
               </a:ext>
             </a:extLst>
           </p:cNvPr>
@@ -11664,10 +11604,10 @@
       </p:sp>
       <p:sp>
         <p:nvSpPr>
-          <p:cNvPr id="22" name="text-63">
+          <p:cNvPr id="22" name="text-61">
             <a:extLst xmlns:a="http://schemas.openxmlformats.org/drawingml/2006/main">
               <a:ext uri="{FF2B5EF4-FFF2-40B4-BE49-F238E27FC236}">
-                <a16:creationId xmlns:a16="http://schemas.microsoft.com/office/drawing/2014/main" id="{16B4675B-E5DE-454F-9B3A-F5573DB24867}"/>
+                <a16:creationId xmlns:a16="http://schemas.microsoft.com/office/drawing/2014/main" id="{649458B1-3ACE-4E60-9BC4-E52B270E2C08}"/>
               </a:ext>
             </a:extLst>
           </p:cNvPr>
@@ -11822,10 +11762,10 @@
       </p:sp>
       <p:sp>
         <p:nvSpPr>
-          <p:cNvPr id="23" name="text-64">
+          <p:cNvPr id="23" name="text-62">
             <a:extLst xmlns:a="http://schemas.openxmlformats.org/drawingml/2006/main">
               <a:ext uri="{FF2B5EF4-FFF2-40B4-BE49-F238E27FC236}">
-                <a16:creationId xmlns:a16="http://schemas.microsoft.com/office/drawing/2014/main" id="{237CB404-FF16-4916-9A11-EF9B2AA9B6DB}"/>
+                <a16:creationId xmlns:a16="http://schemas.microsoft.com/office/drawing/2014/main" id="{97B7A2B1-883A-494A-9421-FB597721D881}"/>
               </a:ext>
             </a:extLst>
           </p:cNvPr>
@@ -11980,10 +11920,10 @@
       </p:sp>
       <p:sp>
         <p:nvSpPr>
-          <p:cNvPr id="24" name="box-65">
+          <p:cNvPr id="24" name="box-63">
             <a:extLst xmlns:a="http://schemas.openxmlformats.org/drawingml/2006/main">
               <a:ext uri="{FF2B5EF4-FFF2-40B4-BE49-F238E27FC236}">
-                <a16:creationId xmlns:a16="http://schemas.microsoft.com/office/drawing/2014/main" id="{FF19466D-0238-406A-A31B-24C4A93AF03C}"/>
+                <a16:creationId xmlns:a16="http://schemas.microsoft.com/office/drawing/2014/main" id="{92BFEBA5-0FDA-4B2F-9E12-90C39D6AFC0A}"/>
               </a:ext>
             </a:extLst>
           </p:cNvPr>
@@ -12010,10 +11950,10 @@
       </p:sp>
       <p:sp>
         <p:nvSpPr>
-          <p:cNvPr id="25" name="box-66">
+          <p:cNvPr id="25" name="box-64">
             <a:extLst xmlns:a="http://schemas.openxmlformats.org/drawingml/2006/main">
               <a:ext uri="{FF2B5EF4-FFF2-40B4-BE49-F238E27FC236}">
-                <a16:creationId xmlns:a16="http://schemas.microsoft.com/office/drawing/2014/main" id="{3EC15BCD-6CF4-4E25-B070-EF67B6CB6904}"/>
+                <a16:creationId xmlns:a16="http://schemas.microsoft.com/office/drawing/2014/main" id="{45B47378-C4E1-4D2D-95A4-084D3BDEB7FE}"/>
               </a:ext>
             </a:extLst>
           </p:cNvPr>
@@ -12040,10 +11980,10 @@
       </p:sp>
       <p:sp>
         <p:nvSpPr>
-          <p:cNvPr id="26" name="text-67">
+          <p:cNvPr id="26" name="text-65">
             <a:extLst xmlns:a="http://schemas.openxmlformats.org/drawingml/2006/main">
               <a:ext uri="{FF2B5EF4-FFF2-40B4-BE49-F238E27FC236}">
-                <a16:creationId xmlns:a16="http://schemas.microsoft.com/office/drawing/2014/main" id="{54608FEA-3B15-45F7-A2B4-06B40ED3E24F}"/>
+                <a16:creationId xmlns:a16="http://schemas.microsoft.com/office/drawing/2014/main" id="{6B95EE58-0756-472A-B78B-90B823AC2576}"/>
               </a:ext>
             </a:extLst>
           </p:cNvPr>
@@ -12198,10 +12138,10 @@
       </p:sp>
       <p:sp>
         <p:nvSpPr>
-          <p:cNvPr id="27" name="text-68">
+          <p:cNvPr id="27" name="text-66">
             <a:extLst xmlns:a="http://schemas.openxmlformats.org/drawingml/2006/main">
               <a:ext uri="{FF2B5EF4-FFF2-40B4-BE49-F238E27FC236}">
-                <a16:creationId xmlns:a16="http://schemas.microsoft.com/office/drawing/2014/main" id="{AB5123C0-C8B7-4BC6-BB9D-553D9A1303A3}"/>
+                <a16:creationId xmlns:a16="http://schemas.microsoft.com/office/drawing/2014/main" id="{263FFF5C-9625-4B20-BDB6-60FD380996BB}"/>
               </a:ext>
             </a:extLst>
           </p:cNvPr>
@@ -12356,10 +12296,10 @@
       </p:sp>
       <p:sp>
         <p:nvSpPr>
-          <p:cNvPr id="28" name="box-69">
+          <p:cNvPr id="28" name="box-67">
             <a:extLst xmlns:a="http://schemas.openxmlformats.org/drawingml/2006/main">
               <a:ext uri="{FF2B5EF4-FFF2-40B4-BE49-F238E27FC236}">
-                <a16:creationId xmlns:a16="http://schemas.microsoft.com/office/drawing/2014/main" id="{0D42F14C-45F7-4638-AB7D-443DB4689DC0}"/>
+                <a16:creationId xmlns:a16="http://schemas.microsoft.com/office/drawing/2014/main" id="{903D5FE0-33B3-4C4C-9053-F738D6E29C90}"/>
               </a:ext>
             </a:extLst>
           </p:cNvPr>
@@ -12386,10 +12326,10 @@
       </p:sp>
       <p:sp>
         <p:nvSpPr>
-          <p:cNvPr id="29" name="box-70">
+          <p:cNvPr id="29" name="box-68">
             <a:extLst xmlns:a="http://schemas.openxmlformats.org/drawingml/2006/main">
               <a:ext uri="{FF2B5EF4-FFF2-40B4-BE49-F238E27FC236}">
-                <a16:creationId xmlns:a16="http://schemas.microsoft.com/office/drawing/2014/main" id="{E190D408-1193-47C9-AA71-63562FFDAA63}"/>
+                <a16:creationId xmlns:a16="http://schemas.microsoft.com/office/drawing/2014/main" id="{A440A098-2A6C-4444-B5B9-F7CD851CE042}"/>
               </a:ext>
             </a:extLst>
           </p:cNvPr>
@@ -12416,10 +12356,10 @@
       </p:sp>
       <p:sp>
         <p:nvSpPr>
-          <p:cNvPr id="30" name="text-71">
+          <p:cNvPr id="30" name="text-69">
             <a:extLst xmlns:a="http://schemas.openxmlformats.org/drawingml/2006/main">
               <a:ext uri="{FF2B5EF4-FFF2-40B4-BE49-F238E27FC236}">
-                <a16:creationId xmlns:a16="http://schemas.microsoft.com/office/drawing/2014/main" id="{436FFACC-C39A-4426-99B7-6837D91EC60B}"/>
+                <a16:creationId xmlns:a16="http://schemas.microsoft.com/office/drawing/2014/main" id="{C664EEC4-00A5-403A-B6EA-E04AB1A04B00}"/>
               </a:ext>
             </a:extLst>
           </p:cNvPr>
@@ -12574,10 +12514,10 @@
       </p:sp>
       <p:sp>
         <p:nvSpPr>
-          <p:cNvPr id="31" name="text-72">
+          <p:cNvPr id="31" name="text-70">
             <a:extLst xmlns:a="http://schemas.openxmlformats.org/drawingml/2006/main">
               <a:ext uri="{FF2B5EF4-FFF2-40B4-BE49-F238E27FC236}">
-                <a16:creationId xmlns:a16="http://schemas.microsoft.com/office/drawing/2014/main" id="{4CE91F71-3DA8-4BD3-8246-ADB041A65892}"/>
+                <a16:creationId xmlns:a16="http://schemas.microsoft.com/office/drawing/2014/main" id="{2DAC14F4-12BC-47B6-932B-4D794615CD85}"/>
               </a:ext>
             </a:extLst>
           </p:cNvPr>
@@ -12732,10 +12672,10 @@
       </p:sp>
       <p:sp>
         <p:nvSpPr>
-          <p:cNvPr id="32" name="box-73">
+          <p:cNvPr id="32" name="box-71">
             <a:extLst xmlns:a="http://schemas.openxmlformats.org/drawingml/2006/main">
               <a:ext uri="{FF2B5EF4-FFF2-40B4-BE49-F238E27FC236}">
-                <a16:creationId xmlns:a16="http://schemas.microsoft.com/office/drawing/2014/main" id="{5EBE6352-3726-4B34-82F9-286E23188B8E}"/>
+                <a16:creationId xmlns:a16="http://schemas.microsoft.com/office/drawing/2014/main" id="{A94FACA0-E657-4143-9B50-453C1775CF97}"/>
               </a:ext>
             </a:extLst>
           </p:cNvPr>
@@ -12762,10 +12702,10 @@
       </p:sp>
       <p:sp>
         <p:nvSpPr>
-          <p:cNvPr id="33" name="box-74">
+          <p:cNvPr id="33" name="box-72">
             <a:extLst xmlns:a="http://schemas.openxmlformats.org/drawingml/2006/main">
               <a:ext uri="{FF2B5EF4-FFF2-40B4-BE49-F238E27FC236}">
-                <a16:creationId xmlns:a16="http://schemas.microsoft.com/office/drawing/2014/main" id="{18FEC658-8132-4429-B6AB-1D04C95E759E}"/>
+                <a16:creationId xmlns:a16="http://schemas.microsoft.com/office/drawing/2014/main" id="{96E971B0-5286-4350-AB43-30290A4CE778}"/>
               </a:ext>
             </a:extLst>
           </p:cNvPr>
@@ -12792,10 +12732,10 @@
       </p:sp>
       <p:sp>
         <p:nvSpPr>
-          <p:cNvPr id="34" name="text-75">
+          <p:cNvPr id="34" name="text-73">
             <a:extLst xmlns:a="http://schemas.openxmlformats.org/drawingml/2006/main">
               <a:ext uri="{FF2B5EF4-FFF2-40B4-BE49-F238E27FC236}">
-                <a16:creationId xmlns:a16="http://schemas.microsoft.com/office/drawing/2014/main" id="{F08E8BD8-9E20-4B08-A1D8-377ED957411C}"/>
+                <a16:creationId xmlns:a16="http://schemas.microsoft.com/office/drawing/2014/main" id="{823351CD-F9A6-4C80-9C1A-713333C144E0}"/>
               </a:ext>
             </a:extLst>
           </p:cNvPr>
@@ -12950,10 +12890,10 @@
       </p:sp>
       <p:sp>
         <p:nvSpPr>
-          <p:cNvPr id="35" name="text-76">
+          <p:cNvPr id="35" name="text-74">
             <a:extLst xmlns:a="http://schemas.openxmlformats.org/drawingml/2006/main">
               <a:ext uri="{FF2B5EF4-FFF2-40B4-BE49-F238E27FC236}">
-                <a16:creationId xmlns:a16="http://schemas.microsoft.com/office/drawing/2014/main" id="{53ABC544-9156-450E-825D-F012C236C681}"/>
+                <a16:creationId xmlns:a16="http://schemas.microsoft.com/office/drawing/2014/main" id="{157CC0C5-7E5D-4CA5-8EF7-76288498B742}"/>
               </a:ext>
             </a:extLst>
           </p:cNvPr>
@@ -13108,10 +13048,10 @@
       </p:sp>
       <p:sp>
         <p:nvSpPr>
-          <p:cNvPr id="36" name="box-77">
+          <p:cNvPr id="36" name="box-75">
             <a:extLst xmlns:a="http://schemas.openxmlformats.org/drawingml/2006/main">
               <a:ext uri="{FF2B5EF4-FFF2-40B4-BE49-F238E27FC236}">
-                <a16:creationId xmlns:a16="http://schemas.microsoft.com/office/drawing/2014/main" id="{094E9396-5A9C-4510-98C2-D869EB1DD0EA}"/>
+                <a16:creationId xmlns:a16="http://schemas.microsoft.com/office/drawing/2014/main" id="{A46058AE-B6C1-4BD0-8BA2-4E2628E52196}"/>
               </a:ext>
             </a:extLst>
           </p:cNvPr>
@@ -13138,10 +13078,10 @@
       </p:sp>
       <p:sp>
         <p:nvSpPr>
-          <p:cNvPr id="37" name="box-78">
+          <p:cNvPr id="37" name="box-76">
             <a:extLst xmlns:a="http://schemas.openxmlformats.org/drawingml/2006/main">
               <a:ext uri="{FF2B5EF4-FFF2-40B4-BE49-F238E27FC236}">
-                <a16:creationId xmlns:a16="http://schemas.microsoft.com/office/drawing/2014/main" id="{7DD977F1-61DE-43A2-9DCF-F6BEC11C493C}"/>
+                <a16:creationId xmlns:a16="http://schemas.microsoft.com/office/drawing/2014/main" id="{F6601F53-B455-4E61-AB9B-7D6CEDD5FAA7}"/>
               </a:ext>
             </a:extLst>
           </p:cNvPr>
@@ -13168,10 +13108,10 @@
       </p:sp>
       <p:sp>
         <p:nvSpPr>
-          <p:cNvPr id="38" name="text-79">
+          <p:cNvPr id="38" name="text-77">
             <a:extLst xmlns:a="http://schemas.openxmlformats.org/drawingml/2006/main">
               <a:ext uri="{FF2B5EF4-FFF2-40B4-BE49-F238E27FC236}">
-                <a16:creationId xmlns:a16="http://schemas.microsoft.com/office/drawing/2014/main" id="{F0711C18-B291-4CE0-A659-9975751408BC}"/>
+                <a16:creationId xmlns:a16="http://schemas.microsoft.com/office/drawing/2014/main" id="{FD75EC8B-5DD5-4334-8070-F780D9218A00}"/>
               </a:ext>
             </a:extLst>
           </p:cNvPr>
@@ -13326,10 +13266,10 @@
       </p:sp>
       <p:sp>
         <p:nvSpPr>
-          <p:cNvPr id="39" name="text-80">
+          <p:cNvPr id="39" name="text-78">
             <a:extLst xmlns:a="http://schemas.openxmlformats.org/drawingml/2006/main">
               <a:ext uri="{FF2B5EF4-FFF2-40B4-BE49-F238E27FC236}">
-                <a16:creationId xmlns:a16="http://schemas.microsoft.com/office/drawing/2014/main" id="{2A48929F-5500-4D23-9FD5-46510533EC40}"/>
+                <a16:creationId xmlns:a16="http://schemas.microsoft.com/office/drawing/2014/main" id="{EFBDA536-4F1B-4B7B-899D-A9A7A98015B2}"/>
               </a:ext>
             </a:extLst>
           </p:cNvPr>
@@ -13484,10 +13424,10 @@
       </p:sp>
       <p:sp>
         <p:nvSpPr>
-          <p:cNvPr id="40" name="box-81">
+          <p:cNvPr id="40" name="box-79">
             <a:extLst xmlns:a="http://schemas.openxmlformats.org/drawingml/2006/main">
               <a:ext uri="{FF2B5EF4-FFF2-40B4-BE49-F238E27FC236}">
-                <a16:creationId xmlns:a16="http://schemas.microsoft.com/office/drawing/2014/main" id="{B09C712D-65CF-4C4C-8FBE-DE01F174489B}"/>
+                <a16:creationId xmlns:a16="http://schemas.microsoft.com/office/drawing/2014/main" id="{214EB63D-644D-42AB-9492-4E038918CED9}"/>
               </a:ext>
             </a:extLst>
           </p:cNvPr>
@@ -13514,10 +13454,10 @@
       </p:sp>
       <p:sp>
         <p:nvSpPr>
-          <p:cNvPr id="41" name="box-82">
+          <p:cNvPr id="41" name="box-80">
             <a:extLst xmlns:a="http://schemas.openxmlformats.org/drawingml/2006/main">
               <a:ext uri="{FF2B5EF4-FFF2-40B4-BE49-F238E27FC236}">
-                <a16:creationId xmlns:a16="http://schemas.microsoft.com/office/drawing/2014/main" id="{CCEC9632-8D4D-41CC-8187-DEDBB270D762}"/>
+                <a16:creationId xmlns:a16="http://schemas.microsoft.com/office/drawing/2014/main" id="{F4F2CE54-B903-4ECD-8739-B1BA3B58C194}"/>
               </a:ext>
             </a:extLst>
           </p:cNvPr>
@@ -13544,10 +13484,10 @@
       </p:sp>
       <p:sp>
         <p:nvSpPr>
-          <p:cNvPr id="42" name="text-83">
+          <p:cNvPr id="42" name="text-81">
             <a:extLst xmlns:a="http://schemas.openxmlformats.org/drawingml/2006/main">
               <a:ext uri="{FF2B5EF4-FFF2-40B4-BE49-F238E27FC236}">
-                <a16:creationId xmlns:a16="http://schemas.microsoft.com/office/drawing/2014/main" id="{90F8A85A-0ADE-4500-A4EF-4409FA9084A5}"/>
+                <a16:creationId xmlns:a16="http://schemas.microsoft.com/office/drawing/2014/main" id="{7ED6CD44-4723-4D50-A6B3-ECCCC729DE82}"/>
               </a:ext>
             </a:extLst>
           </p:cNvPr>
@@ -13702,10 +13642,10 @@
       </p:sp>
       <p:sp>
         <p:nvSpPr>
-          <p:cNvPr id="43" name="text-84">
+          <p:cNvPr id="43" name="text-82">
             <a:extLst xmlns:a="http://schemas.openxmlformats.org/drawingml/2006/main">
               <a:ext uri="{FF2B5EF4-FFF2-40B4-BE49-F238E27FC236}">
-                <a16:creationId xmlns:a16="http://schemas.microsoft.com/office/drawing/2014/main" id="{9C5F175E-220E-456D-B4AE-EA8032A2CFBE}"/>
+                <a16:creationId xmlns:a16="http://schemas.microsoft.com/office/drawing/2014/main" id="{7A8E5424-29D6-416A-9094-CEF1A84C5CEF}"/>
               </a:ext>
             </a:extLst>
           </p:cNvPr>
@@ -13860,10 +13800,10 @@
       </p:sp>
       <p:sp>
         <p:nvSpPr>
-          <p:cNvPr id="44" name="box-85">
+          <p:cNvPr id="44" name="box-83">
             <a:extLst xmlns:a="http://schemas.openxmlformats.org/drawingml/2006/main">
               <a:ext uri="{FF2B5EF4-FFF2-40B4-BE49-F238E27FC236}">
-                <a16:creationId xmlns:a16="http://schemas.microsoft.com/office/drawing/2014/main" id="{A0581014-4AC3-49B5-8DCF-996F95D1E247}"/>
+                <a16:creationId xmlns:a16="http://schemas.microsoft.com/office/drawing/2014/main" id="{540D3F00-A8C2-41CD-8A21-216C6BDBF2AD}"/>
               </a:ext>
             </a:extLst>
           </p:cNvPr>
@@ -13890,10 +13830,10 @@
       </p:sp>
       <p:sp>
         <p:nvSpPr>
-          <p:cNvPr id="45" name="box-86">
+          <p:cNvPr id="45" name="box-84">
             <a:extLst xmlns:a="http://schemas.openxmlformats.org/drawingml/2006/main">
               <a:ext uri="{FF2B5EF4-FFF2-40B4-BE49-F238E27FC236}">
-                <a16:creationId xmlns:a16="http://schemas.microsoft.com/office/drawing/2014/main" id="{E6CE19F1-378E-4C66-9D3D-655426666694}"/>
+                <a16:creationId xmlns:a16="http://schemas.microsoft.com/office/drawing/2014/main" id="{0527EB30-3427-4265-B68E-8E73C95E6D15}"/>
               </a:ext>
             </a:extLst>
           </p:cNvPr>
@@ -13920,10 +13860,10 @@
       </p:sp>
       <p:sp>
         <p:nvSpPr>
-          <p:cNvPr id="46" name="text-87">
+          <p:cNvPr id="46" name="text-85">
             <a:extLst xmlns:a="http://schemas.openxmlformats.org/drawingml/2006/main">
               <a:ext uri="{FF2B5EF4-FFF2-40B4-BE49-F238E27FC236}">
-                <a16:creationId xmlns:a16="http://schemas.microsoft.com/office/drawing/2014/main" id="{18E3C369-CBB7-4598-8E45-E5FB046566CB}"/>
+                <a16:creationId xmlns:a16="http://schemas.microsoft.com/office/drawing/2014/main" id="{770E20AE-EA99-488C-8F85-B448B743A826}"/>
               </a:ext>
             </a:extLst>
           </p:cNvPr>
@@ -14078,10 +14018,10 @@
       </p:sp>
       <p:sp>
         <p:nvSpPr>
-          <p:cNvPr id="47" name="text-88">
+          <p:cNvPr id="47" name="text-86">
             <a:extLst xmlns:a="http://schemas.openxmlformats.org/drawingml/2006/main">
               <a:ext uri="{FF2B5EF4-FFF2-40B4-BE49-F238E27FC236}">
-                <a16:creationId xmlns:a16="http://schemas.microsoft.com/office/drawing/2014/main" id="{0F9FFE34-3E75-4836-AA65-1120327278BF}"/>
+                <a16:creationId xmlns:a16="http://schemas.microsoft.com/office/drawing/2014/main" id="{3DDA0A96-5000-4543-B701-E6CC2554A14E}"/>
               </a:ext>
             </a:extLst>
           </p:cNvPr>
@@ -14236,10 +14176,10 @@
       </p:sp>
       <p:sp>
         <p:nvSpPr>
-          <p:cNvPr id="48" name="text-89">
+          <p:cNvPr id="48" name="text-87">
             <a:extLst xmlns:a="http://schemas.openxmlformats.org/drawingml/2006/main">
               <a:ext uri="{FF2B5EF4-FFF2-40B4-BE49-F238E27FC236}">
-                <a16:creationId xmlns:a16="http://schemas.microsoft.com/office/drawing/2014/main" id="{103AB770-39E9-4366-8647-4A16E23D9C85}"/>
+                <a16:creationId xmlns:a16="http://schemas.microsoft.com/office/drawing/2014/main" id="{7F719976-5614-42C1-B5AA-8159EE01F6DC}"/>
               </a:ext>
             </a:extLst>
           </p:cNvPr>
@@ -14394,10 +14334,10 @@
       </p:sp>
       <p:sp>
         <p:nvSpPr>
-          <p:cNvPr id="49" name="text-90">
+          <p:cNvPr id="49" name="text-88">
             <a:extLst xmlns:a="http://schemas.openxmlformats.org/drawingml/2006/main">
               <a:ext uri="{FF2B5EF4-FFF2-40B4-BE49-F238E27FC236}">
-                <a16:creationId xmlns:a16="http://schemas.microsoft.com/office/drawing/2014/main" id="{EB37B7A8-630B-47C5-A5C8-E51F378F08B9}"/>
+                <a16:creationId xmlns:a16="http://schemas.microsoft.com/office/drawing/2014/main" id="{853DB3FA-9CD9-4F40-8634-E9E30B6A78CF}"/>
               </a:ext>
             </a:extLst>
           </p:cNvPr>
@@ -14552,10 +14492,10 @@
       </p:sp>
       <p:sp>
         <p:nvSpPr>
-          <p:cNvPr id="50" name="text-91">
+          <p:cNvPr id="50" name="text-89">
             <a:extLst xmlns:a="http://schemas.openxmlformats.org/drawingml/2006/main">
               <a:ext uri="{FF2B5EF4-FFF2-40B4-BE49-F238E27FC236}">
-                <a16:creationId xmlns:a16="http://schemas.microsoft.com/office/drawing/2014/main" id="{DFD487AA-FBDA-4B2E-BF36-920F5EB8B16D}"/>
+                <a16:creationId xmlns:a16="http://schemas.microsoft.com/office/drawing/2014/main" id="{9054282D-5346-469E-8D95-31A4433F3F88}"/>
               </a:ext>
             </a:extLst>
           </p:cNvPr>
@@ -14710,10 +14650,10 @@
       </p:sp>
       <p:sp>
         <p:nvSpPr>
-          <p:cNvPr id="51" name="text-92">
+          <p:cNvPr id="51" name="text-90">
             <a:extLst xmlns:a="http://schemas.openxmlformats.org/drawingml/2006/main">
               <a:ext uri="{FF2B5EF4-FFF2-40B4-BE49-F238E27FC236}">
-                <a16:creationId xmlns:a16="http://schemas.microsoft.com/office/drawing/2014/main" id="{B947F48D-31F0-41CC-9BE9-AB0E006870D2}"/>
+                <a16:creationId xmlns:a16="http://schemas.microsoft.com/office/drawing/2014/main" id="{B12E23E9-A044-4A1E-9DFD-4422937FA8BA}"/>
               </a:ext>
             </a:extLst>
           </p:cNvPr>
@@ -14868,10 +14808,10 @@
       </p:sp>
       <p:sp>
         <p:nvSpPr>
-          <p:cNvPr id="52" name="text-93">
+          <p:cNvPr id="52" name="text-91">
             <a:extLst xmlns:a="http://schemas.openxmlformats.org/drawingml/2006/main">
               <a:ext uri="{FF2B5EF4-FFF2-40B4-BE49-F238E27FC236}">
-                <a16:creationId xmlns:a16="http://schemas.microsoft.com/office/drawing/2014/main" id="{FB5C2C18-0EE0-4F49-B607-64E32AE41A3F}"/>
+                <a16:creationId xmlns:a16="http://schemas.microsoft.com/office/drawing/2014/main" id="{855B02C4-0EEA-4E1C-91A9-B6749EF6FBB9}"/>
               </a:ext>
             </a:extLst>
           </p:cNvPr>
@@ -15027,7 +14967,7 @@
     </p:spTree>
     <p:extLst>
       <p:ext uri="{BB962C8B-B14F-4D97-AF65-F5344CB8AC3E}">
-        <p14:creationId xmlns:p14="http://schemas.microsoft.com/office/powerpoint/2010/main" val="886823624"/>
+        <p14:creationId xmlns:p14="http://schemas.microsoft.com/office/powerpoint/2010/main" val="1925339096"/>
       </p:ext>
     </p:extLst>
   </p:cSld>
@@ -15055,10 +14995,10 @@
       </p:grpSpPr>
       <p:sp>
         <p:nvSpPr>
-          <p:cNvPr id="24" name="text-94">
+          <p:cNvPr id="24" name="text-92">
             <a:extLst xmlns:a="http://schemas.openxmlformats.org/drawingml/2006/main">
               <a:ext uri="{FF2B5EF4-FFF2-40B4-BE49-F238E27FC236}">
-                <a16:creationId xmlns:a16="http://schemas.microsoft.com/office/drawing/2014/main" id="{596E1D70-892C-4B48-8C54-1AF6770F8DB8}"/>
+                <a16:creationId xmlns:a16="http://schemas.microsoft.com/office/drawing/2014/main" id="{CF10D852-6DAC-49D9-B8A2-3C5A5AD35C3A}"/>
               </a:ext>
             </a:extLst>
           </p:cNvPr>
@@ -15213,10 +15153,10 @@
       </p:sp>
       <p:sp>
         <p:nvSpPr>
-          <p:cNvPr id="2" name="text-95">
+          <p:cNvPr id="2" name="text-93">
             <a:extLst xmlns:a="http://schemas.openxmlformats.org/drawingml/2006/main">
               <a:ext uri="{FF2B5EF4-FFF2-40B4-BE49-F238E27FC236}">
-                <a16:creationId xmlns:a16="http://schemas.microsoft.com/office/drawing/2014/main" id="{37798312-4D54-47E1-B4FD-3BBEF411FFEC}"/>
+                <a16:creationId xmlns:a16="http://schemas.microsoft.com/office/drawing/2014/main" id="{67995CEE-891C-481A-A22A-86D682D2C690}"/>
               </a:ext>
             </a:extLst>
           </p:cNvPr>
@@ -15371,10 +15311,10 @@
       </p:sp>
       <p:sp>
         <p:nvSpPr>
-          <p:cNvPr id="3" name="rule-96">
+          <p:cNvPr id="3" name="rule-94">
             <a:extLst xmlns:a="http://schemas.openxmlformats.org/drawingml/2006/main">
               <a:ext uri="{FF2B5EF4-FFF2-40B4-BE49-F238E27FC236}">
-                <a16:creationId xmlns:a16="http://schemas.microsoft.com/office/drawing/2014/main" id="{568EC0AA-44F7-44F7-B790-C79A570E3339}"/>
+                <a16:creationId xmlns:a16="http://schemas.microsoft.com/office/drawing/2014/main" id="{2BD7FDD4-96DE-495C-B497-B1D12802E129}"/>
               </a:ext>
             </a:extLst>
           </p:cNvPr>
@@ -15401,10 +15341,10 @@
       </p:sp>
       <p:sp>
         <p:nvSpPr>
-          <p:cNvPr id="4" name="text-97">
+          <p:cNvPr id="4" name="text-95">
             <a:extLst xmlns:a="http://schemas.openxmlformats.org/drawingml/2006/main">
               <a:ext uri="{FF2B5EF4-FFF2-40B4-BE49-F238E27FC236}">
-                <a16:creationId xmlns:a16="http://schemas.microsoft.com/office/drawing/2014/main" id="{24A218FD-7B90-498A-BA3F-E01BDA003C81}"/>
+                <a16:creationId xmlns:a16="http://schemas.microsoft.com/office/drawing/2014/main" id="{7B839B1A-D49E-4406-B60C-9FA8EF433ABA}"/>
               </a:ext>
             </a:extLst>
           </p:cNvPr>
@@ -15559,10 +15499,10 @@
       </p:sp>
       <p:sp>
         <p:nvSpPr>
-          <p:cNvPr id="5" name="text-98">
+          <p:cNvPr id="5" name="text-96">
             <a:extLst xmlns:a="http://schemas.openxmlformats.org/drawingml/2006/main">
               <a:ext uri="{FF2B5EF4-FFF2-40B4-BE49-F238E27FC236}">
-                <a16:creationId xmlns:a16="http://schemas.microsoft.com/office/drawing/2014/main" id="{BAEEFAAB-E464-4F6C-B0BD-DA509CEAA2A6}"/>
+                <a16:creationId xmlns:a16="http://schemas.microsoft.com/office/drawing/2014/main" id="{69EF913F-7DBB-40E7-841C-C1DE0AAEF2E1}"/>
               </a:ext>
             </a:extLst>
           </p:cNvPr>
@@ -15717,10 +15657,10 @@
       </p:sp>
       <p:sp>
         <p:nvSpPr>
-          <p:cNvPr id="6" name="text-99">
+          <p:cNvPr id="6" name="text-97">
             <a:extLst xmlns:a="http://schemas.openxmlformats.org/drawingml/2006/main">
               <a:ext uri="{FF2B5EF4-FFF2-40B4-BE49-F238E27FC236}">
-                <a16:creationId xmlns:a16="http://schemas.microsoft.com/office/drawing/2014/main" id="{3B6AA3B5-8E99-4826-AD02-37C0D634D436}"/>
+                <a16:creationId xmlns:a16="http://schemas.microsoft.com/office/drawing/2014/main" id="{1AFB8BAD-55EE-4692-AFBA-18F3901EE1C7}"/>
               </a:ext>
             </a:extLst>
           </p:cNvPr>
@@ -15875,10 +15815,10 @@
       </p:sp>
       <p:sp>
         <p:nvSpPr>
-          <p:cNvPr id="7" name="text-100">
+          <p:cNvPr id="7" name="text-98">
             <a:extLst xmlns:a="http://schemas.openxmlformats.org/drawingml/2006/main">
               <a:ext uri="{FF2B5EF4-FFF2-40B4-BE49-F238E27FC236}">
-                <a16:creationId xmlns:a16="http://schemas.microsoft.com/office/drawing/2014/main" id="{01E94C67-BAFF-4E34-A58D-80E1350EA82B}"/>
+                <a16:creationId xmlns:a16="http://schemas.microsoft.com/office/drawing/2014/main" id="{E338260B-8A95-4FE2-848A-8E5D18683E22}"/>
               </a:ext>
             </a:extLst>
           </p:cNvPr>
@@ -16036,7 +15976,7 @@
           <p:cNvPr id="8" name="">
             <a:extLst xmlns:a="http://schemas.openxmlformats.org/drawingml/2006/main">
               <a:ext uri="{FF2B5EF4-FFF2-40B4-BE49-F238E27FC236}">
-                <a16:creationId xmlns:a16="http://schemas.microsoft.com/office/drawing/2014/main" id="{7F94CF0E-2A6F-4132-8CC8-E0095C57B2AC}"/>
+                <a16:creationId xmlns:a16="http://schemas.microsoft.com/office/drawing/2014/main" id="{DCC81FA5-D931-4519-8FF2-D20E918EA782}"/>
               </a:ext>
             </a:extLst>
           </p:cNvPr>
@@ -16046,7 +15986,7 @@
           <p:nvPr/>
         </p:nvPicPr>
         <p:blipFill>
-          <a:blip xmlns:r="http://schemas.openxmlformats.org/officeDocument/2006/relationships" xmlns:a="http://schemas.openxmlformats.org/drawingml/2006/main" r:embed="R01ed0b27796a43b0"/>
+          <a:blip xmlns:r="http://schemas.openxmlformats.org/officeDocument/2006/relationships" xmlns:a="http://schemas.openxmlformats.org/drawingml/2006/main" r:embed="R4f9a22bce69348c9"/>
           <a:stretch xmlns:a="http://schemas.openxmlformats.org/drawingml/2006/main"/>
         </p:blipFill>
         <p:spPr>
@@ -16064,7 +16004,7 @@
           <p:cNvPr id="9" name="">
             <a:extLst xmlns:a="http://schemas.openxmlformats.org/drawingml/2006/main">
               <a:ext uri="{FF2B5EF4-FFF2-40B4-BE49-F238E27FC236}">
-                <a16:creationId xmlns:a16="http://schemas.microsoft.com/office/drawing/2014/main" id="{E139CE43-C153-4B10-9E18-2C6FCD0FF616}"/>
+                <a16:creationId xmlns:a16="http://schemas.microsoft.com/office/drawing/2014/main" id="{D94BCF56-F498-4EA0-95A8-4622AE0B6C9B}"/>
               </a:ext>
             </a:extLst>
           </p:cNvPr>
@@ -16074,7 +16014,7 @@
           <p:nvPr/>
         </p:nvPicPr>
         <p:blipFill>
-          <a:blip xmlns:r="http://schemas.openxmlformats.org/officeDocument/2006/relationships" xmlns:a="http://schemas.openxmlformats.org/drawingml/2006/main" r:embed="R6e47b06eec124546"/>
+          <a:blip xmlns:r="http://schemas.openxmlformats.org/officeDocument/2006/relationships" xmlns:a="http://schemas.openxmlformats.org/drawingml/2006/main" r:embed="R62f9a21077374097"/>
           <a:stretch xmlns:a="http://schemas.openxmlformats.org/drawingml/2006/main"/>
         </p:blipFill>
         <p:spPr>
@@ -16089,10 +16029,10 @@
       </p:pic>
       <p:sp>
         <p:nvSpPr>
-          <p:cNvPr id="10" name="text-101">
+          <p:cNvPr id="10" name="text-99">
             <a:extLst xmlns:a="http://schemas.openxmlformats.org/drawingml/2006/main">
               <a:ext uri="{FF2B5EF4-FFF2-40B4-BE49-F238E27FC236}">
-                <a16:creationId xmlns:a16="http://schemas.microsoft.com/office/drawing/2014/main" id="{325AB51E-5D54-49BC-9C55-6062A0993D8D}"/>
+                <a16:creationId xmlns:a16="http://schemas.microsoft.com/office/drawing/2014/main" id="{8DCC7EEC-8346-4949-891B-96A39A005B85}"/>
               </a:ext>
             </a:extLst>
           </p:cNvPr>
@@ -16247,10 +16187,10 @@
       </p:sp>
       <p:sp>
         <p:nvSpPr>
-          <p:cNvPr id="11" name="text-102">
+          <p:cNvPr id="11" name="text-100">
             <a:extLst xmlns:a="http://schemas.openxmlformats.org/drawingml/2006/main">
               <a:ext uri="{FF2B5EF4-FFF2-40B4-BE49-F238E27FC236}">
-                <a16:creationId xmlns:a16="http://schemas.microsoft.com/office/drawing/2014/main" id="{C084F95D-AF59-44F4-8191-2CA17992DF46}"/>
+                <a16:creationId xmlns:a16="http://schemas.microsoft.com/office/drawing/2014/main" id="{1AF22180-3501-4343-9AA1-498061899706}"/>
               </a:ext>
             </a:extLst>
           </p:cNvPr>
@@ -16405,10 +16345,10 @@
       </p:sp>
       <p:sp>
         <p:nvSpPr>
-          <p:cNvPr id="12" name="text-103">
+          <p:cNvPr id="12" name="text-101">
             <a:extLst xmlns:a="http://schemas.openxmlformats.org/drawingml/2006/main">
               <a:ext uri="{FF2B5EF4-FFF2-40B4-BE49-F238E27FC236}">
-                <a16:creationId xmlns:a16="http://schemas.microsoft.com/office/drawing/2014/main" id="{C0232861-D132-4365-A07C-07904B469F5D}"/>
+                <a16:creationId xmlns:a16="http://schemas.microsoft.com/office/drawing/2014/main" id="{00ECF8ED-0402-46C1-A473-6F79CA977BCE}"/>
               </a:ext>
             </a:extLst>
           </p:cNvPr>
@@ -16563,10 +16503,10 @@
       </p:sp>
       <p:sp>
         <p:nvSpPr>
-          <p:cNvPr id="13" name="text-104">
+          <p:cNvPr id="13" name="text-102">
             <a:extLst xmlns:a="http://schemas.openxmlformats.org/drawingml/2006/main">
               <a:ext uri="{FF2B5EF4-FFF2-40B4-BE49-F238E27FC236}">
-                <a16:creationId xmlns:a16="http://schemas.microsoft.com/office/drawing/2014/main" id="{A35F6CF9-7CD7-4EEE-8433-6760FAA1F7D8}"/>
+                <a16:creationId xmlns:a16="http://schemas.microsoft.com/office/drawing/2014/main" id="{3B8C137B-6A1A-4E6D-BECD-EC4F0A7CAFFE}"/>
               </a:ext>
             </a:extLst>
           </p:cNvPr>
@@ -16721,10 +16661,10 @@
       </p:sp>
       <p:sp>
         <p:nvSpPr>
-          <p:cNvPr id="14" name="text-105">
+          <p:cNvPr id="14" name="text-103">
             <a:extLst xmlns:a="http://schemas.openxmlformats.org/drawingml/2006/main">
               <a:ext uri="{FF2B5EF4-FFF2-40B4-BE49-F238E27FC236}">
-                <a16:creationId xmlns:a16="http://schemas.microsoft.com/office/drawing/2014/main" id="{F68FA4E6-9F5C-4D36-B2F5-6190F6B29658}"/>
+                <a16:creationId xmlns:a16="http://schemas.microsoft.com/office/drawing/2014/main" id="{2E751539-77EF-42E2-A51F-21D3549F16F3}"/>
               </a:ext>
             </a:extLst>
           </p:cNvPr>
@@ -16879,10 +16819,10 @@
       </p:sp>
       <p:sp>
         <p:nvSpPr>
-          <p:cNvPr id="15" name="text-106">
+          <p:cNvPr id="15" name="text-104">
             <a:extLst xmlns:a="http://schemas.openxmlformats.org/drawingml/2006/main">
               <a:ext uri="{FF2B5EF4-FFF2-40B4-BE49-F238E27FC236}">
-                <a16:creationId xmlns:a16="http://schemas.microsoft.com/office/drawing/2014/main" id="{F1B6E005-3A3B-4F46-BA39-42A4F9897EA9}"/>
+                <a16:creationId xmlns:a16="http://schemas.microsoft.com/office/drawing/2014/main" id="{98C9A98E-EBCE-44C5-BE4B-25803B422331}"/>
               </a:ext>
             </a:extLst>
           </p:cNvPr>
@@ -17037,10 +16977,10 @@
       </p:sp>
       <p:sp>
         <p:nvSpPr>
-          <p:cNvPr id="16" name="text-107">
+          <p:cNvPr id="16" name="text-105">
             <a:extLst xmlns:a="http://schemas.openxmlformats.org/drawingml/2006/main">
               <a:ext uri="{FF2B5EF4-FFF2-40B4-BE49-F238E27FC236}">
-                <a16:creationId xmlns:a16="http://schemas.microsoft.com/office/drawing/2014/main" id="{6F871836-B2E1-4ECD-B63A-28EC74BFA975}"/>
+                <a16:creationId xmlns:a16="http://schemas.microsoft.com/office/drawing/2014/main" id="{D8109261-27BE-46ED-9451-37B9A6FBDEA3}"/>
               </a:ext>
             </a:extLst>
           </p:cNvPr>
@@ -17195,10 +17135,10 @@
       </p:sp>
       <p:sp>
         <p:nvSpPr>
-          <p:cNvPr id="17" name="text-108">
+          <p:cNvPr id="17" name="text-106">
             <a:extLst xmlns:a="http://schemas.openxmlformats.org/drawingml/2006/main">
               <a:ext uri="{FF2B5EF4-FFF2-40B4-BE49-F238E27FC236}">
-                <a16:creationId xmlns:a16="http://schemas.microsoft.com/office/drawing/2014/main" id="{E2125D76-52EF-4568-AB05-C951CB2C216A}"/>
+                <a16:creationId xmlns:a16="http://schemas.microsoft.com/office/drawing/2014/main" id="{BA0065AC-12B7-474A-ACF5-21474C4401D4}"/>
               </a:ext>
             </a:extLst>
           </p:cNvPr>
@@ -17353,10 +17293,10 @@
       </p:sp>
       <p:sp>
         <p:nvSpPr>
-          <p:cNvPr id="18" name="text-109">
+          <p:cNvPr id="18" name="text-107">
             <a:extLst xmlns:a="http://schemas.openxmlformats.org/drawingml/2006/main">
               <a:ext uri="{FF2B5EF4-FFF2-40B4-BE49-F238E27FC236}">
-                <a16:creationId xmlns:a16="http://schemas.microsoft.com/office/drawing/2014/main" id="{D56D6826-C49D-4975-BBC7-9337E4CABBAB}"/>
+                <a16:creationId xmlns:a16="http://schemas.microsoft.com/office/drawing/2014/main" id="{C89ABAD3-C8AE-4E67-ABA5-92661503B4F7}"/>
               </a:ext>
             </a:extLst>
           </p:cNvPr>
@@ -17511,10 +17451,10 @@
       </p:sp>
       <p:sp>
         <p:nvSpPr>
-          <p:cNvPr id="19" name="rule-110">
+          <p:cNvPr id="19" name="rule-108">
             <a:extLst xmlns:a="http://schemas.openxmlformats.org/drawingml/2006/main">
               <a:ext uri="{FF2B5EF4-FFF2-40B4-BE49-F238E27FC236}">
-                <a16:creationId xmlns:a16="http://schemas.microsoft.com/office/drawing/2014/main" id="{B64DB866-810F-41AF-8094-327D30C1C987}"/>
+                <a16:creationId xmlns:a16="http://schemas.microsoft.com/office/drawing/2014/main" id="{EC157C1E-B415-4DA7-B4C9-D0748576C54F}"/>
               </a:ext>
             </a:extLst>
           </p:cNvPr>
@@ -17544,7 +17484,7 @@
           <p:cNvPr id="20" name="hotspot-1">
             <a:extLst xmlns:a="http://schemas.openxmlformats.org/drawingml/2006/main">
               <a:ext uri="{FF2B5EF4-FFF2-40B4-BE49-F238E27FC236}">
-                <a16:creationId xmlns:a16="http://schemas.microsoft.com/office/drawing/2014/main" id="{D9A46BA1-A179-4D9D-AF03-C30DB354BCBF}"/>
+                <a16:creationId xmlns:a16="http://schemas.microsoft.com/office/drawing/2014/main" id="{6C0D1747-77E9-4EFC-BE57-EA0BA060FB27}"/>
               </a:ext>
             </a:extLst>
             <ns0:hlinkClick xmlns:ns0="http://schemas.openxmlformats.org/drawingml/2006/main" xmlns:ns1="http://schemas.openxmlformats.org/officeDocument/2006/relationships" ns1:id="rIdClick1"/>
@@ -17574,10 +17514,10 @@
       </p:sp>
       <p:sp>
         <p:nvSpPr>
-          <p:cNvPr id="21" name="text-112">
+          <p:cNvPr id="21" name="text-110">
             <a:extLst xmlns:a="http://schemas.openxmlformats.org/drawingml/2006/main">
               <a:ext uri="{FF2B5EF4-FFF2-40B4-BE49-F238E27FC236}">
-                <a16:creationId xmlns:a16="http://schemas.microsoft.com/office/drawing/2014/main" id="{1A1BA821-12FE-4172-B413-27FAD25E0301}"/>
+                <a16:creationId xmlns:a16="http://schemas.microsoft.com/office/drawing/2014/main" id="{907A0721-D468-40C8-9FB7-A12FAB4A19D7}"/>
               </a:ext>
             </a:extLst>
           </p:cNvPr>
@@ -17732,10 +17672,10 @@
       </p:sp>
       <p:sp>
         <p:nvSpPr>
-          <p:cNvPr id="22" name="rule-113">
+          <p:cNvPr id="22" name="rule-111">
             <a:extLst xmlns:a="http://schemas.openxmlformats.org/drawingml/2006/main">
               <a:ext uri="{FF2B5EF4-FFF2-40B4-BE49-F238E27FC236}">
-                <a16:creationId xmlns:a16="http://schemas.microsoft.com/office/drawing/2014/main" id="{D35EA59D-4560-4799-B317-77F94917F027}"/>
+                <a16:creationId xmlns:a16="http://schemas.microsoft.com/office/drawing/2014/main" id="{28219BC6-E5B1-48B7-8F02-D4CB569E3462}"/>
               </a:ext>
             </a:extLst>
           </p:cNvPr>
@@ -17765,7 +17705,7 @@
           <p:cNvPr id="23" name="hotspot-2">
             <a:extLst xmlns:a="http://schemas.openxmlformats.org/drawingml/2006/main">
               <a:ext uri="{FF2B5EF4-FFF2-40B4-BE49-F238E27FC236}">
-                <a16:creationId xmlns:a16="http://schemas.microsoft.com/office/drawing/2014/main" id="{844DD4BB-B9DC-4314-A729-E5595B11849E}"/>
+                <a16:creationId xmlns:a16="http://schemas.microsoft.com/office/drawing/2014/main" id="{EF80C2FF-1A3C-4E1E-A422-1F603E1BA98B}"/>
               </a:ext>
             </a:extLst>
             <ns2:hlinkClick xmlns:ns2="http://schemas.openxmlformats.org/drawingml/2006/main" xmlns:ns3="http://schemas.openxmlformats.org/officeDocument/2006/relationships" ns3:id="rIdClick2"/>
@@ -17796,7 +17736,7 @@
     </p:spTree>
     <p:extLst>
       <p:ext uri="{BB962C8B-B14F-4D97-AF65-F5344CB8AC3E}">
-        <p14:creationId xmlns:p14="http://schemas.microsoft.com/office/powerpoint/2010/main" val="1155116726"/>
+        <p14:creationId xmlns:p14="http://schemas.microsoft.com/office/powerpoint/2010/main" val="559460933"/>
       </p:ext>
     </p:extLst>
   </p:cSld>
@@ -17824,10 +17764,10 @@
       </p:grpSpPr>
       <p:sp>
         <p:nvSpPr>
-          <p:cNvPr id="20" name="text-115">
+          <p:cNvPr id="20" name="text-113">
             <a:extLst xmlns:a="http://schemas.openxmlformats.org/drawingml/2006/main">
               <a:ext uri="{FF2B5EF4-FFF2-40B4-BE49-F238E27FC236}">
-                <a16:creationId xmlns:a16="http://schemas.microsoft.com/office/drawing/2014/main" id="{090748F0-592A-4033-B09C-245137E4BEE3}"/>
+                <a16:creationId xmlns:a16="http://schemas.microsoft.com/office/drawing/2014/main" id="{81C3AE69-83F7-4A18-AE71-F45577DF458D}"/>
               </a:ext>
             </a:extLst>
           </p:cNvPr>
@@ -17982,10 +17922,10 @@
       </p:sp>
       <p:sp>
         <p:nvSpPr>
-          <p:cNvPr id="2" name="text-116">
+          <p:cNvPr id="2" name="text-114">
             <a:extLst xmlns:a="http://schemas.openxmlformats.org/drawingml/2006/main">
               <a:ext uri="{FF2B5EF4-FFF2-40B4-BE49-F238E27FC236}">
-                <a16:creationId xmlns:a16="http://schemas.microsoft.com/office/drawing/2014/main" id="{9C538BA2-914C-47AA-9EA9-87A1EA36FE7C}"/>
+                <a16:creationId xmlns:a16="http://schemas.microsoft.com/office/drawing/2014/main" id="{4144D2BC-279D-4AAA-AAE5-F76EFEFB5BEA}"/>
               </a:ext>
             </a:extLst>
           </p:cNvPr>
@@ -18140,10 +18080,10 @@
       </p:sp>
       <p:sp>
         <p:nvSpPr>
-          <p:cNvPr id="3" name="rule-117">
+          <p:cNvPr id="3" name="rule-115">
             <a:extLst xmlns:a="http://schemas.openxmlformats.org/drawingml/2006/main">
               <a:ext uri="{FF2B5EF4-FFF2-40B4-BE49-F238E27FC236}">
-                <a16:creationId xmlns:a16="http://schemas.microsoft.com/office/drawing/2014/main" id="{0A193942-80E9-4D6A-A5F6-15F510652175}"/>
+                <a16:creationId xmlns:a16="http://schemas.microsoft.com/office/drawing/2014/main" id="{E70EAB07-FD99-4891-A0D3-7855775888BE}"/>
               </a:ext>
             </a:extLst>
           </p:cNvPr>
@@ -18170,10 +18110,10 @@
       </p:sp>
       <p:sp>
         <p:nvSpPr>
-          <p:cNvPr id="4" name="text-118">
+          <p:cNvPr id="4" name="text-116">
             <a:extLst xmlns:a="http://schemas.openxmlformats.org/drawingml/2006/main">
               <a:ext uri="{FF2B5EF4-FFF2-40B4-BE49-F238E27FC236}">
-                <a16:creationId xmlns:a16="http://schemas.microsoft.com/office/drawing/2014/main" id="{37D21380-1E03-4322-B3C2-3DAD0E1D02D2}"/>
+                <a16:creationId xmlns:a16="http://schemas.microsoft.com/office/drawing/2014/main" id="{765CBF66-F64A-4DBA-82DB-5A16147001CB}"/>
               </a:ext>
             </a:extLst>
           </p:cNvPr>
@@ -18328,10 +18268,10 @@
       </p:sp>
       <p:sp>
         <p:nvSpPr>
-          <p:cNvPr id="5" name="text-119">
+          <p:cNvPr id="5" name="text-117">
             <a:extLst xmlns:a="http://schemas.openxmlformats.org/drawingml/2006/main">
               <a:ext uri="{FF2B5EF4-FFF2-40B4-BE49-F238E27FC236}">
-                <a16:creationId xmlns:a16="http://schemas.microsoft.com/office/drawing/2014/main" id="{471AB561-CB08-4994-8B5A-61D7760CF838}"/>
+                <a16:creationId xmlns:a16="http://schemas.microsoft.com/office/drawing/2014/main" id="{0E1B482A-FE30-4BBD-A61B-69FD506F679C}"/>
               </a:ext>
             </a:extLst>
           </p:cNvPr>
@@ -18486,10 +18426,10 @@
       </p:sp>
       <p:sp>
         <p:nvSpPr>
-          <p:cNvPr id="6" name="text-120">
+          <p:cNvPr id="6" name="text-118">
             <a:extLst xmlns:a="http://schemas.openxmlformats.org/drawingml/2006/main">
               <a:ext uri="{FF2B5EF4-FFF2-40B4-BE49-F238E27FC236}">
-                <a16:creationId xmlns:a16="http://schemas.microsoft.com/office/drawing/2014/main" id="{9120BDDA-929D-4613-8A88-2F1AFEE961DD}"/>
+                <a16:creationId xmlns:a16="http://schemas.microsoft.com/office/drawing/2014/main" id="{9E222155-2E32-4B36-9055-954E7AC1E6D5}"/>
               </a:ext>
             </a:extLst>
           </p:cNvPr>
@@ -18644,10 +18584,10 @@
       </p:sp>
       <p:sp>
         <p:nvSpPr>
-          <p:cNvPr id="7" name="text-121">
+          <p:cNvPr id="7" name="text-119">
             <a:extLst xmlns:a="http://schemas.openxmlformats.org/drawingml/2006/main">
               <a:ext uri="{FF2B5EF4-FFF2-40B4-BE49-F238E27FC236}">
-                <a16:creationId xmlns:a16="http://schemas.microsoft.com/office/drawing/2014/main" id="{AFFA26DC-3155-4B6A-9136-A1F71D08F8D1}"/>
+                <a16:creationId xmlns:a16="http://schemas.microsoft.com/office/drawing/2014/main" id="{5158C663-B2F6-4B8D-814E-DECCFE2119B7}"/>
               </a:ext>
             </a:extLst>
           </p:cNvPr>
@@ -18802,10 +18742,10 @@
       </p:sp>
       <p:sp>
         <p:nvSpPr>
-          <p:cNvPr id="8" name="rule-122">
+          <p:cNvPr id="8" name="rule-120">
             <a:extLst xmlns:a="http://schemas.openxmlformats.org/drawingml/2006/main">
               <a:ext uri="{FF2B5EF4-FFF2-40B4-BE49-F238E27FC236}">
-                <a16:creationId xmlns:a16="http://schemas.microsoft.com/office/drawing/2014/main" id="{FD92B83B-7DD1-47D3-9CEC-22C76FFDFBF1}"/>
+                <a16:creationId xmlns:a16="http://schemas.microsoft.com/office/drawing/2014/main" id="{5D833DD7-F453-4AF9-BEAB-DC616156DA02}"/>
               </a:ext>
             </a:extLst>
           </p:cNvPr>
@@ -18832,10 +18772,10 @@
       </p:sp>
       <p:sp>
         <p:nvSpPr>
-          <p:cNvPr id="9" name="text-123">
+          <p:cNvPr id="9" name="text-121">
             <a:extLst xmlns:a="http://schemas.openxmlformats.org/drawingml/2006/main">
               <a:ext uri="{FF2B5EF4-FFF2-40B4-BE49-F238E27FC236}">
-                <a16:creationId xmlns:a16="http://schemas.microsoft.com/office/drawing/2014/main" id="{65B2C515-6263-4F69-95E9-D8298A5A3ADA}"/>
+                <a16:creationId xmlns:a16="http://schemas.microsoft.com/office/drawing/2014/main" id="{E109D0A5-DF39-42A0-B7CC-DB7FAD1503B5}"/>
               </a:ext>
             </a:extLst>
           </p:cNvPr>
@@ -18990,10 +18930,10 @@
       </p:sp>
       <p:sp>
         <p:nvSpPr>
-          <p:cNvPr id="10" name="text-124">
+          <p:cNvPr id="10" name="text-122">
             <a:extLst xmlns:a="http://schemas.openxmlformats.org/drawingml/2006/main">
               <a:ext uri="{FF2B5EF4-FFF2-40B4-BE49-F238E27FC236}">
-                <a16:creationId xmlns:a16="http://schemas.microsoft.com/office/drawing/2014/main" id="{AECF6067-5887-4820-A890-F3DE3336E88D}"/>
+                <a16:creationId xmlns:a16="http://schemas.microsoft.com/office/drawing/2014/main" id="{9B21C680-F596-415A-9887-B6D8C18E502F}"/>
               </a:ext>
             </a:extLst>
           </p:cNvPr>
@@ -19148,10 +19088,10 @@
       </p:sp>
       <p:sp>
         <p:nvSpPr>
-          <p:cNvPr id="11" name="rule-125">
+          <p:cNvPr id="11" name="rule-123">
             <a:extLst xmlns:a="http://schemas.openxmlformats.org/drawingml/2006/main">
               <a:ext uri="{FF2B5EF4-FFF2-40B4-BE49-F238E27FC236}">
-                <a16:creationId xmlns:a16="http://schemas.microsoft.com/office/drawing/2014/main" id="{A38CDF7D-C054-4AF8-A96A-2805FA3C6E2D}"/>
+                <a16:creationId xmlns:a16="http://schemas.microsoft.com/office/drawing/2014/main" id="{95453C61-EDAB-4CE0-9551-A10735CF1834}"/>
               </a:ext>
             </a:extLst>
           </p:cNvPr>
@@ -19178,10 +19118,10 @@
       </p:sp>
       <p:sp>
         <p:nvSpPr>
-          <p:cNvPr id="12" name="text-126">
+          <p:cNvPr id="12" name="text-124">
             <a:extLst xmlns:a="http://schemas.openxmlformats.org/drawingml/2006/main">
               <a:ext uri="{FF2B5EF4-FFF2-40B4-BE49-F238E27FC236}">
-                <a16:creationId xmlns:a16="http://schemas.microsoft.com/office/drawing/2014/main" id="{768909CC-E758-4979-80E6-82F7D660932D}"/>
+                <a16:creationId xmlns:a16="http://schemas.microsoft.com/office/drawing/2014/main" id="{9A3389A1-2BC7-41B2-8307-0B69273EA124}"/>
               </a:ext>
             </a:extLst>
           </p:cNvPr>
@@ -19336,10 +19276,10 @@
       </p:sp>
       <p:sp>
         <p:nvSpPr>
-          <p:cNvPr id="13" name="text-127">
+          <p:cNvPr id="13" name="text-125">
             <a:extLst xmlns:a="http://schemas.openxmlformats.org/drawingml/2006/main">
               <a:ext uri="{FF2B5EF4-FFF2-40B4-BE49-F238E27FC236}">
-                <a16:creationId xmlns:a16="http://schemas.microsoft.com/office/drawing/2014/main" id="{E8BD5BCC-79E0-480C-A0CE-CD8491DF5BC2}"/>
+                <a16:creationId xmlns:a16="http://schemas.microsoft.com/office/drawing/2014/main" id="{27A8CED4-5317-4A21-83EE-13AEACA552F1}"/>
               </a:ext>
             </a:extLst>
           </p:cNvPr>
@@ -19494,10 +19434,10 @@
       </p:sp>
       <p:sp>
         <p:nvSpPr>
-          <p:cNvPr id="14" name="rule-128">
+          <p:cNvPr id="14" name="rule-126">
             <a:extLst xmlns:a="http://schemas.openxmlformats.org/drawingml/2006/main">
               <a:ext uri="{FF2B5EF4-FFF2-40B4-BE49-F238E27FC236}">
-                <a16:creationId xmlns:a16="http://schemas.microsoft.com/office/drawing/2014/main" id="{C09305BB-4989-4B4E-9EB6-91230F33DB97}"/>
+                <a16:creationId xmlns:a16="http://schemas.microsoft.com/office/drawing/2014/main" id="{B13C5E07-9E69-4CE2-A6E5-EF6723DF7583}"/>
               </a:ext>
             </a:extLst>
           </p:cNvPr>
@@ -19524,10 +19464,10 @@
       </p:sp>
       <p:sp>
         <p:nvSpPr>
-          <p:cNvPr id="15" name="text-129">
+          <p:cNvPr id="15" name="text-127">
             <a:extLst xmlns:a="http://schemas.openxmlformats.org/drawingml/2006/main">
               <a:ext uri="{FF2B5EF4-FFF2-40B4-BE49-F238E27FC236}">
-                <a16:creationId xmlns:a16="http://schemas.microsoft.com/office/drawing/2014/main" id="{1C8DFBC2-1444-4A38-988F-15AB3FE14F20}"/>
+                <a16:creationId xmlns:a16="http://schemas.microsoft.com/office/drawing/2014/main" id="{45530B5F-BFA1-4A9D-8A7B-97C9A2B222EF}"/>
               </a:ext>
             </a:extLst>
           </p:cNvPr>
@@ -19682,10 +19622,10 @@
       </p:sp>
       <p:sp>
         <p:nvSpPr>
-          <p:cNvPr id="16" name="text-130">
+          <p:cNvPr id="16" name="text-128">
             <a:extLst xmlns:a="http://schemas.openxmlformats.org/drawingml/2006/main">
               <a:ext uri="{FF2B5EF4-FFF2-40B4-BE49-F238E27FC236}">
-                <a16:creationId xmlns:a16="http://schemas.microsoft.com/office/drawing/2014/main" id="{7C96D935-0FE7-4BC9-B32E-8F2F96C766E9}"/>
+                <a16:creationId xmlns:a16="http://schemas.microsoft.com/office/drawing/2014/main" id="{0430B440-0E41-4B94-A426-69856C64B5DA}"/>
               </a:ext>
             </a:extLst>
           </p:cNvPr>
@@ -19840,10 +19780,10 @@
       </p:sp>
       <p:sp>
         <p:nvSpPr>
-          <p:cNvPr id="17" name="rule-131">
+          <p:cNvPr id="17" name="rule-129">
             <a:extLst xmlns:a="http://schemas.openxmlformats.org/drawingml/2006/main">
               <a:ext uri="{FF2B5EF4-FFF2-40B4-BE49-F238E27FC236}">
-                <a16:creationId xmlns:a16="http://schemas.microsoft.com/office/drawing/2014/main" id="{84650C8B-3C5E-4CE8-81FE-76C1B203AB39}"/>
+                <a16:creationId xmlns:a16="http://schemas.microsoft.com/office/drawing/2014/main" id="{31DCB695-2144-4BA4-8B7F-90C18C415204}"/>
               </a:ext>
             </a:extLst>
           </p:cNvPr>
@@ -19873,7 +19813,7 @@
           <p:cNvPr id="18" name="hotspot-1">
             <a:extLst xmlns:a="http://schemas.openxmlformats.org/drawingml/2006/main">
               <a:ext uri="{FF2B5EF4-FFF2-40B4-BE49-F238E27FC236}">
-                <a16:creationId xmlns:a16="http://schemas.microsoft.com/office/drawing/2014/main" id="{A32BF378-EF2B-4248-8750-3EE048444D1D}"/>
+                <a16:creationId xmlns:a16="http://schemas.microsoft.com/office/drawing/2014/main" id="{63D43E4B-835C-45BE-93E1-7596E1A36AA3}"/>
               </a:ext>
             </a:extLst>
             <ns0:hlinkClick xmlns:ns0="http://schemas.openxmlformats.org/drawingml/2006/main" xmlns:ns1="http://schemas.openxmlformats.org/officeDocument/2006/relationships" ns1:id="rIdClick1"/>
@@ -19903,10 +19843,10 @@
       </p:sp>
       <p:sp>
         <p:nvSpPr>
-          <p:cNvPr id="19" name="rule-133">
+          <p:cNvPr id="19" name="rule-131">
             <a:extLst xmlns:a="http://schemas.openxmlformats.org/drawingml/2006/main">
               <a:ext uri="{FF2B5EF4-FFF2-40B4-BE49-F238E27FC236}">
-                <a16:creationId xmlns:a16="http://schemas.microsoft.com/office/drawing/2014/main" id="{FA44BDAE-6B92-41D4-AE5E-C1075151969F}"/>
+                <a16:creationId xmlns:a16="http://schemas.microsoft.com/office/drawing/2014/main" id="{EF3B012E-7639-42CF-B700-B8DAF1B82C4B}"/>
               </a:ext>
             </a:extLst>
           </p:cNvPr>
@@ -19934,7 +19874,7 @@
     </p:spTree>
     <p:extLst>
       <p:ext uri="{BB962C8B-B14F-4D97-AF65-F5344CB8AC3E}">
-        <p14:creationId xmlns:p14="http://schemas.microsoft.com/office/powerpoint/2010/main" val="623081129"/>
+        <p14:creationId xmlns:p14="http://schemas.microsoft.com/office/powerpoint/2010/main" val="2052388946"/>
       </p:ext>
     </p:extLst>
   </p:cSld>
